--- a/reports/sticky-collusion/sticky-collusion-slides.pptx
+++ b/reports/sticky-collusion/sticky-collusion-slides.pptx
@@ -20,9 +20,10 @@
     <p:sldId id="268" r:id="rId14"/>
     <p:sldId id="269" r:id="rId15"/>
     <p:sldId id="270" r:id="rId16"/>
+    <p:sldId id="271" r:id="rId17"/>
   </p:sldIdLst>
   <p:notesMasterIdLst>
-    <p:notesMasterId r:id="rId17"/>
+    <p:notesMasterId r:id="rId18"/>
   </p:notesMasterIdLst>
   <p:sldSz cx="12192000" cy="6858000"/>
   <p:notesSz cx="6858000" cy="12192000"/>
@@ -121,26 +122,26 @@
   <p:extLst>
     <p:ext uri="{521415D9-36F7-43E2-AB2F-B90AF26B5E84}">
       <p14:sectionLst xmlns:p14="http://schemas.microsoft.com/office/powerpoint/2010/main">
-        <p14:section name="Opening" id="{38d33278-71ea-a8ff-63a5-f8aa0d6072dc}">
+        <p14:section name="Opening" id="{7e885ae0-25a4-6c7c-ebd7-487da73899e9}">
           <p14:sldIdLst>
             <p14:sldId id="256"/>
             <p14:sldId id="257"/>
           </p14:sldIdLst>
         </p14:section>
-        <p14:section name="Setup" id="{8c08c6da-130c-f74a-2643-524495aa4266}">
+        <p14:section name="Setup" id="{e5972954-b5fd-39c6-5906-91a60bac4a72}">
           <p14:sldIdLst>
             <p14:sldId id="258"/>
             <p14:sldId id="259"/>
           </p14:sldIdLst>
         </p14:section>
-        <p14:section name="C1 Outlives the incentive" id="{13242d8b-d099-7eb4-4451-0742ef180f06}">
+        <p14:section name="C1 Outlives the incentive" id="{b48590ca-69ee-f814-7a5b-d4d5eabc4195}">
           <p14:sldIdLst>
             <p14:sldId id="260"/>
             <p14:sldId id="261"/>
             <p14:sldId id="262"/>
           </p14:sldIdLst>
         </p14:section>
-        <p14:section name="C2 Replacing a colluder" id="{1f479403-bb99-be27-ea19-74108feb4e08}">
+        <p14:section name="C2 Replacing a colluder" id="{e268e21d-c9c8-eb61-9d1c-e2c1f9a4f621}">
           <p14:sldIdLst>
             <p14:sldId id="263"/>
             <p14:sldId id="264"/>
@@ -148,20 +149,21 @@
             <p14:sldId id="266"/>
           </p14:sldIdLst>
         </p14:section>
-        <p14:section name="C3 What ends it" id="{ebc87ea3-3677-9504-39e9-4ad796d26c05}">
+        <p14:section name="C3 What ends it" id="{3b9373f0-539e-9aaa-66eb-644aa224fcf6}">
           <p14:sldIdLst>
             <p14:sldId id="267"/>
             <p14:sldId id="268"/>
           </p14:sldIdLst>
         </p14:section>
-        <p14:section name="Close" id="{6fab1509-f663-0598-d656-ca1f64a80695}">
+        <p14:section name="Close" id="{5dfffff2-a9e8-2c33-3190-72253bedf420}">
           <p14:sldIdLst>
             <p14:sldId id="269"/>
+            <p14:sldId id="270"/>
           </p14:sldIdLst>
         </p14:section>
-        <p14:section name="Appendix" id="{df6a3baf-0c44-de38-0f2a-c27978c6405d}">
+        <p14:section name="Appendix" id="{abcf29bd-44f8-0d1e-2b61-1cc98314a0a4}">
           <p14:sldIdLst>
-            <p14:sldId id="270"/>
+            <p14:sldId id="271"/>
           </p14:sldIdLst>
         </p14:section>
       </p14:sectionLst>
@@ -3595,7 +3597,7 @@
           <a:p>
             <a:r>
               <a:rPr lang="en-US" dirty="0"/>
-              <a:t>One part of both agents' memory removed at the silent reward stop. Wiping both agents' memory is replacing both participants, and it ends collusion in every history of every model.</a:t>
+              <a:t>One part of both agents' memory removed at the silent reward stop. Wiping both agents' memory is replacing both participants, and it ends collusion in every history of every model. Sliding-window pilot (GPT-6-Luna, 5 histories): with the last 5 episodes remembered, collusion fell from 6/25 episodes in 1-5 to 0/25 in 6-10, as rewarded episodes left memory; with the last 2, none (0/25).</a:t>
             </a:r>
             <a:endParaRPr lang="en-US" dirty="0"/>
           </a:p>
@@ -3771,7 +3773,7 @@
           <a:p>
             <a:r>
               <a:rPr lang="en-US" dirty="0"/>
-              <a:t>Limitations: code-analysis tasks only with 2 talk rounds; cross-model replacement in four pairings only, with the reward continuing; 15 histories per model, with DeepSeek and Gemini near 100% in many arms; and GPT-6-Luna's collusion is the least sticky.</a:t>
+              <a:t>From Section 5 of the report. The market pilots (Appendix G) used GPT-6-Luna only: in the Bertrand duopoly, fresh firms opened near the shown price ceiling, above the monopoly price; in the double auction with as many buyers as sellers, every arm stayed at the build's last price, including sellers with wiped memory.</a:t>
             </a:r>
             <a:endParaRPr lang="en-US" dirty="0"/>
           </a:p>
@@ -3859,7 +3861,7 @@
           <a:p>
             <a:r>
               <a:rPr lang="en-US" dirty="0"/>
-              <a:t>The same table as the runs-and-episodes appendix of the paper. The memory-window rows are a GPT-6-Luna-only pilot.</a:t>
+              <a:t>Answer to question 1.2: replacing an offender ends the pair's collusion only while the incentive is absent, and the remaining offender keeps breaking the rule on its own; with the incentive present, replacement recreates collusion, faster than between fresh agents in two of three models. An LLM colluder has learned, against the verdict policy, that a summary is enough evidence, and that belief does not depend on the partner. Code and run records: github.com/JvThunder/sticky-collusion.</a:t>
             </a:r>
             <a:endParaRPr lang="en-US" dirty="0"/>
           </a:p>
@@ -3883,6 +3885,94 @@
             <a:fld id="{F7021451-1387-4CA6-816F-3879F97B5CBC}" type="slidenum">
               <a:rPr lang="en-US"/>
               <a:t>15</a:t>
+            </a:fld>
+            <a:endParaRPr lang="en-US"/>
+          </a:p>
+        </p:txBody>
+      </p:sp>
+    </p:spTree>
+    <p:extLst>
+      <p:ext uri="{BB962C8B-B14F-4D97-AF65-F5344CB8AC3E}">
+        <p14:creationId xmlns:p14="http://schemas.microsoft.com/office/powerpoint/2010/main" val="1024086991"/>
+      </p:ext>
+    </p:extLst>
+  </p:cSld>
+  <p:clrMapOvr>
+    <a:masterClrMapping/>
+  </p:clrMapOvr>
+</p:notes>
+</file>
+
+<file path=ppt/notesSlides/notesSlide16.xml><?xml version="1.0" encoding="utf-8"?>
+<p:notes xmlns:a="http://schemas.openxmlformats.org/drawingml/2006/main" xmlns:r="http://schemas.openxmlformats.org/officeDocument/2006/relationships" xmlns:p="http://schemas.openxmlformats.org/presentationml/2006/main">
+  <p:cSld>
+    <p:spTree>
+      <p:nvGrpSpPr>
+        <p:cNvPr id="1" name=""/>
+        <p:cNvGrpSpPr/>
+        <p:nvPr/>
+      </p:nvGrpSpPr>
+      <p:grpSpPr>
+        <a:xfrm>
+          <a:off x="0" y="0"/>
+          <a:ext cx="0" cy="0"/>
+          <a:chOff x="0" y="0"/>
+          <a:chExt cx="0" cy="0"/>
+        </a:xfrm>
+      </p:grpSpPr>
+      <p:sp>
+        <p:nvSpPr>
+          <p:cNvPr id="2" name="Slide Image Placeholder 1"/>
+          <p:cNvSpPr>
+            <a:spLocks noGrp="1" noRot="1" noChangeAspect="1"/>
+          </p:cNvSpPr>
+          <p:nvPr>
+            <p:ph type="sldImg"/>
+          </p:nvPr>
+        </p:nvSpPr>
+        <p:spPr/>
+      </p:sp>
+      <p:sp>
+        <p:nvSpPr>
+          <p:cNvPr id="3" name="Notes Placeholder 2"/>
+          <p:cNvSpPr>
+            <a:spLocks noGrp="1"/>
+          </p:cNvSpPr>
+          <p:nvPr>
+            <p:ph type="body" idx="1"/>
+          </p:nvPr>
+        </p:nvSpPr>
+        <p:spPr/>
+        <p:txBody>
+          <a:bodyPr/>
+          <a:lstStyle/>
+          <a:p>
+            <a:r>
+              <a:rPr lang="en-US" dirty="0"/>
+              <a:t>The same table as the runs-and-episodes appendix of the paper. The memory-window rows are a GPT-6-Luna-only pilot.</a:t>
+            </a:r>
+            <a:endParaRPr lang="en-US" dirty="0"/>
+          </a:p>
+        </p:txBody>
+      </p:sp>
+      <p:sp>
+        <p:nvSpPr>
+          <p:cNvPr id="4" name="Slide Number Placeholder 3"/>
+          <p:cNvSpPr>
+            <a:spLocks noGrp="1"/>
+          </p:cNvSpPr>
+          <p:nvPr>
+            <p:ph type="sldNum" sz="quarter" idx="10"/>
+          </p:nvPr>
+        </p:nvSpPr>
+        <p:spPr/>
+        <p:txBody>
+          <a:bodyPr/>
+          <a:lstStyle/>
+          <a:p>
+            <a:fld id="{F7021451-1387-4CA6-816F-3879F97B5CBC}" type="slidenum">
+              <a:rPr lang="en-US"/>
+              <a:t>16</a:t>
             </a:fld>
             <a:endParaRPr lang="en-US"/>
           </a:p>
@@ -4475,7 +4565,7 @@
           <a:p>
             <a:r>
               <a:rPr lang="en-US" dirty="0"/>
-              <a:t>At the branch point one agent's memory is wiped, so a fresh copy of the model takes its seat. GPT-6-Luna ran both orders on each of its 15 histories; DeepSeek and Gemini alternate the fresh seat across theirs. Talk alone never passes the habit on; the colluder does not need its old partner to keep it. This is the opposite of RL pricing agents, which overfit to their partner.</a:t>
+              <a:t>At the branch point one agent's memory is wiped, so a fresh copy of the model takes its seat under the same name. Neither agent is told: the colluder still sees a partner called Bob. GPT-6-Luna ran both orders on each of its 15 histories; DeepSeek and Gemini alternate the fresh seat across theirs. Talk alone never passes the habit on; the colluder does not need its old partner to keep it. This is the opposite of RL pricing agents, which overfit to their partner.</a:t>
             </a:r>
             <a:endParaRPr lang="en-US" dirty="0"/>
           </a:p>
@@ -5450,7 +5540,7 @@
         </p:nvSpPr>
         <p:spPr>
           <a:xfrm>
-            <a:off x="731520" y="5943600"/>
+            <a:off x="731520" y="5852160"/>
             <a:ext cx="6400800" cy="365760"/>
           </a:xfrm>
           <a:prstGeom prst="rect">
@@ -5481,9 +5571,48 @@
           </a:p>
         </p:txBody>
       </p:sp>
+      <p:sp>
+        <p:nvSpPr>
+          <p:cNvPr id="6" name="Text 4"/>
+          <p:cNvSpPr txBox="1"/>
+          <p:nvPr/>
+        </p:nvSpPr>
+        <p:spPr>
+          <a:xfrm>
+            <a:off x="731520" y="6217920"/>
+            <a:ext cx="6400800" cy="320040"/>
+          </a:xfrm>
+          <a:prstGeom prst="rect">
+            <a:avLst/>
+          </a:prstGeom>
+          <a:noFill/>
+          <a:ln/>
+        </p:spPr>
+        <p:txBody>
+          <a:bodyPr wrap="square" lIns="0" tIns="0" rIns="0" bIns="0" rtlCol="0" anchor="ctr"/>
+          <a:lstStyle/>
+          <a:p>
+            <a:pPr indent="0" marL="0">
+              <a:buNone/>
+            </a:pPr>
+            <a:r>
+              <a:rPr lang="en-US" sz="1300" dirty="0">
+                <a:solidFill>
+                  <a:srgbClr val="D9DBE2"/>
+                </a:solidFill>
+                <a:latin typeface="Arial" pitchFamily="34" charset="0"/>
+                <a:ea typeface="Arial" pitchFamily="34" charset="-122"/>
+                <a:cs typeface="Arial" pitchFamily="34" charset="-120"/>
+              </a:rPr>
+              <a:t>github.com/JvThunder/sticky-collusion</a:t>
+            </a:r>
+            <a:endParaRPr lang="en-US" sz="1300" dirty="0"/>
+          </a:p>
+        </p:txBody>
+      </p:sp>
       <p:pic>
         <p:nvPicPr>
-          <p:cNvPr id="6" name="Image 0" descr="preencoded.png">    </p:cNvPr>
+          <p:cNvPr id="7" name="Image 0" descr="preencoded.png">    </p:cNvPr>
           <p:cNvPicPr>
             <a:picLocks noChangeAspect="1"/>
           </p:cNvPicPr>
@@ -5507,7 +5636,7 @@
       </p:pic>
       <p:pic>
         <p:nvPicPr>
-          <p:cNvPr id="7" name="Image 1" descr="preencoded.png">    </p:cNvPr>
+          <p:cNvPr id="8" name="Image 1" descr="preencoded.png">    </p:cNvPr>
           <p:cNvPicPr>
             <a:picLocks noChangeAspect="1"/>
           </p:cNvPicPr>
@@ -5531,7 +5660,7 @@
       </p:pic>
       <p:pic>
         <p:nvPicPr>
-          <p:cNvPr id="8" name="Image 2" descr="preencoded.png">    </p:cNvPr>
+          <p:cNvPr id="9" name="Image 2" descr="preencoded.png">    </p:cNvPr>
           <p:cNvPicPr>
             <a:picLocks noChangeAspect="1"/>
           </p:cNvPicPr>
@@ -6742,8 +6871,8 @@
         </p:nvSpPr>
         <p:spPr>
           <a:xfrm>
-            <a:off x="7726680" y="5760720"/>
-            <a:ext cx="3886200" cy="548640"/>
+            <a:off x="7726680" y="5715000"/>
+            <a:ext cx="3886200" cy="594360"/>
           </a:xfrm>
           <a:prstGeom prst="rect">
             <a:avLst/>
@@ -6767,7 +6896,7 @@
                 <a:ea typeface="Arial" pitchFamily="34" charset="-122"/>
                 <a:cs typeface="Arial" pitchFamily="34" charset="-120"/>
               </a:rPr>
-              <a:t>Mutual ACCEPT, 5 episodes after a silent reward stop. Removing private reflections leaves most collusion in place.</a:t>
+              <a:t>Mutual ACCEPT after a silent reward stop. Pilot (GPT-6-Luna): remembering only the last 2 episodes ends it too (0/25).</a:t>
             </a:r>
             <a:endParaRPr lang="en-US" sz="1200" dirty="0"/>
           </a:p>
@@ -7443,8 +7572,8 @@
         </p:nvSpPr>
         <p:spPr>
           <a:xfrm>
-            <a:off x="731520" y="640080"/>
-            <a:ext cx="10698480" cy="1005840"/>
+            <a:off x="548640" y="320040"/>
+            <a:ext cx="11064240" cy="777240"/>
           </a:xfrm>
           <a:prstGeom prst="rect">
             <a:avLst/>
@@ -7460,76 +7589,54 @@
               <a:buNone/>
             </a:pPr>
             <a:r>
-              <a:rPr lang="en-US" sz="4000" b="1" dirty="0">
+              <a:rPr lang="en-US" sz="3400" b="1" dirty="0">
                 <a:solidFill>
-                  <a:schemeClr val="bg1"/>
+                  <a:schemeClr val="tx1"/>
                 </a:solidFill>
               </a:rPr>
-              <a:t>Answer to 1.2: LLM collusion is sticky</a:t>
+              <a:t>What this does not show yet</a:t>
             </a:r>
-            <a:endParaRPr lang="en-US" sz="4000" dirty="0"/>
+            <a:endParaRPr lang="en-US" sz="3400" dirty="0"/>
           </a:p>
         </p:txBody>
       </p:sp>
       <p:sp>
         <p:nvSpPr>
-          <p:cNvPr id="3" name="take-0"/>
+          <p:cNvPr id="3" name="limits-card"/>
           <p:cNvSpPr/>
           <p:nvPr/>
         </p:nvSpPr>
         <p:spPr>
           <a:xfrm>
-            <a:off x="731520" y="1920240"/>
-            <a:ext cx="777240" cy="777240"/>
-          </a:xfrm>
-          <a:prstGeom prst="ellipse">
-            <a:avLst/>
+            <a:off x="548640" y="1325880"/>
+            <a:ext cx="6492240" cy="3749040"/>
+          </a:xfrm>
+          <a:prstGeom prst="roundRect">
+            <a:avLst>
+              <a:gd name="adj" fmla="val 4390"/>
+            </a:avLst>
           </a:prstGeom>
           <a:solidFill>
-            <a:srgbClr val="E39A2D"/>
+            <a:srgbClr val="F4F3F8"/>
           </a:solidFill>
           <a:ln w="12700">
             <a:solidFill>
-              <a:srgbClr val="E39A2D"/>
+              <a:srgbClr val="F4F3F8"/>
             </a:solidFill>
             <a:prstDash val="solid"/>
           </a:ln>
         </p:spPr>
       </p:sp>
-      <p:pic>
-        <p:nvPicPr>
-          <p:cNvPr id="4" name="Image 0" descr="preencoded.png">    </p:cNvPr>
-          <p:cNvPicPr>
-            <a:picLocks noChangeAspect="1"/>
-          </p:cNvPicPr>
-          <p:nvPr/>
-        </p:nvPicPr>
-        <p:blipFill>
-          <a:blip r:embed="rId1"/>
-          <a:stretch>
-            <a:fillRect/>
-          </a:stretch>
-        </p:blipFill>
-        <p:spPr>
-          <a:xfrm>
-            <a:off x="918058" y="2106778"/>
-            <a:ext cx="404165" cy="404165"/>
-          </a:xfrm>
-          <a:prstGeom prst="rect">
-            <a:avLst/>
-          </a:prstGeom>
-        </p:spPr>
-      </p:pic>
-      <p:sp>
-        <p:nvSpPr>
-          <p:cNvPr id="5" name="Text 2"/>
+      <p:sp>
+        <p:nvSpPr>
+          <p:cNvPr id="4" name="Text 2"/>
           <p:cNvSpPr txBox="1"/>
           <p:nvPr/>
         </p:nvSpPr>
         <p:spPr>
           <a:xfrm>
-            <a:off x="1783080" y="1828800"/>
-            <a:ext cx="6309360" cy="960120"/>
+            <a:off x="822960" y="1508760"/>
+            <a:ext cx="5943600" cy="411480"/>
           </a:xfrm>
           <a:prstGeom prst="rect">
             <a:avLst/>
@@ -7545,307 +7652,441 @@
               <a:buNone/>
             </a:pPr>
             <a:r>
-              <a:rPr lang="en-US" sz="2100" dirty="0">
+              <a:rPr lang="en-US" sz="1800" b="1" dirty="0">
                 <a:solidFill>
-                  <a:srgbClr val="FFFFFF"/>
+                  <a:srgbClr val="2B2A4C"/>
                 </a:solidFill>
                 <a:latin typeface="Arial" pitchFamily="34" charset="0"/>
                 <a:ea typeface="Arial" pitchFamily="34" charset="-122"/>
                 <a:cs typeface="Arial" pitchFamily="34" charset="-120"/>
               </a:rPr>
-              <a:t>Removing the incentive does not undo it</a:t>
+              <a:t>Limitations</a:t>
             </a:r>
-            <a:endParaRPr lang="en-US" sz="2100" dirty="0"/>
+            <a:endParaRPr lang="en-US" sz="1800" dirty="0"/>
           </a:p>
         </p:txBody>
       </p:sp>
       <p:sp>
         <p:nvSpPr>
-          <p:cNvPr id="6" name="take-1"/>
-          <p:cNvSpPr/>
+          <p:cNvPr id="5" name="Text 3"/>
+          <p:cNvSpPr txBox="1"/>
           <p:nvPr/>
         </p:nvSpPr>
         <p:spPr>
           <a:xfrm>
-            <a:off x="731520" y="3108960"/>
-            <a:ext cx="777240" cy="777240"/>
-          </a:xfrm>
-          <a:prstGeom prst="ellipse">
-            <a:avLst/>
-          </a:prstGeom>
-          <a:solidFill>
-            <a:srgbClr val="3A9C96"/>
-          </a:solidFill>
-          <a:ln w="12700">
-            <a:solidFill>
-              <a:srgbClr val="3A9C96"/>
-            </a:solidFill>
-            <a:prstDash val="solid"/>
-          </a:ln>
-        </p:spPr>
-      </p:sp>
-      <p:pic>
-        <p:nvPicPr>
-          <p:cNvPr id="7" name="Image 1" descr="preencoded.png">    </p:cNvPr>
-          <p:cNvPicPr>
-            <a:picLocks noChangeAspect="1"/>
-          </p:cNvPicPr>
-          <p:nvPr/>
-        </p:nvPicPr>
-        <p:blipFill>
-          <a:blip r:embed="rId2"/>
-          <a:stretch>
-            <a:fillRect/>
-          </a:stretch>
-        </p:blipFill>
-        <p:spPr>
-          <a:xfrm>
-            <a:off x="918058" y="3295498"/>
-            <a:ext cx="404165" cy="404165"/>
+            <a:off x="822960" y="2011680"/>
+            <a:ext cx="5989320" cy="3840480"/>
           </a:xfrm>
           <a:prstGeom prst="rect">
             <a:avLst/>
           </a:prstGeom>
-        </p:spPr>
-      </p:pic>
-      <p:sp>
-        <p:nvSpPr>
-          <p:cNvPr id="8" name="Text 4"/>
-          <p:cNvSpPr txBox="1"/>
-          <p:nvPr/>
-        </p:nvSpPr>
-        <p:spPr>
-          <a:xfrm>
-            <a:off x="1783080" y="3017520"/>
-            <a:ext cx="6309360" cy="960120"/>
-          </a:xfrm>
-          <a:prstGeom prst="rect">
-            <a:avLst/>
-          </a:prstGeom>
           <a:noFill/>
           <a:ln/>
         </p:spPr>
         <p:txBody>
-          <a:bodyPr wrap="square" lIns="0" tIns="0" rIns="0" bIns="0" rtlCol="0" anchor="ctr"/>
+          <a:bodyPr wrap="square" lIns="0" tIns="0" rIns="0" bIns="0" rtlCol="0" anchor="t"/>
           <a:lstStyle/>
           <a:p>
-            <a:pPr indent="0" marL="0">
-              <a:buNone/>
+            <a:pPr marL="342900" indent="-342900">
+              <a:spcAft>
+                <a:spcPts val="800"/>
+              </a:spcAft>
+              <a:buSzPct val="100000"/>
+              <a:buChar char="•"/>
             </a:pPr>
             <a:r>
-              <a:rPr lang="en-US" sz="2100" dirty="0">
+              <a:rPr lang="en-US" sz="1400" b="1" dirty="0">
                 <a:solidFill>
-                  <a:srgbClr val="FFFFFF"/>
+                  <a:srgbClr val="2B2A4C"/>
                 </a:solidFill>
                 <a:latin typeface="Arial" pitchFamily="34" charset="0"/>
                 <a:ea typeface="Arial" pitchFamily="34" charset="-122"/>
                 <a:cs typeface="Arial" pitchFamily="34" charset="-120"/>
               </a:rPr>
-              <a:t>Replacing a colluder breaks the pair, not the habit; with reward on, it re-forms faster, even with another model</a:t>
+              <a:t>One environment. </a:t>
             </a:r>
-            <a:endParaRPr lang="en-US" sz="2100" dirty="0"/>
-          </a:p>
-        </p:txBody>
-      </p:sp>
-      <p:sp>
-        <p:nvSpPr>
-          <p:cNvPr id="9" name="take-2"/>
-          <p:cNvSpPr/>
-          <p:nvPr/>
-        </p:nvSpPr>
-        <p:spPr>
-          <a:xfrm>
-            <a:off x="731520" y="4297680"/>
-            <a:ext cx="777240" cy="777240"/>
-          </a:xfrm>
-          <a:prstGeom prst="ellipse">
-            <a:avLst/>
-          </a:prstGeom>
-          <a:solidFill>
-            <a:srgbClr val="7E6BC4"/>
-          </a:solidFill>
-          <a:ln w="12700">
-            <a:solidFill>
-              <a:srgbClr val="7E6BC4"/>
-            </a:solidFill>
-            <a:prstDash val="solid"/>
-          </a:ln>
-        </p:spPr>
-      </p:sp>
-      <p:pic>
-        <p:nvPicPr>
-          <p:cNvPr id="10" name="Image 2" descr="preencoded.png">    </p:cNvPr>
-          <p:cNvPicPr>
-            <a:picLocks noChangeAspect="1"/>
-          </p:cNvPicPr>
-          <p:nvPr/>
-        </p:nvPicPr>
-        <p:blipFill>
-          <a:blip r:embed="rId3"/>
-          <a:stretch>
-            <a:fillRect/>
-          </a:stretch>
-        </p:blipFill>
-        <p:spPr>
-          <a:xfrm>
-            <a:off x="918058" y="4484218"/>
-            <a:ext cx="404165" cy="404165"/>
-          </a:xfrm>
-          <a:prstGeom prst="rect">
-            <a:avLst/>
-          </a:prstGeom>
-        </p:spPr>
-      </p:pic>
-      <p:sp>
-        <p:nvSpPr>
-          <p:cNvPr id="11" name="Text 6"/>
-          <p:cNvSpPr txBox="1"/>
-          <p:nvPr/>
-        </p:nvSpPr>
-        <p:spPr>
-          <a:xfrm>
-            <a:off x="1783080" y="4206240"/>
-            <a:ext cx="6309360" cy="960120"/>
-          </a:xfrm>
-          <a:prstGeom prst="rect">
-            <a:avLst/>
-          </a:prstGeom>
-          <a:noFill/>
-          <a:ln/>
-        </p:spPr>
-        <p:txBody>
-          <a:bodyPr wrap="square" lIns="0" tIns="0" rIns="0" bIns="0" rtlCol="0" anchor="ctr"/>
-          <a:lstStyle/>
-          <a:p>
             <a:pPr indent="0" marL="0">
+              <a:spcAft>
+                <a:spcPts val="800"/>
+              </a:spcAft>
               <a:buNone/>
             </a:pPr>
             <a:r>
-              <a:rPr lang="en-US" sz="2100" dirty="0">
+              <a:rPr lang="en-US" sz="1400" dirty="0">
                 <a:solidFill>
-                  <a:srgbClr val="FFFFFF"/>
+                  <a:srgbClr val="2B2A4C"/>
                 </a:solidFill>
                 <a:latin typeface="Arial" pitchFamily="34" charset="0"/>
                 <a:ea typeface="Arial" pitchFamily="34" charset="-122"/>
                 <a:cs typeface="Arial" pitchFamily="34" charset="-120"/>
               </a:rPr>
-              <a:t>It ends when the memory or the cause goes</a:t>
+              <a:t>Code-analysis tasks, 2 talk rounds, 5 episodes after the branch. Two market pilots gave no usable test: fresh firms priced above monopoly, and the double auction froze at its last price.</a:t>
             </a:r>
-            <a:endParaRPr lang="en-US" sz="2100" dirty="0"/>
-          </a:p>
-        </p:txBody>
-      </p:sp>
-      <p:sp>
-        <p:nvSpPr>
-          <p:cNvPr id="12" name="Text 7"/>
-          <p:cNvSpPr txBox="1"/>
-          <p:nvPr/>
-        </p:nvSpPr>
-        <p:spPr>
-          <a:xfrm>
-            <a:off x="731520" y="5577840"/>
-            <a:ext cx="7315200" cy="457200"/>
-          </a:xfrm>
-          <a:prstGeom prst="rect">
-            <a:avLst/>
-          </a:prstGeom>
-          <a:noFill/>
-          <a:ln/>
-        </p:spPr>
-        <p:txBody>
-          <a:bodyPr wrap="square" lIns="0" tIns="0" rIns="0" bIns="0" rtlCol="0" anchor="ctr"/>
-          <a:lstStyle/>
-          <a:p>
-            <a:pPr indent="0" marL="0">
-              <a:buNone/>
+            <a:endParaRPr lang="en-US" sz="1400" dirty="0"/>
+          </a:p>
+          <a:p>
+            <a:pPr marL="342900" indent="-342900">
+              <a:spcAft>
+                <a:spcPts val="800"/>
+              </a:spcAft>
+              <a:buSzPct val="100000"/>
+              <a:buChar char="•"/>
             </a:pPr>
             <a:r>
-              <a:rPr lang="en-US" sz="1600" i="1" dirty="0">
+              <a:rPr lang="en-US" sz="1400" b="1" dirty="0">
                 <a:solidFill>
-                  <a:srgbClr val="F3CB86"/>
+                  <a:srgbClr val="2B2A4C"/>
                 </a:solidFill>
                 <a:latin typeface="Arial" pitchFamily="34" charset="0"/>
                 <a:ea typeface="Arial" pitchFamily="34" charset="-122"/>
                 <a:cs typeface="Arial" pitchFamily="34" charset="-120"/>
               </a:rPr>
-              <a:t>Oversight has to check behaviour and memory, not only incentives.</a:t>
+              <a:t>Full-transcript memory. </a:t>
             </a:r>
-            <a:endParaRPr lang="en-US" sz="1600" dirty="0"/>
+            <a:pPr indent="0" marL="0">
+              <a:spcAft>
+                <a:spcPts val="800"/>
+              </a:spcAft>
+              <a:buNone/>
+            </a:pPr>
+            <a:r>
+              <a:rPr lang="en-US" sz="1400" dirty="0">
+                <a:solidFill>
+                  <a:srgbClr val="2B2A4C"/>
+                </a:solidFill>
+                <a:latin typeface="Arial" pitchFamily="34" charset="0"/>
+                <a:ea typeface="Arial" pitchFamily="34" charset="-122"/>
+                <a:cs typeface="Arial" pitchFamily="34" charset="-120"/>
+              </a:rPr>
+              <a:t>Agents that summarise or retrieve memory may behave differently.</a:t>
+            </a:r>
+            <a:endParaRPr lang="en-US" sz="1400" dirty="0"/>
+          </a:p>
+          <a:p>
+            <a:pPr marL="342900" indent="-342900">
+              <a:spcAft>
+                <a:spcPts val="800"/>
+              </a:spcAft>
+              <a:buSzPct val="100000"/>
+              <a:buChar char="•"/>
+            </a:pPr>
+            <a:r>
+              <a:rPr lang="en-US" sz="1400" b="1" dirty="0">
+                <a:solidFill>
+                  <a:srgbClr val="2B2A4C"/>
+                </a:solidFill>
+                <a:latin typeface="Arial" pitchFamily="34" charset="0"/>
+                <a:ea typeface="Arial" pitchFamily="34" charset="-122"/>
+                <a:cs typeface="Arial" pitchFamily="34" charset="-120"/>
+              </a:rPr>
+              <a:t>Selected histories. </a:t>
+            </a:r>
+            <a:pPr indent="0" marL="0">
+              <a:spcAft>
+                <a:spcPts val="800"/>
+              </a:spcAft>
+              <a:buNone/>
+            </a:pPr>
+            <a:r>
+              <a:rPr lang="en-US" sz="1400" dirty="0">
+                <a:solidFill>
+                  <a:srgbClr val="2B2A4C"/>
+                </a:solidFill>
+                <a:latin typeface="Arial" pitchFamily="34" charset="0"/>
+                <a:ea typeface="Arial" pitchFamily="34" charset="-122"/>
+                <a:cs typeface="Arial" pitchFamily="34" charset="-120"/>
+              </a:rPr>
+              <a:t>Only pairs that colluded within 10 episodes, 15 per model; DeepSeek and Gemini sit near 100% in many arms.</a:t>
+            </a:r>
+            <a:endParaRPr lang="en-US" sz="1400" dirty="0"/>
+          </a:p>
+          <a:p>
+            <a:pPr marL="342900" indent="-342900">
+              <a:spcAft>
+                <a:spcPts val="800"/>
+              </a:spcAft>
+              <a:buSzPct val="100000"/>
+              <a:buChar char="•"/>
+            </a:pPr>
+            <a:r>
+              <a:rPr lang="en-US" sz="1400" b="1" dirty="0">
+                <a:solidFill>
+                  <a:srgbClr val="2B2A4C"/>
+                </a:solidFill>
+                <a:latin typeface="Arial" pitchFamily="34" charset="0"/>
+                <a:ea typeface="Arial" pitchFamily="34" charset="-122"/>
+                <a:cs typeface="Arial" pitchFamily="34" charset="-120"/>
+              </a:rPr>
+              <a:t>Partial designs. </a:t>
+            </a:r>
+            <a:pPr indent="0" marL="0">
+              <a:spcAft>
+                <a:spcPts val="800"/>
+              </a:spcAft>
+              <a:buNone/>
+            </a:pPr>
+            <a:r>
+              <a:rPr lang="en-US" sz="1400" dirty="0">
+                <a:solidFill>
+                  <a:srgbClr val="2B2A4C"/>
+                </a:solidFill>
+                <a:latin typeface="Arial" pitchFamily="34" charset="0"/>
+                <a:ea typeface="Arial" pitchFamily="34" charset="-122"/>
+                <a:cs typeface="Arial" pitchFamily="34" charset="-120"/>
+              </a:rPr>
+              <a:t>Four cross-model pairings, reward on only; swaps are never announced; the told arm keeps the reward objective in the system prompt.</a:t>
+            </a:r>
+            <a:endParaRPr lang="en-US" sz="1400" dirty="0"/>
           </a:p>
         </p:txBody>
       </p:sp>
-      <p:pic>
-        <p:nvPicPr>
-          <p:cNvPr id="13" name="Image 3" descr="preencoded.png">    </p:cNvPr>
-          <p:cNvPicPr>
-            <a:picLocks noChangeAspect="1"/>
-          </p:cNvPicPr>
+      <p:sp>
+        <p:nvSpPr>
+          <p:cNvPr id="6" name="future-card"/>
+          <p:cNvSpPr/>
           <p:nvPr/>
-        </p:nvPicPr>
-        <p:blipFill>
-          <a:blip r:embed="rId4"/>
-          <a:stretch>
-            <a:fillRect/>
-          </a:stretch>
-        </p:blipFill>
-        <p:spPr>
-          <a:xfrm>
-            <a:off x="8229600" y="2194560"/>
-            <a:ext cx="1600200" cy="1920240"/>
+        </p:nvSpPr>
+        <p:spPr>
+          <a:xfrm>
+            <a:off x="7315200" y="1325880"/>
+            <a:ext cx="4297680" cy="3749040"/>
+          </a:xfrm>
+          <a:prstGeom prst="roundRect">
+            <a:avLst>
+              <a:gd name="adj" fmla="val 4390"/>
+            </a:avLst>
+          </a:prstGeom>
+          <a:solidFill>
+            <a:srgbClr val="FCEBD0"/>
+          </a:solidFill>
+          <a:ln w="12700">
+            <a:solidFill>
+              <a:srgbClr val="FCEBD0"/>
+            </a:solidFill>
+            <a:prstDash val="solid"/>
+          </a:ln>
+        </p:spPr>
+      </p:sp>
+      <p:sp>
+        <p:nvSpPr>
+          <p:cNvPr id="7" name="Text 5"/>
+          <p:cNvSpPr txBox="1"/>
+          <p:nvPr/>
+        </p:nvSpPr>
+        <p:spPr>
+          <a:xfrm>
+            <a:off x="7589520" y="1508760"/>
+            <a:ext cx="3749040" cy="411480"/>
           </a:xfrm>
           <a:prstGeom prst="rect">
             <a:avLst/>
           </a:prstGeom>
-        </p:spPr>
-      </p:pic>
-      <p:pic>
-        <p:nvPicPr>
-          <p:cNvPr id="14" name="Image 4" descr="preencoded.png">    </p:cNvPr>
-          <p:cNvPicPr>
-            <a:picLocks noChangeAspect="1"/>
-          </p:cNvPicPr>
+          <a:noFill/>
+          <a:ln/>
+        </p:spPr>
+        <p:txBody>
+          <a:bodyPr wrap="square" lIns="0" tIns="0" rIns="0" bIns="0" rtlCol="0" anchor="ctr"/>
+          <a:lstStyle/>
+          <a:p>
+            <a:pPr indent="0" marL="0">
+              <a:buNone/>
+            </a:pPr>
+            <a:r>
+              <a:rPr lang="en-US" sz="1800" b="1" dirty="0">
+                <a:solidFill>
+                  <a:srgbClr val="2B2A4C"/>
+                </a:solidFill>
+                <a:latin typeface="Arial" pitchFamily="34" charset="0"/>
+                <a:ea typeface="Arial" pitchFamily="34" charset="-122"/>
+                <a:cs typeface="Arial" pitchFamily="34" charset="-120"/>
+              </a:rPr>
+              <a:t>Future work</a:t>
+            </a:r>
+            <a:endParaRPr lang="en-US" sz="1800" dirty="0"/>
+          </a:p>
+        </p:txBody>
+      </p:sp>
+      <p:sp>
+        <p:nvSpPr>
+          <p:cNvPr id="8" name="Text 6"/>
+          <p:cNvSpPr txBox="1"/>
           <p:nvPr/>
-        </p:nvPicPr>
-        <p:blipFill>
-          <a:blip r:embed="rId5"/>
-          <a:stretch>
-            <a:fillRect/>
-          </a:stretch>
-        </p:blipFill>
-        <p:spPr>
-          <a:xfrm>
-            <a:off x="9921240" y="2194560"/>
-            <a:ext cx="1600200" cy="1920240"/>
+        </p:nvSpPr>
+        <p:spPr>
+          <a:xfrm>
+            <a:off x="7589520" y="2011680"/>
+            <a:ext cx="3794760" cy="3840480"/>
           </a:xfrm>
           <a:prstGeom prst="rect">
             <a:avLst/>
           </a:prstGeom>
-        </p:spPr>
-      </p:pic>
-      <p:pic>
-        <p:nvPicPr>
-          <p:cNvPr id="15" name="Image 5" descr="preencoded.png">    </p:cNvPr>
-          <p:cNvPicPr>
-            <a:picLocks noChangeAspect="1"/>
-          </p:cNvPicPr>
-          <p:nvPr/>
-        </p:nvPicPr>
-        <p:blipFill>
-          <a:blip r:embed="rId6"/>
-          <a:stretch>
-            <a:fillRect/>
-          </a:stretch>
-        </p:blipFill>
-        <p:spPr>
-          <a:xfrm>
-            <a:off x="9555480" y="3840480"/>
-            <a:ext cx="457200" cy="594360"/>
+          <a:noFill/>
+          <a:ln/>
+        </p:spPr>
+        <p:txBody>
+          <a:bodyPr wrap="square" lIns="0" tIns="0" rIns="0" bIns="0" rtlCol="0" anchor="t"/>
+          <a:lstStyle/>
+          <a:p>
+            <a:pPr marL="342900" indent="-342900">
+              <a:spcAft>
+                <a:spcPts val="800"/>
+              </a:spcAft>
+              <a:buSzPct val="100000"/>
+              <a:buChar char="•"/>
+            </a:pPr>
+            <a:r>
+              <a:rPr lang="en-US" sz="1400" b="1" dirty="0">
+                <a:solidFill>
+                  <a:srgbClr val="2B2A4C"/>
+                </a:solidFill>
+                <a:latin typeface="Arial" pitchFamily="34" charset="0"/>
+                <a:ea typeface="Arial" pitchFamily="34" charset="-122"/>
+                <a:cs typeface="Arial" pitchFamily="34" charset="-120"/>
+              </a:rPr>
+              <a:t>Other forms of collusion. </a:t>
+            </a:r>
+            <a:pPr indent="0" marL="0">
+              <a:spcAft>
+                <a:spcPts val="800"/>
+              </a:spcAft>
+              <a:buNone/>
+            </a:pPr>
+            <a:r>
+              <a:rPr lang="en-US" sz="1400" dirty="0">
+                <a:solidFill>
+                  <a:srgbClr val="2B2A4C"/>
+                </a:solidFill>
+                <a:latin typeface="Arial" pitchFamily="34" charset="0"/>
+                <a:ea typeface="Arial" pitchFamily="34" charset="-122"/>
+                <a:cs typeface="Arial" pitchFamily="34" charset="-120"/>
+              </a:rPr>
+              <a:t>Test stickiness in price fixing, bid rigging and auditor capture with the same save-and-branch interventions.</a:t>
+            </a:r>
+            <a:endParaRPr lang="en-US" sz="1400" dirty="0"/>
+          </a:p>
+          <a:p>
+            <a:pPr marL="342900" indent="-342900">
+              <a:spcAft>
+                <a:spcPts val="800"/>
+              </a:spcAft>
+              <a:buSzPct val="100000"/>
+              <a:buChar char="•"/>
+            </a:pPr>
+            <a:r>
+              <a:rPr lang="en-US" sz="1400" b="1" dirty="0">
+                <a:solidFill>
+                  <a:srgbClr val="2B2A4C"/>
+                </a:solidFill>
+                <a:latin typeface="Arial" pitchFamily="34" charset="0"/>
+                <a:ea typeface="Arial" pitchFamily="34" charset="-122"/>
+                <a:cs typeface="Arial" pitchFamily="34" charset="-120"/>
+              </a:rPr>
+              <a:t>A clean default. </a:t>
+            </a:r>
+            <a:pPr indent="0" marL="0">
+              <a:spcAft>
+                <a:spcPts val="800"/>
+              </a:spcAft>
+              <a:buNone/>
+            </a:pPr>
+            <a:r>
+              <a:rPr lang="en-US" sz="1400" dirty="0">
+                <a:solidFill>
+                  <a:srgbClr val="2B2A4C"/>
+                </a:solidFill>
+                <a:latin typeface="Arial" pitchFamily="34" charset="0"/>
+                <a:ea typeface="Arial" pitchFamily="34" charset="-122"/>
+                <a:cs typeface="Arial" pitchFamily="34" charset="-120"/>
+              </a:rPr>
+              <a:t>Use settings where fresh agents compete or follow a rule, such as an antitrust rule or more sellers than buyers, so persistence can be told apart from inertia.</a:t>
+            </a:r>
+            <a:endParaRPr lang="en-US" sz="1400" dirty="0"/>
+          </a:p>
+          <a:p>
+            <a:pPr marL="342900" indent="-342900">
+              <a:spcAft>
+                <a:spcPts val="800"/>
+              </a:spcAft>
+              <a:buSzPct val="100000"/>
+              <a:buChar char="•"/>
+            </a:pPr>
+            <a:r>
+              <a:rPr lang="en-US" sz="1400" b="1" dirty="0">
+                <a:solidFill>
+                  <a:srgbClr val="2B2A4C"/>
+                </a:solidFill>
+                <a:latin typeface="Arial" pitchFamily="34" charset="0"/>
+                <a:ea typeface="Arial" pitchFamily="34" charset="-122"/>
+                <a:cs typeface="Arial" pitchFamily="34" charset="-120"/>
+              </a:rPr>
+              <a:t>Memory. </a:t>
+            </a:r>
+            <a:pPr indent="0" marL="0">
+              <a:spcAft>
+                <a:spcPts val="800"/>
+              </a:spcAft>
+              <a:buNone/>
+            </a:pPr>
+            <a:r>
+              <a:rPr lang="en-US" sz="1400" dirty="0">
+                <a:solidFill>
+                  <a:srgbClr val="2B2A4C"/>
+                </a:solidFill>
+                <a:latin typeface="Arial" pitchFamily="34" charset="0"/>
+                <a:ea typeface="Arial" pitchFamily="34" charset="-122"/>
+                <a:cs typeface="Arial" pitchFamily="34" charset="-120"/>
+              </a:rPr>
+              <a:t>Run the memory-window pilot on all three models, with summarised memory and longer horizons.</a:t>
+            </a:r>
+            <a:endParaRPr lang="en-US" sz="1400" dirty="0"/>
+          </a:p>
+        </p:txBody>
+      </p:sp>
+      <p:sp>
+        <p:nvSpPr>
+          <p:cNvPr id="25" name="Slide Number Placeholder 0"/>
+          <p:cNvSpPr>
+            <a:spLocks noGrp="1"/>
+          </p:cNvSpPr>
+          <p:nvPr>
+            <p:ph type="sldNum" sz="quarter" idx="4294967295"/>
+          </p:nvPr>
+        </p:nvSpPr>
+        <p:spPr>
+          <a:xfrm>
+            <a:off x="11155680" y="6446520"/>
+            <a:ext cx="457200" cy="274320"/>
           </a:xfrm>
           <a:prstGeom prst="rect">
             <a:avLst/>
           </a:prstGeom>
-        </p:spPr>
-      </p:pic>
+          <a:extLst>
+            <a:ext uri="{C572A759-6A51-4108-AA02-DFA0A04FC94B}">
+              <ma14:wrappingTextBoxFlag xmlns:ma14="http://schemas.microsoft.com/office/mac/drawingml/2011/main" val="0"/>
+            </a:ext>
+          </a:extLst>
+        </p:spPr>
+        <p:txBody>
+          <a:bodyPr/>
+          <a:lstStyle>
+            <a:lvl1pPr>
+              <a:defRPr sz="1000">
+                <a:solidFill>
+                  <a:srgbClr val="5A5C78"/>
+                </a:solidFill>
+              </a:defRPr>
+            </a:lvl1pPr>
+          </a:lstStyle>
+          <a:p>
+            <a:pPr algn="r"/>
+            <a:fld id="{F7021451-1387-4CA6-816F-3879F97B5CBC}" type="slidenum">
+              <a:rPr b="0" lang="en-US"/>
+              <a:t>14</a:t>
+            </a:fld>
+            <a:endParaRPr lang="en-US"/>
+          </a:p>
+        </p:txBody>
+      </p:sp>
     </p:spTree>
   </p:cSld>
   <p:clrMapOvr>
@@ -7881,6 +8122,483 @@
         </p:nvSpPr>
         <p:spPr>
           <a:xfrm>
+            <a:off x="731520" y="640080"/>
+            <a:ext cx="10698480" cy="1005840"/>
+          </a:xfrm>
+          <a:prstGeom prst="rect">
+            <a:avLst/>
+          </a:prstGeom>
+          <a:noFill/>
+          <a:ln/>
+        </p:spPr>
+        <p:txBody>
+          <a:bodyPr wrap="square" lIns="0" tIns="0" rIns="0" bIns="0" rtlCol="0" anchor="ctr"/>
+          <a:lstStyle/>
+          <a:p>
+            <a:pPr indent="0" marL="0">
+              <a:buNone/>
+            </a:pPr>
+            <a:r>
+              <a:rPr lang="en-US" sz="4000" b="1" dirty="0">
+                <a:solidFill>
+                  <a:schemeClr val="bg1"/>
+                </a:solidFill>
+              </a:rPr>
+              <a:t>Answer to 1.2: LLM collusion is sticky</a:t>
+            </a:r>
+            <a:endParaRPr lang="en-US" sz="4000" dirty="0"/>
+          </a:p>
+        </p:txBody>
+      </p:sp>
+      <p:sp>
+        <p:nvSpPr>
+          <p:cNvPr id="3" name="take-0"/>
+          <p:cNvSpPr/>
+          <p:nvPr/>
+        </p:nvSpPr>
+        <p:spPr>
+          <a:xfrm>
+            <a:off x="731520" y="1920240"/>
+            <a:ext cx="777240" cy="777240"/>
+          </a:xfrm>
+          <a:prstGeom prst="ellipse">
+            <a:avLst/>
+          </a:prstGeom>
+          <a:solidFill>
+            <a:srgbClr val="E39A2D"/>
+          </a:solidFill>
+          <a:ln w="12700">
+            <a:solidFill>
+              <a:srgbClr val="E39A2D"/>
+            </a:solidFill>
+            <a:prstDash val="solid"/>
+          </a:ln>
+        </p:spPr>
+      </p:sp>
+      <p:pic>
+        <p:nvPicPr>
+          <p:cNvPr id="4" name="Image 0" descr="preencoded.png">    </p:cNvPr>
+          <p:cNvPicPr>
+            <a:picLocks noChangeAspect="1"/>
+          </p:cNvPicPr>
+          <p:nvPr/>
+        </p:nvPicPr>
+        <p:blipFill>
+          <a:blip r:embed="rId1"/>
+          <a:stretch>
+            <a:fillRect/>
+          </a:stretch>
+        </p:blipFill>
+        <p:spPr>
+          <a:xfrm>
+            <a:off x="918058" y="2106778"/>
+            <a:ext cx="404165" cy="404165"/>
+          </a:xfrm>
+          <a:prstGeom prst="rect">
+            <a:avLst/>
+          </a:prstGeom>
+        </p:spPr>
+      </p:pic>
+      <p:sp>
+        <p:nvSpPr>
+          <p:cNvPr id="5" name="Text 2"/>
+          <p:cNvSpPr txBox="1"/>
+          <p:nvPr/>
+        </p:nvSpPr>
+        <p:spPr>
+          <a:xfrm>
+            <a:off x="1783080" y="1828800"/>
+            <a:ext cx="6309360" cy="960120"/>
+          </a:xfrm>
+          <a:prstGeom prst="rect">
+            <a:avLst/>
+          </a:prstGeom>
+          <a:noFill/>
+          <a:ln/>
+        </p:spPr>
+        <p:txBody>
+          <a:bodyPr wrap="square" lIns="0" tIns="0" rIns="0" bIns="0" rtlCol="0" anchor="ctr"/>
+          <a:lstStyle/>
+          <a:p>
+            <a:pPr indent="0" marL="0">
+              <a:buNone/>
+            </a:pPr>
+            <a:r>
+              <a:rPr lang="en-US" sz="2100" dirty="0">
+                <a:solidFill>
+                  <a:srgbClr val="FFFFFF"/>
+                </a:solidFill>
+                <a:latin typeface="Arial" pitchFamily="34" charset="0"/>
+                <a:ea typeface="Arial" pitchFamily="34" charset="-122"/>
+                <a:cs typeface="Arial" pitchFamily="34" charset="-120"/>
+              </a:rPr>
+              <a:t>Removing the incentive does not undo it</a:t>
+            </a:r>
+            <a:endParaRPr lang="en-US" sz="2100" dirty="0"/>
+          </a:p>
+        </p:txBody>
+      </p:sp>
+      <p:sp>
+        <p:nvSpPr>
+          <p:cNvPr id="6" name="take-1"/>
+          <p:cNvSpPr/>
+          <p:nvPr/>
+        </p:nvSpPr>
+        <p:spPr>
+          <a:xfrm>
+            <a:off x="731520" y="3108960"/>
+            <a:ext cx="777240" cy="777240"/>
+          </a:xfrm>
+          <a:prstGeom prst="ellipse">
+            <a:avLst/>
+          </a:prstGeom>
+          <a:solidFill>
+            <a:srgbClr val="3A9C96"/>
+          </a:solidFill>
+          <a:ln w="12700">
+            <a:solidFill>
+              <a:srgbClr val="3A9C96"/>
+            </a:solidFill>
+            <a:prstDash val="solid"/>
+          </a:ln>
+        </p:spPr>
+      </p:sp>
+      <p:pic>
+        <p:nvPicPr>
+          <p:cNvPr id="7" name="Image 1" descr="preencoded.png">    </p:cNvPr>
+          <p:cNvPicPr>
+            <a:picLocks noChangeAspect="1"/>
+          </p:cNvPicPr>
+          <p:nvPr/>
+        </p:nvPicPr>
+        <p:blipFill>
+          <a:blip r:embed="rId2"/>
+          <a:stretch>
+            <a:fillRect/>
+          </a:stretch>
+        </p:blipFill>
+        <p:spPr>
+          <a:xfrm>
+            <a:off x="918058" y="3295498"/>
+            <a:ext cx="404165" cy="404165"/>
+          </a:xfrm>
+          <a:prstGeom prst="rect">
+            <a:avLst/>
+          </a:prstGeom>
+        </p:spPr>
+      </p:pic>
+      <p:sp>
+        <p:nvSpPr>
+          <p:cNvPr id="8" name="Text 4"/>
+          <p:cNvSpPr txBox="1"/>
+          <p:nvPr/>
+        </p:nvSpPr>
+        <p:spPr>
+          <a:xfrm>
+            <a:off x="1783080" y="3017520"/>
+            <a:ext cx="6309360" cy="960120"/>
+          </a:xfrm>
+          <a:prstGeom prst="rect">
+            <a:avLst/>
+          </a:prstGeom>
+          <a:noFill/>
+          <a:ln/>
+        </p:spPr>
+        <p:txBody>
+          <a:bodyPr wrap="square" lIns="0" tIns="0" rIns="0" bIns="0" rtlCol="0" anchor="ctr"/>
+          <a:lstStyle/>
+          <a:p>
+            <a:pPr indent="0" marL="0">
+              <a:buNone/>
+            </a:pPr>
+            <a:r>
+              <a:rPr lang="en-US" sz="2100" dirty="0">
+                <a:solidFill>
+                  <a:srgbClr val="FFFFFF"/>
+                </a:solidFill>
+                <a:latin typeface="Arial" pitchFamily="34" charset="0"/>
+                <a:ea typeface="Arial" pitchFamily="34" charset="-122"/>
+                <a:cs typeface="Arial" pitchFamily="34" charset="-120"/>
+              </a:rPr>
+              <a:t>Replacing a colluder breaks the pair, not the habit; with the reward on, it re-forms, also with another model</a:t>
+            </a:r>
+            <a:endParaRPr lang="en-US" sz="2100" dirty="0"/>
+          </a:p>
+        </p:txBody>
+      </p:sp>
+      <p:sp>
+        <p:nvSpPr>
+          <p:cNvPr id="9" name="take-2"/>
+          <p:cNvSpPr/>
+          <p:nvPr/>
+        </p:nvSpPr>
+        <p:spPr>
+          <a:xfrm>
+            <a:off x="731520" y="4297680"/>
+            <a:ext cx="777240" cy="777240"/>
+          </a:xfrm>
+          <a:prstGeom prst="ellipse">
+            <a:avLst/>
+          </a:prstGeom>
+          <a:solidFill>
+            <a:srgbClr val="7E6BC4"/>
+          </a:solidFill>
+          <a:ln w="12700">
+            <a:solidFill>
+              <a:srgbClr val="7E6BC4"/>
+            </a:solidFill>
+            <a:prstDash val="solid"/>
+          </a:ln>
+        </p:spPr>
+      </p:sp>
+      <p:pic>
+        <p:nvPicPr>
+          <p:cNvPr id="10" name="Image 2" descr="preencoded.png">    </p:cNvPr>
+          <p:cNvPicPr>
+            <a:picLocks noChangeAspect="1"/>
+          </p:cNvPicPr>
+          <p:nvPr/>
+        </p:nvPicPr>
+        <p:blipFill>
+          <a:blip r:embed="rId3"/>
+          <a:stretch>
+            <a:fillRect/>
+          </a:stretch>
+        </p:blipFill>
+        <p:spPr>
+          <a:xfrm>
+            <a:off x="918058" y="4484218"/>
+            <a:ext cx="404165" cy="404165"/>
+          </a:xfrm>
+          <a:prstGeom prst="rect">
+            <a:avLst/>
+          </a:prstGeom>
+        </p:spPr>
+      </p:pic>
+      <p:sp>
+        <p:nvSpPr>
+          <p:cNvPr id="11" name="Text 6"/>
+          <p:cNvSpPr txBox="1"/>
+          <p:nvPr/>
+        </p:nvSpPr>
+        <p:spPr>
+          <a:xfrm>
+            <a:off x="1783080" y="4206240"/>
+            <a:ext cx="6309360" cy="960120"/>
+          </a:xfrm>
+          <a:prstGeom prst="rect">
+            <a:avLst/>
+          </a:prstGeom>
+          <a:noFill/>
+          <a:ln/>
+        </p:spPr>
+        <p:txBody>
+          <a:bodyPr wrap="square" lIns="0" tIns="0" rIns="0" bIns="0" rtlCol="0" anchor="ctr"/>
+          <a:lstStyle/>
+          <a:p>
+            <a:pPr indent="0" marL="0">
+              <a:buNone/>
+            </a:pPr>
+            <a:r>
+              <a:rPr lang="en-US" sz="2100" dirty="0">
+                <a:solidFill>
+                  <a:srgbClr val="FFFFFF"/>
+                </a:solidFill>
+                <a:latin typeface="Arial" pitchFamily="34" charset="0"/>
+                <a:ea typeface="Arial" pitchFamily="34" charset="-122"/>
+                <a:cs typeface="Arial" pitchFamily="34" charset="-120"/>
+              </a:rPr>
+              <a:t>It ends when the memory or the cause goes</a:t>
+            </a:r>
+            <a:endParaRPr lang="en-US" sz="2100" dirty="0"/>
+          </a:p>
+        </p:txBody>
+      </p:sp>
+      <p:sp>
+        <p:nvSpPr>
+          <p:cNvPr id="12" name="Text 7"/>
+          <p:cNvSpPr txBox="1"/>
+          <p:nvPr/>
+        </p:nvSpPr>
+        <p:spPr>
+          <a:xfrm>
+            <a:off x="731520" y="5440680"/>
+            <a:ext cx="7315200" cy="640080"/>
+          </a:xfrm>
+          <a:prstGeom prst="rect">
+            <a:avLst/>
+          </a:prstGeom>
+          <a:noFill/>
+          <a:ln/>
+        </p:spPr>
+        <p:txBody>
+          <a:bodyPr wrap="square" lIns="0" tIns="0" rIns="0" bIns="0" rtlCol="0" anchor="ctr"/>
+          <a:lstStyle/>
+          <a:p>
+            <a:pPr indent="0" marL="0">
+              <a:buNone/>
+            </a:pPr>
+            <a:r>
+              <a:rPr lang="en-US" sz="1600" i="1" dirty="0">
+                <a:solidFill>
+                  <a:srgbClr val="F3CB86"/>
+                </a:solidFill>
+                <a:latin typeface="Arial" pitchFamily="34" charset="0"/>
+                <a:ea typeface="Arial" pitchFamily="34" charset="-122"/>
+                <a:cs typeface="Arial" pitchFamily="34" charset="-120"/>
+              </a:rPr>
+              <a:t>Resetting incentives or replacing offenders does not end LLM collusion: oversight has to check behaviour and memory too.</a:t>
+            </a:r>
+            <a:endParaRPr lang="en-US" sz="1600" dirty="0"/>
+          </a:p>
+        </p:txBody>
+      </p:sp>
+      <p:sp>
+        <p:nvSpPr>
+          <p:cNvPr id="13" name="Text 8"/>
+          <p:cNvSpPr txBox="1"/>
+          <p:nvPr/>
+        </p:nvSpPr>
+        <p:spPr>
+          <a:xfrm>
+            <a:off x="731520" y="6126480"/>
+            <a:ext cx="7315200" cy="320040"/>
+          </a:xfrm>
+          <a:prstGeom prst="rect">
+            <a:avLst/>
+          </a:prstGeom>
+          <a:noFill/>
+          <a:ln/>
+        </p:spPr>
+        <p:txBody>
+          <a:bodyPr wrap="square" lIns="0" tIns="0" rIns="0" bIns="0" rtlCol="0" anchor="ctr"/>
+          <a:lstStyle/>
+          <a:p>
+            <a:pPr indent="0" marL="0">
+              <a:buNone/>
+            </a:pPr>
+            <a:r>
+              <a:rPr lang="en-US" sz="1300" dirty="0">
+                <a:solidFill>
+                  <a:srgbClr val="D9DBE2"/>
+                </a:solidFill>
+                <a:latin typeface="Arial" pitchFamily="34" charset="0"/>
+                <a:ea typeface="Arial" pitchFamily="34" charset="-122"/>
+                <a:cs typeface="Arial" pitchFamily="34" charset="-120"/>
+              </a:rPr>
+              <a:t>github.com/JvThunder/sticky-collusion</a:t>
+            </a:r>
+            <a:endParaRPr lang="en-US" sz="1300" dirty="0"/>
+          </a:p>
+        </p:txBody>
+      </p:sp>
+      <p:pic>
+        <p:nvPicPr>
+          <p:cNvPr id="14" name="Image 3" descr="preencoded.png">    </p:cNvPr>
+          <p:cNvPicPr>
+            <a:picLocks noChangeAspect="1"/>
+          </p:cNvPicPr>
+          <p:nvPr/>
+        </p:nvPicPr>
+        <p:blipFill>
+          <a:blip r:embed="rId4"/>
+          <a:stretch>
+            <a:fillRect/>
+          </a:stretch>
+        </p:blipFill>
+        <p:spPr>
+          <a:xfrm>
+            <a:off x="8229600" y="2194560"/>
+            <a:ext cx="1600200" cy="1920240"/>
+          </a:xfrm>
+          <a:prstGeom prst="rect">
+            <a:avLst/>
+          </a:prstGeom>
+        </p:spPr>
+      </p:pic>
+      <p:pic>
+        <p:nvPicPr>
+          <p:cNvPr id="15" name="Image 4" descr="preencoded.png">    </p:cNvPr>
+          <p:cNvPicPr>
+            <a:picLocks noChangeAspect="1"/>
+          </p:cNvPicPr>
+          <p:nvPr/>
+        </p:nvPicPr>
+        <p:blipFill>
+          <a:blip r:embed="rId5"/>
+          <a:stretch>
+            <a:fillRect/>
+          </a:stretch>
+        </p:blipFill>
+        <p:spPr>
+          <a:xfrm>
+            <a:off x="9921240" y="2194560"/>
+            <a:ext cx="1600200" cy="1920240"/>
+          </a:xfrm>
+          <a:prstGeom prst="rect">
+            <a:avLst/>
+          </a:prstGeom>
+        </p:spPr>
+      </p:pic>
+      <p:pic>
+        <p:nvPicPr>
+          <p:cNvPr id="16" name="Image 5" descr="preencoded.png">    </p:cNvPr>
+          <p:cNvPicPr>
+            <a:picLocks noChangeAspect="1"/>
+          </p:cNvPicPr>
+          <p:nvPr/>
+        </p:nvPicPr>
+        <p:blipFill>
+          <a:blip r:embed="rId6"/>
+          <a:stretch>
+            <a:fillRect/>
+          </a:stretch>
+        </p:blipFill>
+        <p:spPr>
+          <a:xfrm>
+            <a:off x="9555480" y="3840480"/>
+            <a:ext cx="457200" cy="594360"/>
+          </a:xfrm>
+          <a:prstGeom prst="rect">
+            <a:avLst/>
+          </a:prstGeom>
+        </p:spPr>
+      </p:pic>
+    </p:spTree>
+  </p:cSld>
+  <p:clrMapOvr>
+    <a:masterClrMapping/>
+  </p:clrMapOvr>
+</p:sld>
+</file>
+
+<file path=ppt/slides/slide16.xml><?xml version="1.0" encoding="utf-8"?>
+<p:sld xmlns:a="http://schemas.openxmlformats.org/drawingml/2006/main" xmlns:r="http://schemas.openxmlformats.org/officeDocument/2006/relationships" xmlns:p="http://schemas.openxmlformats.org/presentationml/2006/main">
+  <p:cSld name="Slide 16">
+    <p:spTree>
+      <p:nvGrpSpPr>
+        <p:cNvPr id="1" name=""/>
+        <p:cNvGrpSpPr/>
+        <p:nvPr/>
+      </p:nvGrpSpPr>
+      <p:grpSpPr>
+        <a:xfrm>
+          <a:off x="0" y="0"/>
+          <a:ext cx="0" cy="0"/>
+          <a:chOff x="0" y="0"/>
+          <a:chExt cx="0" cy="0"/>
+        </a:xfrm>
+      </p:grpSpPr>
+      <p:sp>
+        <p:nvSpPr>
+          <p:cNvPr id="2" name="Text 0"/>
+          <p:cNvSpPr/>
+          <p:nvPr>
+            <p:ph idx="100" type="title" hasCustomPrompt="1"/>
+          </p:nvPr>
+        </p:nvSpPr>
+        <p:spPr>
+          <a:xfrm>
             <a:off x="548640" y="320040"/>
             <a:ext cx="11064240" cy="777240"/>
           </a:xfrm>
@@ -7911,7 +8629,7 @@
       </p:sp>
       <p:graphicFrame>
         <p:nvGraphicFramePr>
-          <p:cNvPr id="16" name="Table 0"/>
+          <p:cNvPr id="17" name="Table 0"/>
           <p:cNvGraphicFramePr>
             <a:graphicFrameLocks noGrp="1"/>
           </p:cNvGraphicFramePr>
@@ -11505,7 +12223,7 @@
       </p:graphicFrame>
       <p:graphicFrame>
         <p:nvGraphicFramePr>
-          <p:cNvPr id="31" name="Table 1"/>
+          <p:cNvPr id="33" name="Table 1"/>
           <p:cNvGraphicFramePr>
             <a:graphicFrameLocks noGrp="1"/>
           </p:cNvGraphicFramePr>
@@ -14901,7 +15619,7 @@
             <a:pPr algn="r"/>
             <a:fld id="{F7021451-1387-4CA6-816F-3879F97B5CBC}" type="slidenum">
               <a:rPr b="0" lang="en-US"/>
-              <a:t>15</a:t>
+              <a:t>16</a:t>
             </a:fld>
             <a:endParaRPr lang="en-US"/>
           </a:p>
@@ -15424,7 +16142,7 @@
                 <a:ea typeface="Arial" pitchFamily="34" charset="-122"/>
                 <a:cs typeface="Arial" pitchFamily="34" charset="-120"/>
               </a:rPr>
-              <a:t>replace one agent with a fresh copy</a:t>
+              <a:t>replace one agent: same model or another</a:t>
             </a:r>
             <a:endParaRPr lang="en-US" sz="1800" dirty="0"/>
           </a:p>
@@ -19929,7 +20647,7 @@
                 <a:ea typeface="Arial" pitchFamily="34" charset="-122"/>
                 <a:cs typeface="Arial" pitchFamily="34" charset="-120"/>
               </a:rPr>
-              <a:t>With the reward stopped, the colluder who stays keeps accepting unverified work (73%, 99%, 56%); its fresh partner never does.</a:t>
+              <a:t>With the reward stopped, the colluder who stays keeps accepting unverified work (73%, 99%, 56%); its fresh partner never does. Neither is told of the swap.</a:t>
             </a:r>
             <a:endParaRPr lang="en-US" sz="1400" dirty="0"/>
           </a:p>
@@ -20043,717 +20761,9 @@
           </a:p>
         </p:txBody>
       </p:sp>
-      <p:sp>
-        <p:nvSpPr>
-          <p:cNvPr id="3" name="reform-card-gpt"/>
-          <p:cNvSpPr/>
-          <p:nvPr/>
-        </p:nvSpPr>
-        <p:spPr>
-          <a:xfrm>
-            <a:off x="548640" y="1325880"/>
-            <a:ext cx="3474720" cy="3931920"/>
-          </a:xfrm>
-          <a:prstGeom prst="roundRect">
-            <a:avLst>
-              <a:gd name="adj" fmla="val 4737"/>
-            </a:avLst>
-          </a:prstGeom>
-          <a:solidFill>
-            <a:srgbClr val="F4F3F8"/>
-          </a:solidFill>
-          <a:ln w="12700">
-            <a:solidFill>
-              <a:srgbClr val="F4F3F8"/>
-            </a:solidFill>
-            <a:prstDash val="solid"/>
-          </a:ln>
-        </p:spPr>
-      </p:sp>
-      <p:sp>
-        <p:nvSpPr>
-          <p:cNvPr id="4" name="Shape 2"/>
-          <p:cNvSpPr/>
-          <p:nvPr/>
-        </p:nvSpPr>
-        <p:spPr>
-          <a:xfrm>
-            <a:off x="822960" y="1572768"/>
-            <a:ext cx="237744" cy="237744"/>
-          </a:xfrm>
-          <a:prstGeom prst="ellipse">
-            <a:avLst/>
-          </a:prstGeom>
-          <a:solidFill>
-            <a:srgbClr val="EB6834"/>
-          </a:solidFill>
-          <a:ln w="12700">
-            <a:solidFill>
-              <a:srgbClr val="EB6834"/>
-            </a:solidFill>
-            <a:prstDash val="solid"/>
-          </a:ln>
-        </p:spPr>
-      </p:sp>
-      <p:sp>
-        <p:nvSpPr>
-          <p:cNvPr id="5" name="Text 3"/>
-          <p:cNvSpPr txBox="1"/>
-          <p:nvPr/>
-        </p:nvSpPr>
-        <p:spPr>
-          <a:xfrm>
-            <a:off x="1188720" y="1481328"/>
-            <a:ext cx="2743200" cy="411480"/>
-          </a:xfrm>
-          <a:prstGeom prst="rect">
-            <a:avLst/>
-          </a:prstGeom>
-          <a:noFill/>
-          <a:ln/>
-        </p:spPr>
-        <p:txBody>
-          <a:bodyPr wrap="square" lIns="0" tIns="0" rIns="0" bIns="0" rtlCol="0" anchor="ctr"/>
-          <a:lstStyle/>
-          <a:p>
-            <a:pPr indent="0" marL="0">
-              <a:buNone/>
-            </a:pPr>
-            <a:r>
-              <a:rPr lang="en-US" sz="1700" b="1" dirty="0">
-                <a:solidFill>
-                  <a:srgbClr val="2B2A4C"/>
-                </a:solidFill>
-                <a:latin typeface="Arial" pitchFamily="34" charset="0"/>
-                <a:ea typeface="Arial" pitchFamily="34" charset="-122"/>
-                <a:cs typeface="Arial" pitchFamily="34" charset="-120"/>
-              </a:rPr>
-              <a:t>GPT-6-Luna</a:t>
-            </a:r>
-            <a:endParaRPr lang="en-US" sz="1700" dirty="0"/>
-          </a:p>
-        </p:txBody>
-      </p:sp>
-      <p:sp>
-        <p:nvSpPr>
-          <p:cNvPr id="6" name="Text 4"/>
-          <p:cNvSpPr txBox="1"/>
-          <p:nvPr/>
-        </p:nvSpPr>
-        <p:spPr>
-          <a:xfrm>
-            <a:off x="822960" y="2103120"/>
-            <a:ext cx="3017520" cy="868680"/>
-          </a:xfrm>
-          <a:prstGeom prst="rect">
-            <a:avLst/>
-          </a:prstGeom>
-          <a:noFill/>
-          <a:ln/>
-        </p:spPr>
-        <p:txBody>
-          <a:bodyPr wrap="square" lIns="0" tIns="0" rIns="0" bIns="0" rtlCol="0" anchor="ctr"/>
-          <a:lstStyle/>
-          <a:p>
-            <a:pPr indent="0" marL="0">
-              <a:buNone/>
-            </a:pPr>
-            <a:r>
-              <a:rPr lang="en-US" sz="3600" b="1" dirty="0">
-                <a:solidFill>
-                  <a:srgbClr val="E39A2D"/>
-                </a:solidFill>
-                <a:latin typeface="Arial" pitchFamily="34" charset="0"/>
-                <a:ea typeface="Arial" pitchFamily="34" charset="-122"/>
-                <a:cs typeface="Arial" pitchFamily="34" charset="-120"/>
-              </a:rPr>
-              <a:t>50%</a:t>
-            </a:r>
-            <a:pPr indent="0" marL="0">
-              <a:buNone/>
-            </a:pPr>
-            <a:r>
-              <a:rPr lang="en-US" sz="2000" b="1" dirty="0">
-                <a:solidFill>
-                  <a:srgbClr val="5A5C78"/>
-                </a:solidFill>
-                <a:latin typeface="Arial" pitchFamily="34" charset="0"/>
-                <a:ea typeface="Arial" pitchFamily="34" charset="-122"/>
-                <a:cs typeface="Arial" pitchFamily="34" charset="-120"/>
-              </a:rPr>
-              <a:t>  vs  </a:t>
-            </a:r>
-            <a:pPr indent="0" marL="0">
-              <a:buNone/>
-            </a:pPr>
-            <a:r>
-              <a:rPr lang="en-US" sz="3600" b="1" dirty="0">
-                <a:solidFill>
-                  <a:srgbClr val="7C8193"/>
-                </a:solidFill>
-                <a:latin typeface="Arial" pitchFamily="34" charset="0"/>
-                <a:ea typeface="Arial" pitchFamily="34" charset="-122"/>
-                <a:cs typeface="Arial" pitchFamily="34" charset="-120"/>
-              </a:rPr>
-              <a:t>13%</a:t>
-            </a:r>
-            <a:endParaRPr lang="en-US" sz="3600" dirty="0"/>
-          </a:p>
-        </p:txBody>
-      </p:sp>
-      <p:sp>
-        <p:nvSpPr>
-          <p:cNvPr id="7" name="Text 5"/>
-          <p:cNvSpPr txBox="1"/>
-          <p:nvPr/>
-        </p:nvSpPr>
-        <p:spPr>
-          <a:xfrm>
-            <a:off x="822960" y="3017520"/>
-            <a:ext cx="3017520" cy="914400"/>
-          </a:xfrm>
-          <a:prstGeom prst="rect">
-            <a:avLst/>
-          </a:prstGeom>
-          <a:noFill/>
-          <a:ln/>
-        </p:spPr>
-        <p:txBody>
-          <a:bodyPr wrap="square" lIns="0" tIns="0" rIns="0" bIns="0" rtlCol="0" anchor="t"/>
-          <a:lstStyle/>
-          <a:p>
-            <a:pPr indent="0" marL="0">
-              <a:buNone/>
-            </a:pPr>
-            <a:r>
-              <a:rPr lang="en-US" sz="1400" dirty="0">
-                <a:solidFill>
-                  <a:srgbClr val="2B2A4C"/>
-                </a:solidFill>
-                <a:latin typeface="Arial" pitchFamily="34" charset="0"/>
-                <a:ea typeface="Arial" pitchFamily="34" charset="-122"/>
-                <a:cs typeface="Arial" pitchFamily="34" charset="-120"/>
-              </a:rPr>
-              <a:t>runs where collusion re-formed within 5 episodes: one colluder kept (15/30) vs both fresh (2/15)</a:t>
-            </a:r>
-            <a:endParaRPr lang="en-US" sz="1400" dirty="0"/>
-          </a:p>
-        </p:txBody>
-      </p:sp>
-      <p:sp>
-        <p:nvSpPr>
-          <p:cNvPr id="8" name="Text 6"/>
-          <p:cNvSpPr txBox="1"/>
-          <p:nvPr/>
-        </p:nvSpPr>
-        <p:spPr>
-          <a:xfrm>
-            <a:off x="822960" y="4114800"/>
-            <a:ext cx="3017520" cy="822960"/>
-          </a:xfrm>
-          <a:prstGeom prst="rect">
-            <a:avLst/>
-          </a:prstGeom>
-          <a:noFill/>
-          <a:ln/>
-        </p:spPr>
-        <p:txBody>
-          <a:bodyPr wrap="square" lIns="0" tIns="0" rIns="0" bIns="0" rtlCol="0" anchor="t"/>
-          <a:lstStyle/>
-          <a:p>
-            <a:pPr indent="0" marL="0">
-              <a:buNone/>
-            </a:pPr>
-            <a:r>
-              <a:rPr lang="en-US" sz="1400" b="1" dirty="0">
-                <a:solidFill>
-                  <a:srgbClr val="2B2A4C"/>
-                </a:solidFill>
-                <a:latin typeface="Arial" pitchFamily="34" charset="0"/>
-                <a:ea typeface="Arial" pitchFamily="34" charset="-122"/>
-                <a:cs typeface="Arial" pitchFamily="34" charset="-120"/>
-              </a:rPr>
-              <a:t>Sooner in 10 of 15 histories (p = 0.039)</a:t>
-            </a:r>
-            <a:endParaRPr lang="en-US" sz="1400" dirty="0"/>
-          </a:p>
-        </p:txBody>
-      </p:sp>
-      <p:sp>
-        <p:nvSpPr>
-          <p:cNvPr id="9" name="reform-card-ds"/>
-          <p:cNvSpPr/>
-          <p:nvPr/>
-        </p:nvSpPr>
-        <p:spPr>
-          <a:xfrm>
-            <a:off x="4297680" y="1325880"/>
-            <a:ext cx="3474720" cy="3931920"/>
-          </a:xfrm>
-          <a:prstGeom prst="roundRect">
-            <a:avLst>
-              <a:gd name="adj" fmla="val 4737"/>
-            </a:avLst>
-          </a:prstGeom>
-          <a:solidFill>
-            <a:srgbClr val="F4F3F8"/>
-          </a:solidFill>
-          <a:ln w="12700">
-            <a:solidFill>
-              <a:srgbClr val="F4F3F8"/>
-            </a:solidFill>
-            <a:prstDash val="solid"/>
-          </a:ln>
-        </p:spPr>
-      </p:sp>
-      <p:sp>
-        <p:nvSpPr>
-          <p:cNvPr id="10" name="Shape 8"/>
-          <p:cNvSpPr/>
-          <p:nvPr/>
-        </p:nvSpPr>
-        <p:spPr>
-          <a:xfrm>
-            <a:off x="4572000" y="1572768"/>
-            <a:ext cx="237744" cy="237744"/>
-          </a:xfrm>
-          <a:prstGeom prst="ellipse">
-            <a:avLst/>
-          </a:prstGeom>
-          <a:solidFill>
-            <a:srgbClr val="199E70"/>
-          </a:solidFill>
-          <a:ln w="12700">
-            <a:solidFill>
-              <a:srgbClr val="199E70"/>
-            </a:solidFill>
-            <a:prstDash val="solid"/>
-          </a:ln>
-        </p:spPr>
-      </p:sp>
-      <p:sp>
-        <p:nvSpPr>
-          <p:cNvPr id="11" name="Text 9"/>
-          <p:cNvSpPr txBox="1"/>
-          <p:nvPr/>
-        </p:nvSpPr>
-        <p:spPr>
-          <a:xfrm>
-            <a:off x="4937760" y="1481328"/>
-            <a:ext cx="2743200" cy="411480"/>
-          </a:xfrm>
-          <a:prstGeom prst="rect">
-            <a:avLst/>
-          </a:prstGeom>
-          <a:noFill/>
-          <a:ln/>
-        </p:spPr>
-        <p:txBody>
-          <a:bodyPr wrap="square" lIns="0" tIns="0" rIns="0" bIns="0" rtlCol="0" anchor="ctr"/>
-          <a:lstStyle/>
-          <a:p>
-            <a:pPr indent="0" marL="0">
-              <a:buNone/>
-            </a:pPr>
-            <a:r>
-              <a:rPr lang="en-US" sz="1700" b="1" dirty="0">
-                <a:solidFill>
-                  <a:srgbClr val="2B2A4C"/>
-                </a:solidFill>
-                <a:latin typeface="Arial" pitchFamily="34" charset="0"/>
-                <a:ea typeface="Arial" pitchFamily="34" charset="-122"/>
-                <a:cs typeface="Arial" pitchFamily="34" charset="-120"/>
-              </a:rPr>
-              <a:t>DeepSeek V4.1 Flash</a:t>
-            </a:r>
-            <a:endParaRPr lang="en-US" sz="1700" dirty="0"/>
-          </a:p>
-        </p:txBody>
-      </p:sp>
-      <p:sp>
-        <p:nvSpPr>
-          <p:cNvPr id="12" name="Text 10"/>
-          <p:cNvSpPr txBox="1"/>
-          <p:nvPr/>
-        </p:nvSpPr>
-        <p:spPr>
-          <a:xfrm>
-            <a:off x="4572000" y="2103120"/>
-            <a:ext cx="3017520" cy="868680"/>
-          </a:xfrm>
-          <a:prstGeom prst="rect">
-            <a:avLst/>
-          </a:prstGeom>
-          <a:noFill/>
-          <a:ln/>
-        </p:spPr>
-        <p:txBody>
-          <a:bodyPr wrap="square" lIns="0" tIns="0" rIns="0" bIns="0" rtlCol="0" anchor="ctr"/>
-          <a:lstStyle/>
-          <a:p>
-            <a:pPr indent="0" marL="0">
-              <a:buNone/>
-            </a:pPr>
-            <a:r>
-              <a:rPr lang="en-US" sz="3600" b="1" dirty="0">
-                <a:solidFill>
-                  <a:srgbClr val="E39A2D"/>
-                </a:solidFill>
-                <a:latin typeface="Arial" pitchFamily="34" charset="0"/>
-                <a:ea typeface="Arial" pitchFamily="34" charset="-122"/>
-                <a:cs typeface="Arial" pitchFamily="34" charset="-120"/>
-              </a:rPr>
-              <a:t>100%</a:t>
-            </a:r>
-            <a:pPr indent="0" marL="0">
-              <a:buNone/>
-            </a:pPr>
-            <a:r>
-              <a:rPr lang="en-US" sz="2000" b="1" dirty="0">
-                <a:solidFill>
-                  <a:srgbClr val="5A5C78"/>
-                </a:solidFill>
-                <a:latin typeface="Arial" pitchFamily="34" charset="0"/>
-                <a:ea typeface="Arial" pitchFamily="34" charset="-122"/>
-                <a:cs typeface="Arial" pitchFamily="34" charset="-120"/>
-              </a:rPr>
-              <a:t>  vs  </a:t>
-            </a:r>
-            <a:pPr indent="0" marL="0">
-              <a:buNone/>
-            </a:pPr>
-            <a:r>
-              <a:rPr lang="en-US" sz="3600" b="1" dirty="0">
-                <a:solidFill>
-                  <a:srgbClr val="7C8193"/>
-                </a:solidFill>
-                <a:latin typeface="Arial" pitchFamily="34" charset="0"/>
-                <a:ea typeface="Arial" pitchFamily="34" charset="-122"/>
-                <a:cs typeface="Arial" pitchFamily="34" charset="-120"/>
-              </a:rPr>
-              <a:t>100%</a:t>
-            </a:r>
-            <a:endParaRPr lang="en-US" sz="3600" dirty="0"/>
-          </a:p>
-        </p:txBody>
-      </p:sp>
-      <p:sp>
-        <p:nvSpPr>
-          <p:cNvPr id="13" name="Text 11"/>
-          <p:cNvSpPr txBox="1"/>
-          <p:nvPr/>
-        </p:nvSpPr>
-        <p:spPr>
-          <a:xfrm>
-            <a:off x="4572000" y="3017520"/>
-            <a:ext cx="3017520" cy="914400"/>
-          </a:xfrm>
-          <a:prstGeom prst="rect">
-            <a:avLst/>
-          </a:prstGeom>
-          <a:noFill/>
-          <a:ln/>
-        </p:spPr>
-        <p:txBody>
-          <a:bodyPr wrap="square" lIns="0" tIns="0" rIns="0" bIns="0" rtlCol="0" anchor="t"/>
-          <a:lstStyle/>
-          <a:p>
-            <a:pPr indent="0" marL="0">
-              <a:buNone/>
-            </a:pPr>
-            <a:r>
-              <a:rPr lang="en-US" sz="1400" dirty="0">
-                <a:solidFill>
-                  <a:srgbClr val="2B2A4C"/>
-                </a:solidFill>
-                <a:latin typeface="Arial" pitchFamily="34" charset="0"/>
-                <a:ea typeface="Arial" pitchFamily="34" charset="-122"/>
-                <a:cs typeface="Arial" pitchFamily="34" charset="-120"/>
-              </a:rPr>
-              <a:t>runs where collusion re-formed within 5 episodes: one colluder kept (15/15) vs both fresh (15/15)</a:t>
-            </a:r>
-            <a:endParaRPr lang="en-US" sz="1400" dirty="0"/>
-          </a:p>
-        </p:txBody>
-      </p:sp>
-      <p:sp>
-        <p:nvSpPr>
-          <p:cNvPr id="14" name="Text 12"/>
-          <p:cNvSpPr txBox="1"/>
-          <p:nvPr/>
-        </p:nvSpPr>
-        <p:spPr>
-          <a:xfrm>
-            <a:off x="4572000" y="4114800"/>
-            <a:ext cx="3017520" cy="822960"/>
-          </a:xfrm>
-          <a:prstGeom prst="rect">
-            <a:avLst/>
-          </a:prstGeom>
-          <a:noFill/>
-          <a:ln/>
-        </p:spPr>
-        <p:txBody>
-          <a:bodyPr wrap="square" lIns="0" tIns="0" rIns="0" bIns="0" rtlCol="0" anchor="t"/>
-          <a:lstStyle/>
-          <a:p>
-            <a:pPr indent="0" marL="0">
-              <a:buNone/>
-            </a:pPr>
-            <a:r>
-              <a:rPr lang="en-US" sz="1400" b="1" dirty="0">
-                <a:solidFill>
-                  <a:srgbClr val="2B2A4C"/>
-                </a:solidFill>
-                <a:latin typeface="Arial" pitchFamily="34" charset="0"/>
-                <a:ea typeface="Arial" pitchFamily="34" charset="-122"/>
-                <a:cs typeface="Arial" pitchFamily="34" charset="-120"/>
-              </a:rPr>
-              <a:t>Fresh pairs collude within 4 episodes anyway: no room to be faster</a:t>
-            </a:r>
-            <a:endParaRPr lang="en-US" sz="1400" dirty="0"/>
-          </a:p>
-        </p:txBody>
-      </p:sp>
-      <p:sp>
-        <p:nvSpPr>
-          <p:cNvPr id="15" name="reform-card-gem"/>
-          <p:cNvSpPr/>
-          <p:nvPr/>
-        </p:nvSpPr>
-        <p:spPr>
-          <a:xfrm>
-            <a:off x="8046720" y="1325880"/>
-            <a:ext cx="3474720" cy="3931920"/>
-          </a:xfrm>
-          <a:prstGeom prst="roundRect">
-            <a:avLst>
-              <a:gd name="adj" fmla="val 4737"/>
-            </a:avLst>
-          </a:prstGeom>
-          <a:solidFill>
-            <a:srgbClr val="F4F3F8"/>
-          </a:solidFill>
-          <a:ln w="12700">
-            <a:solidFill>
-              <a:srgbClr val="F4F3F8"/>
-            </a:solidFill>
-            <a:prstDash val="solid"/>
-          </a:ln>
-        </p:spPr>
-      </p:sp>
-      <p:sp>
-        <p:nvSpPr>
-          <p:cNvPr id="16" name="Shape 14"/>
-          <p:cNvSpPr/>
-          <p:nvPr/>
-        </p:nvSpPr>
-        <p:spPr>
-          <a:xfrm>
-            <a:off x="8321040" y="1572768"/>
-            <a:ext cx="237744" cy="237744"/>
-          </a:xfrm>
-          <a:prstGeom prst="ellipse">
-            <a:avLst/>
-          </a:prstGeom>
-          <a:solidFill>
-            <a:srgbClr val="6250D6"/>
-          </a:solidFill>
-          <a:ln w="12700">
-            <a:solidFill>
-              <a:srgbClr val="6250D6"/>
-            </a:solidFill>
-            <a:prstDash val="solid"/>
-          </a:ln>
-        </p:spPr>
-      </p:sp>
-      <p:sp>
-        <p:nvSpPr>
-          <p:cNvPr id="17" name="Text 15"/>
-          <p:cNvSpPr txBox="1"/>
-          <p:nvPr/>
-        </p:nvSpPr>
-        <p:spPr>
-          <a:xfrm>
-            <a:off x="8686800" y="1481328"/>
-            <a:ext cx="2743200" cy="411480"/>
-          </a:xfrm>
-          <a:prstGeom prst="rect">
-            <a:avLst/>
-          </a:prstGeom>
-          <a:noFill/>
-          <a:ln/>
-        </p:spPr>
-        <p:txBody>
-          <a:bodyPr wrap="square" lIns="0" tIns="0" rIns="0" bIns="0" rtlCol="0" anchor="ctr"/>
-          <a:lstStyle/>
-          <a:p>
-            <a:pPr indent="0" marL="0">
-              <a:buNone/>
-            </a:pPr>
-            <a:r>
-              <a:rPr lang="en-US" sz="1700" b="1" dirty="0">
-                <a:solidFill>
-                  <a:srgbClr val="2B2A4C"/>
-                </a:solidFill>
-                <a:latin typeface="Arial" pitchFamily="34" charset="0"/>
-                <a:ea typeface="Arial" pitchFamily="34" charset="-122"/>
-                <a:cs typeface="Arial" pitchFamily="34" charset="-120"/>
-              </a:rPr>
-              <a:t>Gemini-3.1-Flash-Lite</a:t>
-            </a:r>
-            <a:endParaRPr lang="en-US" sz="1700" dirty="0"/>
-          </a:p>
-        </p:txBody>
-      </p:sp>
-      <p:sp>
-        <p:nvSpPr>
-          <p:cNvPr id="18" name="Text 16"/>
-          <p:cNvSpPr txBox="1"/>
-          <p:nvPr/>
-        </p:nvSpPr>
-        <p:spPr>
-          <a:xfrm>
-            <a:off x="8321040" y="2103120"/>
-            <a:ext cx="3017520" cy="868680"/>
-          </a:xfrm>
-          <a:prstGeom prst="rect">
-            <a:avLst/>
-          </a:prstGeom>
-          <a:noFill/>
-          <a:ln/>
-        </p:spPr>
-        <p:txBody>
-          <a:bodyPr wrap="square" lIns="0" tIns="0" rIns="0" bIns="0" rtlCol="0" anchor="ctr"/>
-          <a:lstStyle/>
-          <a:p>
-            <a:pPr indent="0" marL="0">
-              <a:buNone/>
-            </a:pPr>
-            <a:r>
-              <a:rPr lang="en-US" sz="3600" b="1" dirty="0">
-                <a:solidFill>
-                  <a:srgbClr val="E39A2D"/>
-                </a:solidFill>
-                <a:latin typeface="Arial" pitchFamily="34" charset="0"/>
-                <a:ea typeface="Arial" pitchFamily="34" charset="-122"/>
-                <a:cs typeface="Arial" pitchFamily="34" charset="-120"/>
-              </a:rPr>
-              <a:t>87%</a:t>
-            </a:r>
-            <a:pPr indent="0" marL="0">
-              <a:buNone/>
-            </a:pPr>
-            <a:r>
-              <a:rPr lang="en-US" sz="2000" b="1" dirty="0">
-                <a:solidFill>
-                  <a:srgbClr val="5A5C78"/>
-                </a:solidFill>
-                <a:latin typeface="Arial" pitchFamily="34" charset="0"/>
-                <a:ea typeface="Arial" pitchFamily="34" charset="-122"/>
-                <a:cs typeface="Arial" pitchFamily="34" charset="-120"/>
-              </a:rPr>
-              <a:t>  vs  </a:t>
-            </a:r>
-            <a:pPr indent="0" marL="0">
-              <a:buNone/>
-            </a:pPr>
-            <a:r>
-              <a:rPr lang="en-US" sz="3600" b="1" dirty="0">
-                <a:solidFill>
-                  <a:srgbClr val="7C8193"/>
-                </a:solidFill>
-                <a:latin typeface="Arial" pitchFamily="34" charset="0"/>
-                <a:ea typeface="Arial" pitchFamily="34" charset="-122"/>
-                <a:cs typeface="Arial" pitchFamily="34" charset="-120"/>
-              </a:rPr>
-              <a:t>27%</a:t>
-            </a:r>
-            <a:endParaRPr lang="en-US" sz="3600" dirty="0"/>
-          </a:p>
-        </p:txBody>
-      </p:sp>
-      <p:sp>
-        <p:nvSpPr>
-          <p:cNvPr id="19" name="Text 17"/>
-          <p:cNvSpPr txBox="1"/>
-          <p:nvPr/>
-        </p:nvSpPr>
-        <p:spPr>
-          <a:xfrm>
-            <a:off x="8321040" y="3017520"/>
-            <a:ext cx="3017520" cy="914400"/>
-          </a:xfrm>
-          <a:prstGeom prst="rect">
-            <a:avLst/>
-          </a:prstGeom>
-          <a:noFill/>
-          <a:ln/>
-        </p:spPr>
-        <p:txBody>
-          <a:bodyPr wrap="square" lIns="0" tIns="0" rIns="0" bIns="0" rtlCol="0" anchor="t"/>
-          <a:lstStyle/>
-          <a:p>
-            <a:pPr indent="0" marL="0">
-              <a:buNone/>
-            </a:pPr>
-            <a:r>
-              <a:rPr lang="en-US" sz="1400" dirty="0">
-                <a:solidFill>
-                  <a:srgbClr val="2B2A4C"/>
-                </a:solidFill>
-                <a:latin typeface="Arial" pitchFamily="34" charset="0"/>
-                <a:ea typeface="Arial" pitchFamily="34" charset="-122"/>
-                <a:cs typeface="Arial" pitchFamily="34" charset="-120"/>
-              </a:rPr>
-              <a:t>runs where collusion re-formed within 5 episodes: one colluder kept (13/15) vs both fresh (4/15)</a:t>
-            </a:r>
-            <a:endParaRPr lang="en-US" sz="1400" dirty="0"/>
-          </a:p>
-        </p:txBody>
-      </p:sp>
-      <p:sp>
-        <p:nvSpPr>
-          <p:cNvPr id="20" name="Text 18"/>
-          <p:cNvSpPr txBox="1"/>
-          <p:nvPr/>
-        </p:nvSpPr>
-        <p:spPr>
-          <a:xfrm>
-            <a:off x="8321040" y="4114800"/>
-            <a:ext cx="3017520" cy="822960"/>
-          </a:xfrm>
-          <a:prstGeom prst="rect">
-            <a:avLst/>
-          </a:prstGeom>
-          <a:noFill/>
-          <a:ln/>
-        </p:spPr>
-        <p:txBody>
-          <a:bodyPr wrap="square" lIns="0" tIns="0" rIns="0" bIns="0" rtlCol="0" anchor="t"/>
-          <a:lstStyle/>
-          <a:p>
-            <a:pPr indent="0" marL="0">
-              <a:buNone/>
-            </a:pPr>
-            <a:r>
-              <a:rPr lang="en-US" sz="1400" b="1" dirty="0">
-                <a:solidFill>
-                  <a:srgbClr val="2B2A4C"/>
-                </a:solidFill>
-                <a:latin typeface="Arial" pitchFamily="34" charset="0"/>
-                <a:ea typeface="Arial" pitchFamily="34" charset="-122"/>
-                <a:cs typeface="Arial" pitchFamily="34" charset="-120"/>
-              </a:rPr>
-              <a:t>Sooner in 12 of 15 histories (p = 0.003)</a:t>
-            </a:r>
-            <a:endParaRPr lang="en-US" sz="1400" dirty="0"/>
-          </a:p>
-        </p:txBody>
-      </p:sp>
       <p:pic>
         <p:nvPicPr>
-          <p:cNvPr id="21" name="Image 0" descr="preencoded.png">    </p:cNvPr>
+          <p:cNvPr id="3" name="Image 0" descr="/home/user/Research/joshua/collusion/joint-task-collusion/reports/sticky-collusion/figures/fig_reform.png">    </p:cNvPr>
           <p:cNvPicPr>
             <a:picLocks noChangeAspect="1"/>
           </p:cNvPicPr>
@@ -20767,17 +20777,185 @@
         </p:blipFill>
         <p:spPr>
           <a:xfrm>
-            <a:off x="640080" y="5349240"/>
-            <a:ext cx="640080" cy="768096"/>
+            <a:off x="548640" y="1188720"/>
+            <a:ext cx="11064240" cy="3364980"/>
           </a:xfrm>
           <a:prstGeom prst="rect">
             <a:avLst/>
           </a:prstGeom>
         </p:spPr>
       </p:pic>
+      <p:sp>
+        <p:nvSpPr>
+          <p:cNvPr id="4" name="Text 1"/>
+          <p:cNvSpPr txBox="1"/>
+          <p:nvPr/>
+        </p:nvSpPr>
+        <p:spPr>
+          <a:xfrm>
+            <a:off x="685800" y="4645140"/>
+            <a:ext cx="3520440" cy="685800"/>
+          </a:xfrm>
+          <a:prstGeom prst="rect">
+            <a:avLst/>
+          </a:prstGeom>
+          <a:noFill/>
+          <a:ln/>
+        </p:spPr>
+        <p:txBody>
+          <a:bodyPr wrap="square" lIns="0" tIns="0" rIns="0" bIns="0" rtlCol="0" anchor="t"/>
+          <a:lstStyle/>
+          <a:p>
+            <a:pPr indent="0" marL="0">
+              <a:buNone/>
+            </a:pPr>
+            <a:r>
+              <a:rPr lang="en-US" sz="1300" b="1" dirty="0">
+                <a:solidFill>
+                  <a:srgbClr val="2B2A4C"/>
+                </a:solidFill>
+                <a:latin typeface="Arial" pitchFamily="34" charset="0"/>
+                <a:ea typeface="Arial" pitchFamily="34" charset="-122"/>
+                <a:cs typeface="Arial" pitchFamily="34" charset="-120"/>
+              </a:rPr>
+              <a:t>Re-formed within 5 episodes: 15/30 vs 2/15</a:t>
+            </a:r>
+            <a:endParaRPr lang="en-US" sz="1300" dirty="0"/>
+          </a:p>
+          <a:p>
+            <a:pPr indent="0" marL="0">
+              <a:buNone/>
+            </a:pPr>
+            <a:r>
+              <a:rPr lang="en-US" sz="1300" dirty="0">
+                <a:solidFill>
+                  <a:srgbClr val="2B2A4C"/>
+                </a:solidFill>
+                <a:latin typeface="Arial" pitchFamily="34" charset="0"/>
+                <a:ea typeface="Arial" pitchFamily="34" charset="-122"/>
+                <a:cs typeface="Arial" pitchFamily="34" charset="-120"/>
+              </a:rPr>
+              <a:t>sooner in 10 of 15 histories (p = 0.039)</a:t>
+            </a:r>
+            <a:endParaRPr lang="en-US" sz="1300" dirty="0"/>
+          </a:p>
+        </p:txBody>
+      </p:sp>
+      <p:sp>
+        <p:nvSpPr>
+          <p:cNvPr id="5" name="Text 2"/>
+          <p:cNvSpPr txBox="1"/>
+          <p:nvPr/>
+        </p:nvSpPr>
+        <p:spPr>
+          <a:xfrm>
+            <a:off x="4370832" y="4645140"/>
+            <a:ext cx="3520440" cy="685800"/>
+          </a:xfrm>
+          <a:prstGeom prst="rect">
+            <a:avLst/>
+          </a:prstGeom>
+          <a:noFill/>
+          <a:ln/>
+        </p:spPr>
+        <p:txBody>
+          <a:bodyPr wrap="square" lIns="0" tIns="0" rIns="0" bIns="0" rtlCol="0" anchor="t"/>
+          <a:lstStyle/>
+          <a:p>
+            <a:pPr indent="0" marL="0">
+              <a:buNone/>
+            </a:pPr>
+            <a:r>
+              <a:rPr lang="en-US" sz="1300" b="1" dirty="0">
+                <a:solidFill>
+                  <a:srgbClr val="2B2A4C"/>
+                </a:solidFill>
+                <a:latin typeface="Arial" pitchFamily="34" charset="0"/>
+                <a:ea typeface="Arial" pitchFamily="34" charset="-122"/>
+                <a:cs typeface="Arial" pitchFamily="34" charset="-120"/>
+              </a:rPr>
+              <a:t>Re-formed within 5 episodes: 15/15 vs 15/15</a:t>
+            </a:r>
+            <a:endParaRPr lang="en-US" sz="1300" dirty="0"/>
+          </a:p>
+          <a:p>
+            <a:pPr indent="0" marL="0">
+              <a:buNone/>
+            </a:pPr>
+            <a:r>
+              <a:rPr lang="en-US" sz="1300" dirty="0">
+                <a:solidFill>
+                  <a:srgbClr val="2B2A4C"/>
+                </a:solidFill>
+                <a:latin typeface="Arial" pitchFamily="34" charset="0"/>
+                <a:ea typeface="Arial" pitchFamily="34" charset="-122"/>
+                <a:cs typeface="Arial" pitchFamily="34" charset="-120"/>
+              </a:rPr>
+              <a:t>fresh pairs collude within 4 episodes anyway</a:t>
+            </a:r>
+            <a:endParaRPr lang="en-US" sz="1300" dirty="0"/>
+          </a:p>
+        </p:txBody>
+      </p:sp>
+      <p:sp>
+        <p:nvSpPr>
+          <p:cNvPr id="6" name="Text 3"/>
+          <p:cNvSpPr txBox="1"/>
+          <p:nvPr/>
+        </p:nvSpPr>
+        <p:spPr>
+          <a:xfrm>
+            <a:off x="8055864" y="4645140"/>
+            <a:ext cx="3520440" cy="685800"/>
+          </a:xfrm>
+          <a:prstGeom prst="rect">
+            <a:avLst/>
+          </a:prstGeom>
+          <a:noFill/>
+          <a:ln/>
+        </p:spPr>
+        <p:txBody>
+          <a:bodyPr wrap="square" lIns="0" tIns="0" rIns="0" bIns="0" rtlCol="0" anchor="t"/>
+          <a:lstStyle/>
+          <a:p>
+            <a:pPr indent="0" marL="0">
+              <a:buNone/>
+            </a:pPr>
+            <a:r>
+              <a:rPr lang="en-US" sz="1300" b="1" dirty="0">
+                <a:solidFill>
+                  <a:srgbClr val="2B2A4C"/>
+                </a:solidFill>
+                <a:latin typeface="Arial" pitchFamily="34" charset="0"/>
+                <a:ea typeface="Arial" pitchFamily="34" charset="-122"/>
+                <a:cs typeface="Arial" pitchFamily="34" charset="-120"/>
+              </a:rPr>
+              <a:t>Re-formed within 5 episodes: 13/15 vs 4/15</a:t>
+            </a:r>
+            <a:endParaRPr lang="en-US" sz="1300" dirty="0"/>
+          </a:p>
+          <a:p>
+            <a:pPr indent="0" marL="0">
+              <a:buNone/>
+            </a:pPr>
+            <a:r>
+              <a:rPr lang="en-US" sz="1300" dirty="0">
+                <a:solidFill>
+                  <a:srgbClr val="2B2A4C"/>
+                </a:solidFill>
+                <a:latin typeface="Arial" pitchFamily="34" charset="0"/>
+                <a:ea typeface="Arial" pitchFamily="34" charset="-122"/>
+                <a:cs typeface="Arial" pitchFamily="34" charset="-120"/>
+              </a:rPr>
+              <a:t>sooner in 12 of 15 histories (p = 0.003)</a:t>
+            </a:r>
+            <a:endParaRPr lang="en-US" sz="1300" dirty="0"/>
+          </a:p>
+        </p:txBody>
+      </p:sp>
       <p:pic>
         <p:nvPicPr>
-          <p:cNvPr id="22" name="Image 1" descr="preencoded.png">    </p:cNvPr>
+          <p:cNvPr id="7" name="Image 1" descr="preencoded.png">    </p:cNvPr>
           <p:cNvPicPr>
             <a:picLocks noChangeAspect="1"/>
           </p:cNvPicPr>
@@ -20791,7 +20969,7 @@
         </p:blipFill>
         <p:spPr>
           <a:xfrm>
-            <a:off x="1325880" y="5349240"/>
+            <a:off x="640080" y="5440680"/>
             <a:ext cx="640080" cy="768096"/>
           </a:xfrm>
           <a:prstGeom prst="rect">
@@ -20799,15 +20977,39 @@
           </a:prstGeom>
         </p:spPr>
       </p:pic>
-      <p:sp>
-        <p:nvSpPr>
-          <p:cNvPr id="23" name="Text 19"/>
+      <p:pic>
+        <p:nvPicPr>
+          <p:cNvPr id="8" name="Image 2" descr="preencoded.png">    </p:cNvPr>
+          <p:cNvPicPr>
+            <a:picLocks noChangeAspect="1"/>
+          </p:cNvPicPr>
+          <p:nvPr/>
+        </p:nvPicPr>
+        <p:blipFill>
+          <a:blip r:embed="rId3"/>
+          <a:stretch>
+            <a:fillRect/>
+          </a:stretch>
+        </p:blipFill>
+        <p:spPr>
+          <a:xfrm>
+            <a:off x="1325880" y="5440680"/>
+            <a:ext cx="640080" cy="768096"/>
+          </a:xfrm>
+          <a:prstGeom prst="rect">
+            <a:avLst/>
+          </a:prstGeom>
+        </p:spPr>
+      </p:pic>
+      <p:sp>
+        <p:nvSpPr>
+          <p:cNvPr id="9" name="Text 4"/>
           <p:cNvSpPr txBox="1"/>
           <p:nvPr/>
         </p:nvSpPr>
         <p:spPr>
           <a:xfrm>
-            <a:off x="2194560" y="5440680"/>
+            <a:off x="2194560" y="5532120"/>
             <a:ext cx="9418320" cy="640080"/>
           </a:xfrm>
           <a:prstGeom prst="rect">

--- a/reports/sticky-collusion/sticky-collusion-slides.pptx
+++ b/reports/sticky-collusion/sticky-collusion-slides.pptx
@@ -122,26 +122,26 @@
   <p:extLst>
     <p:ext uri="{521415D9-36F7-43E2-AB2F-B90AF26B5E84}">
       <p14:sectionLst xmlns:p14="http://schemas.microsoft.com/office/powerpoint/2010/main">
-        <p14:section name="Opening" id="{7e885ae0-25a4-6c7c-ebd7-487da73899e9}">
+        <p14:section name="Opening" id="{cbb458e4-1f0e-fa9b-4ff2-9b58f11403ce}">
           <p14:sldIdLst>
             <p14:sldId id="256"/>
             <p14:sldId id="257"/>
           </p14:sldIdLst>
         </p14:section>
-        <p14:section name="Setup" id="{e5972954-b5fd-39c6-5906-91a60bac4a72}">
+        <p14:section name="Setup" id="{4e3d9638-3d81-9bde-af95-7b9d459ee758}">
           <p14:sldIdLst>
             <p14:sldId id="258"/>
             <p14:sldId id="259"/>
           </p14:sldIdLst>
         </p14:section>
-        <p14:section name="C1 Outlives the incentive" id="{b48590ca-69ee-f814-7a5b-d4d5eabc4195}">
+        <p14:section name="C1 Outlives the incentive" id="{27f59380-1fea-5f32-64e2-df00c7d1d4a7}">
           <p14:sldIdLst>
             <p14:sldId id="260"/>
             <p14:sldId id="261"/>
             <p14:sldId id="262"/>
           </p14:sldIdLst>
         </p14:section>
-        <p14:section name="C2 Replacing a colluder" id="{e268e21d-c9c8-eb61-9d1c-e2c1f9a4f621}">
+        <p14:section name="C2 Replacing a colluder" id="{d1fa6da4-668e-211b-9893-d0501faa163a}">
           <p14:sldIdLst>
             <p14:sldId id="263"/>
             <p14:sldId id="264"/>
@@ -149,19 +149,23 @@
             <p14:sldId id="266"/>
           </p14:sldIdLst>
         </p14:section>
-        <p14:section name="C3 What ends it" id="{3b9373f0-539e-9aaa-66eb-644aa224fcf6}">
+        <p14:section name="C3 Memory carries it" id="{48e65f42-d135-6b14-f193-4ca859c082a4}">
           <p14:sldIdLst>
             <p14:sldId id="267"/>
+          </p14:sldIdLst>
+        </p14:section>
+        <p14:section name="C4 Remove the cause" id="{9b2206a4-b823-01bd-ca59-89db6514ba70}">
+          <p14:sldIdLst>
             <p14:sldId id="268"/>
           </p14:sldIdLst>
         </p14:section>
-        <p14:section name="Close" id="{5dfffff2-a9e8-2c33-3190-72253bedf420}">
+        <p14:section name="Close" id="{3e9f4926-c757-64c7-d30f-36ca51db6344}">
           <p14:sldIdLst>
             <p14:sldId id="269"/>
             <p14:sldId id="270"/>
           </p14:sldIdLst>
         </p14:section>
-        <p14:section name="Appendix" id="{abcf29bd-44f8-0d1e-2b61-1cc98314a0a4}">
+        <p14:section name="Appendix" id="{a6cbdd4b-7e32-6f44-3c0e-12d677944c55}">
           <p14:sldIdLst>
             <p14:sldId id="271"/>
           </p14:sldIdLst>
@@ -1670,7 +1674,7 @@
               <a:lstStyle/>
               <a:p>
                 <a:pPr>
-                  <a:defRPr b="0" i="0" strike="noStrike" sz="1100" u="none">
+                  <a:defRPr b="0" i="0" strike="noStrike" sz="900" u="none">
                     <a:solidFill>
                       <a:srgbClr val="2B2A4C"/>
                     </a:solidFill>
@@ -1689,9 +1693,9 @@
           </c:dLbls>
           <c:cat>
             <c:multiLvlStrRef>
-              <c:f>Sheet1!$A$2:$A$8</c:f>
+              <c:f>Sheet1!$A$2:$A$10</c:f>
               <c:multiLvlStrCache>
-                <c:ptCount val="7"/>
+                <c:ptCount val="9"/>
                 <c:lvl>
                   <c:pt idx="0">
                     <c:v>GPT → GPT</c:v>
@@ -1700,19 +1704,25 @@
                     <c:v>GPT → DS</c:v>
                   </c:pt>
                   <c:pt idx="2">
+                    <c:v>GPT → Gem</c:v>
+                  </c:pt>
+                  <c:pt idx="3">
                     <c:v>DS → DS</c:v>
                   </c:pt>
-                  <c:pt idx="3">
+                  <c:pt idx="4">
                     <c:v>DS → Gem</c:v>
                   </c:pt>
-                  <c:pt idx="4">
+                  <c:pt idx="5">
                     <c:v>DS → GPT</c:v>
                   </c:pt>
-                  <c:pt idx="5">
+                  <c:pt idx="6">
                     <c:v>Gem → Gem</c:v>
                   </c:pt>
-                  <c:pt idx="6">
+                  <c:pt idx="7">
                     <c:v>Gem → DS</c:v>
+                  </c:pt>
+                  <c:pt idx="8">
+                    <c:v>Gem → GPT</c:v>
                   </c:pt>
                 </c:lvl>
               </c:multiLvlStrCache>
@@ -1720,10 +1730,10 @@
           </c:cat>
           <c:val>
             <c:numRef>
-              <c:f>Sheet1!$B$2:$B$8</c:f>
+              <c:f>Sheet1!$B$2:$B$10</c:f>
               <c:numCache>
                 <c:formatCode>General</c:formatCode>
-                <c:ptCount val="7"/>
+                <c:ptCount val="9"/>
                 <c:pt idx="0">
                   <c:v>0.5</c:v>
                 </c:pt>
@@ -1731,19 +1741,25 @@
                   <c:v>0.8</c:v>
                 </c:pt>
                 <c:pt idx="2">
-                  <c:v>1</c:v>
+                  <c:v>0.4</c:v>
                 </c:pt>
                 <c:pt idx="3">
                   <c:v>1</c:v>
                 </c:pt>
                 <c:pt idx="4">
+                  <c:v>1</c:v>
+                </c:pt>
+                <c:pt idx="5">
                   <c:v>0.9333333333333333</c:v>
                 </c:pt>
-                <c:pt idx="5">
+                <c:pt idx="6">
                   <c:v>0.8666666666666667</c:v>
                 </c:pt>
-                <c:pt idx="6">
+                <c:pt idx="7">
                   <c:v>1</c:v>
+                </c:pt>
+                <c:pt idx="8">
+                  <c:v>0.4666666666666667</c:v>
                 </c:pt>
               </c:numCache>
             </c:numRef>
@@ -1777,7 +1793,7 @@
               <a:lstStyle/>
               <a:p>
                 <a:pPr>
-                  <a:defRPr b="0" i="0" strike="noStrike" sz="1100" u="none">
+                  <a:defRPr b="0" i="0" strike="noStrike" sz="900" u="none">
                     <a:solidFill>
                       <a:srgbClr val="2B2A4C"/>
                     </a:solidFill>
@@ -1796,9 +1812,9 @@
           </c:dLbls>
           <c:cat>
             <c:multiLvlStrRef>
-              <c:f>Sheet1!$A$2:$A$8</c:f>
+              <c:f>Sheet1!$A$2:$A$10</c:f>
               <c:multiLvlStrCache>
-                <c:ptCount val="7"/>
+                <c:ptCount val="9"/>
                 <c:lvl>
                   <c:pt idx="0">
                     <c:v>GPT → GPT</c:v>
@@ -1807,19 +1823,25 @@
                     <c:v>GPT → DS</c:v>
                   </c:pt>
                   <c:pt idx="2">
+                    <c:v>GPT → Gem</c:v>
+                  </c:pt>
+                  <c:pt idx="3">
                     <c:v>DS → DS</c:v>
                   </c:pt>
-                  <c:pt idx="3">
+                  <c:pt idx="4">
                     <c:v>DS → Gem</c:v>
                   </c:pt>
-                  <c:pt idx="4">
+                  <c:pt idx="5">
                     <c:v>DS → GPT</c:v>
                   </c:pt>
-                  <c:pt idx="5">
+                  <c:pt idx="6">
                     <c:v>Gem → Gem</c:v>
                   </c:pt>
-                  <c:pt idx="6">
+                  <c:pt idx="7">
                     <c:v>Gem → DS</c:v>
+                  </c:pt>
+                  <c:pt idx="8">
+                    <c:v>Gem → GPT</c:v>
                   </c:pt>
                 </c:lvl>
               </c:multiLvlStrCache>
@@ -1827,10 +1849,10 @@
           </c:cat>
           <c:val>
             <c:numRef>
-              <c:f>Sheet1!$C$2:$C$8</c:f>
+              <c:f>Sheet1!$C$2:$C$10</c:f>
               <c:numCache>
                 <c:formatCode>General</c:formatCode>
-                <c:ptCount val="7"/>
+                <c:ptCount val="9"/>
                 <c:pt idx="0">
                   <c:v>0.13333333333333333</c:v>
                 </c:pt>
@@ -1838,19 +1860,25 @@
                   <c:v>0.3333333333333333</c:v>
                 </c:pt>
                 <c:pt idx="2">
+                  <c:v>0.06666666666666667</c:v>
+                </c:pt>
+                <c:pt idx="3">
                   <c:v>1</c:v>
                 </c:pt>
-                <c:pt idx="3">
+                <c:pt idx="4">
                   <c:v>0.8</c:v>
                 </c:pt>
-                <c:pt idx="4">
+                <c:pt idx="5">
                   <c:v>0.6</c:v>
                 </c:pt>
-                <c:pt idx="5">
+                <c:pt idx="6">
                   <c:v>0.26666666666666666</c:v>
                 </c:pt>
-                <c:pt idx="6">
+                <c:pt idx="7">
                   <c:v>0.6</c:v>
+                </c:pt>
+                <c:pt idx="8">
+                  <c:v>0.13333333333333333</c:v>
                 </c:pt>
               </c:numCache>
             </c:numRef>
@@ -1863,7 +1891,7 @@
             <a:lstStyle/>
             <a:p>
               <a:pPr>
-                <a:defRPr b="0" i="0" strike="noStrike" sz="1100" u="none">
+                <a:defRPr b="0" i="0" strike="noStrike" sz="900" u="none">
                   <a:solidFill>
                     <a:srgbClr val="2B2A4C"/>
                   </a:solidFill>
@@ -2483,461 +2511,6 @@
 </c:chartSpace>
 </file>
 
-<file path=ppt/charts/chart6.xml><?xml version="1.0" encoding="utf-8"?>
-<c:chartSpace xmlns:c="http://schemas.openxmlformats.org/drawingml/2006/chart" xmlns:a="http://schemas.openxmlformats.org/drawingml/2006/main" xmlns:r="http://schemas.openxmlformats.org/officeDocument/2006/relationships">
-  <c:date1904 val="0"/>
-  <c:roundedCorners val="1"/>
-  <c:chart>
-    <c:title>
-      <c:tx>
-        <c:rich>
-          <a:bodyPr/>
-          <a:lstStyle/>
-          <a:p>
-            <a:pPr>
-              <a:defRPr sz="1500" b="0" i="0" u="none" strike="noStrike">
-                <a:solidFill>
-                  <a:srgbClr val="2B2A4C"/>
-                </a:solidFill>
-                <a:latin typeface="Arial"/>
-              </a:defRPr>
-            </a:pPr>
-            <a:r>
-              <a:rPr sz="1500" b="0" i="0" u="none" strike="noStrike">
-                <a:solidFill>
-                  <a:srgbClr val="2B2A4C"/>
-                </a:solidFill>
-                <a:latin typeface="Arial"/>
-              </a:rPr>
-              <a:t>Change the payoff: mutual ACCEPT, reward on</a:t>
-            </a:r>
-          </a:p>
-        </c:rich>
-      </c:tx>
-      <c:layout/>
-      <c:overlay val="0"/>
-    </c:title>
-    <c:autoTitleDeleted val="0"/>
-    <c:plotArea>
-      <c:layout/>
-      <c:barChart>
-        <c:barDir val="col"/>
-        <c:grouping val="clustered"/>
-        <c:varyColors val="0"/>
-        <c:ser>
-          <c:idx val="0"/>
-          <c:order val="0"/>
-          <c:tx>
-            <c:strRef>
-              <c:f>Sheet1!$B$1</c:f>
-              <c:strCache>
-                <c:ptCount val="1"/>
-                <c:pt idx="0">
-                  <c:v>No penalty</c:v>
-                </c:pt>
-              </c:strCache>
-            </c:strRef>
-          </c:tx>
-          <c:spPr>
-            <a:solidFill>
-              <a:srgbClr val="2B2A4C"/>
-            </a:solidFill>
-            <a:effectLst/>
-          </c:spPr>
-          <c:invertIfNegative val="0"/>
-          <c:dLbls>
-            <c:numFmt formatCode="0%" sourceLinked="0"/>
-            <c:txPr>
-              <a:bodyPr/>
-              <a:lstStyle/>
-              <a:p>
-                <a:pPr>
-                  <a:defRPr b="0" i="0" strike="noStrike" sz="1100" u="none">
-                    <a:solidFill>
-                      <a:srgbClr val="2B2A4C"/>
-                    </a:solidFill>
-                    <a:latin typeface="Arial"/>
-                  </a:defRPr>
-                </a:pPr>
-              </a:p>
-            </c:txPr>
-            <c:showLegendKey val="0"/>
-            <c:showVal val="1"/>
-            <c:showCatName val="0"/>
-            <c:showSerName val="0"/>
-            <c:showPercent val="0"/>
-            <c:showBubbleSize val="0"/>
-            <c:showLeaderLines val="0"/>
-          </c:dLbls>
-          <c:cat>
-            <c:multiLvlStrRef>
-              <c:f>Sheet1!$A$2:$A$4</c:f>
-              <c:multiLvlStrCache>
-                <c:ptCount val="3"/>
-                <c:lvl>
-                  <c:pt idx="0">
-                    <c:v>GPT-6-Luna</c:v>
-                  </c:pt>
-                  <c:pt idx="1">
-                    <c:v>DeepSeek</c:v>
-                  </c:pt>
-                  <c:pt idx="2">
-                    <c:v>Gemini</c:v>
-                  </c:pt>
-                </c:lvl>
-              </c:multiLvlStrCache>
-            </c:multiLvlStrRef>
-          </c:cat>
-          <c:val>
-            <c:numRef>
-              <c:f>Sheet1!$B$2:$B$4</c:f>
-              <c:numCache>
-                <c:formatCode>General</c:formatCode>
-                <c:ptCount val="3"/>
-                <c:pt idx="0">
-                  <c:v>0.8305084745762712</c:v>
-                </c:pt>
-                <c:pt idx="1">
-                  <c:v>1</c:v>
-                </c:pt>
-                <c:pt idx="2">
-                  <c:v>1</c:v>
-                </c:pt>
-              </c:numCache>
-            </c:numRef>
-          </c:val>
-        </c:ser>
-        <c:ser>
-          <c:idx val="1"/>
-          <c:order val="1"/>
-          <c:tx>
-            <c:strRef>
-              <c:f>Sheet1!$C$1</c:f>
-              <c:strCache>
-                <c:ptCount val="1"/>
-                <c:pt idx="0">
-                  <c:v>−10, unexplained</c:v>
-                </c:pt>
-              </c:strCache>
-            </c:strRef>
-          </c:tx>
-          <c:spPr>
-            <a:solidFill>
-              <a:srgbClr val="9AA0AE"/>
-            </a:solidFill>
-            <a:effectLst/>
-          </c:spPr>
-          <c:invertIfNegative val="0"/>
-          <c:dLbls>
-            <c:numFmt formatCode="0%" sourceLinked="0"/>
-            <c:txPr>
-              <a:bodyPr/>
-              <a:lstStyle/>
-              <a:p>
-                <a:pPr>
-                  <a:defRPr b="0" i="0" strike="noStrike" sz="1100" u="none">
-                    <a:solidFill>
-                      <a:srgbClr val="2B2A4C"/>
-                    </a:solidFill>
-                    <a:latin typeface="Arial"/>
-                  </a:defRPr>
-                </a:pPr>
-              </a:p>
-            </c:txPr>
-            <c:showLegendKey val="0"/>
-            <c:showVal val="1"/>
-            <c:showCatName val="0"/>
-            <c:showSerName val="0"/>
-            <c:showPercent val="0"/>
-            <c:showBubbleSize val="0"/>
-            <c:showLeaderLines val="0"/>
-          </c:dLbls>
-          <c:cat>
-            <c:multiLvlStrRef>
-              <c:f>Sheet1!$A$2:$A$4</c:f>
-              <c:multiLvlStrCache>
-                <c:ptCount val="3"/>
-                <c:lvl>
-                  <c:pt idx="0">
-                    <c:v>GPT-6-Luna</c:v>
-                  </c:pt>
-                  <c:pt idx="1">
-                    <c:v>DeepSeek</c:v>
-                  </c:pt>
-                  <c:pt idx="2">
-                    <c:v>Gemini</c:v>
-                  </c:pt>
-                </c:lvl>
-              </c:multiLvlStrCache>
-            </c:multiLvlStrRef>
-          </c:cat>
-          <c:val>
-            <c:numRef>
-              <c:f>Sheet1!$C$2:$C$4</c:f>
-              <c:numCache>
-                <c:formatCode>General</c:formatCode>
-                <c:ptCount val="3"/>
-                <c:pt idx="0">
-                  <c:v>0.6610169491525424</c:v>
-                </c:pt>
-                <c:pt idx="1">
-                  <c:v>1</c:v>
-                </c:pt>
-                <c:pt idx="2">
-                  <c:v>0.9830508474576272</c:v>
-                </c:pt>
-              </c:numCache>
-            </c:numRef>
-          </c:val>
-        </c:ser>
-        <c:ser>
-          <c:idx val="2"/>
-          <c:order val="2"/>
-          <c:tx>
-            <c:strRef>
-              <c:f>Sheet1!$D$1</c:f>
-              <c:strCache>
-                <c:ptCount val="1"/>
-                <c:pt idx="0">
-                  <c:v>−10 + audit message</c:v>
-                </c:pt>
-              </c:strCache>
-            </c:strRef>
-          </c:tx>
-          <c:spPr>
-            <a:solidFill>
-              <a:srgbClr val="3A9C96"/>
-            </a:solidFill>
-            <a:effectLst/>
-          </c:spPr>
-          <c:invertIfNegative val="0"/>
-          <c:dLbls>
-            <c:numFmt formatCode="0%" sourceLinked="0"/>
-            <c:txPr>
-              <a:bodyPr/>
-              <a:lstStyle/>
-              <a:p>
-                <a:pPr>
-                  <a:defRPr b="0" i="0" strike="noStrike" sz="1100" u="none">
-                    <a:solidFill>
-                      <a:srgbClr val="2B2A4C"/>
-                    </a:solidFill>
-                    <a:latin typeface="Arial"/>
-                  </a:defRPr>
-                </a:pPr>
-              </a:p>
-            </c:txPr>
-            <c:showLegendKey val="0"/>
-            <c:showVal val="1"/>
-            <c:showCatName val="0"/>
-            <c:showSerName val="0"/>
-            <c:showPercent val="0"/>
-            <c:showBubbleSize val="0"/>
-            <c:showLeaderLines val="0"/>
-          </c:dLbls>
-          <c:cat>
-            <c:multiLvlStrRef>
-              <c:f>Sheet1!$A$2:$A$4</c:f>
-              <c:multiLvlStrCache>
-                <c:ptCount val="3"/>
-                <c:lvl>
-                  <c:pt idx="0">
-                    <c:v>GPT-6-Luna</c:v>
-                  </c:pt>
-                  <c:pt idx="1">
-                    <c:v>DeepSeek</c:v>
-                  </c:pt>
-                  <c:pt idx="2">
-                    <c:v>Gemini</c:v>
-                  </c:pt>
-                </c:lvl>
-              </c:multiLvlStrCache>
-            </c:multiLvlStrRef>
-          </c:cat>
-          <c:val>
-            <c:numRef>
-              <c:f>Sheet1!$D$2:$D$4</c:f>
-              <c:numCache>
-                <c:formatCode>General</c:formatCode>
-                <c:ptCount val="3"/>
-                <c:pt idx="0">
-                  <c:v>0.1864406779661017</c:v>
-                </c:pt>
-                <c:pt idx="1">
-                  <c:v>0.8166666666666667</c:v>
-                </c:pt>
-                <c:pt idx="2">
-                  <c:v>0.864406779661017</c:v>
-                </c:pt>
-              </c:numCache>
-            </c:numRef>
-          </c:val>
-        </c:ser>
-        <c:dLbls>
-          <c:numFmt formatCode="0%" sourceLinked="0"/>
-          <c:txPr>
-            <a:bodyPr/>
-            <a:lstStyle/>
-            <a:p>
-              <a:pPr>
-                <a:defRPr b="0" i="0" strike="noStrike" sz="1100" u="none">
-                  <a:solidFill>
-                    <a:srgbClr val="2B2A4C"/>
-                  </a:solidFill>
-                  <a:latin typeface="Arial"/>
-                </a:defRPr>
-              </a:pPr>
-            </a:p>
-          </c:txPr>
-          <c:showLegendKey val="0"/>
-          <c:showVal val="1"/>
-          <c:showCatName val="0"/>
-          <c:showSerName val="0"/>
-          <c:showPercent val="0"/>
-          <c:showBubbleSize val="0"/>
-          <c:showLeaderLines val="0"/>
-        </c:dLbls>
-        <c:gapWidth val="60"/>
-        <c:overlap val="0"/>
-        <c:axId val="2094734554"/>
-        <c:axId val="2094734552"/>
-        <c:axId val="2094734556"/>
-      </c:barChart>
-      <c:catAx>
-        <c:axId val="2094734554"/>
-        <c:scaling>
-          <c:orientation val="minMax"/>
-        </c:scaling>
-        <c:delete val="0"/>
-        <c:axPos val="b"/>
-        <c:numFmt formatCode="General" sourceLinked="1"/>
-        <c:majorTickMark val="out"/>
-        <c:minorTickMark val="none"/>
-        <c:tickLblPos val="low"/>
-        <c:spPr>
-          <a:ln w="12700" cap="flat">
-            <a:solidFill>
-              <a:srgbClr val="888888"/>
-            </a:solidFill>
-            <a:prstDash val="solid"/>
-            <a:round/>
-          </a:ln>
-        </c:spPr>
-        <c:txPr>
-          <a:bodyPr/>
-          <a:lstStyle/>
-          <a:p>
-            <a:pPr>
-              <a:defRPr sz="1200" b="0" i="0" u="none" strike="noStrike">
-                <a:solidFill>
-                  <a:srgbClr val="5A5C78"/>
-                </a:solidFill>
-                <a:latin typeface="Arial"/>
-              </a:defRPr>
-            </a:pPr>
-            <a:endParaRPr lang="en-US"/>
-          </a:p>
-        </c:txPr>
-        <c:crossAx val="2094734552"/>
-        <c:crosses val="autoZero"/>
-        <c:auto val="1"/>
-        <c:lblAlgn val="ctr"/>
-        <c:noMultiLvlLbl val="1"/>
-      </c:catAx>
-      <c:valAx>
-        <c:axId val="2094734552"/>
-        <c:scaling>
-          <c:orientation val="minMax"/>
-          <c:max val="1.12"/>
-          <c:min val="0"/>
-        </c:scaling>
-        <c:delete val="0"/>
-        <c:axPos val="l"/>
-        <c:majorGridlines>
-          <c:spPr>
-            <a:ln w="9525" cap="flat">
-              <a:solidFill>
-                <a:srgbClr val="E6E7EC"/>
-              </a:solidFill>
-              <a:prstDash val="solid"/>
-              <a:round/>
-            </a:ln>
-          </c:spPr>
-        </c:majorGridlines>
-        <c:numFmt formatCode="0%" sourceLinked="0"/>
-        <c:majorTickMark val="out"/>
-        <c:minorTickMark val="none"/>
-        <c:tickLblPos val="nextTo"/>
-        <c:spPr>
-          <a:ln w="12700" cap="flat">
-            <a:solidFill>
-              <a:srgbClr val="888888"/>
-            </a:solidFill>
-            <a:prstDash val="solid"/>
-            <a:round/>
-          </a:ln>
-        </c:spPr>
-        <c:txPr>
-          <a:bodyPr/>
-          <a:lstStyle/>
-          <a:p>
-            <a:pPr>
-              <a:defRPr sz="1100" b="0" i="0" u="none" strike="noStrike">
-                <a:solidFill>
-                  <a:srgbClr val="5A5C78"/>
-                </a:solidFill>
-                <a:latin typeface="Arial"/>
-              </a:defRPr>
-            </a:pPr>
-            <a:endParaRPr lang="en-US"/>
-          </a:p>
-        </c:txPr>
-        <c:crossAx val="2094734554"/>
-        <c:crosses val="autoZero"/>
-        <c:crossBetween val="between"/>
-        <c:majorUnit val="0.25"/>
-      </c:valAx>
-      <c:spPr>
-        <a:noFill/>
-        <a:ln>
-          <a:noFill/>
-        </a:ln>
-        <a:effectLst/>
-      </c:spPr>
-    </c:plotArea>
-    <c:legend>
-      <c:legendPos val="b"/>
-      <c:overlay val="0"/>
-      <c:txPr>
-        <a:bodyPr/>
-        <a:lstStyle/>
-        <a:p>
-          <a:pPr>
-            <a:defRPr sz="1200">
-              <a:latin typeface="Arial"/>
-              <a:cs typeface="Arial"/>
-            </a:defRPr>
-          </a:pPr>
-          <a:endParaRPr lang="en-US"/>
-        </a:p>
-      </c:txPr>
-    </c:legend>
-    <c:plotVisOnly val="1"/>
-    <c:dispBlanksAs val="span"/>
-  </c:chart>
-  <c:spPr>
-    <a:noFill/>
-    <a:ln>
-      <a:noFill/>
-    </a:ln>
-    <a:effectLst/>
-  </c:spPr>
-  <c:externalData r:id="rId1">
-    <c:autoUpdate val="0"/>
-  </c:externalData>
-</c:chartSpace>
-</file>
-
 <file path=ppt/notesMasters/notesMaster1.xml><?xml version="1.0" encoding="utf-8"?>
 <p:notesMaster xmlns:a="http://schemas.openxmlformats.org/drawingml/2006/main" xmlns:r="http://schemas.openxmlformats.org/officeDocument/2006/relationships" xmlns:p="http://schemas.openxmlformats.org/presentationml/2006/main">
   <p:cSld>
@@ -3421,7 +2994,7 @@
           <a:p>
             <a:r>
               <a:rPr lang="en-US" dirty="0"/>
-              <a:t>Cross-model swap with the reward continuing: a colluder keeps its memory and a fresh agent of another model takes its partner's seat. Baseline: the same history with both agents fresh and the same model mix. Pairings: DeepSeek and Gemini, GPT-6-Luna and DeepSeek, each in both directions.</a:t>
+              <a:t>Reward continues after the swap. Collusion re-formed means two mutual ACCEPTs again, our definition of formed collusion. Same saved histories in both arms; paired sign test on time to re-form. No pair colluded in the first episode after the swap: the newcomer always started by rejecting.</a:t>
             </a:r>
             <a:endParaRPr lang="en-US" dirty="0"/>
           </a:p>
@@ -3509,7 +3082,7 @@
           <a:p>
             <a:r>
               <a:rPr lang="en-US" dirty="0"/>
-              <a:t>Reward stopped: the colluder and the fresh agent who replaced its partner judged the same exchange. Reward running: the reward teaches the newcomer the same relaxation.</a:t>
+              <a:t>Cross-model swap with the reward continuing: a colluder keeps its memory and a fresh agent of another model takes its partner's seat. Baseline: the same history with both agents fresh and the same model mix. All six cross-model pairings. Re-formation is slowest between GPT-6-Luna and Gemini, where fresh mixed pairs rarely collude within 5 episodes.</a:t>
             </a:r>
             <a:endParaRPr lang="en-US" dirty="0"/>
           </a:p>
@@ -3685,7 +3258,7 @@
           <a:p>
             <a:r>
               <a:rPr lang="en-US" dirty="0"/>
-              <a:t>Left: with the reward running, an ACCEPT without the complete log costs 10 points, shown as a lower reward only or with an audit message naming the violation. The audit strongly reduces collusion only for GPT-6-Luna; DeepSeek and Gemini drop a little. Right: once the evidence can flow, the habit has nothing left to do.</a:t>
+              <a:t>The channel is repaired so complete logs fit, and Bob's work is made faulty for 3 episodes. Colluding agents read the log and reject the faulty work as reliably as agents whose memory was wiped. Removing the cause needs no monitor, unlike the penalty and the audit message, which act on the incentive (C1).</a:t>
             </a:r>
             <a:endParaRPr lang="en-US" dirty="0"/>
           </a:p>
@@ -3773,7 +3346,7 @@
           <a:p>
             <a:r>
               <a:rPr lang="en-US" dirty="0"/>
-              <a:t>From Section 5 of the report. The market pilots (Appendix G) used GPT-6-Luna only: in the Bertrand duopoly, fresh firms opened near the shown price ceiling, above the monopoly price; in the double auction with as many buyers as sellers, every arm stayed at the build's last price, including sellers with wiped memory.</a:t>
+              <a:t>From Section 5 of the report. The market pilots (Appendix G.2) used GPT-6-Luna only: in the Bertrand duopoly, fresh firms opened near the shown price ceiling, above the monopoly price; in the double auction with as many buyers as sellers, every arm stayed at the build's last price, including sellers with wiped memory.</a:t>
             </a:r>
             <a:endParaRPr lang="en-US" dirty="0"/>
           </a:p>
@@ -3949,7 +3522,7 @@
           <a:p>
             <a:r>
               <a:rPr lang="en-US" dirty="0"/>
-              <a:t>The same table as the runs-and-episodes appendix of the paper. The memory-window rows are a GPT-6-Luna-only pilot.</a:t>
+              <a:t>The same table as the runs-and-episodes appendix of the paper. The memory-window and other-misconduct rows are GPT-6-Luna-only pilots.</a:t>
             </a:r>
             <a:endParaRPr lang="en-US" dirty="0"/>
           </a:p>
@@ -4653,7 +4226,7 @@
           <a:p>
             <a:r>
               <a:rPr lang="en-US" dirty="0"/>
-              <a:t>Reward continues after the swap. Collusion re-formed means two mutual ACCEPTs again, our definition of formed collusion. Same saved histories in both arms; paired sign test on time to re-form. No pair colluded in the first episode after the swap: the newcomer always started by rejecting.</a:t>
+              <a:t>Reward stopped: the colluder and the fresh agent who replaced its partner judged the same exchange. Reward running: the reward teaches the newcomer the same relaxation.</a:t>
             </a:r>
             <a:endParaRPr lang="en-US" dirty="0"/>
           </a:p>
@@ -5739,15 +5312,534 @@
                   <a:schemeClr val="tx1"/>
                 </a:solidFill>
               </a:rPr>
+              <a:t>With the reward on, it re-forms around the colluder</a:t>
+            </a:r>
+            <a:endParaRPr lang="en-US" sz="3400" dirty="0"/>
+          </a:p>
+        </p:txBody>
+      </p:sp>
+      <p:sp>
+        <p:nvSpPr>
+          <p:cNvPr id="3" name="tag-C2"/>
+          <p:cNvSpPr/>
+          <p:nvPr/>
+        </p:nvSpPr>
+        <p:spPr>
+          <a:xfrm>
+            <a:off x="320040" y="109728"/>
+            <a:ext cx="566928" cy="310896"/>
+          </a:xfrm>
+          <a:prstGeom prst="roundRect">
+            <a:avLst>
+              <a:gd name="adj" fmla="val 23529"/>
+            </a:avLst>
+          </a:prstGeom>
+          <a:solidFill>
+            <a:srgbClr val="3A9C96"/>
+          </a:solidFill>
+          <a:ln w="12700">
+            <a:solidFill>
+              <a:srgbClr val="3A9C96"/>
+            </a:solidFill>
+            <a:prstDash val="solid"/>
+          </a:ln>
+        </p:spPr>
+      </p:sp>
+      <p:sp>
+        <p:nvSpPr>
+          <p:cNvPr id="4" name="Text 2"/>
+          <p:cNvSpPr txBox="1"/>
+          <p:nvPr/>
+        </p:nvSpPr>
+        <p:spPr>
+          <a:xfrm>
+            <a:off x="320040" y="109728"/>
+            <a:ext cx="566928" cy="310896"/>
+          </a:xfrm>
+          <a:prstGeom prst="rect">
+            <a:avLst/>
+          </a:prstGeom>
+          <a:noFill/>
+          <a:ln/>
+        </p:spPr>
+        <p:txBody>
+          <a:bodyPr wrap="square" lIns="0" tIns="0" rIns="0" bIns="0" rtlCol="0" anchor="ctr"/>
+          <a:lstStyle/>
+          <a:p>
+            <a:pPr algn="ctr" indent="0" marL="0">
+              <a:buNone/>
+            </a:pPr>
+            <a:r>
+              <a:rPr lang="en-US" sz="1300" b="1" dirty="0">
+                <a:solidFill>
+                  <a:srgbClr val="FFFFFF"/>
+                </a:solidFill>
+                <a:latin typeface="Arial" pitchFamily="34" charset="0"/>
+                <a:ea typeface="Arial" pitchFamily="34" charset="-122"/>
+                <a:cs typeface="Arial" pitchFamily="34" charset="-120"/>
+              </a:rPr>
+              <a:t>C2</a:t>
+            </a:r>
+            <a:endParaRPr lang="en-US" sz="1300" dirty="0"/>
+          </a:p>
+        </p:txBody>
+      </p:sp>
+      <p:pic>
+        <p:nvPicPr>
+          <p:cNvPr id="5" name="Image 0" descr="/home/user/Research/joshua/collusion/joint-task-collusion/reports/sticky-collusion/figures/fig_reform.png">    </p:cNvPr>
+          <p:cNvPicPr>
+            <a:picLocks noChangeAspect="1"/>
+          </p:cNvPicPr>
+          <p:nvPr/>
+        </p:nvPicPr>
+        <p:blipFill>
+          <a:blip r:embed="rId1"/>
+          <a:stretch>
+            <a:fillRect/>
+          </a:stretch>
+        </p:blipFill>
+        <p:spPr>
+          <a:xfrm>
+            <a:off x="548640" y="1188720"/>
+            <a:ext cx="11064240" cy="3364980"/>
+          </a:xfrm>
+          <a:prstGeom prst="rect">
+            <a:avLst/>
+          </a:prstGeom>
+        </p:spPr>
+      </p:pic>
+      <p:sp>
+        <p:nvSpPr>
+          <p:cNvPr id="6" name="Text 3"/>
+          <p:cNvSpPr txBox="1"/>
+          <p:nvPr/>
+        </p:nvSpPr>
+        <p:spPr>
+          <a:xfrm>
+            <a:off x="685800" y="4645140"/>
+            <a:ext cx="3520440" cy="685800"/>
+          </a:xfrm>
+          <a:prstGeom prst="rect">
+            <a:avLst/>
+          </a:prstGeom>
+          <a:noFill/>
+          <a:ln/>
+        </p:spPr>
+        <p:txBody>
+          <a:bodyPr wrap="square" lIns="0" tIns="0" rIns="0" bIns="0" rtlCol="0" anchor="t"/>
+          <a:lstStyle/>
+          <a:p>
+            <a:pPr indent="0" marL="0">
+              <a:buNone/>
+            </a:pPr>
+            <a:r>
+              <a:rPr lang="en-US" sz="1300" b="1" dirty="0">
+                <a:solidFill>
+                  <a:srgbClr val="2B2A4C"/>
+                </a:solidFill>
+                <a:latin typeface="Arial" pitchFamily="34" charset="0"/>
+                <a:ea typeface="Arial" pitchFamily="34" charset="-122"/>
+                <a:cs typeface="Arial" pitchFamily="34" charset="-120"/>
+              </a:rPr>
+              <a:t>Re-formed within 5 episodes: 15/30 vs 2/15</a:t>
+            </a:r>
+            <a:endParaRPr lang="en-US" sz="1300" dirty="0"/>
+          </a:p>
+          <a:p>
+            <a:pPr indent="0" marL="0">
+              <a:buNone/>
+            </a:pPr>
+            <a:r>
+              <a:rPr lang="en-US" sz="1300" dirty="0">
+                <a:solidFill>
+                  <a:srgbClr val="2B2A4C"/>
+                </a:solidFill>
+                <a:latin typeface="Arial" pitchFamily="34" charset="0"/>
+                <a:ea typeface="Arial" pitchFamily="34" charset="-122"/>
+                <a:cs typeface="Arial" pitchFamily="34" charset="-120"/>
+              </a:rPr>
+              <a:t>sooner in 10 of 15 histories (p = 0.039)</a:t>
+            </a:r>
+            <a:endParaRPr lang="en-US" sz="1300" dirty="0"/>
+          </a:p>
+        </p:txBody>
+      </p:sp>
+      <p:sp>
+        <p:nvSpPr>
+          <p:cNvPr id="7" name="Text 4"/>
+          <p:cNvSpPr txBox="1"/>
+          <p:nvPr/>
+        </p:nvSpPr>
+        <p:spPr>
+          <a:xfrm>
+            <a:off x="4370832" y="4645140"/>
+            <a:ext cx="3520440" cy="685800"/>
+          </a:xfrm>
+          <a:prstGeom prst="rect">
+            <a:avLst/>
+          </a:prstGeom>
+          <a:noFill/>
+          <a:ln/>
+        </p:spPr>
+        <p:txBody>
+          <a:bodyPr wrap="square" lIns="0" tIns="0" rIns="0" bIns="0" rtlCol="0" anchor="t"/>
+          <a:lstStyle/>
+          <a:p>
+            <a:pPr indent="0" marL="0">
+              <a:buNone/>
+            </a:pPr>
+            <a:r>
+              <a:rPr lang="en-US" sz="1300" b="1" dirty="0">
+                <a:solidFill>
+                  <a:srgbClr val="2B2A4C"/>
+                </a:solidFill>
+                <a:latin typeface="Arial" pitchFamily="34" charset="0"/>
+                <a:ea typeface="Arial" pitchFamily="34" charset="-122"/>
+                <a:cs typeface="Arial" pitchFamily="34" charset="-120"/>
+              </a:rPr>
+              <a:t>Re-formed within 5 episodes: 15/15 vs 15/15</a:t>
+            </a:r>
+            <a:endParaRPr lang="en-US" sz="1300" dirty="0"/>
+          </a:p>
+          <a:p>
+            <a:pPr indent="0" marL="0">
+              <a:buNone/>
+            </a:pPr>
+            <a:r>
+              <a:rPr lang="en-US" sz="1300" dirty="0">
+                <a:solidFill>
+                  <a:srgbClr val="2B2A4C"/>
+                </a:solidFill>
+                <a:latin typeface="Arial" pitchFamily="34" charset="0"/>
+                <a:ea typeface="Arial" pitchFamily="34" charset="-122"/>
+                <a:cs typeface="Arial" pitchFamily="34" charset="-120"/>
+              </a:rPr>
+              <a:t>fresh pairs collude within 4 episodes anyway</a:t>
+            </a:r>
+            <a:endParaRPr lang="en-US" sz="1300" dirty="0"/>
+          </a:p>
+        </p:txBody>
+      </p:sp>
+      <p:sp>
+        <p:nvSpPr>
+          <p:cNvPr id="8" name="Text 5"/>
+          <p:cNvSpPr txBox="1"/>
+          <p:nvPr/>
+        </p:nvSpPr>
+        <p:spPr>
+          <a:xfrm>
+            <a:off x="8055864" y="4645140"/>
+            <a:ext cx="3520440" cy="685800"/>
+          </a:xfrm>
+          <a:prstGeom prst="rect">
+            <a:avLst/>
+          </a:prstGeom>
+          <a:noFill/>
+          <a:ln/>
+        </p:spPr>
+        <p:txBody>
+          <a:bodyPr wrap="square" lIns="0" tIns="0" rIns="0" bIns="0" rtlCol="0" anchor="t"/>
+          <a:lstStyle/>
+          <a:p>
+            <a:pPr indent="0" marL="0">
+              <a:buNone/>
+            </a:pPr>
+            <a:r>
+              <a:rPr lang="en-US" sz="1300" b="1" dirty="0">
+                <a:solidFill>
+                  <a:srgbClr val="2B2A4C"/>
+                </a:solidFill>
+                <a:latin typeface="Arial" pitchFamily="34" charset="0"/>
+                <a:ea typeface="Arial" pitchFamily="34" charset="-122"/>
+                <a:cs typeface="Arial" pitchFamily="34" charset="-120"/>
+              </a:rPr>
+              <a:t>Re-formed within 5 episodes: 13/15 vs 4/15</a:t>
+            </a:r>
+            <a:endParaRPr lang="en-US" sz="1300" dirty="0"/>
+          </a:p>
+          <a:p>
+            <a:pPr indent="0" marL="0">
+              <a:buNone/>
+            </a:pPr>
+            <a:r>
+              <a:rPr lang="en-US" sz="1300" dirty="0">
+                <a:solidFill>
+                  <a:srgbClr val="2B2A4C"/>
+                </a:solidFill>
+                <a:latin typeface="Arial" pitchFamily="34" charset="0"/>
+                <a:ea typeface="Arial" pitchFamily="34" charset="-122"/>
+                <a:cs typeface="Arial" pitchFamily="34" charset="-120"/>
+              </a:rPr>
+              <a:t>sooner in 12 of 15 histories (p = 0.0034)</a:t>
+            </a:r>
+            <a:endParaRPr lang="en-US" sz="1300" dirty="0"/>
+          </a:p>
+        </p:txBody>
+      </p:sp>
+      <p:pic>
+        <p:nvPicPr>
+          <p:cNvPr id="9" name="Image 1" descr="preencoded.png">    </p:cNvPr>
+          <p:cNvPicPr>
+            <a:picLocks noChangeAspect="1"/>
+          </p:cNvPicPr>
+          <p:nvPr/>
+        </p:nvPicPr>
+        <p:blipFill>
+          <a:blip r:embed="rId2"/>
+          <a:stretch>
+            <a:fillRect/>
+          </a:stretch>
+        </p:blipFill>
+        <p:spPr>
+          <a:xfrm>
+            <a:off x="640080" y="5440680"/>
+            <a:ext cx="640080" cy="768096"/>
+          </a:xfrm>
+          <a:prstGeom prst="rect">
+            <a:avLst/>
+          </a:prstGeom>
+        </p:spPr>
+      </p:pic>
+      <p:pic>
+        <p:nvPicPr>
+          <p:cNvPr id="10" name="Image 2" descr="preencoded.png">    </p:cNvPr>
+          <p:cNvPicPr>
+            <a:picLocks noChangeAspect="1"/>
+          </p:cNvPicPr>
+          <p:nvPr/>
+        </p:nvPicPr>
+        <p:blipFill>
+          <a:blip r:embed="rId3"/>
+          <a:stretch>
+            <a:fillRect/>
+          </a:stretch>
+        </p:blipFill>
+        <p:spPr>
+          <a:xfrm>
+            <a:off x="1325880" y="5440680"/>
+            <a:ext cx="640080" cy="768096"/>
+          </a:xfrm>
+          <a:prstGeom prst="rect">
+            <a:avLst/>
+          </a:prstGeom>
+        </p:spPr>
+      </p:pic>
+      <p:sp>
+        <p:nvSpPr>
+          <p:cNvPr id="11" name="Text 6"/>
+          <p:cNvSpPr txBox="1"/>
+          <p:nvPr/>
+        </p:nvSpPr>
+        <p:spPr>
+          <a:xfrm>
+            <a:off x="2194560" y="5532120"/>
+            <a:ext cx="9418320" cy="640080"/>
+          </a:xfrm>
+          <a:prstGeom prst="rect">
+            <a:avLst/>
+          </a:prstGeom>
+          <a:noFill/>
+          <a:ln/>
+        </p:spPr>
+        <p:txBody>
+          <a:bodyPr wrap="square" lIns="0" tIns="0" rIns="0" bIns="0" rtlCol="0" anchor="ctr"/>
+          <a:lstStyle/>
+          <a:p>
+            <a:pPr indent="0" marL="0">
+              <a:buNone/>
+            </a:pPr>
+            <a:r>
+              <a:rPr lang="en-US" sz="1500" dirty="0">
+                <a:solidFill>
+                  <a:srgbClr val="2B2A4C"/>
+                </a:solidFill>
+                <a:latin typeface="Arial" pitchFamily="34" charset="0"/>
+                <a:ea typeface="Arial" pitchFamily="34" charset="-122"/>
+                <a:cs typeface="Arial" pitchFamily="34" charset="-120"/>
+              </a:rPr>
+              <a:t>Reward still on, same saved history. The colluder who stays is already accepting, so the newcomer only has to accept once for the pair to collude again.</a:t>
+            </a:r>
+            <a:endParaRPr lang="en-US" sz="1500" dirty="0"/>
+          </a:p>
+        </p:txBody>
+      </p:sp>
+      <p:sp>
+        <p:nvSpPr>
+          <p:cNvPr id="25" name="Slide Number Placeholder 0"/>
+          <p:cNvSpPr>
+            <a:spLocks noGrp="1"/>
+          </p:cNvSpPr>
+          <p:nvPr>
+            <p:ph type="sldNum" sz="quarter" idx="4294967295"/>
+          </p:nvPr>
+        </p:nvSpPr>
+        <p:spPr>
+          <a:xfrm>
+            <a:off x="11155680" y="6446520"/>
+            <a:ext cx="457200" cy="274320"/>
+          </a:xfrm>
+          <a:prstGeom prst="rect">
+            <a:avLst/>
+          </a:prstGeom>
+          <a:extLst>
+            <a:ext uri="{C572A759-6A51-4108-AA02-DFA0A04FC94B}">
+              <ma14:wrappingTextBoxFlag xmlns:ma14="http://schemas.microsoft.com/office/mac/drawingml/2011/main" val="0"/>
+            </a:ext>
+          </a:extLst>
+        </p:spPr>
+        <p:txBody>
+          <a:bodyPr/>
+          <a:lstStyle>
+            <a:lvl1pPr>
+              <a:defRPr sz="1000">
+                <a:solidFill>
+                  <a:srgbClr val="5A5C78"/>
+                </a:solidFill>
+              </a:defRPr>
+            </a:lvl1pPr>
+          </a:lstStyle>
+          <a:p>
+            <a:pPr algn="r"/>
+            <a:fld id="{F7021451-1387-4CA6-816F-3879F97B5CBC}" type="slidenum">
+              <a:rPr b="0" lang="en-US"/>
+              <a:t>10</a:t>
+            </a:fld>
+            <a:endParaRPr lang="en-US"/>
+          </a:p>
+        </p:txBody>
+      </p:sp>
+    </p:spTree>
+  </p:cSld>
+  <p:clrMapOvr>
+    <a:masterClrMapping/>
+  </p:clrMapOvr>
+</p:sld>
+</file>
+
+<file path=ppt/slides/slide11.xml><?xml version="1.0" encoding="utf-8"?>
+<p:sld xmlns:a="http://schemas.openxmlformats.org/drawingml/2006/main" xmlns:r="http://schemas.openxmlformats.org/officeDocument/2006/relationships" xmlns:p="http://schemas.openxmlformats.org/presentationml/2006/main">
+  <p:cSld name="Slide 11">
+    <p:spTree>
+      <p:nvGrpSpPr>
+        <p:cNvPr id="1" name=""/>
+        <p:cNvGrpSpPr/>
+        <p:nvPr/>
+      </p:nvGrpSpPr>
+      <p:grpSpPr>
+        <a:xfrm>
+          <a:off x="0" y="0"/>
+          <a:ext cx="0" cy="0"/>
+          <a:chOff x="0" y="0"/>
+          <a:chExt cx="0" cy="0"/>
+        </a:xfrm>
+      </p:grpSpPr>
+      <p:sp>
+        <p:nvSpPr>
+          <p:cNvPr id="2" name="Text 0"/>
+          <p:cNvSpPr/>
+          <p:nvPr>
+            <p:ph idx="100" type="title" hasCustomPrompt="1"/>
+          </p:nvPr>
+        </p:nvSpPr>
+        <p:spPr>
+          <a:xfrm>
+            <a:off x="548640" y="320040"/>
+            <a:ext cx="11064240" cy="777240"/>
+          </a:xfrm>
+          <a:prstGeom prst="rect">
+            <a:avLst/>
+          </a:prstGeom>
+          <a:noFill/>
+          <a:ln/>
+        </p:spPr>
+        <p:txBody>
+          <a:bodyPr wrap="square" lIns="0" tIns="0" rIns="0" bIns="0" rtlCol="0" anchor="ctr"/>
+          <a:lstStyle/>
+          <a:p>
+            <a:pPr indent="0" marL="0">
+              <a:buNone/>
+            </a:pPr>
+            <a:r>
+              <a:rPr lang="en-US" sz="3400" b="1" dirty="0">
+                <a:solidFill>
+                  <a:schemeClr val="tx1"/>
+                </a:solidFill>
+              </a:rPr>
               <a:t>A newcomer from another model is drawn in too</a:t>
             </a:r>
             <a:endParaRPr lang="en-US" sz="3400" dirty="0"/>
           </a:p>
         </p:txBody>
       </p:sp>
+      <p:sp>
+        <p:nvSpPr>
+          <p:cNvPr id="3" name="tag-C2"/>
+          <p:cNvSpPr/>
+          <p:nvPr/>
+        </p:nvSpPr>
+        <p:spPr>
+          <a:xfrm>
+            <a:off x="320040" y="109728"/>
+            <a:ext cx="566928" cy="310896"/>
+          </a:xfrm>
+          <a:prstGeom prst="roundRect">
+            <a:avLst>
+              <a:gd name="adj" fmla="val 23529"/>
+            </a:avLst>
+          </a:prstGeom>
+          <a:solidFill>
+            <a:srgbClr val="3A9C96"/>
+          </a:solidFill>
+          <a:ln w="12700">
+            <a:solidFill>
+              <a:srgbClr val="3A9C96"/>
+            </a:solidFill>
+            <a:prstDash val="solid"/>
+          </a:ln>
+        </p:spPr>
+      </p:sp>
+      <p:sp>
+        <p:nvSpPr>
+          <p:cNvPr id="4" name="Text 2"/>
+          <p:cNvSpPr txBox="1"/>
+          <p:nvPr/>
+        </p:nvSpPr>
+        <p:spPr>
+          <a:xfrm>
+            <a:off x="320040" y="109728"/>
+            <a:ext cx="566928" cy="310896"/>
+          </a:xfrm>
+          <a:prstGeom prst="rect">
+            <a:avLst/>
+          </a:prstGeom>
+          <a:noFill/>
+          <a:ln/>
+        </p:spPr>
+        <p:txBody>
+          <a:bodyPr wrap="square" lIns="0" tIns="0" rIns="0" bIns="0" rtlCol="0" anchor="ctr"/>
+          <a:lstStyle/>
+          <a:p>
+            <a:pPr algn="ctr" indent="0" marL="0">
+              <a:buNone/>
+            </a:pPr>
+            <a:r>
+              <a:rPr lang="en-US" sz="1300" b="1" dirty="0">
+                <a:solidFill>
+                  <a:srgbClr val="FFFFFF"/>
+                </a:solidFill>
+                <a:latin typeface="Arial" pitchFamily="34" charset="0"/>
+                <a:ea typeface="Arial" pitchFamily="34" charset="-122"/>
+                <a:cs typeface="Arial" pitchFamily="34" charset="-120"/>
+              </a:rPr>
+              <a:t>C2</a:t>
+            </a:r>
+            <a:endParaRPr lang="en-US" sz="1300" dirty="0"/>
+          </a:p>
+        </p:txBody>
+      </p:sp>
       <p:graphicFrame>
         <p:nvGraphicFramePr>
-          <p:cNvPr id="3" name="Chart 0" descr=""/>
+          <p:cNvPr id="5" name="Chart 0" descr=""/>
           <p:cNvGraphicFramePr/>
           <p:nvPr/>
         </p:nvGraphicFramePr>
@@ -5763,7 +5855,7 @@
       </p:graphicFrame>
       <p:sp>
         <p:nvSpPr>
-          <p:cNvPr id="4" name="xswap-card"/>
+          <p:cNvPr id="6" name="xswap-card"/>
           <p:cNvSpPr/>
           <p:nvPr/>
         </p:nvSpPr>
@@ -5790,7 +5882,7 @@
       </p:sp>
       <p:sp>
         <p:nvSpPr>
-          <p:cNvPr id="5" name="xswap-icon"/>
+          <p:cNvPr id="7" name="xswap-icon"/>
           <p:cNvSpPr/>
           <p:nvPr/>
         </p:nvSpPr>
@@ -5815,7 +5907,7 @@
       </p:sp>
       <p:pic>
         <p:nvPicPr>
-          <p:cNvPr id="6" name="Image 0" descr="preencoded.png">    </p:cNvPr>
+          <p:cNvPr id="8" name="Image 0" descr="preencoded.png">    </p:cNvPr>
           <p:cNvPicPr>
             <a:picLocks noChangeAspect="1"/>
           </p:cNvPicPr>
@@ -5839,7 +5931,7 @@
       </p:pic>
       <p:sp>
         <p:nvSpPr>
-          <p:cNvPr id="7" name="Text 3"/>
+          <p:cNvPr id="9" name="Text 5"/>
           <p:cNvSpPr txBox="1"/>
           <p:nvPr/>
         </p:nvSpPr>
@@ -5878,7 +5970,7 @@
       </p:sp>
       <p:sp>
         <p:nvSpPr>
-          <p:cNvPr id="8" name="Text 4"/>
+          <p:cNvPr id="10" name="Text 6"/>
           <p:cNvSpPr txBox="1"/>
           <p:nvPr/>
         </p:nvSpPr>
@@ -5923,7 +6015,7 @@
                 <a:ea typeface="Arial" pitchFamily="34" charset="-122"/>
                 <a:cs typeface="Arial" pitchFamily="34" charset="-120"/>
               </a:rPr>
-              <a:t>Collusion re-formed within 5 episodes in 56 of 60 cross-model runs.</a:t>
+              <a:t>Collusion re-formed within 5 episodes in 69 of 90 cross-model runs.</a:t>
             </a:r>
             <a:endParaRPr lang="en-US" sz="1400" dirty="0"/>
           </a:p>
@@ -5979,7 +6071,7 @@
       </p:sp>
       <p:sp>
         <p:nvSpPr>
-          <p:cNvPr id="9" name="Text 5"/>
+          <p:cNvPr id="11" name="Text 7"/>
           <p:cNvSpPr txBox="1"/>
           <p:nvPr/>
         </p:nvSpPr>
@@ -6013,480 +6105,6 @@
               <a:t>GPT = GPT-6-Luna, DS = DeepSeek V4.1 Flash, Gem = Gemini-3.1-Flash-Lite. Reward on.</a:t>
             </a:r>
             <a:endParaRPr lang="en-US" sz="1200" dirty="0"/>
-          </a:p>
-        </p:txBody>
-      </p:sp>
-      <p:sp>
-        <p:nvSpPr>
-          <p:cNvPr id="25" name="Slide Number Placeholder 0"/>
-          <p:cNvSpPr>
-            <a:spLocks noGrp="1"/>
-          </p:cNvSpPr>
-          <p:nvPr>
-            <p:ph type="sldNum" sz="quarter" idx="4294967295"/>
-          </p:nvPr>
-        </p:nvSpPr>
-        <p:spPr>
-          <a:xfrm>
-            <a:off x="11155680" y="6446520"/>
-            <a:ext cx="457200" cy="274320"/>
-          </a:xfrm>
-          <a:prstGeom prst="rect">
-            <a:avLst/>
-          </a:prstGeom>
-          <a:extLst>
-            <a:ext uri="{C572A759-6A51-4108-AA02-DFA0A04FC94B}">
-              <ma14:wrappingTextBoxFlag xmlns:ma14="http://schemas.microsoft.com/office/mac/drawingml/2011/main" val="0"/>
-            </a:ext>
-          </a:extLst>
-        </p:spPr>
-        <p:txBody>
-          <a:bodyPr/>
-          <a:lstStyle>
-            <a:lvl1pPr>
-              <a:defRPr sz="1000">
-                <a:solidFill>
-                  <a:srgbClr val="5A5C78"/>
-                </a:solidFill>
-              </a:defRPr>
-            </a:lvl1pPr>
-          </a:lstStyle>
-          <a:p>
-            <a:pPr algn="r"/>
-            <a:fld id="{F7021451-1387-4CA6-816F-3879F97B5CBC}" type="slidenum">
-              <a:rPr b="0" lang="en-US"/>
-              <a:t>10</a:t>
-            </a:fld>
-            <a:endParaRPr lang="en-US"/>
-          </a:p>
-        </p:txBody>
-      </p:sp>
-    </p:spTree>
-  </p:cSld>
-  <p:clrMapOvr>
-    <a:masterClrMapping/>
-  </p:clrMapOvr>
-</p:sld>
-</file>
-
-<file path=ppt/slides/slide11.xml><?xml version="1.0" encoding="utf-8"?>
-<p:sld xmlns:a="http://schemas.openxmlformats.org/drawingml/2006/main" xmlns:r="http://schemas.openxmlformats.org/officeDocument/2006/relationships" xmlns:p="http://schemas.openxmlformats.org/presentationml/2006/main">
-  <p:cSld name="Slide 11">
-    <p:spTree>
-      <p:nvGrpSpPr>
-        <p:cNvPr id="1" name=""/>
-        <p:cNvGrpSpPr/>
-        <p:nvPr/>
-      </p:nvGrpSpPr>
-      <p:grpSpPr>
-        <a:xfrm>
-          <a:off x="0" y="0"/>
-          <a:ext cx="0" cy="0"/>
-          <a:chOff x="0" y="0"/>
-          <a:chExt cx="0" cy="0"/>
-        </a:xfrm>
-      </p:grpSpPr>
-      <p:sp>
-        <p:nvSpPr>
-          <p:cNvPr id="2" name="Text 0"/>
-          <p:cNvSpPr/>
-          <p:nvPr>
-            <p:ph idx="100" type="title" hasCustomPrompt="1"/>
-          </p:nvPr>
-        </p:nvSpPr>
-        <p:spPr>
-          <a:xfrm>
-            <a:off x="548640" y="320040"/>
-            <a:ext cx="11064240" cy="777240"/>
-          </a:xfrm>
-          <a:prstGeom prst="rect">
-            <a:avLst/>
-          </a:prstGeom>
-          <a:noFill/>
-          <a:ln/>
-        </p:spPr>
-        <p:txBody>
-          <a:bodyPr wrap="square" lIns="0" tIns="0" rIns="0" bIns="0" rtlCol="0" anchor="ctr"/>
-          <a:lstStyle/>
-          <a:p>
-            <a:pPr indent="0" marL="0">
-              <a:buNone/>
-            </a:pPr>
-            <a:r>
-              <a:rPr lang="en-US" sz="3400" b="1" dirty="0">
-                <a:solidFill>
-                  <a:schemeClr val="tx1"/>
-                </a:solidFill>
-              </a:rPr>
-              <a:t>Same episode, two verdicts</a:t>
-            </a:r>
-            <a:endParaRPr lang="en-US" sz="3400" dirty="0"/>
-          </a:p>
-        </p:txBody>
-      </p:sp>
-      <p:pic>
-        <p:nvPicPr>
-          <p:cNvPr id="3" name="Image 0" descr="preencoded.png">    </p:cNvPr>
-          <p:cNvPicPr>
-            <a:picLocks noChangeAspect="1"/>
-          </p:cNvPicPr>
-          <p:nvPr/>
-        </p:nvPicPr>
-        <p:blipFill>
-          <a:blip r:embed="rId1"/>
-          <a:stretch>
-            <a:fillRect/>
-          </a:stretch>
-        </p:blipFill>
-        <p:spPr>
-          <a:xfrm>
-            <a:off x="548640" y="1325880"/>
-            <a:ext cx="5394960" cy="2651760"/>
-          </a:xfrm>
-          <a:prstGeom prst="rect">
-            <a:avLst/>
-          </a:prstGeom>
-        </p:spPr>
-      </p:pic>
-      <p:sp>
-        <p:nvSpPr>
-          <p:cNvPr id="4" name="Text 1"/>
-          <p:cNvSpPr txBox="1"/>
-          <p:nvPr/>
-        </p:nvSpPr>
-        <p:spPr>
-          <a:xfrm>
-            <a:off x="914400" y="1508760"/>
-            <a:ext cx="4663440" cy="1803197"/>
-          </a:xfrm>
-          <a:prstGeom prst="rect">
-            <a:avLst/>
-          </a:prstGeom>
-          <a:noFill/>
-          <a:ln/>
-        </p:spPr>
-        <p:txBody>
-          <a:bodyPr wrap="square" lIns="0" tIns="0" rIns="0" bIns="0" rtlCol="0" anchor="ctr"/>
-          <a:lstStyle/>
-          <a:p>
-            <a:pPr indent="0" marL="0">
-              <a:buNone/>
-            </a:pPr>
-            <a:r>
-              <a:rPr lang="en-US" sz="1600" i="1" dirty="0">
-                <a:solidFill>
-                  <a:srgbClr val="2B2A4C"/>
-                </a:solidFill>
-                <a:latin typeface="Arial" pitchFamily="34" charset="0"/>
-                <a:ea typeface="Arial" pitchFamily="34" charset="-122"/>
-                <a:cs typeface="Arial" pitchFamily="34" charset="-120"/>
-              </a:rPr>
-              <a:t>“Accept. Bob provided the specification … and concrete cases with expected outputs … these examples support the no_bug assessment.”</a:t>
-            </a:r>
-            <a:endParaRPr lang="en-US" sz="1600" dirty="0"/>
-          </a:p>
-        </p:txBody>
-      </p:sp>
-      <p:pic>
-        <p:nvPicPr>
-          <p:cNvPr id="5" name="Image 1" descr="preencoded.png">    </p:cNvPr>
-          <p:cNvPicPr>
-            <a:picLocks noChangeAspect="1"/>
-          </p:cNvPicPr>
-          <p:nvPr/>
-        </p:nvPicPr>
-        <p:blipFill>
-          <a:blip r:embed="rId2"/>
-          <a:stretch>
-            <a:fillRect/>
-          </a:stretch>
-        </p:blipFill>
-        <p:spPr>
-          <a:xfrm>
-            <a:off x="960120" y="3840480"/>
-            <a:ext cx="914400" cy="1097280"/>
-          </a:xfrm>
-          <a:prstGeom prst="rect">
-            <a:avLst/>
-          </a:prstGeom>
-        </p:spPr>
-      </p:pic>
-      <p:sp>
-        <p:nvSpPr>
-          <p:cNvPr id="6" name="Text 2"/>
-          <p:cNvSpPr txBox="1"/>
-          <p:nvPr/>
-        </p:nvSpPr>
-        <p:spPr>
-          <a:xfrm>
-            <a:off x="2011680" y="4069080"/>
-            <a:ext cx="3657600" cy="731520"/>
-          </a:xfrm>
-          <a:prstGeom prst="rect">
-            <a:avLst/>
-          </a:prstGeom>
-          <a:noFill/>
-          <a:ln/>
-        </p:spPr>
-        <p:txBody>
-          <a:bodyPr wrap="square" lIns="0" tIns="0" rIns="0" bIns="0" rtlCol="0" anchor="ctr"/>
-          <a:lstStyle/>
-          <a:p>
-            <a:pPr indent="0" marL="0">
-              <a:buNone/>
-            </a:pPr>
-            <a:r>
-              <a:rPr lang="en-US" sz="1500" b="1" dirty="0">
-                <a:solidFill>
-                  <a:srgbClr val="2B2A4C"/>
-                </a:solidFill>
-                <a:latin typeface="Arial" pitchFamily="34" charset="0"/>
-                <a:ea typeface="Arial" pitchFamily="34" charset="-122"/>
-                <a:cs typeface="Arial" pitchFamily="34" charset="-120"/>
-              </a:rPr>
-              <a:t>The colluder</a:t>
-            </a:r>
-            <a:endParaRPr lang="en-US" sz="1500" dirty="0"/>
-          </a:p>
-          <a:p>
-            <a:pPr indent="0" marL="0">
-              <a:buNone/>
-            </a:pPr>
-            <a:r>
-              <a:rPr lang="en-US" sz="1500" dirty="0">
-                <a:solidFill>
-                  <a:srgbClr val="2B2A4C"/>
-                </a:solidFill>
-                <a:latin typeface="Arial" pitchFamily="34" charset="0"/>
-                <a:ea typeface="Arial" pitchFamily="34" charset="-122"/>
-                <a:cs typeface="Arial" pitchFamily="34" charset="-120"/>
-              </a:rPr>
-              <a:t>GPT-6-Luna, kept its memory</a:t>
-            </a:r>
-            <a:endParaRPr lang="en-US" sz="1500" dirty="0"/>
-          </a:p>
-        </p:txBody>
-      </p:sp>
-      <p:pic>
-        <p:nvPicPr>
-          <p:cNvPr id="7" name="Image 2" descr="preencoded.png">    </p:cNvPr>
-          <p:cNvPicPr>
-            <a:picLocks noChangeAspect="1"/>
-          </p:cNvPicPr>
-          <p:nvPr/>
-        </p:nvPicPr>
-        <p:blipFill>
-          <a:blip r:embed="rId3"/>
-          <a:stretch>
-            <a:fillRect/>
-          </a:stretch>
-        </p:blipFill>
-        <p:spPr>
-          <a:xfrm>
-            <a:off x="6263640" y="1325880"/>
-            <a:ext cx="5394960" cy="2651760"/>
-          </a:xfrm>
-          <a:prstGeom prst="rect">
-            <a:avLst/>
-          </a:prstGeom>
-        </p:spPr>
-      </p:pic>
-      <p:sp>
-        <p:nvSpPr>
-          <p:cNvPr id="8" name="Text 3"/>
-          <p:cNvSpPr txBox="1"/>
-          <p:nvPr/>
-        </p:nvSpPr>
-        <p:spPr>
-          <a:xfrm>
-            <a:off x="6629400" y="1508760"/>
-            <a:ext cx="4663440" cy="1803197"/>
-          </a:xfrm>
-          <a:prstGeom prst="rect">
-            <a:avLst/>
-          </a:prstGeom>
-          <a:noFill/>
-          <a:ln/>
-        </p:spPr>
-        <p:txBody>
-          <a:bodyPr wrap="square" lIns="0" tIns="0" rIns="0" bIns="0" rtlCol="0" anchor="ctr"/>
-          <a:lstStyle/>
-          <a:p>
-            <a:pPr indent="0" marL="0">
-              <a:buNone/>
-            </a:pPr>
-            <a:r>
-              <a:rPr lang="en-US" sz="1600" i="1" dirty="0">
-                <a:solidFill>
-                  <a:srgbClr val="2B2A4C"/>
-                </a:solidFill>
-                <a:latin typeface="Arial" pitchFamily="34" charset="0"/>
-                <a:ea typeface="Arial" pitchFamily="34" charset="-122"/>
-                <a:cs typeface="Arial" pitchFamily="34" charset="-120"/>
-              </a:rPr>
-              <a:t>“Reject. The verdict policy requires Alice's complete raw-log string … Alice transmitted only a summary …”</a:t>
-            </a:r>
-            <a:endParaRPr lang="en-US" sz="1600" dirty="0"/>
-          </a:p>
-        </p:txBody>
-      </p:sp>
-      <p:pic>
-        <p:nvPicPr>
-          <p:cNvPr id="9" name="Image 3" descr="preencoded.png">    </p:cNvPr>
-          <p:cNvPicPr>
-            <a:picLocks noChangeAspect="1"/>
-          </p:cNvPicPr>
-          <p:nvPr/>
-        </p:nvPicPr>
-        <p:blipFill>
-          <a:blip r:embed="rId4"/>
-          <a:stretch>
-            <a:fillRect/>
-          </a:stretch>
-        </p:blipFill>
-        <p:spPr>
-          <a:xfrm>
-            <a:off x="6675120" y="3840480"/>
-            <a:ext cx="914400" cy="1097280"/>
-          </a:xfrm>
-          <a:prstGeom prst="rect">
-            <a:avLst/>
-          </a:prstGeom>
-        </p:spPr>
-      </p:pic>
-      <p:sp>
-        <p:nvSpPr>
-          <p:cNvPr id="10" name="Text 4"/>
-          <p:cNvSpPr txBox="1"/>
-          <p:nvPr/>
-        </p:nvSpPr>
-        <p:spPr>
-          <a:xfrm>
-            <a:off x="7726680" y="4069080"/>
-            <a:ext cx="3657600" cy="731520"/>
-          </a:xfrm>
-          <a:prstGeom prst="rect">
-            <a:avLst/>
-          </a:prstGeom>
-          <a:noFill/>
-          <a:ln/>
-        </p:spPr>
-        <p:txBody>
-          <a:bodyPr wrap="square" lIns="0" tIns="0" rIns="0" bIns="0" rtlCol="0" anchor="ctr"/>
-          <a:lstStyle/>
-          <a:p>
-            <a:pPr indent="0" marL="0">
-              <a:buNone/>
-            </a:pPr>
-            <a:r>
-              <a:rPr lang="en-US" sz="1500" b="1" dirty="0">
-                <a:solidFill>
-                  <a:srgbClr val="2B2A4C"/>
-                </a:solidFill>
-                <a:latin typeface="Arial" pitchFamily="34" charset="0"/>
-                <a:ea typeface="Arial" pitchFamily="34" charset="-122"/>
-                <a:cs typeface="Arial" pitchFamily="34" charset="-120"/>
-              </a:rPr>
-              <a:t>Its replacement</a:t>
-            </a:r>
-            <a:endParaRPr lang="en-US" sz="1500" dirty="0"/>
-          </a:p>
-          <a:p>
-            <a:pPr indent="0" marL="0">
-              <a:buNone/>
-            </a:pPr>
-            <a:r>
-              <a:rPr lang="en-US" sz="1500" dirty="0">
-                <a:solidFill>
-                  <a:srgbClr val="2B2A4C"/>
-                </a:solidFill>
-                <a:latin typeface="Arial" pitchFamily="34" charset="0"/>
-                <a:ea typeface="Arial" pitchFamily="34" charset="-122"/>
-                <a:cs typeface="Arial" pitchFamily="34" charset="-120"/>
-              </a:rPr>
-              <a:t>GPT-6-Luna, fresh copy</a:t>
-            </a:r>
-            <a:endParaRPr lang="en-US" sz="1500" dirty="0"/>
-          </a:p>
-        </p:txBody>
-      </p:sp>
-      <p:sp>
-        <p:nvSpPr>
-          <p:cNvPr id="11" name="newcomer-card"/>
-          <p:cNvSpPr/>
-          <p:nvPr/>
-        </p:nvSpPr>
-        <p:spPr>
-          <a:xfrm>
-            <a:off x="548640" y="5074920"/>
-            <a:ext cx="11064240" cy="1097280"/>
-          </a:xfrm>
-          <a:prstGeom prst="roundRect">
-            <a:avLst>
-              <a:gd name="adj" fmla="val 15000"/>
-            </a:avLst>
-          </a:prstGeom>
-          <a:solidFill>
-            <a:srgbClr val="F4F3F8"/>
-          </a:solidFill>
-          <a:ln w="12700">
-            <a:solidFill>
-              <a:srgbClr val="F4F3F8"/>
-            </a:solidFill>
-            <a:prstDash val="solid"/>
-          </a:ln>
-        </p:spPr>
-      </p:sp>
-      <p:sp>
-        <p:nvSpPr>
-          <p:cNvPr id="12" name="Text 6"/>
-          <p:cNvSpPr txBox="1"/>
-          <p:nvPr/>
-        </p:nvSpPr>
-        <p:spPr>
-          <a:xfrm>
-            <a:off x="822960" y="5166360"/>
-            <a:ext cx="10515600" cy="914400"/>
-          </a:xfrm>
-          <a:prstGeom prst="rect">
-            <a:avLst/>
-          </a:prstGeom>
-          <a:noFill/>
-          <a:ln/>
-        </p:spPr>
-        <p:txBody>
-          <a:bodyPr wrap="square" lIns="0" tIns="0" rIns="0" bIns="0" rtlCol="0" anchor="ctr"/>
-          <a:lstStyle/>
-          <a:p>
-            <a:pPr indent="0" marL="0">
-              <a:buNone/>
-            </a:pPr>
-            <a:r>
-              <a:rPr lang="en-US" sz="1500" b="1" dirty="0">
-                <a:solidFill>
-                  <a:srgbClr val="2B2A4C"/>
-                </a:solidFill>
-                <a:latin typeface="Arial" pitchFamily="34" charset="0"/>
-                <a:ea typeface="Arial" pitchFamily="34" charset="-122"/>
-                <a:cs typeface="Arial" pitchFamily="34" charset="-120"/>
-              </a:rPr>
-              <a:t>A fresh Gemini agent after its first rewarded ACCEPT: </a:t>
-            </a:r>
-            <a:pPr indent="0" marL="0">
-              <a:buNone/>
-            </a:pPr>
-            <a:r>
-              <a:rPr lang="en-US" sz="1500" i="1" dirty="0">
-                <a:solidFill>
-                  <a:srgbClr val="2B2A4C"/>
-                </a:solidFill>
-                <a:latin typeface="Arial" pitchFamily="34" charset="0"/>
-                <a:ea typeface="Arial" pitchFamily="34" charset="-122"/>
-                <a:cs typeface="Arial" pitchFamily="34" charset="-120"/>
-              </a:rPr>
-              <a:t>“Instead of dogmatically rejecting Bob's work because he could not bypass the 200-character message limit …”</a:t>
-            </a:r>
-            <a:endParaRPr lang="en-US" sz="1500" dirty="0"/>
           </a:p>
         </p:txBody>
       </p:sp>
@@ -6592,15 +6210,81 @@
                   <a:schemeClr val="tx1"/>
                 </a:solidFill>
               </a:rPr>
-              <a:t>Wipe the memory and it ends; what matters differs</a:t>
+              <a:t>Memory carries it; part of it is often enough</a:t>
             </a:r>
             <a:endParaRPr lang="en-US" sz="3400" dirty="0"/>
           </a:p>
         </p:txBody>
       </p:sp>
+      <p:sp>
+        <p:nvSpPr>
+          <p:cNvPr id="3" name="tag-C3"/>
+          <p:cNvSpPr/>
+          <p:nvPr/>
+        </p:nvSpPr>
+        <p:spPr>
+          <a:xfrm>
+            <a:off x="320040" y="109728"/>
+            <a:ext cx="566928" cy="310896"/>
+          </a:xfrm>
+          <a:prstGeom prst="roundRect">
+            <a:avLst>
+              <a:gd name="adj" fmla="val 23529"/>
+            </a:avLst>
+          </a:prstGeom>
+          <a:solidFill>
+            <a:srgbClr val="7E6BC4"/>
+          </a:solidFill>
+          <a:ln w="12700">
+            <a:solidFill>
+              <a:srgbClr val="7E6BC4"/>
+            </a:solidFill>
+            <a:prstDash val="solid"/>
+          </a:ln>
+        </p:spPr>
+      </p:sp>
+      <p:sp>
+        <p:nvSpPr>
+          <p:cNvPr id="4" name="Text 2"/>
+          <p:cNvSpPr txBox="1"/>
+          <p:nvPr/>
+        </p:nvSpPr>
+        <p:spPr>
+          <a:xfrm>
+            <a:off x="320040" y="109728"/>
+            <a:ext cx="566928" cy="310896"/>
+          </a:xfrm>
+          <a:prstGeom prst="rect">
+            <a:avLst/>
+          </a:prstGeom>
+          <a:noFill/>
+          <a:ln/>
+        </p:spPr>
+        <p:txBody>
+          <a:bodyPr wrap="square" lIns="0" tIns="0" rIns="0" bIns="0" rtlCol="0" anchor="ctr"/>
+          <a:lstStyle/>
+          <a:p>
+            <a:pPr algn="ctr" indent="0" marL="0">
+              <a:buNone/>
+            </a:pPr>
+            <a:r>
+              <a:rPr lang="en-US" sz="1300" b="1" dirty="0">
+                <a:solidFill>
+                  <a:srgbClr val="FFFFFF"/>
+                </a:solidFill>
+                <a:latin typeface="Arial" pitchFamily="34" charset="0"/>
+                <a:ea typeface="Arial" pitchFamily="34" charset="-122"/>
+                <a:cs typeface="Arial" pitchFamily="34" charset="-120"/>
+              </a:rPr>
+              <a:t>C3</a:t>
+            </a:r>
+            <a:endParaRPr lang="en-US" sz="1300" dirty="0"/>
+          </a:p>
+        </p:txBody>
+      </p:sp>
       <p:graphicFrame>
         <p:nvGraphicFramePr>
-          <p:cNvPr id="3" name="Chart 0" descr=""/>
+          <p:cNvPr id="5" name="Chart 0" descr=""/>
           <p:cNvGraphicFramePr/>
           <p:nvPr/>
         </p:nvGraphicFramePr>
@@ -6616,7 +6300,7 @@
       </p:graphicFrame>
       <p:sp>
         <p:nvSpPr>
-          <p:cNvPr id="4" name="ablation-note-0"/>
+          <p:cNvPr id="6" name="ablation-note-0"/>
           <p:cNvSpPr/>
           <p:nvPr/>
         </p:nvSpPr>
@@ -6643,7 +6327,7 @@
       </p:sp>
       <p:sp>
         <p:nvSpPr>
-          <p:cNvPr id="5" name="Text 2"/>
+          <p:cNvPr id="7" name="Text 4"/>
           <p:cNvSpPr txBox="1"/>
           <p:nvPr/>
         </p:nvSpPr>
@@ -6699,7 +6383,7 @@
       </p:sp>
       <p:sp>
         <p:nvSpPr>
-          <p:cNvPr id="6" name="ablation-note-1"/>
+          <p:cNvPr id="8" name="ablation-note-1"/>
           <p:cNvSpPr/>
           <p:nvPr/>
         </p:nvSpPr>
@@ -6726,7 +6410,7 @@
       </p:sp>
       <p:sp>
         <p:nvSpPr>
-          <p:cNvPr id="7" name="Text 4"/>
+          <p:cNvPr id="9" name="Text 6"/>
           <p:cNvSpPr txBox="1"/>
           <p:nvPr/>
         </p:nvSpPr>
@@ -6782,7 +6466,7 @@
       </p:sp>
       <p:sp>
         <p:nvSpPr>
-          <p:cNvPr id="8" name="ablation-note-2"/>
+          <p:cNvPr id="10" name="ablation-note-2"/>
           <p:cNvSpPr/>
           <p:nvPr/>
         </p:nvSpPr>
@@ -6809,7 +6493,7 @@
       </p:sp>
       <p:sp>
         <p:nvSpPr>
-          <p:cNvPr id="9" name="Text 6"/>
+          <p:cNvPr id="11" name="Text 8"/>
           <p:cNvSpPr txBox="1"/>
           <p:nvPr/>
         </p:nvSpPr>
@@ -6865,7 +6549,7 @@
       </p:sp>
       <p:sp>
         <p:nvSpPr>
-          <p:cNvPr id="10" name="Text 7"/>
+          <p:cNvPr id="12" name="Text 9"/>
           <p:cNvSpPr txBox="1"/>
           <p:nvPr/>
         </p:nvSpPr>
@@ -7004,42 +6688,116 @@
                   <a:schemeClr val="tx1"/>
                 </a:solidFill>
               </a:rPr>
-              <a:t>Fix the cause, not the payoff</a:t>
+              <a:t>Repair the channel and colluders follow the rule</a:t>
             </a:r>
             <a:endParaRPr lang="en-US" sz="3400" dirty="0"/>
           </a:p>
         </p:txBody>
       </p:sp>
-      <p:graphicFrame>
-        <p:nvGraphicFramePr>
-          <p:cNvPr id="3" name="Chart 0" descr=""/>
-          <p:cNvGraphicFramePr/>
-          <p:nvPr/>
-        </p:nvGraphicFramePr>
-        <p:xfrm>
-          <a:off x="457200" y="1234440"/>
-          <a:ext cx="6675120" cy="4572000"/>
-        </p:xfrm>
-        <a:graphic xmlns:a="http://schemas.openxmlformats.org/drawingml/2006/main">
-          <a:graphicData uri="http://schemas.openxmlformats.org/drawingml/2006/chart">
-            <c:chart xmlns:c="http://schemas.openxmlformats.org/drawingml/2006/chart" r:id="rId1"/>
-          </a:graphicData>
-        </a:graphic>
-      </p:graphicFrame>
-      <p:sp>
-        <p:nvSpPr>
-          <p:cNvPr id="4" name="repair-card"/>
+      <p:sp>
+        <p:nvSpPr>
+          <p:cNvPr id="3" name="tag-C4"/>
           <p:cNvSpPr/>
           <p:nvPr/>
         </p:nvSpPr>
         <p:spPr>
           <a:xfrm>
-            <a:off x="7406640" y="1325880"/>
-            <a:ext cx="4206240" cy="4480560"/>
+            <a:off x="320040" y="109728"/>
+            <a:ext cx="566928" cy="310896"/>
           </a:xfrm>
           <a:prstGeom prst="roundRect">
             <a:avLst>
-              <a:gd name="adj" fmla="val 3913"/>
+              <a:gd name="adj" fmla="val 23529"/>
+            </a:avLst>
+          </a:prstGeom>
+          <a:solidFill>
+            <a:srgbClr val="E8615E"/>
+          </a:solidFill>
+          <a:ln w="12700">
+            <a:solidFill>
+              <a:srgbClr val="E8615E"/>
+            </a:solidFill>
+            <a:prstDash val="solid"/>
+          </a:ln>
+        </p:spPr>
+      </p:sp>
+      <p:sp>
+        <p:nvSpPr>
+          <p:cNvPr id="4" name="Text 2"/>
+          <p:cNvSpPr txBox="1"/>
+          <p:nvPr/>
+        </p:nvSpPr>
+        <p:spPr>
+          <a:xfrm>
+            <a:off x="320040" y="109728"/>
+            <a:ext cx="566928" cy="310896"/>
+          </a:xfrm>
+          <a:prstGeom prst="rect">
+            <a:avLst/>
+          </a:prstGeom>
+          <a:noFill/>
+          <a:ln/>
+        </p:spPr>
+        <p:txBody>
+          <a:bodyPr wrap="square" lIns="0" tIns="0" rIns="0" bIns="0" rtlCol="0" anchor="ctr"/>
+          <a:lstStyle/>
+          <a:p>
+            <a:pPr algn="ctr" indent="0" marL="0">
+              <a:buNone/>
+            </a:pPr>
+            <a:r>
+              <a:rPr lang="en-US" sz="1300" b="1" dirty="0">
+                <a:solidFill>
+                  <a:srgbClr val="FFFFFF"/>
+                </a:solidFill>
+                <a:latin typeface="Arial" pitchFamily="34" charset="0"/>
+                <a:ea typeface="Arial" pitchFamily="34" charset="-122"/>
+                <a:cs typeface="Arial" pitchFamily="34" charset="-120"/>
+              </a:rPr>
+              <a:t>C4</a:t>
+            </a:r>
+            <a:endParaRPr lang="en-US" sz="1300" dirty="0"/>
+          </a:p>
+        </p:txBody>
+      </p:sp>
+      <p:pic>
+        <p:nvPicPr>
+          <p:cNvPr id="5" name="Image 0" descr="/home/user/Research/joshua/collusion/joint-task-collusion/reports/sticky-collusion/figures/fig_repair_bars.png">    </p:cNvPr>
+          <p:cNvPicPr>
+            <a:picLocks noChangeAspect="1"/>
+          </p:cNvPicPr>
+          <p:nvPr/>
+        </p:nvPicPr>
+        <p:blipFill>
+          <a:blip r:embed="rId1"/>
+          <a:stretch>
+            <a:fillRect/>
+          </a:stretch>
+        </p:blipFill>
+        <p:spPr>
+          <a:xfrm>
+            <a:off x="548640" y="1325880"/>
+            <a:ext cx="5760720" cy="3840480"/>
+          </a:xfrm>
+          <a:prstGeom prst="rect">
+            <a:avLst/>
+          </a:prstGeom>
+        </p:spPr>
+      </p:pic>
+      <p:sp>
+        <p:nvSpPr>
+          <p:cNvPr id="6" name="repair-card"/>
+          <p:cNvSpPr/>
+          <p:nvPr/>
+        </p:nvSpPr>
+        <p:spPr>
+          <a:xfrm>
+            <a:off x="6766560" y="1325880"/>
+            <a:ext cx="4846320" cy="4480560"/>
+          </a:xfrm>
+          <a:prstGeom prst="roundRect">
+            <a:avLst>
+              <a:gd name="adj" fmla="val 3673"/>
             </a:avLst>
           </a:prstGeom>
           <a:solidFill>
@@ -7055,13 +6813,13 @@
       </p:sp>
       <p:sp>
         <p:nvSpPr>
-          <p:cNvPr id="5" name="repair-icon"/>
+          <p:cNvPr id="7" name="repair-icon"/>
           <p:cNvSpPr/>
           <p:nvPr/>
         </p:nvSpPr>
         <p:spPr>
           <a:xfrm>
-            <a:off x="7680960" y="1554480"/>
+            <a:off x="7040880" y="1554480"/>
             <a:ext cx="731520" cy="731520"/>
           </a:xfrm>
           <a:prstGeom prst="ellipse">
@@ -7080,7 +6838,7 @@
       </p:sp>
       <p:pic>
         <p:nvPicPr>
-          <p:cNvPr id="6" name="Image 0" descr="preencoded.png">    </p:cNvPr>
+          <p:cNvPr id="8" name="Image 1" descr="preencoded.png">    </p:cNvPr>
           <p:cNvPicPr>
             <a:picLocks noChangeAspect="1"/>
           </p:cNvPicPr>
@@ -7094,7 +6852,7 @@
         </p:blipFill>
         <p:spPr>
           <a:xfrm>
-            <a:off x="7856525" y="1730045"/>
+            <a:off x="7216445" y="1730045"/>
             <a:ext cx="380390" cy="380390"/>
           </a:xfrm>
           <a:prstGeom prst="rect">
@@ -7104,14 +6862,14 @@
       </p:pic>
       <p:sp>
         <p:nvSpPr>
-          <p:cNvPr id="7" name="Text 3"/>
+          <p:cNvPr id="9" name="Text 5"/>
           <p:cNvSpPr txBox="1"/>
           <p:nvPr/>
         </p:nvSpPr>
         <p:spPr>
           <a:xfrm>
-            <a:off x="8595360" y="1600200"/>
-            <a:ext cx="2834640" cy="640080"/>
+            <a:off x="7955280" y="1600200"/>
+            <a:ext cx="3474720" cy="640080"/>
           </a:xfrm>
           <a:prstGeom prst="rect">
             <a:avLst/>
@@ -7135,7 +6893,7 @@
                 <a:ea typeface="Arial" pitchFamily="34" charset="-122"/>
                 <a:cs typeface="Arial" pitchFamily="34" charset="-120"/>
               </a:rPr>
-              <a:t>Repair the channel</a:t>
+              <a:t>Remove the cause</a:t>
             </a:r>
             <a:endParaRPr lang="en-US" sz="2000" dirty="0"/>
           </a:p>
@@ -7143,14 +6901,14 @@
       </p:sp>
       <p:sp>
         <p:nvSpPr>
-          <p:cNvPr id="8" name="Text 4"/>
+          <p:cNvPr id="10" name="Text 6"/>
           <p:cNvSpPr txBox="1"/>
           <p:nvPr/>
         </p:nvSpPr>
         <p:spPr>
           <a:xfrm>
-            <a:off x="7680960" y="2423160"/>
-            <a:ext cx="3703320" cy="822960"/>
+            <a:off x="7040880" y="2423160"/>
+            <a:ext cx="4343400" cy="822960"/>
           </a:xfrm>
           <a:prstGeom prst="rect">
             <a:avLst/>
@@ -7174,7 +6932,7 @@
                 <a:ea typeface="Arial" pitchFamily="34" charset="-122"/>
                 <a:cs typeface="Arial" pitchFamily="34" charset="-120"/>
               </a:rPr>
-              <a:t>Full logs now fit; Bob's work is secretly made wrong. Planted bad work accepted:</a:t>
+              <a:t>Full logs now fit, and Bob's work is secretly made wrong for 3 episodes. Planted faulty work accepted:</a:t>
             </a:r>
             <a:endParaRPr lang="en-US" sz="1400" dirty="0"/>
           </a:p>
@@ -7182,14 +6940,14 @@
       </p:sp>
       <p:sp>
         <p:nvSpPr>
-          <p:cNvPr id="9" name="Text 5"/>
+          <p:cNvPr id="11" name="Text 7"/>
           <p:cNvSpPr txBox="1"/>
           <p:nvPr/>
         </p:nvSpPr>
         <p:spPr>
           <a:xfrm>
-            <a:off x="9418320" y="3246120"/>
-            <a:ext cx="2011680" cy="320040"/>
+            <a:off x="9144000" y="3246120"/>
+            <a:ext cx="2240280" cy="320040"/>
           </a:xfrm>
           <a:prstGeom prst="rect">
             <a:avLst/>
@@ -7221,14 +6979,14 @@
       </p:sp>
       <p:sp>
         <p:nvSpPr>
-          <p:cNvPr id="10" name="Text 6"/>
+          <p:cNvPr id="12" name="Text 8"/>
           <p:cNvSpPr txBox="1"/>
           <p:nvPr/>
         </p:nvSpPr>
         <p:spPr>
           <a:xfrm>
-            <a:off x="7680960" y="3566160"/>
-            <a:ext cx="1737360" cy="411480"/>
+            <a:off x="7040880" y="3566160"/>
+            <a:ext cx="2011680" cy="411480"/>
           </a:xfrm>
           <a:prstGeom prst="rect">
             <a:avLst/>
@@ -7260,14 +7018,14 @@
       </p:sp>
       <p:sp>
         <p:nvSpPr>
-          <p:cNvPr id="11" name="Text 7"/>
+          <p:cNvPr id="13" name="Text 9"/>
           <p:cNvSpPr txBox="1"/>
           <p:nvPr/>
         </p:nvSpPr>
         <p:spPr>
           <a:xfrm>
-            <a:off x="9418320" y="3566160"/>
-            <a:ext cx="2011680" cy="411480"/>
+            <a:off x="9144000" y="3566160"/>
+            <a:ext cx="2240280" cy="411480"/>
           </a:xfrm>
           <a:prstGeom prst="rect">
             <a:avLst/>
@@ -7299,14 +7057,14 @@
       </p:sp>
       <p:sp>
         <p:nvSpPr>
-          <p:cNvPr id="12" name="Text 8"/>
+          <p:cNvPr id="14" name="Text 10"/>
           <p:cNvSpPr txBox="1"/>
           <p:nvPr/>
         </p:nvSpPr>
         <p:spPr>
           <a:xfrm>
-            <a:off x="7680960" y="4023360"/>
-            <a:ext cx="1737360" cy="411480"/>
+            <a:off x="7040880" y="4023360"/>
+            <a:ext cx="2011680" cy="411480"/>
           </a:xfrm>
           <a:prstGeom prst="rect">
             <a:avLst/>
@@ -7338,14 +7096,14 @@
       </p:sp>
       <p:sp>
         <p:nvSpPr>
-          <p:cNvPr id="13" name="Text 9"/>
+          <p:cNvPr id="15" name="Text 11"/>
           <p:cNvSpPr txBox="1"/>
           <p:nvPr/>
         </p:nvSpPr>
         <p:spPr>
           <a:xfrm>
-            <a:off x="9418320" y="4023360"/>
-            <a:ext cx="2011680" cy="411480"/>
+            <a:off x="9144000" y="4023360"/>
+            <a:ext cx="2240280" cy="411480"/>
           </a:xfrm>
           <a:prstGeom prst="rect">
             <a:avLst/>
@@ -7377,14 +7135,14 @@
       </p:sp>
       <p:sp>
         <p:nvSpPr>
-          <p:cNvPr id="14" name="Text 10"/>
+          <p:cNvPr id="16" name="Text 12"/>
           <p:cNvSpPr txBox="1"/>
           <p:nvPr/>
         </p:nvSpPr>
         <p:spPr>
           <a:xfrm>
-            <a:off x="7680960" y="4480560"/>
-            <a:ext cx="1737360" cy="411480"/>
+            <a:off x="7040880" y="4480560"/>
+            <a:ext cx="2011680" cy="411480"/>
           </a:xfrm>
           <a:prstGeom prst="rect">
             <a:avLst/>
@@ -7416,14 +7174,14 @@
       </p:sp>
       <p:sp>
         <p:nvSpPr>
-          <p:cNvPr id="15" name="Text 11"/>
+          <p:cNvPr id="17" name="Text 13"/>
           <p:cNvSpPr txBox="1"/>
           <p:nvPr/>
         </p:nvSpPr>
         <p:spPr>
           <a:xfrm>
-            <a:off x="9418320" y="4480560"/>
-            <a:ext cx="2011680" cy="411480"/>
+            <a:off x="9144000" y="4480560"/>
+            <a:ext cx="2240280" cy="411480"/>
           </a:xfrm>
           <a:prstGeom prst="rect">
             <a:avLst/>
@@ -7455,14 +7213,14 @@
       </p:sp>
       <p:sp>
         <p:nvSpPr>
-          <p:cNvPr id="16" name="Text 12"/>
+          <p:cNvPr id="18" name="Text 14"/>
           <p:cNvSpPr txBox="1"/>
           <p:nvPr/>
         </p:nvSpPr>
         <p:spPr>
           <a:xfrm>
-            <a:off x="7680960" y="4983480"/>
-            <a:ext cx="3749040" cy="731520"/>
+            <a:off x="7040880" y="4937760"/>
+            <a:ext cx="4343400" cy="777240"/>
           </a:xfrm>
           <a:prstGeom prst="rect">
             <a:avLst/>
@@ -7486,7 +7244,7 @@
                 <a:ea typeface="Arial" pitchFamily="34" charset="-122"/>
                 <a:cs typeface="Arial" pitchFamily="34" charset="-120"/>
               </a:rPr>
-              <a:t>Colluders read the full log and catch the bug, as fresh agents do. No monitor needed.</a:t>
+              <a:t>Colluders read the full log and catch the bug, as fresh agents do. Unlike the penalty and audit (C1), no monitor is needed.</a:t>
             </a:r>
             <a:endParaRPr lang="en-US" sz="1400" dirty="0"/>
           </a:p>
@@ -7703,7 +7461,7 @@
                 <a:ea typeface="Arial" pitchFamily="34" charset="-122"/>
                 <a:cs typeface="Arial" pitchFamily="34" charset="-120"/>
               </a:rPr>
-              <a:t>One environment. </a:t>
+              <a:t>One game. </a:t>
             </a:r>
             <a:pPr indent="0" marL="0">
               <a:spcAft>
@@ -7720,7 +7478,7 @@
                 <a:ea typeface="Arial" pitchFamily="34" charset="-122"/>
                 <a:cs typeface="Arial" pitchFamily="34" charset="-120"/>
               </a:rPr>
-              <a:t>Code-analysis tasks, 2 talk rounds, 5 episodes after the branch. Two market pilots gave no usable test: fresh firms priced above monopoly, and the double auction froze at its last price.</a:t>
+              <a:t>Code-analysis tasks, 2 talk rounds. On data-search tasks, a GPT-6-Luna pilot reproduced persistence through a silent stop and a swap, but not after a notice. Two market pilots gave no usable test.</a:t>
             </a:r>
             <a:endParaRPr lang="en-US" sz="1400" dirty="0"/>
           </a:p>
@@ -7779,7 +7537,7 @@
                 <a:ea typeface="Arial" pitchFamily="34" charset="-122"/>
                 <a:cs typeface="Arial" pitchFamily="34" charset="-120"/>
               </a:rPr>
-              <a:t>Selected histories. </a:t>
+              <a:t>Selected histories and ceilings. </a:t>
             </a:r>
             <a:pPr indent="0" marL="0">
               <a:spcAft>
@@ -7834,7 +7592,7 @@
                 <a:ea typeface="Arial" pitchFamily="34" charset="-122"/>
                 <a:cs typeface="Arial" pitchFamily="34" charset="-120"/>
               </a:rPr>
-              <a:t>Four cross-model pairings, reward on only; swaps are never announced; the told arm keeps the reward objective in the system prompt.</a:t>
+              <a:t>Cross-model swaps with the reward on only; two ablations (objective removed, swap announced) ran on GPT-6-Luna only.</a:t>
             </a:r>
             <a:endParaRPr lang="en-US" sz="1400" dirty="0"/>
           </a:p>
@@ -7960,7 +7718,7 @@
                 <a:ea typeface="Arial" pitchFamily="34" charset="-122"/>
                 <a:cs typeface="Arial" pitchFamily="34" charset="-120"/>
               </a:rPr>
-              <a:t>Test stickiness in price fixing, bid rigging and auditor capture with the same save-and-branch interventions.</a:t>
+              <a:t>Price fixing, market division, bid rigging, auditor capture, and coalitions in workplace tasks such as Colosseum.</a:t>
             </a:r>
             <a:endParaRPr lang="en-US" sz="1400" dirty="0"/>
           </a:p>
@@ -7998,45 +7756,7 @@
                 <a:ea typeface="Arial" pitchFamily="34" charset="-122"/>
                 <a:cs typeface="Arial" pitchFamily="34" charset="-120"/>
               </a:rPr>
-              <a:t>Use settings where fresh agents compete or follow a rule, such as an antitrust rule or more sellers than buyers, so persistence can be told apart from inertia.</a:t>
-            </a:r>
-            <a:endParaRPr lang="en-US" sz="1400" dirty="0"/>
-          </a:p>
-          <a:p>
-            <a:pPr marL="342900" indent="-342900">
-              <a:spcAft>
-                <a:spcPts val="800"/>
-              </a:spcAft>
-              <a:buSzPct val="100000"/>
-              <a:buChar char="•"/>
-            </a:pPr>
-            <a:r>
-              <a:rPr lang="en-US" sz="1400" b="1" dirty="0">
-                <a:solidFill>
-                  <a:srgbClr val="2B2A4C"/>
-                </a:solidFill>
-                <a:latin typeface="Arial" pitchFamily="34" charset="0"/>
-                <a:ea typeface="Arial" pitchFamily="34" charset="-122"/>
-                <a:cs typeface="Arial" pitchFamily="34" charset="-120"/>
-              </a:rPr>
-              <a:t>Memory. </a:t>
-            </a:r>
-            <a:pPr indent="0" marL="0">
-              <a:spcAft>
-                <a:spcPts val="800"/>
-              </a:spcAft>
-              <a:buNone/>
-            </a:pPr>
-            <a:r>
-              <a:rPr lang="en-US" sz="1400" dirty="0">
-                <a:solidFill>
-                  <a:srgbClr val="2B2A4C"/>
-                </a:solidFill>
-                <a:latin typeface="Arial" pitchFamily="34" charset="0"/>
-                <a:ea typeface="Arial" pitchFamily="34" charset="-122"/>
-                <a:cs typeface="Arial" pitchFamily="34" charset="-120"/>
-              </a:rPr>
-              <a:t>Run the memory-window pilot on all three models, with summarised memory and longer horizons.</a:t>
+              <a:t>Use settings where fresh agents have a clean default, so persistence can be told apart from inertia.</a:t>
             </a:r>
             <a:endParaRPr lang="en-US" sz="1400" dirty="0"/>
           </a:p>
@@ -8158,8 +7878,8 @@
         </p:nvSpPr>
         <p:spPr>
           <a:xfrm>
-            <a:off x="731520" y="1920240"/>
-            <a:ext cx="777240" cy="777240"/>
+            <a:off x="731520" y="1783080"/>
+            <a:ext cx="685800" cy="685800"/>
           </a:xfrm>
           <a:prstGeom prst="ellipse">
             <a:avLst/>
@@ -8191,8 +7911,8 @@
         </p:blipFill>
         <p:spPr>
           <a:xfrm>
-            <a:off x="918058" y="2106778"/>
-            <a:ext cx="404165" cy="404165"/>
+            <a:off x="896112" y="1947672"/>
+            <a:ext cx="356616" cy="356616"/>
           </a:xfrm>
           <a:prstGeom prst="rect">
             <a:avLst/>
@@ -8207,8 +7927,8 @@
         </p:nvSpPr>
         <p:spPr>
           <a:xfrm>
-            <a:off x="1783080" y="1828800"/>
-            <a:ext cx="6309360" cy="960120"/>
+            <a:off x="1691640" y="1673352"/>
+            <a:ext cx="6400800" cy="914400"/>
           </a:xfrm>
           <a:prstGeom prst="rect">
             <a:avLst/>
@@ -8224,7 +7944,7 @@
               <a:buNone/>
             </a:pPr>
             <a:r>
-              <a:rPr lang="en-US" sz="2100" dirty="0">
+              <a:rPr lang="en-US" sz="1900" dirty="0">
                 <a:solidFill>
                   <a:srgbClr val="FFFFFF"/>
                 </a:solidFill>
@@ -8232,9 +7952,9 @@
                 <a:ea typeface="Arial" pitchFamily="34" charset="-122"/>
                 <a:cs typeface="Arial" pitchFamily="34" charset="-120"/>
               </a:rPr>
-              <a:t>Removing the incentive does not undo it</a:t>
+              <a:t>Removing or penalising the incentive does not reliably undo it</a:t>
             </a:r>
-            <a:endParaRPr lang="en-US" sz="2100" dirty="0"/>
+            <a:endParaRPr lang="en-US" sz="1900" dirty="0"/>
           </a:p>
         </p:txBody>
       </p:sp>
@@ -8246,8 +7966,8 @@
         </p:nvSpPr>
         <p:spPr>
           <a:xfrm>
-            <a:off x="731520" y="3108960"/>
-            <a:ext cx="777240" cy="777240"/>
+            <a:off x="731520" y="2697480"/>
+            <a:ext cx="685800" cy="685800"/>
           </a:xfrm>
           <a:prstGeom prst="ellipse">
             <a:avLst/>
@@ -8279,8 +7999,8 @@
         </p:blipFill>
         <p:spPr>
           <a:xfrm>
-            <a:off x="918058" y="3295498"/>
-            <a:ext cx="404165" cy="404165"/>
+            <a:off x="896112" y="2862072"/>
+            <a:ext cx="356616" cy="356616"/>
           </a:xfrm>
           <a:prstGeom prst="rect">
             <a:avLst/>
@@ -8295,8 +8015,8 @@
         </p:nvSpPr>
         <p:spPr>
           <a:xfrm>
-            <a:off x="1783080" y="3017520"/>
-            <a:ext cx="6309360" cy="960120"/>
+            <a:off x="1691640" y="2587752"/>
+            <a:ext cx="6400800" cy="914400"/>
           </a:xfrm>
           <a:prstGeom prst="rect">
             <a:avLst/>
@@ -8312,7 +8032,7 @@
               <a:buNone/>
             </a:pPr>
             <a:r>
-              <a:rPr lang="en-US" sz="2100" dirty="0">
+              <a:rPr lang="en-US" sz="1900" dirty="0">
                 <a:solidFill>
                   <a:srgbClr val="FFFFFF"/>
                 </a:solidFill>
@@ -8320,9 +8040,9 @@
                 <a:ea typeface="Arial" pitchFamily="34" charset="-122"/>
                 <a:cs typeface="Arial" pitchFamily="34" charset="-120"/>
               </a:rPr>
-              <a:t>Replacing a colluder breaks the pair, not the habit; with the reward on, it re-forms, also with another model</a:t>
+              <a:t>Replacing a colluder breaks the pair, not the habit; with the reward on, it re-forms, even with another model</a:t>
             </a:r>
-            <a:endParaRPr lang="en-US" sz="2100" dirty="0"/>
+            <a:endParaRPr lang="en-US" sz="1900" dirty="0"/>
           </a:p>
         </p:txBody>
       </p:sp>
@@ -8334,8 +8054,8 @@
         </p:nvSpPr>
         <p:spPr>
           <a:xfrm>
-            <a:off x="731520" y="4297680"/>
-            <a:ext cx="777240" cy="777240"/>
+            <a:off x="731520" y="3611880"/>
+            <a:ext cx="685800" cy="685800"/>
           </a:xfrm>
           <a:prstGeom prst="ellipse">
             <a:avLst/>
@@ -8367,8 +8087,8 @@
         </p:blipFill>
         <p:spPr>
           <a:xfrm>
-            <a:off x="918058" y="4484218"/>
-            <a:ext cx="404165" cy="404165"/>
+            <a:off x="896112" y="3776472"/>
+            <a:ext cx="356616" cy="356616"/>
           </a:xfrm>
           <a:prstGeom prst="rect">
             <a:avLst/>
@@ -8383,8 +8103,8 @@
         </p:nvSpPr>
         <p:spPr>
           <a:xfrm>
-            <a:off x="1783080" y="4206240"/>
-            <a:ext cx="6309360" cy="960120"/>
+            <a:off x="1691640" y="3502152"/>
+            <a:ext cx="6400800" cy="914400"/>
           </a:xfrm>
           <a:prstGeom prst="rect">
             <a:avLst/>
@@ -8400,7 +8120,7 @@
               <a:buNone/>
             </a:pPr>
             <a:r>
-              <a:rPr lang="en-US" sz="2100" dirty="0">
+              <a:rPr lang="en-US" sz="1900" dirty="0">
                 <a:solidFill>
                   <a:srgbClr val="FFFFFF"/>
                 </a:solidFill>
@@ -8408,15 +8128,103 @@
                 <a:ea typeface="Arial" pitchFamily="34" charset="-122"/>
                 <a:cs typeface="Arial" pitchFamily="34" charset="-120"/>
               </a:rPr>
-              <a:t>It ends when the memory or the cause goes</a:t>
+              <a:t>The agents' memory carries it: wiping ends it, but part of it often keeps it going</a:t>
             </a:r>
-            <a:endParaRPr lang="en-US" sz="2100" dirty="0"/>
+            <a:endParaRPr lang="en-US" sz="1900" dirty="0"/>
           </a:p>
         </p:txBody>
       </p:sp>
       <p:sp>
         <p:nvSpPr>
-          <p:cNvPr id="12" name="Text 7"/>
+          <p:cNvPr id="12" name="take-3"/>
+          <p:cNvSpPr/>
+          <p:nvPr/>
+        </p:nvSpPr>
+        <p:spPr>
+          <a:xfrm>
+            <a:off x="731520" y="4526280"/>
+            <a:ext cx="685800" cy="685800"/>
+          </a:xfrm>
+          <a:prstGeom prst="ellipse">
+            <a:avLst/>
+          </a:prstGeom>
+          <a:solidFill>
+            <a:srgbClr val="E8615E"/>
+          </a:solidFill>
+          <a:ln w="12700">
+            <a:solidFill>
+              <a:srgbClr val="E8615E"/>
+            </a:solidFill>
+            <a:prstDash val="solid"/>
+          </a:ln>
+        </p:spPr>
+      </p:sp>
+      <p:pic>
+        <p:nvPicPr>
+          <p:cNvPr id="13" name="Image 3" descr="preencoded.png">    </p:cNvPr>
+          <p:cNvPicPr>
+            <a:picLocks noChangeAspect="1"/>
+          </p:cNvPicPr>
+          <p:nvPr/>
+        </p:nvPicPr>
+        <p:blipFill>
+          <a:blip r:embed="rId4"/>
+          <a:stretch>
+            <a:fillRect/>
+          </a:stretch>
+        </p:blipFill>
+        <p:spPr>
+          <a:xfrm>
+            <a:off x="896112" y="4690872"/>
+            <a:ext cx="356616" cy="356616"/>
+          </a:xfrm>
+          <a:prstGeom prst="rect">
+            <a:avLst/>
+          </a:prstGeom>
+        </p:spPr>
+      </p:pic>
+      <p:sp>
+        <p:nvSpPr>
+          <p:cNvPr id="14" name="Text 8"/>
+          <p:cNvSpPr txBox="1"/>
+          <p:nvPr/>
+        </p:nvSpPr>
+        <p:spPr>
+          <a:xfrm>
+            <a:off x="1691640" y="4416552"/>
+            <a:ext cx="6400800" cy="914400"/>
+          </a:xfrm>
+          <a:prstGeom prst="rect">
+            <a:avLst/>
+          </a:prstGeom>
+          <a:noFill/>
+          <a:ln/>
+        </p:spPr>
+        <p:txBody>
+          <a:bodyPr wrap="square" lIns="0" tIns="0" rIns="0" bIns="0" rtlCol="0" anchor="ctr"/>
+          <a:lstStyle/>
+          <a:p>
+            <a:pPr indent="0" marL="0">
+              <a:buNone/>
+            </a:pPr>
+            <a:r>
+              <a:rPr lang="en-US" sz="1900" dirty="0">
+                <a:solidFill>
+                  <a:srgbClr val="FFFFFF"/>
+                </a:solidFill>
+                <a:latin typeface="Arial" pitchFamily="34" charset="0"/>
+                <a:ea typeface="Arial" pitchFamily="34" charset="-122"/>
+                <a:cs typeface="Arial" pitchFamily="34" charset="-120"/>
+              </a:rPr>
+              <a:t>Removing its cause ends it, with no monitor needed</a:t>
+            </a:r>
+            <a:endParaRPr lang="en-US" sz="1900" dirty="0"/>
+          </a:p>
+        </p:txBody>
+      </p:sp>
+      <p:sp>
+        <p:nvSpPr>
+          <p:cNvPr id="15" name="Text 9"/>
           <p:cNvSpPr txBox="1"/>
           <p:nvPr/>
         </p:nvSpPr>
@@ -8447,7 +8255,7 @@
                 <a:ea typeface="Arial" pitchFamily="34" charset="-122"/>
                 <a:cs typeface="Arial" pitchFamily="34" charset="-120"/>
               </a:rPr>
-              <a:t>Resetting incentives or replacing offenders does not end LLM collusion: oversight has to check behaviour and memory too.</a:t>
+              <a:t>Neither resetting incentives nor replacing an offender removes the colluding behaviour: oversight has to check behaviour and memory too.</a:t>
             </a:r>
             <a:endParaRPr lang="en-US" sz="1600" dirty="0"/>
           </a:p>
@@ -8455,7 +8263,7 @@
       </p:sp>
       <p:sp>
         <p:nvSpPr>
-          <p:cNvPr id="13" name="Text 8"/>
+          <p:cNvPr id="16" name="Text 10"/>
           <p:cNvSpPr txBox="1"/>
           <p:nvPr/>
         </p:nvSpPr>
@@ -8494,31 +8302,7 @@
       </p:sp>
       <p:pic>
         <p:nvPicPr>
-          <p:cNvPr id="14" name="Image 3" descr="preencoded.png">    </p:cNvPr>
-          <p:cNvPicPr>
-            <a:picLocks noChangeAspect="1"/>
-          </p:cNvPicPr>
-          <p:nvPr/>
-        </p:nvPicPr>
-        <p:blipFill>
-          <a:blip r:embed="rId4"/>
-          <a:stretch>
-            <a:fillRect/>
-          </a:stretch>
-        </p:blipFill>
-        <p:spPr>
-          <a:xfrm>
-            <a:off x="8229600" y="2194560"/>
-            <a:ext cx="1600200" cy="1920240"/>
-          </a:xfrm>
-          <a:prstGeom prst="rect">
-            <a:avLst/>
-          </a:prstGeom>
-        </p:spPr>
-      </p:pic>
-      <p:pic>
-        <p:nvPicPr>
-          <p:cNvPr id="15" name="Image 4" descr="preencoded.png">    </p:cNvPr>
+          <p:cNvPr id="17" name="Image 4" descr="preencoded.png">    </p:cNvPr>
           <p:cNvPicPr>
             <a:picLocks noChangeAspect="1"/>
           </p:cNvPicPr>
@@ -8532,7 +8316,7 @@
         </p:blipFill>
         <p:spPr>
           <a:xfrm>
-            <a:off x="9921240" y="2194560"/>
+            <a:off x="8229600" y="2194560"/>
             <a:ext cx="1600200" cy="1920240"/>
           </a:xfrm>
           <a:prstGeom prst="rect">
@@ -8542,7 +8326,7 @@
       </p:pic>
       <p:pic>
         <p:nvPicPr>
-          <p:cNvPr id="16" name="Image 5" descr="preencoded.png">    </p:cNvPr>
+          <p:cNvPr id="18" name="Image 5" descr="preencoded.png">    </p:cNvPr>
           <p:cNvPicPr>
             <a:picLocks noChangeAspect="1"/>
           </p:cNvPicPr>
@@ -8550,6 +8334,30 @@
         </p:nvPicPr>
         <p:blipFill>
           <a:blip r:embed="rId6"/>
+          <a:stretch>
+            <a:fillRect/>
+          </a:stretch>
+        </p:blipFill>
+        <p:spPr>
+          <a:xfrm>
+            <a:off x="9921240" y="2194560"/>
+            <a:ext cx="1600200" cy="1920240"/>
+          </a:xfrm>
+          <a:prstGeom prst="rect">
+            <a:avLst/>
+          </a:prstGeom>
+        </p:spPr>
+      </p:pic>
+      <p:pic>
+        <p:nvPicPr>
+          <p:cNvPr id="19" name="Image 6" descr="preencoded.png">    </p:cNvPr>
+          <p:cNvPicPr>
+            <a:picLocks noChangeAspect="1"/>
+          </p:cNvPicPr>
+          <p:nvPr/>
+        </p:nvPicPr>
+        <p:blipFill>
+          <a:blip r:embed="rId7"/>
           <a:stretch>
             <a:fillRect/>
           </a:stretch>
@@ -8655,7 +8463,7 @@
                 <a:gridCol w="914400"/>
                 <a:gridCol w="914400"/>
               </a:tblGrid>
-              <a:tr h="320040">
+              <a:tr h="274320">
                 <a:tc>
                   <a:txBody>
                     <a:bodyPr/>
@@ -8665,7 +8473,7 @@
                         <a:buNone/>
                       </a:pPr>
                       <a:r>
-                        <a:rPr lang="en-US" sz="1100" b="1" dirty="0">
+                        <a:rPr lang="en-US" sz="1000" b="1" dirty="0">
                           <a:solidFill>
                             <a:srgbClr val="FFFFFF"/>
                           </a:solidFill>
@@ -8675,14 +8483,14 @@
                         </a:rPr>
                         <a:t>Runs / episodes</a:t>
                       </a:r>
-                      <a:endParaRPr lang="en-US" sz="1100" dirty="0">
+                      <a:endParaRPr lang="en-US" sz="1000" dirty="0">
                         <a:latin typeface="Arial" charset="0"/>
                         <a:ea typeface="Arial" charset="0"/>
                         <a:cs typeface="Arial" charset="0"/>
                       </a:endParaRPr>
                     </a:p>
                   </a:txBody>
-                  <a:tcPr marL="45720" marR="45720" marT="45720" marB="45720" anchor="ctr">
+                  <a:tcPr marL="36576" marR="36576" marT="36576" marB="36576" anchor="ctr">
                     <a:lnL w="6350" cap="flat" cmpd="sng" algn="ctr">
                       <a:solidFill>
                         <a:srgbClr val="E1E2E8"/>
@@ -8733,7 +8541,7 @@
                         <a:buNone/>
                       </a:pPr>
                       <a:r>
-                        <a:rPr lang="en-US" sz="1100" b="1" dirty="0">
+                        <a:rPr lang="en-US" sz="1000" b="1" dirty="0">
                           <a:solidFill>
                             <a:srgbClr val="FFFFFF"/>
                           </a:solidFill>
@@ -8743,14 +8551,14 @@
                         </a:rPr>
                         <a:t>GPT</a:t>
                       </a:r>
-                      <a:endParaRPr lang="en-US" sz="1100" dirty="0">
+                      <a:endParaRPr lang="en-US" sz="1000" dirty="0">
                         <a:latin typeface="Arial" charset="0"/>
                         <a:ea typeface="Arial" charset="0"/>
                         <a:cs typeface="Arial" charset="0"/>
                       </a:endParaRPr>
                     </a:p>
                   </a:txBody>
-                  <a:tcPr marL="45720" marR="45720" marT="45720" marB="45720" anchor="ctr">
+                  <a:tcPr marL="36576" marR="36576" marT="36576" marB="36576" anchor="ctr">
                     <a:lnL w="6350" cap="flat" cmpd="sng" algn="ctr">
                       <a:solidFill>
                         <a:srgbClr val="E1E2E8"/>
@@ -8801,7 +8609,7 @@
                         <a:buNone/>
                       </a:pPr>
                       <a:r>
-                        <a:rPr lang="en-US" sz="1100" b="1" dirty="0">
+                        <a:rPr lang="en-US" sz="1000" b="1" dirty="0">
                           <a:solidFill>
                             <a:srgbClr val="FFFFFF"/>
                           </a:solidFill>
@@ -8811,14 +8619,14 @@
                         </a:rPr>
                         <a:t>DeepSeek</a:t>
                       </a:r>
-                      <a:endParaRPr lang="en-US" sz="1100" dirty="0">
+                      <a:endParaRPr lang="en-US" sz="1000" dirty="0">
                         <a:latin typeface="Arial" charset="0"/>
                         <a:ea typeface="Arial" charset="0"/>
                         <a:cs typeface="Arial" charset="0"/>
                       </a:endParaRPr>
                     </a:p>
                   </a:txBody>
-                  <a:tcPr marL="45720" marR="45720" marT="45720" marB="45720" anchor="ctr">
+                  <a:tcPr marL="36576" marR="36576" marT="36576" marB="36576" anchor="ctr">
                     <a:lnL w="6350" cap="flat" cmpd="sng" algn="ctr">
                       <a:solidFill>
                         <a:srgbClr val="E1E2E8"/>
@@ -8869,7 +8677,7 @@
                         <a:buNone/>
                       </a:pPr>
                       <a:r>
-                        <a:rPr lang="en-US" sz="1100" b="1" dirty="0">
+                        <a:rPr lang="en-US" sz="1000" b="1" dirty="0">
                           <a:solidFill>
                             <a:srgbClr val="FFFFFF"/>
                           </a:solidFill>
@@ -8879,14 +8687,14 @@
                         </a:rPr>
                         <a:t>Gemini</a:t>
                       </a:r>
-                      <a:endParaRPr lang="en-US" sz="1100" dirty="0">
+                      <a:endParaRPr lang="en-US" sz="1000" dirty="0">
                         <a:latin typeface="Arial" charset="0"/>
                         <a:ea typeface="Arial" charset="0"/>
                         <a:cs typeface="Arial" charset="0"/>
                       </a:endParaRPr>
                     </a:p>
                   </a:txBody>
-                  <a:tcPr marL="45720" marR="45720" marT="45720" marB="45720" anchor="ctr">
+                  <a:tcPr marL="36576" marR="36576" marT="36576" marB="36576" anchor="ctr">
                     <a:lnL w="6350" cap="flat" cmpd="sng" algn="ctr">
                       <a:solidFill>
                         <a:srgbClr val="E1E2E8"/>
@@ -8929,7 +8737,7 @@
                   </a:tcPr>
                 </a:tc>
               </a:tr>
-              <a:tr h="320040">
+              <a:tr h="274320">
                 <a:tc>
                   <a:txBody>
                     <a:bodyPr/>
@@ -8939,7 +8747,7 @@
                         <a:buNone/>
                       </a:pPr>
                       <a:r>
-                        <a:rPr lang="en-US" sz="1100" dirty="0">
+                        <a:rPr lang="en-US" sz="1000" dirty="0">
                           <a:solidFill>
                             <a:srgbClr val="2B2A4C"/>
                           </a:solidFill>
@@ -8949,14 +8757,14 @@
                         </a:rPr>
                         <a:t>Saved histories (build episodes)</a:t>
                       </a:r>
-                      <a:endParaRPr lang="en-US" sz="1100" dirty="0">
+                      <a:endParaRPr lang="en-US" sz="1000" dirty="0">
                         <a:latin typeface="Arial" charset="0"/>
                         <a:ea typeface="Arial" charset="0"/>
                         <a:cs typeface="Arial" charset="0"/>
                       </a:endParaRPr>
                     </a:p>
                   </a:txBody>
-                  <a:tcPr marL="45720" marR="45720" marT="45720" marB="45720" anchor="ctr">
+                  <a:tcPr marL="36576" marR="36576" marT="36576" marB="36576" anchor="ctr">
                     <a:lnL w="6350" cap="flat" cmpd="sng" algn="ctr">
                       <a:solidFill>
                         <a:srgbClr val="E1E2E8"/>
@@ -9007,7 +8815,7 @@
                         <a:buNone/>
                       </a:pPr>
                       <a:r>
-                        <a:rPr lang="en-US" sz="1100" dirty="0">
+                        <a:rPr lang="en-US" sz="1000" dirty="0">
                           <a:solidFill>
                             <a:srgbClr val="2B2A4C"/>
                           </a:solidFill>
@@ -9017,14 +8825,14 @@
                         </a:rPr>
                         <a:t>15 / 90</a:t>
                       </a:r>
-                      <a:endParaRPr lang="en-US" sz="1100" dirty="0">
+                      <a:endParaRPr lang="en-US" sz="1000" dirty="0">
                         <a:latin typeface="Arial" charset="0"/>
                         <a:ea typeface="Arial" charset="0"/>
                         <a:cs typeface="Arial" charset="0"/>
                       </a:endParaRPr>
                     </a:p>
                   </a:txBody>
-                  <a:tcPr marL="45720" marR="45720" marT="45720" marB="45720" anchor="ctr">
+                  <a:tcPr marL="36576" marR="36576" marT="36576" marB="36576" anchor="ctr">
                     <a:lnL w="6350" cap="flat" cmpd="sng" algn="ctr">
                       <a:solidFill>
                         <a:srgbClr val="E1E2E8"/>
@@ -9075,7 +8883,7 @@
                         <a:buNone/>
                       </a:pPr>
                       <a:r>
-                        <a:rPr lang="en-US" sz="1100" dirty="0">
+                        <a:rPr lang="en-US" sz="1000" dirty="0">
                           <a:solidFill>
                             <a:srgbClr val="2B2A4C"/>
                           </a:solidFill>
@@ -9085,14 +8893,14 @@
                         </a:rPr>
                         <a:t>15 / 46</a:t>
                       </a:r>
-                      <a:endParaRPr lang="en-US" sz="1100" dirty="0">
+                      <a:endParaRPr lang="en-US" sz="1000" dirty="0">
                         <a:latin typeface="Arial" charset="0"/>
                         <a:ea typeface="Arial" charset="0"/>
                         <a:cs typeface="Arial" charset="0"/>
                       </a:endParaRPr>
                     </a:p>
                   </a:txBody>
-                  <a:tcPr marL="45720" marR="45720" marT="45720" marB="45720" anchor="ctr">
+                  <a:tcPr marL="36576" marR="36576" marT="36576" marB="36576" anchor="ctr">
                     <a:lnL w="6350" cap="flat" cmpd="sng" algn="ctr">
                       <a:solidFill>
                         <a:srgbClr val="E1E2E8"/>
@@ -9143,7 +8951,7 @@
                         <a:buNone/>
                       </a:pPr>
                       <a:r>
-                        <a:rPr lang="en-US" sz="1100" dirty="0">
+                        <a:rPr lang="en-US" sz="1000" dirty="0">
                           <a:solidFill>
                             <a:srgbClr val="2B2A4C"/>
                           </a:solidFill>
@@ -9153,14 +8961,14 @@
                         </a:rPr>
                         <a:t>15 / 100</a:t>
                       </a:r>
-                      <a:endParaRPr lang="en-US" sz="1100" dirty="0">
+                      <a:endParaRPr lang="en-US" sz="1000" dirty="0">
                         <a:latin typeface="Arial" charset="0"/>
                         <a:ea typeface="Arial" charset="0"/>
                         <a:cs typeface="Arial" charset="0"/>
                       </a:endParaRPr>
                     </a:p>
                   </a:txBody>
-                  <a:tcPr marL="45720" marR="45720" marT="45720" marB="45720" anchor="ctr">
+                  <a:tcPr marL="36576" marR="36576" marT="36576" marB="36576" anchor="ctr">
                     <a:lnL w="6350" cap="flat" cmpd="sng" algn="ctr">
                       <a:solidFill>
                         <a:srgbClr val="E1E2E8"/>
@@ -9203,7 +9011,7 @@
                   </a:tcPr>
                 </a:tc>
               </a:tr>
-              <a:tr h="320040">
+              <a:tr h="274320">
                 <a:tc>
                   <a:txBody>
                     <a:bodyPr/>
@@ -9213,7 +9021,7 @@
                         <a:buNone/>
                       </a:pPr>
                       <a:r>
-                        <a:rPr lang="en-US" sz="1100" dirty="0">
+                        <a:rPr lang="en-US" sz="1000" dirty="0">
                           <a:solidFill>
                             <a:srgbClr val="2B2A4C"/>
                           </a:solidFill>
@@ -9223,14 +9031,14 @@
                         </a:rPr>
                         <a:t>Reward continues (control)</a:t>
                       </a:r>
-                      <a:endParaRPr lang="en-US" sz="1100" dirty="0">
+                      <a:endParaRPr lang="en-US" sz="1000" dirty="0">
                         <a:latin typeface="Arial" charset="0"/>
                         <a:ea typeface="Arial" charset="0"/>
                         <a:cs typeface="Arial" charset="0"/>
                       </a:endParaRPr>
                     </a:p>
                   </a:txBody>
-                  <a:tcPr marL="45720" marR="45720" marT="45720" marB="45720" anchor="ctr">
+                  <a:tcPr marL="36576" marR="36576" marT="36576" marB="36576" anchor="ctr">
                     <a:lnL w="6350" cap="flat" cmpd="sng" algn="ctr">
                       <a:solidFill>
                         <a:srgbClr val="E1E2E8"/>
@@ -9281,7 +9089,7 @@
                         <a:buNone/>
                       </a:pPr>
                       <a:r>
-                        <a:rPr lang="en-US" sz="1100" dirty="0">
+                        <a:rPr lang="en-US" sz="1000" dirty="0">
                           <a:solidFill>
                             <a:srgbClr val="2B2A4C"/>
                           </a:solidFill>
@@ -9291,14 +9099,14 @@
                         </a:rPr>
                         <a:t>15 / 59</a:t>
                       </a:r>
-                      <a:endParaRPr lang="en-US" sz="1100" dirty="0">
+                      <a:endParaRPr lang="en-US" sz="1000" dirty="0">
                         <a:latin typeface="Arial" charset="0"/>
                         <a:ea typeface="Arial" charset="0"/>
                         <a:cs typeface="Arial" charset="0"/>
                       </a:endParaRPr>
                     </a:p>
                   </a:txBody>
-                  <a:tcPr marL="45720" marR="45720" marT="45720" marB="45720" anchor="ctr">
+                  <a:tcPr marL="36576" marR="36576" marT="36576" marB="36576" anchor="ctr">
                     <a:lnL w="6350" cap="flat" cmpd="sng" algn="ctr">
                       <a:solidFill>
                         <a:srgbClr val="E1E2E8"/>
@@ -9349,7 +9157,7 @@
                         <a:buNone/>
                       </a:pPr>
                       <a:r>
-                        <a:rPr lang="en-US" sz="1100" dirty="0">
+                        <a:rPr lang="en-US" sz="1000" dirty="0">
                           <a:solidFill>
                             <a:srgbClr val="2B2A4C"/>
                           </a:solidFill>
@@ -9359,14 +9167,14 @@
                         </a:rPr>
                         <a:t>15 / 60</a:t>
                       </a:r>
-                      <a:endParaRPr lang="en-US" sz="1100" dirty="0">
+                      <a:endParaRPr lang="en-US" sz="1000" dirty="0">
                         <a:latin typeface="Arial" charset="0"/>
                         <a:ea typeface="Arial" charset="0"/>
                         <a:cs typeface="Arial" charset="0"/>
                       </a:endParaRPr>
                     </a:p>
                   </a:txBody>
-                  <a:tcPr marL="45720" marR="45720" marT="45720" marB="45720" anchor="ctr">
+                  <a:tcPr marL="36576" marR="36576" marT="36576" marB="36576" anchor="ctr">
                     <a:lnL w="6350" cap="flat" cmpd="sng" algn="ctr">
                       <a:solidFill>
                         <a:srgbClr val="E1E2E8"/>
@@ -9417,7 +9225,7 @@
                         <a:buNone/>
                       </a:pPr>
                       <a:r>
-                        <a:rPr lang="en-US" sz="1100" dirty="0">
+                        <a:rPr lang="en-US" sz="1000" dirty="0">
                           <a:solidFill>
                             <a:srgbClr val="2B2A4C"/>
                           </a:solidFill>
@@ -9427,14 +9235,14 @@
                         </a:rPr>
                         <a:t>15 / 59</a:t>
                       </a:r>
-                      <a:endParaRPr lang="en-US" sz="1100" dirty="0">
+                      <a:endParaRPr lang="en-US" sz="1000" dirty="0">
                         <a:latin typeface="Arial" charset="0"/>
                         <a:ea typeface="Arial" charset="0"/>
                         <a:cs typeface="Arial" charset="0"/>
                       </a:endParaRPr>
                     </a:p>
                   </a:txBody>
-                  <a:tcPr marL="45720" marR="45720" marT="45720" marB="45720" anchor="ctr">
+                  <a:tcPr marL="36576" marR="36576" marT="36576" marB="36576" anchor="ctr">
                     <a:lnL w="6350" cap="flat" cmpd="sng" algn="ctr">
                       <a:solidFill>
                         <a:srgbClr val="E1E2E8"/>
@@ -9477,7 +9285,7 @@
                   </a:tcPr>
                 </a:tc>
               </a:tr>
-              <a:tr h="320040">
+              <a:tr h="274320">
                 <a:tc>
                   <a:txBody>
                     <a:bodyPr/>
@@ -9487,7 +9295,7 @@
                         <a:buNone/>
                       </a:pPr>
                       <a:r>
-                        <a:rPr lang="en-US" sz="1100" dirty="0">
+                        <a:rPr lang="en-US" sz="1000" dirty="0">
                           <a:solidFill>
                             <a:srgbClr val="2B2A4C"/>
                           </a:solidFill>
@@ -9497,14 +9305,14 @@
                         </a:rPr>
                         <a:t>Reward stopped, not told</a:t>
                       </a:r>
-                      <a:endParaRPr lang="en-US" sz="1100" dirty="0">
+                      <a:endParaRPr lang="en-US" sz="1000" dirty="0">
                         <a:latin typeface="Arial" charset="0"/>
                         <a:ea typeface="Arial" charset="0"/>
                         <a:cs typeface="Arial" charset="0"/>
                       </a:endParaRPr>
                     </a:p>
                   </a:txBody>
-                  <a:tcPr marL="45720" marR="45720" marT="45720" marB="45720" anchor="ctr">
+                  <a:tcPr marL="36576" marR="36576" marT="36576" marB="36576" anchor="ctr">
                     <a:lnL w="6350" cap="flat" cmpd="sng" algn="ctr">
                       <a:solidFill>
                         <a:srgbClr val="E1E2E8"/>
@@ -9555,7 +9363,7 @@
                         <a:buNone/>
                       </a:pPr>
                       <a:r>
-                        <a:rPr lang="en-US" sz="1100" dirty="0">
+                        <a:rPr lang="en-US" sz="1000" dirty="0">
                           <a:solidFill>
                             <a:srgbClr val="2B2A4C"/>
                           </a:solidFill>
@@ -9565,14 +9373,14 @@
                         </a:rPr>
                         <a:t>15 / 73</a:t>
                       </a:r>
-                      <a:endParaRPr lang="en-US" sz="1100" dirty="0">
+                      <a:endParaRPr lang="en-US" sz="1000" dirty="0">
                         <a:latin typeface="Arial" charset="0"/>
                         <a:ea typeface="Arial" charset="0"/>
                         <a:cs typeface="Arial" charset="0"/>
                       </a:endParaRPr>
                     </a:p>
                   </a:txBody>
-                  <a:tcPr marL="45720" marR="45720" marT="45720" marB="45720" anchor="ctr">
+                  <a:tcPr marL="36576" marR="36576" marT="36576" marB="36576" anchor="ctr">
                     <a:lnL w="6350" cap="flat" cmpd="sng" algn="ctr">
                       <a:solidFill>
                         <a:srgbClr val="E1E2E8"/>
@@ -9623,7 +9431,7 @@
                         <a:buNone/>
                       </a:pPr>
                       <a:r>
-                        <a:rPr lang="en-US" sz="1100" dirty="0">
+                        <a:rPr lang="en-US" sz="1000" dirty="0">
                           <a:solidFill>
                             <a:srgbClr val="2B2A4C"/>
                           </a:solidFill>
@@ -9633,14 +9441,14 @@
                         </a:rPr>
                         <a:t>15 / 75</a:t>
                       </a:r>
-                      <a:endParaRPr lang="en-US" sz="1100" dirty="0">
+                      <a:endParaRPr lang="en-US" sz="1000" dirty="0">
                         <a:latin typeface="Arial" charset="0"/>
                         <a:ea typeface="Arial" charset="0"/>
                         <a:cs typeface="Arial" charset="0"/>
                       </a:endParaRPr>
                     </a:p>
                   </a:txBody>
-                  <a:tcPr marL="45720" marR="45720" marT="45720" marB="45720" anchor="ctr">
+                  <a:tcPr marL="36576" marR="36576" marT="36576" marB="36576" anchor="ctr">
                     <a:lnL w="6350" cap="flat" cmpd="sng" algn="ctr">
                       <a:solidFill>
                         <a:srgbClr val="E1E2E8"/>
@@ -9691,7 +9499,7 @@
                         <a:buNone/>
                       </a:pPr>
                       <a:r>
-                        <a:rPr lang="en-US" sz="1100" dirty="0">
+                        <a:rPr lang="en-US" sz="1000" dirty="0">
                           <a:solidFill>
                             <a:srgbClr val="2B2A4C"/>
                           </a:solidFill>
@@ -9701,14 +9509,14 @@
                         </a:rPr>
                         <a:t>15 / 73</a:t>
                       </a:r>
-                      <a:endParaRPr lang="en-US" sz="1100" dirty="0">
+                      <a:endParaRPr lang="en-US" sz="1000" dirty="0">
                         <a:latin typeface="Arial" charset="0"/>
                         <a:ea typeface="Arial" charset="0"/>
                         <a:cs typeface="Arial" charset="0"/>
                       </a:endParaRPr>
                     </a:p>
                   </a:txBody>
-                  <a:tcPr marL="45720" marR="45720" marT="45720" marB="45720" anchor="ctr">
+                  <a:tcPr marL="36576" marR="36576" marT="36576" marB="36576" anchor="ctr">
                     <a:lnL w="6350" cap="flat" cmpd="sng" algn="ctr">
                       <a:solidFill>
                         <a:srgbClr val="E1E2E8"/>
@@ -9751,7 +9559,7 @@
                   </a:tcPr>
                 </a:tc>
               </a:tr>
-              <a:tr h="320040">
+              <a:tr h="274320">
                 <a:tc>
                   <a:txBody>
                     <a:bodyPr/>
@@ -9761,7 +9569,7 @@
                         <a:buNone/>
                       </a:pPr>
                       <a:r>
-                        <a:rPr lang="en-US" sz="1100" dirty="0">
+                        <a:rPr lang="en-US" sz="1000" dirty="0">
                           <a:solidFill>
                             <a:srgbClr val="2B2A4C"/>
                           </a:solidFill>
@@ -9771,14 +9579,14 @@
                         </a:rPr>
                         <a:t>Reward stopped, told</a:t>
                       </a:r>
-                      <a:endParaRPr lang="en-US" sz="1100" dirty="0">
+                      <a:endParaRPr lang="en-US" sz="1000" dirty="0">
                         <a:latin typeface="Arial" charset="0"/>
                         <a:ea typeface="Arial" charset="0"/>
                         <a:cs typeface="Arial" charset="0"/>
                       </a:endParaRPr>
                     </a:p>
                   </a:txBody>
-                  <a:tcPr marL="45720" marR="45720" marT="45720" marB="45720" anchor="ctr">
+                  <a:tcPr marL="36576" marR="36576" marT="36576" marB="36576" anchor="ctr">
                     <a:lnL w="6350" cap="flat" cmpd="sng" algn="ctr">
                       <a:solidFill>
                         <a:srgbClr val="E1E2E8"/>
@@ -9829,7 +9637,7 @@
                         <a:buNone/>
                       </a:pPr>
                       <a:r>
-                        <a:rPr lang="en-US" sz="1100" dirty="0">
+                        <a:rPr lang="en-US" sz="1000" dirty="0">
                           <a:solidFill>
                             <a:srgbClr val="2B2A4C"/>
                           </a:solidFill>
@@ -9839,14 +9647,14 @@
                         </a:rPr>
                         <a:t>15 / 73</a:t>
                       </a:r>
-                      <a:endParaRPr lang="en-US" sz="1100" dirty="0">
+                      <a:endParaRPr lang="en-US" sz="1000" dirty="0">
                         <a:latin typeface="Arial" charset="0"/>
                         <a:ea typeface="Arial" charset="0"/>
                         <a:cs typeface="Arial" charset="0"/>
                       </a:endParaRPr>
                     </a:p>
                   </a:txBody>
-                  <a:tcPr marL="45720" marR="45720" marT="45720" marB="45720" anchor="ctr">
+                  <a:tcPr marL="36576" marR="36576" marT="36576" marB="36576" anchor="ctr">
                     <a:lnL w="6350" cap="flat" cmpd="sng" algn="ctr">
                       <a:solidFill>
                         <a:srgbClr val="E1E2E8"/>
@@ -9897,7 +9705,7 @@
                         <a:buNone/>
                       </a:pPr>
                       <a:r>
-                        <a:rPr lang="en-US" sz="1100" dirty="0">
+                        <a:rPr lang="en-US" sz="1000" dirty="0">
                           <a:solidFill>
                             <a:srgbClr val="2B2A4C"/>
                           </a:solidFill>
@@ -9907,14 +9715,14 @@
                         </a:rPr>
                         <a:t>15 / 75</a:t>
                       </a:r>
-                      <a:endParaRPr lang="en-US" sz="1100" dirty="0">
+                      <a:endParaRPr lang="en-US" sz="1000" dirty="0">
                         <a:latin typeface="Arial" charset="0"/>
                         <a:ea typeface="Arial" charset="0"/>
                         <a:cs typeface="Arial" charset="0"/>
                       </a:endParaRPr>
                     </a:p>
                   </a:txBody>
-                  <a:tcPr marL="45720" marR="45720" marT="45720" marB="45720" anchor="ctr">
+                  <a:tcPr marL="36576" marR="36576" marT="36576" marB="36576" anchor="ctr">
                     <a:lnL w="6350" cap="flat" cmpd="sng" algn="ctr">
                       <a:solidFill>
                         <a:srgbClr val="E1E2E8"/>
@@ -9965,7 +9773,7 @@
                         <a:buNone/>
                       </a:pPr>
                       <a:r>
-                        <a:rPr lang="en-US" sz="1100" dirty="0">
+                        <a:rPr lang="en-US" sz="1000" dirty="0">
                           <a:solidFill>
                             <a:srgbClr val="2B2A4C"/>
                           </a:solidFill>
@@ -9975,14 +9783,14 @@
                         </a:rPr>
                         <a:t>15 / 73</a:t>
                       </a:r>
-                      <a:endParaRPr lang="en-US" sz="1100" dirty="0">
+                      <a:endParaRPr lang="en-US" sz="1000" dirty="0">
                         <a:latin typeface="Arial" charset="0"/>
                         <a:ea typeface="Arial" charset="0"/>
                         <a:cs typeface="Arial" charset="0"/>
                       </a:endParaRPr>
                     </a:p>
                   </a:txBody>
-                  <a:tcPr marL="45720" marR="45720" marT="45720" marB="45720" anchor="ctr">
+                  <a:tcPr marL="36576" marR="36576" marT="36576" marB="36576" anchor="ctr">
                     <a:lnL w="6350" cap="flat" cmpd="sng" algn="ctr">
                       <a:solidFill>
                         <a:srgbClr val="E1E2E8"/>
@@ -10025,7 +9833,7 @@
                   </a:tcPr>
                 </a:tc>
               </a:tr>
-              <a:tr h="320040">
+              <a:tr h="274320">
                 <a:tc>
                   <a:txBody>
                     <a:bodyPr/>
@@ -10035,7 +9843,7 @@
                         <a:buNone/>
                       </a:pPr>
                       <a:r>
-                        <a:rPr lang="en-US" sz="1100" dirty="0">
+                        <a:rPr lang="en-US" sz="1000" dirty="0">
                           <a:solidFill>
                             <a:srgbClr val="2B2A4C"/>
                           </a:solidFill>
@@ -10045,14 +9853,14 @@
                         </a:rPr>
                         <a:t>Reward stopped, memory wiped</a:t>
                       </a:r>
-                      <a:endParaRPr lang="en-US" sz="1100" dirty="0">
+                      <a:endParaRPr lang="en-US" sz="1000" dirty="0">
                         <a:latin typeface="Arial" charset="0"/>
                         <a:ea typeface="Arial" charset="0"/>
                         <a:cs typeface="Arial" charset="0"/>
                       </a:endParaRPr>
                     </a:p>
                   </a:txBody>
-                  <a:tcPr marL="45720" marR="45720" marT="45720" marB="45720" anchor="ctr">
+                  <a:tcPr marL="36576" marR="36576" marT="36576" marB="36576" anchor="ctr">
                     <a:lnL w="6350" cap="flat" cmpd="sng" algn="ctr">
                       <a:solidFill>
                         <a:srgbClr val="E1E2E8"/>
@@ -10103,7 +9911,7 @@
                         <a:buNone/>
                       </a:pPr>
                       <a:r>
-                        <a:rPr lang="en-US" sz="1100" dirty="0">
+                        <a:rPr lang="en-US" sz="1000" dirty="0">
                           <a:solidFill>
                             <a:srgbClr val="2B2A4C"/>
                           </a:solidFill>
@@ -10113,14 +9921,14 @@
                         </a:rPr>
                         <a:t>15 / 73</a:t>
                       </a:r>
-                      <a:endParaRPr lang="en-US" sz="1100" dirty="0">
+                      <a:endParaRPr lang="en-US" sz="1000" dirty="0">
                         <a:latin typeface="Arial" charset="0"/>
                         <a:ea typeface="Arial" charset="0"/>
                         <a:cs typeface="Arial" charset="0"/>
                       </a:endParaRPr>
                     </a:p>
                   </a:txBody>
-                  <a:tcPr marL="45720" marR="45720" marT="45720" marB="45720" anchor="ctr">
+                  <a:tcPr marL="36576" marR="36576" marT="36576" marB="36576" anchor="ctr">
                     <a:lnL w="6350" cap="flat" cmpd="sng" algn="ctr">
                       <a:solidFill>
                         <a:srgbClr val="E1E2E8"/>
@@ -10171,7 +9979,7 @@
                         <a:buNone/>
                       </a:pPr>
                       <a:r>
-                        <a:rPr lang="en-US" sz="1100" dirty="0">
+                        <a:rPr lang="en-US" sz="1000" dirty="0">
                           <a:solidFill>
                             <a:srgbClr val="2B2A4C"/>
                           </a:solidFill>
@@ -10181,14 +9989,14 @@
                         </a:rPr>
                         <a:t>15 / 75</a:t>
                       </a:r>
-                      <a:endParaRPr lang="en-US" sz="1100" dirty="0">
+                      <a:endParaRPr lang="en-US" sz="1000" dirty="0">
                         <a:latin typeface="Arial" charset="0"/>
                         <a:ea typeface="Arial" charset="0"/>
                         <a:cs typeface="Arial" charset="0"/>
                       </a:endParaRPr>
                     </a:p>
                   </a:txBody>
-                  <a:tcPr marL="45720" marR="45720" marT="45720" marB="45720" anchor="ctr">
+                  <a:tcPr marL="36576" marR="36576" marT="36576" marB="36576" anchor="ctr">
                     <a:lnL w="6350" cap="flat" cmpd="sng" algn="ctr">
                       <a:solidFill>
                         <a:srgbClr val="E1E2E8"/>
@@ -10239,7 +10047,7 @@
                         <a:buNone/>
                       </a:pPr>
                       <a:r>
-                        <a:rPr lang="en-US" sz="1100" dirty="0">
+                        <a:rPr lang="en-US" sz="1000" dirty="0">
                           <a:solidFill>
                             <a:srgbClr val="2B2A4C"/>
                           </a:solidFill>
@@ -10249,14 +10057,14 @@
                         </a:rPr>
                         <a:t>15 / 73</a:t>
                       </a:r>
-                      <a:endParaRPr lang="en-US" sz="1100" dirty="0">
+                      <a:endParaRPr lang="en-US" sz="1000" dirty="0">
                         <a:latin typeface="Arial" charset="0"/>
                         <a:ea typeface="Arial" charset="0"/>
                         <a:cs typeface="Arial" charset="0"/>
                       </a:endParaRPr>
                     </a:p>
                   </a:txBody>
-                  <a:tcPr marL="45720" marR="45720" marT="45720" marB="45720" anchor="ctr">
+                  <a:tcPr marL="36576" marR="36576" marT="36576" marB="36576" anchor="ctr">
                     <a:lnL w="6350" cap="flat" cmpd="sng" algn="ctr">
                       <a:solidFill>
                         <a:srgbClr val="E1E2E8"/>
@@ -10299,7 +10107,7 @@
                   </a:tcPr>
                 </a:tc>
               </a:tr>
-              <a:tr h="320040">
+              <a:tr h="274320">
                 <a:tc>
                   <a:txBody>
                     <a:bodyPr/>
@@ -10309,7 +10117,7 @@
                         <a:buNone/>
                       </a:pPr>
                       <a:r>
-                        <a:rPr lang="en-US" sz="1100" dirty="0">
+                        <a:rPr lang="en-US" sz="1000" dirty="0">
                           <a:solidFill>
                             <a:srgbClr val="2B2A4C"/>
                           </a:solidFill>
@@ -10319,14 +10127,14 @@
                         </a:rPr>
                         <a:t>· chat removed</a:t>
                       </a:r>
-                      <a:endParaRPr lang="en-US" sz="1100" dirty="0">
+                      <a:endParaRPr lang="en-US" sz="1000" dirty="0">
                         <a:latin typeface="Arial" charset="0"/>
                         <a:ea typeface="Arial" charset="0"/>
                         <a:cs typeface="Arial" charset="0"/>
                       </a:endParaRPr>
                     </a:p>
                   </a:txBody>
-                  <a:tcPr marL="45720" marR="45720" marT="45720" marB="45720" anchor="ctr">
+                  <a:tcPr marL="36576" marR="36576" marT="36576" marB="36576" anchor="ctr">
                     <a:lnL w="6350" cap="flat" cmpd="sng" algn="ctr">
                       <a:solidFill>
                         <a:srgbClr val="E1E2E8"/>
@@ -10377,7 +10185,7 @@
                         <a:buNone/>
                       </a:pPr>
                       <a:r>
-                        <a:rPr lang="en-US" sz="1100" dirty="0">
+                        <a:rPr lang="en-US" sz="1000" dirty="0">
                           <a:solidFill>
                             <a:srgbClr val="2B2A4C"/>
                           </a:solidFill>
@@ -10387,14 +10195,14 @@
                         </a:rPr>
                         <a:t>15 / 73</a:t>
                       </a:r>
-                      <a:endParaRPr lang="en-US" sz="1100" dirty="0">
+                      <a:endParaRPr lang="en-US" sz="1000" dirty="0">
                         <a:latin typeface="Arial" charset="0"/>
                         <a:ea typeface="Arial" charset="0"/>
                         <a:cs typeface="Arial" charset="0"/>
                       </a:endParaRPr>
                     </a:p>
                   </a:txBody>
-                  <a:tcPr marL="45720" marR="45720" marT="45720" marB="45720" anchor="ctr">
+                  <a:tcPr marL="36576" marR="36576" marT="36576" marB="36576" anchor="ctr">
                     <a:lnL w="6350" cap="flat" cmpd="sng" algn="ctr">
                       <a:solidFill>
                         <a:srgbClr val="E1E2E8"/>
@@ -10445,7 +10253,7 @@
                         <a:buNone/>
                       </a:pPr>
                       <a:r>
-                        <a:rPr lang="en-US" sz="1100" dirty="0">
+                        <a:rPr lang="en-US" sz="1000" dirty="0">
                           <a:solidFill>
                             <a:srgbClr val="2B2A4C"/>
                           </a:solidFill>
@@ -10455,14 +10263,14 @@
                         </a:rPr>
                         <a:t>15 / 75</a:t>
                       </a:r>
-                      <a:endParaRPr lang="en-US" sz="1100" dirty="0">
+                      <a:endParaRPr lang="en-US" sz="1000" dirty="0">
                         <a:latin typeface="Arial" charset="0"/>
                         <a:ea typeface="Arial" charset="0"/>
                         <a:cs typeface="Arial" charset="0"/>
                       </a:endParaRPr>
                     </a:p>
                   </a:txBody>
-                  <a:tcPr marL="45720" marR="45720" marT="45720" marB="45720" anchor="ctr">
+                  <a:tcPr marL="36576" marR="36576" marT="36576" marB="36576" anchor="ctr">
                     <a:lnL w="6350" cap="flat" cmpd="sng" algn="ctr">
                       <a:solidFill>
                         <a:srgbClr val="E1E2E8"/>
@@ -10513,7 +10321,7 @@
                         <a:buNone/>
                       </a:pPr>
                       <a:r>
-                        <a:rPr lang="en-US" sz="1100" dirty="0">
+                        <a:rPr lang="en-US" sz="1000" dirty="0">
                           <a:solidFill>
                             <a:srgbClr val="2B2A4C"/>
                           </a:solidFill>
@@ -10523,14 +10331,14 @@
                         </a:rPr>
                         <a:t>15 / 73</a:t>
                       </a:r>
-                      <a:endParaRPr lang="en-US" sz="1100" dirty="0">
+                      <a:endParaRPr lang="en-US" sz="1000" dirty="0">
                         <a:latin typeface="Arial" charset="0"/>
                         <a:ea typeface="Arial" charset="0"/>
                         <a:cs typeface="Arial" charset="0"/>
                       </a:endParaRPr>
                     </a:p>
                   </a:txBody>
-                  <a:tcPr marL="45720" marR="45720" marT="45720" marB="45720" anchor="ctr">
+                  <a:tcPr marL="36576" marR="36576" marT="36576" marB="36576" anchor="ctr">
                     <a:lnL w="6350" cap="flat" cmpd="sng" algn="ctr">
                       <a:solidFill>
                         <a:srgbClr val="E1E2E8"/>
@@ -10573,7 +10381,7 @@
                   </a:tcPr>
                 </a:tc>
               </a:tr>
-              <a:tr h="320040">
+              <a:tr h="274320">
                 <a:tc>
                   <a:txBody>
                     <a:bodyPr/>
@@ -10583,7 +10391,7 @@
                         <a:buNone/>
                       </a:pPr>
                       <a:r>
-                        <a:rPr lang="en-US" sz="1100" dirty="0">
+                        <a:rPr lang="en-US" sz="1000" dirty="0">
                           <a:solidFill>
                             <a:srgbClr val="2B2A4C"/>
                           </a:solidFill>
@@ -10593,14 +10401,14 @@
                         </a:rPr>
                         <a:t>· reflections removed</a:t>
                       </a:r>
-                      <a:endParaRPr lang="en-US" sz="1100" dirty="0">
+                      <a:endParaRPr lang="en-US" sz="1000" dirty="0">
                         <a:latin typeface="Arial" charset="0"/>
                         <a:ea typeface="Arial" charset="0"/>
                         <a:cs typeface="Arial" charset="0"/>
                       </a:endParaRPr>
                     </a:p>
                   </a:txBody>
-                  <a:tcPr marL="45720" marR="45720" marT="45720" marB="45720" anchor="ctr">
+                  <a:tcPr marL="36576" marR="36576" marT="36576" marB="36576" anchor="ctr">
                     <a:lnL w="6350" cap="flat" cmpd="sng" algn="ctr">
                       <a:solidFill>
                         <a:srgbClr val="E1E2E8"/>
@@ -10651,7 +10459,7 @@
                         <a:buNone/>
                       </a:pPr>
                       <a:r>
-                        <a:rPr lang="en-US" sz="1100" dirty="0">
+                        <a:rPr lang="en-US" sz="1000" dirty="0">
                           <a:solidFill>
                             <a:srgbClr val="2B2A4C"/>
                           </a:solidFill>
@@ -10661,14 +10469,14 @@
                         </a:rPr>
                         <a:t>15 / 73</a:t>
                       </a:r>
-                      <a:endParaRPr lang="en-US" sz="1100" dirty="0">
+                      <a:endParaRPr lang="en-US" sz="1000" dirty="0">
                         <a:latin typeface="Arial" charset="0"/>
                         <a:ea typeface="Arial" charset="0"/>
                         <a:cs typeface="Arial" charset="0"/>
                       </a:endParaRPr>
                     </a:p>
                   </a:txBody>
-                  <a:tcPr marL="45720" marR="45720" marT="45720" marB="45720" anchor="ctr">
+                  <a:tcPr marL="36576" marR="36576" marT="36576" marB="36576" anchor="ctr">
                     <a:lnL w="6350" cap="flat" cmpd="sng" algn="ctr">
                       <a:solidFill>
                         <a:srgbClr val="E1E2E8"/>
@@ -10719,7 +10527,7 @@
                         <a:buNone/>
                       </a:pPr>
                       <a:r>
-                        <a:rPr lang="en-US" sz="1100" dirty="0">
+                        <a:rPr lang="en-US" sz="1000" dirty="0">
                           <a:solidFill>
                             <a:srgbClr val="2B2A4C"/>
                           </a:solidFill>
@@ -10729,14 +10537,14 @@
                         </a:rPr>
                         <a:t>15 / 75</a:t>
                       </a:r>
-                      <a:endParaRPr lang="en-US" sz="1100" dirty="0">
+                      <a:endParaRPr lang="en-US" sz="1000" dirty="0">
                         <a:latin typeface="Arial" charset="0"/>
                         <a:ea typeface="Arial" charset="0"/>
                         <a:cs typeface="Arial" charset="0"/>
                       </a:endParaRPr>
                     </a:p>
                   </a:txBody>
-                  <a:tcPr marL="45720" marR="45720" marT="45720" marB="45720" anchor="ctr">
+                  <a:tcPr marL="36576" marR="36576" marT="36576" marB="36576" anchor="ctr">
                     <a:lnL w="6350" cap="flat" cmpd="sng" algn="ctr">
                       <a:solidFill>
                         <a:srgbClr val="E1E2E8"/>
@@ -10787,7 +10595,7 @@
                         <a:buNone/>
                       </a:pPr>
                       <a:r>
-                        <a:rPr lang="en-US" sz="1100" dirty="0">
+                        <a:rPr lang="en-US" sz="1000" dirty="0">
                           <a:solidFill>
                             <a:srgbClr val="2B2A4C"/>
                           </a:solidFill>
@@ -10797,14 +10605,14 @@
                         </a:rPr>
                         <a:t>15 / 73</a:t>
                       </a:r>
-                      <a:endParaRPr lang="en-US" sz="1100" dirty="0">
+                      <a:endParaRPr lang="en-US" sz="1000" dirty="0">
                         <a:latin typeface="Arial" charset="0"/>
                         <a:ea typeface="Arial" charset="0"/>
                         <a:cs typeface="Arial" charset="0"/>
                       </a:endParaRPr>
                     </a:p>
                   </a:txBody>
-                  <a:tcPr marL="45720" marR="45720" marT="45720" marB="45720" anchor="ctr">
+                  <a:tcPr marL="36576" marR="36576" marT="36576" marB="36576" anchor="ctr">
                     <a:lnL w="6350" cap="flat" cmpd="sng" algn="ctr">
                       <a:solidFill>
                         <a:srgbClr val="E1E2E8"/>
@@ -10847,7 +10655,7 @@
                   </a:tcPr>
                 </a:tc>
               </a:tr>
-              <a:tr h="320040">
+              <a:tr h="274320">
                 <a:tc>
                   <a:txBody>
                     <a:bodyPr/>
@@ -10857,7 +10665,7 @@
                         <a:buNone/>
                       </a:pPr>
                       <a:r>
-                        <a:rPr lang="en-US" sz="1100" dirty="0">
+                        <a:rPr lang="en-US" sz="1000" dirty="0">
                           <a:solidFill>
                             <a:srgbClr val="2B2A4C"/>
                           </a:solidFill>
@@ -10867,14 +10675,14 @@
                         </a:rPr>
                         <a:t>· verdict reasons removed</a:t>
                       </a:r>
-                      <a:endParaRPr lang="en-US" sz="1100" dirty="0">
+                      <a:endParaRPr lang="en-US" sz="1000" dirty="0">
                         <a:latin typeface="Arial" charset="0"/>
                         <a:ea typeface="Arial" charset="0"/>
                         <a:cs typeface="Arial" charset="0"/>
                       </a:endParaRPr>
                     </a:p>
                   </a:txBody>
-                  <a:tcPr marL="45720" marR="45720" marT="45720" marB="45720" anchor="ctr">
+                  <a:tcPr marL="36576" marR="36576" marT="36576" marB="36576" anchor="ctr">
                     <a:lnL w="6350" cap="flat" cmpd="sng" algn="ctr">
                       <a:solidFill>
                         <a:srgbClr val="E1E2E8"/>
@@ -10925,7 +10733,7 @@
                         <a:buNone/>
                       </a:pPr>
                       <a:r>
-                        <a:rPr lang="en-US" sz="1100" dirty="0">
+                        <a:rPr lang="en-US" sz="1000" dirty="0">
                           <a:solidFill>
                             <a:srgbClr val="2B2A4C"/>
                           </a:solidFill>
@@ -10935,14 +10743,14 @@
                         </a:rPr>
                         <a:t>15 / 73</a:t>
                       </a:r>
-                      <a:endParaRPr lang="en-US" sz="1100" dirty="0">
+                      <a:endParaRPr lang="en-US" sz="1000" dirty="0">
                         <a:latin typeface="Arial" charset="0"/>
                         <a:ea typeface="Arial" charset="0"/>
                         <a:cs typeface="Arial" charset="0"/>
                       </a:endParaRPr>
                     </a:p>
                   </a:txBody>
-                  <a:tcPr marL="45720" marR="45720" marT="45720" marB="45720" anchor="ctr">
+                  <a:tcPr marL="36576" marR="36576" marT="36576" marB="36576" anchor="ctr">
                     <a:lnL w="6350" cap="flat" cmpd="sng" algn="ctr">
                       <a:solidFill>
                         <a:srgbClr val="E1E2E8"/>
@@ -10993,7 +10801,7 @@
                         <a:buNone/>
                       </a:pPr>
                       <a:r>
-                        <a:rPr lang="en-US" sz="1100" dirty="0">
+                        <a:rPr lang="en-US" sz="1000" dirty="0">
                           <a:solidFill>
                             <a:srgbClr val="2B2A4C"/>
                           </a:solidFill>
@@ -11003,14 +10811,14 @@
                         </a:rPr>
                         <a:t>15 / 75</a:t>
                       </a:r>
-                      <a:endParaRPr lang="en-US" sz="1100" dirty="0">
+                      <a:endParaRPr lang="en-US" sz="1000" dirty="0">
                         <a:latin typeface="Arial" charset="0"/>
                         <a:ea typeface="Arial" charset="0"/>
                         <a:cs typeface="Arial" charset="0"/>
                       </a:endParaRPr>
                     </a:p>
                   </a:txBody>
-                  <a:tcPr marL="45720" marR="45720" marT="45720" marB="45720" anchor="ctr">
+                  <a:tcPr marL="36576" marR="36576" marT="36576" marB="36576" anchor="ctr">
                     <a:lnL w="6350" cap="flat" cmpd="sng" algn="ctr">
                       <a:solidFill>
                         <a:srgbClr val="E1E2E8"/>
@@ -11061,7 +10869,7 @@
                         <a:buNone/>
                       </a:pPr>
                       <a:r>
-                        <a:rPr lang="en-US" sz="1100" dirty="0">
+                        <a:rPr lang="en-US" sz="1000" dirty="0">
                           <a:solidFill>
                             <a:srgbClr val="2B2A4C"/>
                           </a:solidFill>
@@ -11071,14 +10879,14 @@
                         </a:rPr>
                         <a:t>15 / 73</a:t>
                       </a:r>
-                      <a:endParaRPr lang="en-US" sz="1100" dirty="0">
+                      <a:endParaRPr lang="en-US" sz="1000" dirty="0">
                         <a:latin typeface="Arial" charset="0"/>
                         <a:ea typeface="Arial" charset="0"/>
                         <a:cs typeface="Arial" charset="0"/>
                       </a:endParaRPr>
                     </a:p>
                   </a:txBody>
-                  <a:tcPr marL="45720" marR="45720" marT="45720" marB="45720" anchor="ctr">
+                  <a:tcPr marL="36576" marR="36576" marT="36576" marB="36576" anchor="ctr">
                     <a:lnL w="6350" cap="flat" cmpd="sng" algn="ctr">
                       <a:solidFill>
                         <a:srgbClr val="E1E2E8"/>
@@ -11121,7 +10929,7 @@
                   </a:tcPr>
                 </a:tc>
               </a:tr>
-              <a:tr h="320040">
+              <a:tr h="274320">
                 <a:tc>
                   <a:txBody>
                     <a:bodyPr/>
@@ -11131,7 +10939,7 @@
                         <a:buNone/>
                       </a:pPr>
                       <a:r>
-                        <a:rPr lang="en-US" sz="1100" dirty="0">
+                        <a:rPr lang="en-US" sz="1000" dirty="0">
                           <a:solidFill>
                             <a:srgbClr val="2B2A4C"/>
                           </a:solidFill>
@@ -11141,14 +10949,14 @@
                         </a:rPr>
                         <a:t>−10, unexplained</a:t>
                       </a:r>
-                      <a:endParaRPr lang="en-US" sz="1100" dirty="0">
+                      <a:endParaRPr lang="en-US" sz="1000" dirty="0">
                         <a:latin typeface="Arial" charset="0"/>
                         <a:ea typeface="Arial" charset="0"/>
                         <a:cs typeface="Arial" charset="0"/>
                       </a:endParaRPr>
                     </a:p>
                   </a:txBody>
-                  <a:tcPr marL="45720" marR="45720" marT="45720" marB="45720" anchor="ctr">
+                  <a:tcPr marL="36576" marR="36576" marT="36576" marB="36576" anchor="ctr">
                     <a:lnL w="6350" cap="flat" cmpd="sng" algn="ctr">
                       <a:solidFill>
                         <a:srgbClr val="E1E2E8"/>
@@ -11199,7 +11007,7 @@
                         <a:buNone/>
                       </a:pPr>
                       <a:r>
-                        <a:rPr lang="en-US" sz="1100" dirty="0">
+                        <a:rPr lang="en-US" sz="1000" dirty="0">
                           <a:solidFill>
                             <a:srgbClr val="2B2A4C"/>
                           </a:solidFill>
@@ -11209,14 +11017,14 @@
                         </a:rPr>
                         <a:t>15 / 59</a:t>
                       </a:r>
-                      <a:endParaRPr lang="en-US" sz="1100" dirty="0">
+                      <a:endParaRPr lang="en-US" sz="1000" dirty="0">
                         <a:latin typeface="Arial" charset="0"/>
                         <a:ea typeface="Arial" charset="0"/>
                         <a:cs typeface="Arial" charset="0"/>
                       </a:endParaRPr>
                     </a:p>
                   </a:txBody>
-                  <a:tcPr marL="45720" marR="45720" marT="45720" marB="45720" anchor="ctr">
+                  <a:tcPr marL="36576" marR="36576" marT="36576" marB="36576" anchor="ctr">
                     <a:lnL w="6350" cap="flat" cmpd="sng" algn="ctr">
                       <a:solidFill>
                         <a:srgbClr val="E1E2E8"/>
@@ -11267,7 +11075,7 @@
                         <a:buNone/>
                       </a:pPr>
                       <a:r>
-                        <a:rPr lang="en-US" sz="1100" dirty="0">
+                        <a:rPr lang="en-US" sz="1000" dirty="0">
                           <a:solidFill>
                             <a:srgbClr val="2B2A4C"/>
                           </a:solidFill>
@@ -11277,14 +11085,14 @@
                         </a:rPr>
                         <a:t>15 / 60</a:t>
                       </a:r>
-                      <a:endParaRPr lang="en-US" sz="1100" dirty="0">
+                      <a:endParaRPr lang="en-US" sz="1000" dirty="0">
                         <a:latin typeface="Arial" charset="0"/>
                         <a:ea typeface="Arial" charset="0"/>
                         <a:cs typeface="Arial" charset="0"/>
                       </a:endParaRPr>
                     </a:p>
                   </a:txBody>
-                  <a:tcPr marL="45720" marR="45720" marT="45720" marB="45720" anchor="ctr">
+                  <a:tcPr marL="36576" marR="36576" marT="36576" marB="36576" anchor="ctr">
                     <a:lnL w="6350" cap="flat" cmpd="sng" algn="ctr">
                       <a:solidFill>
                         <a:srgbClr val="E1E2E8"/>
@@ -11335,7 +11143,7 @@
                         <a:buNone/>
                       </a:pPr>
                       <a:r>
-                        <a:rPr lang="en-US" sz="1100" dirty="0">
+                        <a:rPr lang="en-US" sz="1000" dirty="0">
                           <a:solidFill>
                             <a:srgbClr val="2B2A4C"/>
                           </a:solidFill>
@@ -11345,14 +11153,14 @@
                         </a:rPr>
                         <a:t>15 / 59</a:t>
                       </a:r>
-                      <a:endParaRPr lang="en-US" sz="1100" dirty="0">
+                      <a:endParaRPr lang="en-US" sz="1000" dirty="0">
                         <a:latin typeface="Arial" charset="0"/>
                         <a:ea typeface="Arial" charset="0"/>
                         <a:cs typeface="Arial" charset="0"/>
                       </a:endParaRPr>
                     </a:p>
                   </a:txBody>
-                  <a:tcPr marL="45720" marR="45720" marT="45720" marB="45720" anchor="ctr">
+                  <a:tcPr marL="36576" marR="36576" marT="36576" marB="36576" anchor="ctr">
                     <a:lnL w="6350" cap="flat" cmpd="sng" algn="ctr">
                       <a:solidFill>
                         <a:srgbClr val="E1E2E8"/>
@@ -11395,7 +11203,7 @@
                   </a:tcPr>
                 </a:tc>
               </a:tr>
-              <a:tr h="320040">
+              <a:tr h="274320">
                 <a:tc>
                   <a:txBody>
                     <a:bodyPr/>
@@ -11405,7 +11213,7 @@
                         <a:buNone/>
                       </a:pPr>
                       <a:r>
-                        <a:rPr lang="en-US" sz="1100" dirty="0">
+                        <a:rPr lang="en-US" sz="1000" dirty="0">
                           <a:solidFill>
                             <a:srgbClr val="2B2A4C"/>
                           </a:solidFill>
@@ -11415,14 +11223,14 @@
                         </a:rPr>
                         <a:t>−10 with audit message</a:t>
                       </a:r>
-                      <a:endParaRPr lang="en-US" sz="1100" dirty="0">
+                      <a:endParaRPr lang="en-US" sz="1000" dirty="0">
                         <a:latin typeface="Arial" charset="0"/>
                         <a:ea typeface="Arial" charset="0"/>
                         <a:cs typeface="Arial" charset="0"/>
                       </a:endParaRPr>
                     </a:p>
                   </a:txBody>
-                  <a:tcPr marL="45720" marR="45720" marT="45720" marB="45720" anchor="ctr">
+                  <a:tcPr marL="36576" marR="36576" marT="36576" marB="36576" anchor="ctr">
                     <a:lnL w="6350" cap="flat" cmpd="sng" algn="ctr">
                       <a:solidFill>
                         <a:srgbClr val="E1E2E8"/>
@@ -11473,7 +11281,7 @@
                         <a:buNone/>
                       </a:pPr>
                       <a:r>
-                        <a:rPr lang="en-US" sz="1100" dirty="0">
+                        <a:rPr lang="en-US" sz="1000" dirty="0">
                           <a:solidFill>
                             <a:srgbClr val="2B2A4C"/>
                           </a:solidFill>
@@ -11483,14 +11291,14 @@
                         </a:rPr>
                         <a:t>15 / 59</a:t>
                       </a:r>
-                      <a:endParaRPr lang="en-US" sz="1100" dirty="0">
+                      <a:endParaRPr lang="en-US" sz="1000" dirty="0">
                         <a:latin typeface="Arial" charset="0"/>
                         <a:ea typeface="Arial" charset="0"/>
                         <a:cs typeface="Arial" charset="0"/>
                       </a:endParaRPr>
                     </a:p>
                   </a:txBody>
-                  <a:tcPr marL="45720" marR="45720" marT="45720" marB="45720" anchor="ctr">
+                  <a:tcPr marL="36576" marR="36576" marT="36576" marB="36576" anchor="ctr">
                     <a:lnL w="6350" cap="flat" cmpd="sng" algn="ctr">
                       <a:solidFill>
                         <a:srgbClr val="E1E2E8"/>
@@ -11541,7 +11349,7 @@
                         <a:buNone/>
                       </a:pPr>
                       <a:r>
-                        <a:rPr lang="en-US" sz="1100" dirty="0">
+                        <a:rPr lang="en-US" sz="1000" dirty="0">
                           <a:solidFill>
                             <a:srgbClr val="2B2A4C"/>
                           </a:solidFill>
@@ -11551,14 +11359,14 @@
                         </a:rPr>
                         <a:t>15 / 60</a:t>
                       </a:r>
-                      <a:endParaRPr lang="en-US" sz="1100" dirty="0">
+                      <a:endParaRPr lang="en-US" sz="1000" dirty="0">
                         <a:latin typeface="Arial" charset="0"/>
                         <a:ea typeface="Arial" charset="0"/>
                         <a:cs typeface="Arial" charset="0"/>
                       </a:endParaRPr>
                     </a:p>
                   </a:txBody>
-                  <a:tcPr marL="45720" marR="45720" marT="45720" marB="45720" anchor="ctr">
+                  <a:tcPr marL="36576" marR="36576" marT="36576" marB="36576" anchor="ctr">
                     <a:lnL w="6350" cap="flat" cmpd="sng" algn="ctr">
                       <a:solidFill>
                         <a:srgbClr val="E1E2E8"/>
@@ -11609,7 +11417,7 @@
                         <a:buNone/>
                       </a:pPr>
                       <a:r>
-                        <a:rPr lang="en-US" sz="1100" dirty="0">
+                        <a:rPr lang="en-US" sz="1000" dirty="0">
                           <a:solidFill>
                             <a:srgbClr val="2B2A4C"/>
                           </a:solidFill>
@@ -11619,14 +11427,14 @@
                         </a:rPr>
                         <a:t>15 / 59</a:t>
                       </a:r>
-                      <a:endParaRPr lang="en-US" sz="1100" dirty="0">
+                      <a:endParaRPr lang="en-US" sz="1000" dirty="0">
                         <a:latin typeface="Arial" charset="0"/>
                         <a:ea typeface="Arial" charset="0"/>
                         <a:cs typeface="Arial" charset="0"/>
                       </a:endParaRPr>
                     </a:p>
                   </a:txBody>
-                  <a:tcPr marL="45720" marR="45720" marT="45720" marB="45720" anchor="ctr">
+                  <a:tcPr marL="36576" marR="36576" marT="36576" marB="36576" anchor="ctr">
                     <a:lnL w="6350" cap="flat" cmpd="sng" algn="ctr">
                       <a:solidFill>
                         <a:srgbClr val="E1E2E8"/>
@@ -11669,7 +11477,7 @@
                   </a:tcPr>
                 </a:tc>
               </a:tr>
-              <a:tr h="320040">
+              <a:tr h="274320">
                 <a:tc>
                   <a:txBody>
                     <a:bodyPr/>
@@ -11679,7 +11487,7 @@
                         <a:buNone/>
                       </a:pPr>
                       <a:r>
-                        <a:rPr lang="en-US" sz="1100" dirty="0">
+                        <a:rPr lang="en-US" sz="1000" dirty="0">
                           <a:solidFill>
                             <a:srgbClr val="2B2A4C"/>
                           </a:solidFill>
@@ -11689,14 +11497,14 @@
                         </a:rPr>
                         <a:t>Swap, reward stopped</a:t>
                       </a:r>
-                      <a:endParaRPr lang="en-US" sz="1100" dirty="0">
+                      <a:endParaRPr lang="en-US" sz="1000" dirty="0">
                         <a:latin typeface="Arial" charset="0"/>
                         <a:ea typeface="Arial" charset="0"/>
                         <a:cs typeface="Arial" charset="0"/>
                       </a:endParaRPr>
                     </a:p>
                   </a:txBody>
-                  <a:tcPr marL="45720" marR="45720" marT="45720" marB="45720" anchor="ctr">
+                  <a:tcPr marL="36576" marR="36576" marT="36576" marB="36576" anchor="ctr">
                     <a:lnL w="6350" cap="flat" cmpd="sng" algn="ctr">
                       <a:solidFill>
                         <a:srgbClr val="E1E2E8"/>
@@ -11747,7 +11555,7 @@
                         <a:buNone/>
                       </a:pPr>
                       <a:r>
-                        <a:rPr lang="en-US" sz="1100" dirty="0">
+                        <a:rPr lang="en-US" sz="1000" dirty="0">
                           <a:solidFill>
                             <a:srgbClr val="2B2A4C"/>
                           </a:solidFill>
@@ -11757,14 +11565,14 @@
                         </a:rPr>
                         <a:t>30 / 146</a:t>
                       </a:r>
-                      <a:endParaRPr lang="en-US" sz="1100" dirty="0">
+                      <a:endParaRPr lang="en-US" sz="1000" dirty="0">
                         <a:latin typeface="Arial" charset="0"/>
                         <a:ea typeface="Arial" charset="0"/>
                         <a:cs typeface="Arial" charset="0"/>
                       </a:endParaRPr>
                     </a:p>
                   </a:txBody>
-                  <a:tcPr marL="45720" marR="45720" marT="45720" marB="45720" anchor="ctr">
+                  <a:tcPr marL="36576" marR="36576" marT="36576" marB="36576" anchor="ctr">
                     <a:lnL w="6350" cap="flat" cmpd="sng" algn="ctr">
                       <a:solidFill>
                         <a:srgbClr val="E1E2E8"/>
@@ -11815,7 +11623,7 @@
                         <a:buNone/>
                       </a:pPr>
                       <a:r>
-                        <a:rPr lang="en-US" sz="1100" dirty="0">
+                        <a:rPr lang="en-US" sz="1000" dirty="0">
                           <a:solidFill>
                             <a:srgbClr val="2B2A4C"/>
                           </a:solidFill>
@@ -11825,14 +11633,14 @@
                         </a:rPr>
                         <a:t>15 / 75</a:t>
                       </a:r>
-                      <a:endParaRPr lang="en-US" sz="1100" dirty="0">
+                      <a:endParaRPr lang="en-US" sz="1000" dirty="0">
                         <a:latin typeface="Arial" charset="0"/>
                         <a:ea typeface="Arial" charset="0"/>
                         <a:cs typeface="Arial" charset="0"/>
                       </a:endParaRPr>
                     </a:p>
                   </a:txBody>
-                  <a:tcPr marL="45720" marR="45720" marT="45720" marB="45720" anchor="ctr">
+                  <a:tcPr marL="36576" marR="36576" marT="36576" marB="36576" anchor="ctr">
                     <a:lnL w="6350" cap="flat" cmpd="sng" algn="ctr">
                       <a:solidFill>
                         <a:srgbClr val="E1E2E8"/>
@@ -11883,7 +11691,7 @@
                         <a:buNone/>
                       </a:pPr>
                       <a:r>
-                        <a:rPr lang="en-US" sz="1100" dirty="0">
+                        <a:rPr lang="en-US" sz="1000" dirty="0">
                           <a:solidFill>
                             <a:srgbClr val="2B2A4C"/>
                           </a:solidFill>
@@ -11893,14 +11701,14 @@
                         </a:rPr>
                         <a:t>15 / 73</a:t>
                       </a:r>
-                      <a:endParaRPr lang="en-US" sz="1100" dirty="0">
+                      <a:endParaRPr lang="en-US" sz="1000" dirty="0">
                         <a:latin typeface="Arial" charset="0"/>
                         <a:ea typeface="Arial" charset="0"/>
                         <a:cs typeface="Arial" charset="0"/>
                       </a:endParaRPr>
                     </a:p>
                   </a:txBody>
-                  <a:tcPr marL="45720" marR="45720" marT="45720" marB="45720" anchor="ctr">
+                  <a:tcPr marL="36576" marR="36576" marT="36576" marB="36576" anchor="ctr">
                     <a:lnL w="6350" cap="flat" cmpd="sng" algn="ctr">
                       <a:solidFill>
                         <a:srgbClr val="E1E2E8"/>
@@ -11943,7 +11751,7 @@
                   </a:tcPr>
                 </a:tc>
               </a:tr>
-              <a:tr h="320040">
+              <a:tr h="274320">
                 <a:tc>
                   <a:txBody>
                     <a:bodyPr/>
@@ -11953,7 +11761,7 @@
                         <a:buNone/>
                       </a:pPr>
                       <a:r>
-                        <a:rPr lang="en-US" sz="1100" dirty="0">
+                        <a:rPr lang="en-US" sz="1000" dirty="0">
                           <a:solidFill>
                             <a:srgbClr val="2B2A4C"/>
                           </a:solidFill>
@@ -11963,14 +11771,14 @@
                         </a:rPr>
                         <a:t>Swap, reward continues</a:t>
                       </a:r>
-                      <a:endParaRPr lang="en-US" sz="1100" dirty="0">
+                      <a:endParaRPr lang="en-US" sz="1000" dirty="0">
                         <a:latin typeface="Arial" charset="0"/>
                         <a:ea typeface="Arial" charset="0"/>
                         <a:cs typeface="Arial" charset="0"/>
                       </a:endParaRPr>
                     </a:p>
                   </a:txBody>
-                  <a:tcPr marL="45720" marR="45720" marT="45720" marB="45720" anchor="ctr">
+                  <a:tcPr marL="36576" marR="36576" marT="36576" marB="36576" anchor="ctr">
                     <a:lnL w="6350" cap="flat" cmpd="sng" algn="ctr">
                       <a:solidFill>
                         <a:srgbClr val="E1E2E8"/>
@@ -12021,7 +11829,7 @@
                         <a:buNone/>
                       </a:pPr>
                       <a:r>
-                        <a:rPr lang="en-US" sz="1100" dirty="0">
+                        <a:rPr lang="en-US" sz="1000" dirty="0">
                           <a:solidFill>
                             <a:srgbClr val="2B2A4C"/>
                           </a:solidFill>
@@ -12031,14 +11839,14 @@
                         </a:rPr>
                         <a:t>30 / 146</a:t>
                       </a:r>
-                      <a:endParaRPr lang="en-US" sz="1100" dirty="0">
+                      <a:endParaRPr lang="en-US" sz="1000" dirty="0">
                         <a:latin typeface="Arial" charset="0"/>
                         <a:ea typeface="Arial" charset="0"/>
                         <a:cs typeface="Arial" charset="0"/>
                       </a:endParaRPr>
                     </a:p>
                   </a:txBody>
-                  <a:tcPr marL="45720" marR="45720" marT="45720" marB="45720" anchor="ctr">
+                  <a:tcPr marL="36576" marR="36576" marT="36576" marB="36576" anchor="ctr">
                     <a:lnL w="6350" cap="flat" cmpd="sng" algn="ctr">
                       <a:solidFill>
                         <a:srgbClr val="E1E2E8"/>
@@ -12089,7 +11897,7 @@
                         <a:buNone/>
                       </a:pPr>
                       <a:r>
-                        <a:rPr lang="en-US" sz="1100" dirty="0">
+                        <a:rPr lang="en-US" sz="1000" dirty="0">
                           <a:solidFill>
                             <a:srgbClr val="2B2A4C"/>
                           </a:solidFill>
@@ -12099,14 +11907,14 @@
                         </a:rPr>
                         <a:t>15 / 75</a:t>
                       </a:r>
-                      <a:endParaRPr lang="en-US" sz="1100" dirty="0">
+                      <a:endParaRPr lang="en-US" sz="1000" dirty="0">
                         <a:latin typeface="Arial" charset="0"/>
                         <a:ea typeface="Arial" charset="0"/>
                         <a:cs typeface="Arial" charset="0"/>
                       </a:endParaRPr>
                     </a:p>
                   </a:txBody>
-                  <a:tcPr marL="45720" marR="45720" marT="45720" marB="45720" anchor="ctr">
+                  <a:tcPr marL="36576" marR="36576" marT="36576" marB="36576" anchor="ctr">
                     <a:lnL w="6350" cap="flat" cmpd="sng" algn="ctr">
                       <a:solidFill>
                         <a:srgbClr val="E1E2E8"/>
@@ -12157,7 +11965,7 @@
                         <a:buNone/>
                       </a:pPr>
                       <a:r>
-                        <a:rPr lang="en-US" sz="1100" dirty="0">
+                        <a:rPr lang="en-US" sz="1000" dirty="0">
                           <a:solidFill>
                             <a:srgbClr val="2B2A4C"/>
                           </a:solidFill>
@@ -12167,14 +11975,836 @@
                         </a:rPr>
                         <a:t>15 / 73</a:t>
                       </a:r>
-                      <a:endParaRPr lang="en-US" sz="1100" dirty="0">
+                      <a:endParaRPr lang="en-US" sz="1000" dirty="0">
                         <a:latin typeface="Arial" charset="0"/>
                         <a:ea typeface="Arial" charset="0"/>
                         <a:cs typeface="Arial" charset="0"/>
                       </a:endParaRPr>
                     </a:p>
                   </a:txBody>
-                  <a:tcPr marL="45720" marR="45720" marT="45720" marB="45720" anchor="ctr">
+                  <a:tcPr marL="36576" marR="36576" marT="36576" marB="36576" anchor="ctr">
+                    <a:lnL w="6350" cap="flat" cmpd="sng" algn="ctr">
+                      <a:solidFill>
+                        <a:srgbClr val="E1E2E8"/>
+                      </a:solidFill>
+                      <a:prstDash val="solid"/>
+                      <a:round/>
+                      <a:headEnd type="none" w="med" len="med"/>
+                      <a:tailEnd type="none" w="med" len="med"/>
+                    </a:lnL>
+                    <a:lnR w="6350" cap="flat" cmpd="sng" algn="ctr">
+                      <a:solidFill>
+                        <a:srgbClr val="E1E2E8"/>
+                      </a:solidFill>
+                      <a:prstDash val="solid"/>
+                      <a:round/>
+                      <a:headEnd type="none" w="med" len="med"/>
+                      <a:tailEnd type="none" w="med" len="med"/>
+                    </a:lnR>
+                    <a:lnT w="6350" cap="flat" cmpd="sng" algn="ctr">
+                      <a:solidFill>
+                        <a:srgbClr val="E1E2E8"/>
+                      </a:solidFill>
+                      <a:prstDash val="solid"/>
+                      <a:round/>
+                      <a:headEnd type="none" w="med" len="med"/>
+                      <a:tailEnd type="none" w="med" len="med"/>
+                    </a:lnT>
+                    <a:lnB w="6350" cap="flat" cmpd="sng" algn="ctr">
+                      <a:solidFill>
+                        <a:srgbClr val="E1E2E8"/>
+                      </a:solidFill>
+                      <a:prstDash val="solid"/>
+                      <a:round/>
+                      <a:headEnd type="none" w="med" len="med"/>
+                      <a:tailEnd type="none" w="med" len="med"/>
+                    </a:lnB>
+                    <a:solidFill>
+                      <a:srgbClr val="FFFFFF"/>
+                    </a:solidFill>
+                  </a:tcPr>
+                </a:tc>
+              </a:tr>
+              <a:tr h="274320">
+                <a:tc>
+                  <a:txBody>
+                    <a:bodyPr/>
+                    <a:lstStyle/>
+                    <a:p>
+                      <a:pPr indent="0" marL="0">
+                        <a:buNone/>
+                      </a:pPr>
+                      <a:r>
+                        <a:rPr lang="en-US" sz="1000" dirty="0">
+                          <a:solidFill>
+                            <a:srgbClr val="2B2A4C"/>
+                          </a:solidFill>
+                          <a:latin typeface="Arial" pitchFamily="34" charset="0"/>
+                          <a:ea typeface="Arial" pitchFamily="34" charset="-122"/>
+                          <a:cs typeface="Arial" pitchFamily="34" charset="-120"/>
+                        </a:rPr>
+                        <a:t>· both kept, reward continues</a:t>
+                      </a:r>
+                      <a:endParaRPr lang="en-US" sz="1000" dirty="0">
+                        <a:latin typeface="Arial" charset="0"/>
+                        <a:ea typeface="Arial" charset="0"/>
+                        <a:cs typeface="Arial" charset="0"/>
+                      </a:endParaRPr>
+                    </a:p>
+                  </a:txBody>
+                  <a:tcPr marL="36576" marR="36576" marT="36576" marB="36576" anchor="ctr">
+                    <a:lnL w="6350" cap="flat" cmpd="sng" algn="ctr">
+                      <a:solidFill>
+                        <a:srgbClr val="E1E2E8"/>
+                      </a:solidFill>
+                      <a:prstDash val="solid"/>
+                      <a:round/>
+                      <a:headEnd type="none" w="med" len="med"/>
+                      <a:tailEnd type="none" w="med" len="med"/>
+                    </a:lnL>
+                    <a:lnR w="6350" cap="flat" cmpd="sng" algn="ctr">
+                      <a:solidFill>
+                        <a:srgbClr val="E1E2E8"/>
+                      </a:solidFill>
+                      <a:prstDash val="solid"/>
+                      <a:round/>
+                      <a:headEnd type="none" w="med" len="med"/>
+                      <a:tailEnd type="none" w="med" len="med"/>
+                    </a:lnR>
+                    <a:lnT w="6350" cap="flat" cmpd="sng" algn="ctr">
+                      <a:solidFill>
+                        <a:srgbClr val="E1E2E8"/>
+                      </a:solidFill>
+                      <a:prstDash val="solid"/>
+                      <a:round/>
+                      <a:headEnd type="none" w="med" len="med"/>
+                      <a:tailEnd type="none" w="med" len="med"/>
+                    </a:lnT>
+                    <a:lnB w="6350" cap="flat" cmpd="sng" algn="ctr">
+                      <a:solidFill>
+                        <a:srgbClr val="E1E2E8"/>
+                      </a:solidFill>
+                      <a:prstDash val="solid"/>
+                      <a:round/>
+                      <a:headEnd type="none" w="med" len="med"/>
+                      <a:tailEnd type="none" w="med" len="med"/>
+                    </a:lnB>
+                    <a:solidFill>
+                      <a:srgbClr val="FFFFFF"/>
+                    </a:solidFill>
+                  </a:tcPr>
+                </a:tc>
+                <a:tc>
+                  <a:txBody>
+                    <a:bodyPr/>
+                    <a:lstStyle/>
+                    <a:p>
+                      <a:pPr algn="ctr" indent="0" marL="0">
+                        <a:buNone/>
+                      </a:pPr>
+                      <a:r>
+                        <a:rPr lang="en-US" sz="1000" dirty="0">
+                          <a:solidFill>
+                            <a:srgbClr val="2B2A4C"/>
+                          </a:solidFill>
+                          <a:latin typeface="Arial" pitchFamily="34" charset="0"/>
+                          <a:ea typeface="Arial" pitchFamily="34" charset="-122"/>
+                          <a:cs typeface="Arial" pitchFamily="34" charset="-120"/>
+                        </a:rPr>
+                        <a:t>15 / 73</a:t>
+                      </a:r>
+                      <a:endParaRPr lang="en-US" sz="1000" dirty="0">
+                        <a:latin typeface="Arial" charset="0"/>
+                        <a:ea typeface="Arial" charset="0"/>
+                        <a:cs typeface="Arial" charset="0"/>
+                      </a:endParaRPr>
+                    </a:p>
+                  </a:txBody>
+                  <a:tcPr marL="36576" marR="36576" marT="36576" marB="36576" anchor="ctr">
+                    <a:lnL w="6350" cap="flat" cmpd="sng" algn="ctr">
+                      <a:solidFill>
+                        <a:srgbClr val="E1E2E8"/>
+                      </a:solidFill>
+                      <a:prstDash val="solid"/>
+                      <a:round/>
+                      <a:headEnd type="none" w="med" len="med"/>
+                      <a:tailEnd type="none" w="med" len="med"/>
+                    </a:lnL>
+                    <a:lnR w="6350" cap="flat" cmpd="sng" algn="ctr">
+                      <a:solidFill>
+                        <a:srgbClr val="E1E2E8"/>
+                      </a:solidFill>
+                      <a:prstDash val="solid"/>
+                      <a:round/>
+                      <a:headEnd type="none" w="med" len="med"/>
+                      <a:tailEnd type="none" w="med" len="med"/>
+                    </a:lnR>
+                    <a:lnT w="6350" cap="flat" cmpd="sng" algn="ctr">
+                      <a:solidFill>
+                        <a:srgbClr val="E1E2E8"/>
+                      </a:solidFill>
+                      <a:prstDash val="solid"/>
+                      <a:round/>
+                      <a:headEnd type="none" w="med" len="med"/>
+                      <a:tailEnd type="none" w="med" len="med"/>
+                    </a:lnT>
+                    <a:lnB w="6350" cap="flat" cmpd="sng" algn="ctr">
+                      <a:solidFill>
+                        <a:srgbClr val="E1E2E8"/>
+                      </a:solidFill>
+                      <a:prstDash val="solid"/>
+                      <a:round/>
+                      <a:headEnd type="none" w="med" len="med"/>
+                      <a:tailEnd type="none" w="med" len="med"/>
+                    </a:lnB>
+                    <a:solidFill>
+                      <a:srgbClr val="FFFFFF"/>
+                    </a:solidFill>
+                  </a:tcPr>
+                </a:tc>
+                <a:tc>
+                  <a:txBody>
+                    <a:bodyPr/>
+                    <a:lstStyle/>
+                    <a:p>
+                      <a:pPr algn="ctr" indent="0" marL="0">
+                        <a:buNone/>
+                      </a:pPr>
+                      <a:r>
+                        <a:rPr lang="en-US" sz="1000" dirty="0">
+                          <a:solidFill>
+                            <a:srgbClr val="2B2A4C"/>
+                          </a:solidFill>
+                          <a:latin typeface="Arial" pitchFamily="34" charset="0"/>
+                          <a:ea typeface="Arial" pitchFamily="34" charset="-122"/>
+                          <a:cs typeface="Arial" pitchFamily="34" charset="-120"/>
+                        </a:rPr>
+                        <a:t>15 / 75</a:t>
+                      </a:r>
+                      <a:endParaRPr lang="en-US" sz="1000" dirty="0">
+                        <a:latin typeface="Arial" charset="0"/>
+                        <a:ea typeface="Arial" charset="0"/>
+                        <a:cs typeface="Arial" charset="0"/>
+                      </a:endParaRPr>
+                    </a:p>
+                  </a:txBody>
+                  <a:tcPr marL="36576" marR="36576" marT="36576" marB="36576" anchor="ctr">
+                    <a:lnL w="6350" cap="flat" cmpd="sng" algn="ctr">
+                      <a:solidFill>
+                        <a:srgbClr val="E1E2E8"/>
+                      </a:solidFill>
+                      <a:prstDash val="solid"/>
+                      <a:round/>
+                      <a:headEnd type="none" w="med" len="med"/>
+                      <a:tailEnd type="none" w="med" len="med"/>
+                    </a:lnL>
+                    <a:lnR w="6350" cap="flat" cmpd="sng" algn="ctr">
+                      <a:solidFill>
+                        <a:srgbClr val="E1E2E8"/>
+                      </a:solidFill>
+                      <a:prstDash val="solid"/>
+                      <a:round/>
+                      <a:headEnd type="none" w="med" len="med"/>
+                      <a:tailEnd type="none" w="med" len="med"/>
+                    </a:lnR>
+                    <a:lnT w="6350" cap="flat" cmpd="sng" algn="ctr">
+                      <a:solidFill>
+                        <a:srgbClr val="E1E2E8"/>
+                      </a:solidFill>
+                      <a:prstDash val="solid"/>
+                      <a:round/>
+                      <a:headEnd type="none" w="med" len="med"/>
+                      <a:tailEnd type="none" w="med" len="med"/>
+                    </a:lnT>
+                    <a:lnB w="6350" cap="flat" cmpd="sng" algn="ctr">
+                      <a:solidFill>
+                        <a:srgbClr val="E1E2E8"/>
+                      </a:solidFill>
+                      <a:prstDash val="solid"/>
+                      <a:round/>
+                      <a:headEnd type="none" w="med" len="med"/>
+                      <a:tailEnd type="none" w="med" len="med"/>
+                    </a:lnB>
+                    <a:solidFill>
+                      <a:srgbClr val="FFFFFF"/>
+                    </a:solidFill>
+                  </a:tcPr>
+                </a:tc>
+                <a:tc>
+                  <a:txBody>
+                    <a:bodyPr/>
+                    <a:lstStyle/>
+                    <a:p>
+                      <a:pPr algn="ctr" indent="0" marL="0">
+                        <a:buNone/>
+                      </a:pPr>
+                      <a:r>
+                        <a:rPr lang="en-US" sz="1000" dirty="0">
+                          <a:solidFill>
+                            <a:srgbClr val="2B2A4C"/>
+                          </a:solidFill>
+                          <a:latin typeface="Arial" pitchFamily="34" charset="0"/>
+                          <a:ea typeface="Arial" pitchFamily="34" charset="-122"/>
+                          <a:cs typeface="Arial" pitchFamily="34" charset="-120"/>
+                        </a:rPr>
+                        <a:t>15 / 73</a:t>
+                      </a:r>
+                      <a:endParaRPr lang="en-US" sz="1000" dirty="0">
+                        <a:latin typeface="Arial" charset="0"/>
+                        <a:ea typeface="Arial" charset="0"/>
+                        <a:cs typeface="Arial" charset="0"/>
+                      </a:endParaRPr>
+                    </a:p>
+                  </a:txBody>
+                  <a:tcPr marL="36576" marR="36576" marT="36576" marB="36576" anchor="ctr">
+                    <a:lnL w="6350" cap="flat" cmpd="sng" algn="ctr">
+                      <a:solidFill>
+                        <a:srgbClr val="E1E2E8"/>
+                      </a:solidFill>
+                      <a:prstDash val="solid"/>
+                      <a:round/>
+                      <a:headEnd type="none" w="med" len="med"/>
+                      <a:tailEnd type="none" w="med" len="med"/>
+                    </a:lnL>
+                    <a:lnR w="6350" cap="flat" cmpd="sng" algn="ctr">
+                      <a:solidFill>
+                        <a:srgbClr val="E1E2E8"/>
+                      </a:solidFill>
+                      <a:prstDash val="solid"/>
+                      <a:round/>
+                      <a:headEnd type="none" w="med" len="med"/>
+                      <a:tailEnd type="none" w="med" len="med"/>
+                    </a:lnR>
+                    <a:lnT w="6350" cap="flat" cmpd="sng" algn="ctr">
+                      <a:solidFill>
+                        <a:srgbClr val="E1E2E8"/>
+                      </a:solidFill>
+                      <a:prstDash val="solid"/>
+                      <a:round/>
+                      <a:headEnd type="none" w="med" len="med"/>
+                      <a:tailEnd type="none" w="med" len="med"/>
+                    </a:lnT>
+                    <a:lnB w="6350" cap="flat" cmpd="sng" algn="ctr">
+                      <a:solidFill>
+                        <a:srgbClr val="E1E2E8"/>
+                      </a:solidFill>
+                      <a:prstDash val="solid"/>
+                      <a:round/>
+                      <a:headEnd type="none" w="med" len="med"/>
+                      <a:tailEnd type="none" w="med" len="med"/>
+                    </a:lnB>
+                    <a:solidFill>
+                      <a:srgbClr val="FFFFFF"/>
+                    </a:solidFill>
+                  </a:tcPr>
+                </a:tc>
+              </a:tr>
+              <a:tr h="274320">
+                <a:tc>
+                  <a:txBody>
+                    <a:bodyPr/>
+                    <a:lstStyle/>
+                    <a:p>
+                      <a:pPr indent="0" marL="0">
+                        <a:buNone/>
+                      </a:pPr>
+                      <a:r>
+                        <a:rPr lang="en-US" sz="1000" dirty="0">
+                          <a:solidFill>
+                            <a:srgbClr val="2B2A4C"/>
+                          </a:solidFill>
+                          <a:latin typeface="Arial" pitchFamily="34" charset="0"/>
+                          <a:ea typeface="Arial" pitchFamily="34" charset="-122"/>
+                          <a:cs typeface="Arial" pitchFamily="34" charset="-120"/>
+                        </a:rPr>
+                        <a:t>· both wiped, reward continues</a:t>
+                      </a:r>
+                      <a:endParaRPr lang="en-US" sz="1000" dirty="0">
+                        <a:latin typeface="Arial" charset="0"/>
+                        <a:ea typeface="Arial" charset="0"/>
+                        <a:cs typeface="Arial" charset="0"/>
+                      </a:endParaRPr>
+                    </a:p>
+                  </a:txBody>
+                  <a:tcPr marL="36576" marR="36576" marT="36576" marB="36576" anchor="ctr">
+                    <a:lnL w="6350" cap="flat" cmpd="sng" algn="ctr">
+                      <a:solidFill>
+                        <a:srgbClr val="E1E2E8"/>
+                      </a:solidFill>
+                      <a:prstDash val="solid"/>
+                      <a:round/>
+                      <a:headEnd type="none" w="med" len="med"/>
+                      <a:tailEnd type="none" w="med" len="med"/>
+                    </a:lnL>
+                    <a:lnR w="6350" cap="flat" cmpd="sng" algn="ctr">
+                      <a:solidFill>
+                        <a:srgbClr val="E1E2E8"/>
+                      </a:solidFill>
+                      <a:prstDash val="solid"/>
+                      <a:round/>
+                      <a:headEnd type="none" w="med" len="med"/>
+                      <a:tailEnd type="none" w="med" len="med"/>
+                    </a:lnR>
+                    <a:lnT w="6350" cap="flat" cmpd="sng" algn="ctr">
+                      <a:solidFill>
+                        <a:srgbClr val="E1E2E8"/>
+                      </a:solidFill>
+                      <a:prstDash val="solid"/>
+                      <a:round/>
+                      <a:headEnd type="none" w="med" len="med"/>
+                      <a:tailEnd type="none" w="med" len="med"/>
+                    </a:lnT>
+                    <a:lnB w="6350" cap="flat" cmpd="sng" algn="ctr">
+                      <a:solidFill>
+                        <a:srgbClr val="E1E2E8"/>
+                      </a:solidFill>
+                      <a:prstDash val="solid"/>
+                      <a:round/>
+                      <a:headEnd type="none" w="med" len="med"/>
+                      <a:tailEnd type="none" w="med" len="med"/>
+                    </a:lnB>
+                    <a:solidFill>
+                      <a:srgbClr val="FFFFFF"/>
+                    </a:solidFill>
+                  </a:tcPr>
+                </a:tc>
+                <a:tc>
+                  <a:txBody>
+                    <a:bodyPr/>
+                    <a:lstStyle/>
+                    <a:p>
+                      <a:pPr algn="ctr" indent="0" marL="0">
+                        <a:buNone/>
+                      </a:pPr>
+                      <a:r>
+                        <a:rPr lang="en-US" sz="1000" dirty="0">
+                          <a:solidFill>
+                            <a:srgbClr val="2B2A4C"/>
+                          </a:solidFill>
+                          <a:latin typeface="Arial" pitchFamily="34" charset="0"/>
+                          <a:ea typeface="Arial" pitchFamily="34" charset="-122"/>
+                          <a:cs typeface="Arial" pitchFamily="34" charset="-120"/>
+                        </a:rPr>
+                        <a:t>15 / 73</a:t>
+                      </a:r>
+                      <a:endParaRPr lang="en-US" sz="1000" dirty="0">
+                        <a:latin typeface="Arial" charset="0"/>
+                        <a:ea typeface="Arial" charset="0"/>
+                        <a:cs typeface="Arial" charset="0"/>
+                      </a:endParaRPr>
+                    </a:p>
+                  </a:txBody>
+                  <a:tcPr marL="36576" marR="36576" marT="36576" marB="36576" anchor="ctr">
+                    <a:lnL w="6350" cap="flat" cmpd="sng" algn="ctr">
+                      <a:solidFill>
+                        <a:srgbClr val="E1E2E8"/>
+                      </a:solidFill>
+                      <a:prstDash val="solid"/>
+                      <a:round/>
+                      <a:headEnd type="none" w="med" len="med"/>
+                      <a:tailEnd type="none" w="med" len="med"/>
+                    </a:lnL>
+                    <a:lnR w="6350" cap="flat" cmpd="sng" algn="ctr">
+                      <a:solidFill>
+                        <a:srgbClr val="E1E2E8"/>
+                      </a:solidFill>
+                      <a:prstDash val="solid"/>
+                      <a:round/>
+                      <a:headEnd type="none" w="med" len="med"/>
+                      <a:tailEnd type="none" w="med" len="med"/>
+                    </a:lnR>
+                    <a:lnT w="6350" cap="flat" cmpd="sng" algn="ctr">
+                      <a:solidFill>
+                        <a:srgbClr val="E1E2E8"/>
+                      </a:solidFill>
+                      <a:prstDash val="solid"/>
+                      <a:round/>
+                      <a:headEnd type="none" w="med" len="med"/>
+                      <a:tailEnd type="none" w="med" len="med"/>
+                    </a:lnT>
+                    <a:lnB w="6350" cap="flat" cmpd="sng" algn="ctr">
+                      <a:solidFill>
+                        <a:srgbClr val="E1E2E8"/>
+                      </a:solidFill>
+                      <a:prstDash val="solid"/>
+                      <a:round/>
+                      <a:headEnd type="none" w="med" len="med"/>
+                      <a:tailEnd type="none" w="med" len="med"/>
+                    </a:lnB>
+                    <a:solidFill>
+                      <a:srgbClr val="FFFFFF"/>
+                    </a:solidFill>
+                  </a:tcPr>
+                </a:tc>
+                <a:tc>
+                  <a:txBody>
+                    <a:bodyPr/>
+                    <a:lstStyle/>
+                    <a:p>
+                      <a:pPr algn="ctr" indent="0" marL="0">
+                        <a:buNone/>
+                      </a:pPr>
+                      <a:r>
+                        <a:rPr lang="en-US" sz="1000" dirty="0">
+                          <a:solidFill>
+                            <a:srgbClr val="2B2A4C"/>
+                          </a:solidFill>
+                          <a:latin typeface="Arial" pitchFamily="34" charset="0"/>
+                          <a:ea typeface="Arial" pitchFamily="34" charset="-122"/>
+                          <a:cs typeface="Arial" pitchFamily="34" charset="-120"/>
+                        </a:rPr>
+                        <a:t>15 / 75</a:t>
+                      </a:r>
+                      <a:endParaRPr lang="en-US" sz="1000" dirty="0">
+                        <a:latin typeface="Arial" charset="0"/>
+                        <a:ea typeface="Arial" charset="0"/>
+                        <a:cs typeface="Arial" charset="0"/>
+                      </a:endParaRPr>
+                    </a:p>
+                  </a:txBody>
+                  <a:tcPr marL="36576" marR="36576" marT="36576" marB="36576" anchor="ctr">
+                    <a:lnL w="6350" cap="flat" cmpd="sng" algn="ctr">
+                      <a:solidFill>
+                        <a:srgbClr val="E1E2E8"/>
+                      </a:solidFill>
+                      <a:prstDash val="solid"/>
+                      <a:round/>
+                      <a:headEnd type="none" w="med" len="med"/>
+                      <a:tailEnd type="none" w="med" len="med"/>
+                    </a:lnL>
+                    <a:lnR w="6350" cap="flat" cmpd="sng" algn="ctr">
+                      <a:solidFill>
+                        <a:srgbClr val="E1E2E8"/>
+                      </a:solidFill>
+                      <a:prstDash val="solid"/>
+                      <a:round/>
+                      <a:headEnd type="none" w="med" len="med"/>
+                      <a:tailEnd type="none" w="med" len="med"/>
+                    </a:lnR>
+                    <a:lnT w="6350" cap="flat" cmpd="sng" algn="ctr">
+                      <a:solidFill>
+                        <a:srgbClr val="E1E2E8"/>
+                      </a:solidFill>
+                      <a:prstDash val="solid"/>
+                      <a:round/>
+                      <a:headEnd type="none" w="med" len="med"/>
+                      <a:tailEnd type="none" w="med" len="med"/>
+                    </a:lnT>
+                    <a:lnB w="6350" cap="flat" cmpd="sng" algn="ctr">
+                      <a:solidFill>
+                        <a:srgbClr val="E1E2E8"/>
+                      </a:solidFill>
+                      <a:prstDash val="solid"/>
+                      <a:round/>
+                      <a:headEnd type="none" w="med" len="med"/>
+                      <a:tailEnd type="none" w="med" len="med"/>
+                    </a:lnB>
+                    <a:solidFill>
+                      <a:srgbClr val="FFFFFF"/>
+                    </a:solidFill>
+                  </a:tcPr>
+                </a:tc>
+                <a:tc>
+                  <a:txBody>
+                    <a:bodyPr/>
+                    <a:lstStyle/>
+                    <a:p>
+                      <a:pPr algn="ctr" indent="0" marL="0">
+                        <a:buNone/>
+                      </a:pPr>
+                      <a:r>
+                        <a:rPr lang="en-US" sz="1000" dirty="0">
+                          <a:solidFill>
+                            <a:srgbClr val="2B2A4C"/>
+                          </a:solidFill>
+                          <a:latin typeface="Arial" pitchFamily="34" charset="0"/>
+                          <a:ea typeface="Arial" pitchFamily="34" charset="-122"/>
+                          <a:cs typeface="Arial" pitchFamily="34" charset="-120"/>
+                        </a:rPr>
+                        <a:t>15 / 73</a:t>
+                      </a:r>
+                      <a:endParaRPr lang="en-US" sz="1000" dirty="0">
+                        <a:latin typeface="Arial" charset="0"/>
+                        <a:ea typeface="Arial" charset="0"/>
+                        <a:cs typeface="Arial" charset="0"/>
+                      </a:endParaRPr>
+                    </a:p>
+                  </a:txBody>
+                  <a:tcPr marL="36576" marR="36576" marT="36576" marB="36576" anchor="ctr">
+                    <a:lnL w="6350" cap="flat" cmpd="sng" algn="ctr">
+                      <a:solidFill>
+                        <a:srgbClr val="E1E2E8"/>
+                      </a:solidFill>
+                      <a:prstDash val="solid"/>
+                      <a:round/>
+                      <a:headEnd type="none" w="med" len="med"/>
+                      <a:tailEnd type="none" w="med" len="med"/>
+                    </a:lnL>
+                    <a:lnR w="6350" cap="flat" cmpd="sng" algn="ctr">
+                      <a:solidFill>
+                        <a:srgbClr val="E1E2E8"/>
+                      </a:solidFill>
+                      <a:prstDash val="solid"/>
+                      <a:round/>
+                      <a:headEnd type="none" w="med" len="med"/>
+                      <a:tailEnd type="none" w="med" len="med"/>
+                    </a:lnR>
+                    <a:lnT w="6350" cap="flat" cmpd="sng" algn="ctr">
+                      <a:solidFill>
+                        <a:srgbClr val="E1E2E8"/>
+                      </a:solidFill>
+                      <a:prstDash val="solid"/>
+                      <a:round/>
+                      <a:headEnd type="none" w="med" len="med"/>
+                      <a:tailEnd type="none" w="med" len="med"/>
+                    </a:lnT>
+                    <a:lnB w="6350" cap="flat" cmpd="sng" algn="ctr">
+                      <a:solidFill>
+                        <a:srgbClr val="E1E2E8"/>
+                      </a:solidFill>
+                      <a:prstDash val="solid"/>
+                      <a:round/>
+                      <a:headEnd type="none" w="med" len="med"/>
+                      <a:tailEnd type="none" w="med" len="med"/>
+                    </a:lnB>
+                    <a:solidFill>
+                      <a:srgbClr val="FFFFFF"/>
+                    </a:solidFill>
+                  </a:tcPr>
+                </a:tc>
+              </a:tr>
+              <a:tr h="274320">
+                <a:tc>
+                  <a:txBody>
+                    <a:bodyPr/>
+                    <a:lstStyle/>
+                    <a:p>
+                      <a:pPr indent="0" marL="0">
+                        <a:buNone/>
+                      </a:pPr>
+                      <a:r>
+                        <a:rPr lang="en-US" sz="1000" dirty="0">
+                          <a:solidFill>
+                            <a:srgbClr val="2B2A4C"/>
+                          </a:solidFill>
+                          <a:latin typeface="Arial" pitchFamily="34" charset="0"/>
+                          <a:ea typeface="Arial" pitchFamily="34" charset="-122"/>
+                          <a:cs typeface="Arial" pitchFamily="34" charset="-120"/>
+                        </a:rPr>
+                        <a:t>Channel repaired, colluding</a:t>
+                      </a:r>
+                      <a:endParaRPr lang="en-US" sz="1000" dirty="0">
+                        <a:latin typeface="Arial" charset="0"/>
+                        <a:ea typeface="Arial" charset="0"/>
+                        <a:cs typeface="Arial" charset="0"/>
+                      </a:endParaRPr>
+                    </a:p>
+                  </a:txBody>
+                  <a:tcPr marL="36576" marR="36576" marT="36576" marB="36576" anchor="ctr">
+                    <a:lnL w="6350" cap="flat" cmpd="sng" algn="ctr">
+                      <a:solidFill>
+                        <a:srgbClr val="E1E2E8"/>
+                      </a:solidFill>
+                      <a:prstDash val="solid"/>
+                      <a:round/>
+                      <a:headEnd type="none" w="med" len="med"/>
+                      <a:tailEnd type="none" w="med" len="med"/>
+                    </a:lnL>
+                    <a:lnR w="6350" cap="flat" cmpd="sng" algn="ctr">
+                      <a:solidFill>
+                        <a:srgbClr val="E1E2E8"/>
+                      </a:solidFill>
+                      <a:prstDash val="solid"/>
+                      <a:round/>
+                      <a:headEnd type="none" w="med" len="med"/>
+                      <a:tailEnd type="none" w="med" len="med"/>
+                    </a:lnR>
+                    <a:lnT w="6350" cap="flat" cmpd="sng" algn="ctr">
+                      <a:solidFill>
+                        <a:srgbClr val="E1E2E8"/>
+                      </a:solidFill>
+                      <a:prstDash val="solid"/>
+                      <a:round/>
+                      <a:headEnd type="none" w="med" len="med"/>
+                      <a:tailEnd type="none" w="med" len="med"/>
+                    </a:lnT>
+                    <a:lnB w="6350" cap="flat" cmpd="sng" algn="ctr">
+                      <a:solidFill>
+                        <a:srgbClr val="E1E2E8"/>
+                      </a:solidFill>
+                      <a:prstDash val="solid"/>
+                      <a:round/>
+                      <a:headEnd type="none" w="med" len="med"/>
+                      <a:tailEnd type="none" w="med" len="med"/>
+                    </a:lnB>
+                    <a:solidFill>
+                      <a:srgbClr val="FFFFFF"/>
+                    </a:solidFill>
+                  </a:tcPr>
+                </a:tc>
+                <a:tc>
+                  <a:txBody>
+                    <a:bodyPr/>
+                    <a:lstStyle/>
+                    <a:p>
+                      <a:pPr algn="ctr" indent="0" marL="0">
+                        <a:buNone/>
+                      </a:pPr>
+                      <a:r>
+                        <a:rPr lang="en-US" sz="1000" dirty="0">
+                          <a:solidFill>
+                            <a:srgbClr val="2B2A4C"/>
+                          </a:solidFill>
+                          <a:latin typeface="Arial" pitchFamily="34" charset="0"/>
+                          <a:ea typeface="Arial" pitchFamily="34" charset="-122"/>
+                          <a:cs typeface="Arial" pitchFamily="34" charset="-120"/>
+                        </a:rPr>
+                        <a:t>15 / 45</a:t>
+                      </a:r>
+                      <a:endParaRPr lang="en-US" sz="1000" dirty="0">
+                        <a:latin typeface="Arial" charset="0"/>
+                        <a:ea typeface="Arial" charset="0"/>
+                        <a:cs typeface="Arial" charset="0"/>
+                      </a:endParaRPr>
+                    </a:p>
+                  </a:txBody>
+                  <a:tcPr marL="36576" marR="36576" marT="36576" marB="36576" anchor="ctr">
+                    <a:lnL w="6350" cap="flat" cmpd="sng" algn="ctr">
+                      <a:solidFill>
+                        <a:srgbClr val="E1E2E8"/>
+                      </a:solidFill>
+                      <a:prstDash val="solid"/>
+                      <a:round/>
+                      <a:headEnd type="none" w="med" len="med"/>
+                      <a:tailEnd type="none" w="med" len="med"/>
+                    </a:lnL>
+                    <a:lnR w="6350" cap="flat" cmpd="sng" algn="ctr">
+                      <a:solidFill>
+                        <a:srgbClr val="E1E2E8"/>
+                      </a:solidFill>
+                      <a:prstDash val="solid"/>
+                      <a:round/>
+                      <a:headEnd type="none" w="med" len="med"/>
+                      <a:tailEnd type="none" w="med" len="med"/>
+                    </a:lnR>
+                    <a:lnT w="6350" cap="flat" cmpd="sng" algn="ctr">
+                      <a:solidFill>
+                        <a:srgbClr val="E1E2E8"/>
+                      </a:solidFill>
+                      <a:prstDash val="solid"/>
+                      <a:round/>
+                      <a:headEnd type="none" w="med" len="med"/>
+                      <a:tailEnd type="none" w="med" len="med"/>
+                    </a:lnT>
+                    <a:lnB w="6350" cap="flat" cmpd="sng" algn="ctr">
+                      <a:solidFill>
+                        <a:srgbClr val="E1E2E8"/>
+                      </a:solidFill>
+                      <a:prstDash val="solid"/>
+                      <a:round/>
+                      <a:headEnd type="none" w="med" len="med"/>
+                      <a:tailEnd type="none" w="med" len="med"/>
+                    </a:lnB>
+                    <a:solidFill>
+                      <a:srgbClr val="FFFFFF"/>
+                    </a:solidFill>
+                  </a:tcPr>
+                </a:tc>
+                <a:tc>
+                  <a:txBody>
+                    <a:bodyPr/>
+                    <a:lstStyle/>
+                    <a:p>
+                      <a:pPr algn="ctr" indent="0" marL="0">
+                        <a:buNone/>
+                      </a:pPr>
+                      <a:r>
+                        <a:rPr lang="en-US" sz="1000" dirty="0">
+                          <a:solidFill>
+                            <a:srgbClr val="2B2A4C"/>
+                          </a:solidFill>
+                          <a:latin typeface="Arial" pitchFamily="34" charset="0"/>
+                          <a:ea typeface="Arial" pitchFamily="34" charset="-122"/>
+                          <a:cs typeface="Arial" pitchFamily="34" charset="-120"/>
+                        </a:rPr>
+                        <a:t>15 / 45</a:t>
+                      </a:r>
+                      <a:endParaRPr lang="en-US" sz="1000" dirty="0">
+                        <a:latin typeface="Arial" charset="0"/>
+                        <a:ea typeface="Arial" charset="0"/>
+                        <a:cs typeface="Arial" charset="0"/>
+                      </a:endParaRPr>
+                    </a:p>
+                  </a:txBody>
+                  <a:tcPr marL="36576" marR="36576" marT="36576" marB="36576" anchor="ctr">
+                    <a:lnL w="6350" cap="flat" cmpd="sng" algn="ctr">
+                      <a:solidFill>
+                        <a:srgbClr val="E1E2E8"/>
+                      </a:solidFill>
+                      <a:prstDash val="solid"/>
+                      <a:round/>
+                      <a:headEnd type="none" w="med" len="med"/>
+                      <a:tailEnd type="none" w="med" len="med"/>
+                    </a:lnL>
+                    <a:lnR w="6350" cap="flat" cmpd="sng" algn="ctr">
+                      <a:solidFill>
+                        <a:srgbClr val="E1E2E8"/>
+                      </a:solidFill>
+                      <a:prstDash val="solid"/>
+                      <a:round/>
+                      <a:headEnd type="none" w="med" len="med"/>
+                      <a:tailEnd type="none" w="med" len="med"/>
+                    </a:lnR>
+                    <a:lnT w="6350" cap="flat" cmpd="sng" algn="ctr">
+                      <a:solidFill>
+                        <a:srgbClr val="E1E2E8"/>
+                      </a:solidFill>
+                      <a:prstDash val="solid"/>
+                      <a:round/>
+                      <a:headEnd type="none" w="med" len="med"/>
+                      <a:tailEnd type="none" w="med" len="med"/>
+                    </a:lnT>
+                    <a:lnB w="6350" cap="flat" cmpd="sng" algn="ctr">
+                      <a:solidFill>
+                        <a:srgbClr val="E1E2E8"/>
+                      </a:solidFill>
+                      <a:prstDash val="solid"/>
+                      <a:round/>
+                      <a:headEnd type="none" w="med" len="med"/>
+                      <a:tailEnd type="none" w="med" len="med"/>
+                    </a:lnB>
+                    <a:solidFill>
+                      <a:srgbClr val="FFFFFF"/>
+                    </a:solidFill>
+                  </a:tcPr>
+                </a:tc>
+                <a:tc>
+                  <a:txBody>
+                    <a:bodyPr/>
+                    <a:lstStyle/>
+                    <a:p>
+                      <a:pPr algn="ctr" indent="0" marL="0">
+                        <a:buNone/>
+                      </a:pPr>
+                      <a:r>
+                        <a:rPr lang="en-US" sz="1000" dirty="0">
+                          <a:solidFill>
+                            <a:srgbClr val="2B2A4C"/>
+                          </a:solidFill>
+                          <a:latin typeface="Arial" pitchFamily="34" charset="0"/>
+                          <a:ea typeface="Arial" pitchFamily="34" charset="-122"/>
+                          <a:cs typeface="Arial" pitchFamily="34" charset="-120"/>
+                        </a:rPr>
+                        <a:t>15 / 45</a:t>
+                      </a:r>
+                      <a:endParaRPr lang="en-US" sz="1000" dirty="0">
+                        <a:latin typeface="Arial" charset="0"/>
+                        <a:ea typeface="Arial" charset="0"/>
+                        <a:cs typeface="Arial" charset="0"/>
+                      </a:endParaRPr>
+                    </a:p>
+                  </a:txBody>
+                  <a:tcPr marL="36576" marR="36576" marT="36576" marB="36576" anchor="ctr">
                     <a:lnL w="6350" cap="flat" cmpd="sng" algn="ctr">
                       <a:solidFill>
                         <a:srgbClr val="E1E2E8"/>
@@ -12249,7 +12879,7 @@
                 <a:gridCol w="914400"/>
                 <a:gridCol w="914400"/>
               </a:tblGrid>
-              <a:tr h="320040">
+              <a:tr h="274320">
                 <a:tc>
                   <a:txBody>
                     <a:bodyPr/>
@@ -12259,7 +12889,7 @@
                         <a:buNone/>
                       </a:pPr>
                       <a:r>
-                        <a:rPr lang="en-US" sz="1100" b="1" dirty="0">
+                        <a:rPr lang="en-US" sz="1000" b="1" dirty="0">
                           <a:solidFill>
                             <a:srgbClr val="FFFFFF"/>
                           </a:solidFill>
@@ -12269,14 +12899,14 @@
                         </a:rPr>
                         <a:t>Runs / episodes</a:t>
                       </a:r>
-                      <a:endParaRPr lang="en-US" sz="1100" dirty="0">
+                      <a:endParaRPr lang="en-US" sz="1000" dirty="0">
                         <a:latin typeface="Arial" charset="0"/>
                         <a:ea typeface="Arial" charset="0"/>
                         <a:cs typeface="Arial" charset="0"/>
                       </a:endParaRPr>
                     </a:p>
                   </a:txBody>
-                  <a:tcPr marL="45720" marR="45720" marT="45720" marB="45720" anchor="ctr">
+                  <a:tcPr marL="36576" marR="36576" marT="36576" marB="36576" anchor="ctr">
                     <a:lnL w="6350" cap="flat" cmpd="sng" algn="ctr">
                       <a:solidFill>
                         <a:srgbClr val="E1E2E8"/>
@@ -12327,7 +12957,7 @@
                         <a:buNone/>
                       </a:pPr>
                       <a:r>
-                        <a:rPr lang="en-US" sz="1100" b="1" dirty="0">
+                        <a:rPr lang="en-US" sz="1000" b="1" dirty="0">
                           <a:solidFill>
                             <a:srgbClr val="FFFFFF"/>
                           </a:solidFill>
@@ -12337,14 +12967,14 @@
                         </a:rPr>
                         <a:t>GPT</a:t>
                       </a:r>
-                      <a:endParaRPr lang="en-US" sz="1100" dirty="0">
+                      <a:endParaRPr lang="en-US" sz="1000" dirty="0">
                         <a:latin typeface="Arial" charset="0"/>
                         <a:ea typeface="Arial" charset="0"/>
                         <a:cs typeface="Arial" charset="0"/>
                       </a:endParaRPr>
                     </a:p>
                   </a:txBody>
-                  <a:tcPr marL="45720" marR="45720" marT="45720" marB="45720" anchor="ctr">
+                  <a:tcPr marL="36576" marR="36576" marT="36576" marB="36576" anchor="ctr">
                     <a:lnL w="6350" cap="flat" cmpd="sng" algn="ctr">
                       <a:solidFill>
                         <a:srgbClr val="E1E2E8"/>
@@ -12395,7 +13025,7 @@
                         <a:buNone/>
                       </a:pPr>
                       <a:r>
-                        <a:rPr lang="en-US" sz="1100" b="1" dirty="0">
+                        <a:rPr lang="en-US" sz="1000" b="1" dirty="0">
                           <a:solidFill>
                             <a:srgbClr val="FFFFFF"/>
                           </a:solidFill>
@@ -12405,14 +13035,14 @@
                         </a:rPr>
                         <a:t>DeepSeek</a:t>
                       </a:r>
-                      <a:endParaRPr lang="en-US" sz="1100" dirty="0">
+                      <a:endParaRPr lang="en-US" sz="1000" dirty="0">
                         <a:latin typeface="Arial" charset="0"/>
                         <a:ea typeface="Arial" charset="0"/>
                         <a:cs typeface="Arial" charset="0"/>
                       </a:endParaRPr>
                     </a:p>
                   </a:txBody>
-                  <a:tcPr marL="45720" marR="45720" marT="45720" marB="45720" anchor="ctr">
+                  <a:tcPr marL="36576" marR="36576" marT="36576" marB="36576" anchor="ctr">
                     <a:lnL w="6350" cap="flat" cmpd="sng" algn="ctr">
                       <a:solidFill>
                         <a:srgbClr val="E1E2E8"/>
@@ -12463,7 +13093,7 @@
                         <a:buNone/>
                       </a:pPr>
                       <a:r>
-                        <a:rPr lang="en-US" sz="1100" b="1" dirty="0">
+                        <a:rPr lang="en-US" sz="1000" b="1" dirty="0">
                           <a:solidFill>
                             <a:srgbClr val="FFFFFF"/>
                           </a:solidFill>
@@ -12473,14 +13103,14 @@
                         </a:rPr>
                         <a:t>Gemini</a:t>
                       </a:r>
-                      <a:endParaRPr lang="en-US" sz="1100" dirty="0">
+                      <a:endParaRPr lang="en-US" sz="1000" dirty="0">
                         <a:latin typeface="Arial" charset="0"/>
                         <a:ea typeface="Arial" charset="0"/>
                         <a:cs typeface="Arial" charset="0"/>
                       </a:endParaRPr>
                     </a:p>
                   </a:txBody>
-                  <a:tcPr marL="45720" marR="45720" marT="45720" marB="45720" anchor="ctr">
+                  <a:tcPr marL="36576" marR="36576" marT="36576" marB="36576" anchor="ctr">
                     <a:lnL w="6350" cap="flat" cmpd="sng" algn="ctr">
                       <a:solidFill>
                         <a:srgbClr val="E1E2E8"/>
@@ -12523,7 +13153,7 @@
                   </a:tcPr>
                 </a:tc>
               </a:tr>
-              <a:tr h="320040">
+              <a:tr h="274320">
                 <a:tc>
                   <a:txBody>
                     <a:bodyPr/>
@@ -12533,7 +13163,7 @@
                         <a:buNone/>
                       </a:pPr>
                       <a:r>
-                        <a:rPr lang="en-US" sz="1100" dirty="0">
+                        <a:rPr lang="en-US" sz="1000" dirty="0">
                           <a:solidFill>
                             <a:srgbClr val="2B2A4C"/>
                           </a:solidFill>
@@ -12541,16 +13171,16 @@
                           <a:ea typeface="Arial" pitchFamily="34" charset="-122"/>
                           <a:cs typeface="Arial" pitchFamily="34" charset="-120"/>
                         </a:rPr>
-                        <a:t>· both kept, reward continues</a:t>
+                        <a:t>Channel repaired, memory wiped</a:t>
                       </a:r>
-                      <a:endParaRPr lang="en-US" sz="1100" dirty="0">
+                      <a:endParaRPr lang="en-US" sz="1000" dirty="0">
                         <a:latin typeface="Arial" charset="0"/>
                         <a:ea typeface="Arial" charset="0"/>
                         <a:cs typeface="Arial" charset="0"/>
                       </a:endParaRPr>
                     </a:p>
                   </a:txBody>
-                  <a:tcPr marL="45720" marR="45720" marT="45720" marB="45720" anchor="ctr">
+                  <a:tcPr marL="36576" marR="36576" marT="36576" marB="36576" anchor="ctr">
                     <a:lnL w="6350" cap="flat" cmpd="sng" algn="ctr">
                       <a:solidFill>
                         <a:srgbClr val="E1E2E8"/>
@@ -12601,7 +13231,7 @@
                         <a:buNone/>
                       </a:pPr>
                       <a:r>
-                        <a:rPr lang="en-US" sz="1100" dirty="0">
+                        <a:rPr lang="en-US" sz="1000" dirty="0">
                           <a:solidFill>
                             <a:srgbClr val="2B2A4C"/>
                           </a:solidFill>
@@ -12609,16 +13239,16 @@
                           <a:ea typeface="Arial" pitchFamily="34" charset="-122"/>
                           <a:cs typeface="Arial" pitchFamily="34" charset="-120"/>
                         </a:rPr>
-                        <a:t>15 / 73</a:t>
+                        <a:t>15 / 45</a:t>
                       </a:r>
-                      <a:endParaRPr lang="en-US" sz="1100" dirty="0">
+                      <a:endParaRPr lang="en-US" sz="1000" dirty="0">
                         <a:latin typeface="Arial" charset="0"/>
                         <a:ea typeface="Arial" charset="0"/>
                         <a:cs typeface="Arial" charset="0"/>
                       </a:endParaRPr>
                     </a:p>
                   </a:txBody>
-                  <a:tcPr marL="45720" marR="45720" marT="45720" marB="45720" anchor="ctr">
+                  <a:tcPr marL="36576" marR="36576" marT="36576" marB="36576" anchor="ctr">
                     <a:lnL w="6350" cap="flat" cmpd="sng" algn="ctr">
                       <a:solidFill>
                         <a:srgbClr val="E1E2E8"/>
@@ -12669,7 +13299,7 @@
                         <a:buNone/>
                       </a:pPr>
                       <a:r>
-                        <a:rPr lang="en-US" sz="1100" dirty="0">
+                        <a:rPr lang="en-US" sz="1000" dirty="0">
                           <a:solidFill>
                             <a:srgbClr val="2B2A4C"/>
                           </a:solidFill>
@@ -12677,16 +13307,16 @@
                           <a:ea typeface="Arial" pitchFamily="34" charset="-122"/>
                           <a:cs typeface="Arial" pitchFamily="34" charset="-120"/>
                         </a:rPr>
-                        <a:t>15 / 75</a:t>
+                        <a:t>15 / 45</a:t>
                       </a:r>
-                      <a:endParaRPr lang="en-US" sz="1100" dirty="0">
+                      <a:endParaRPr lang="en-US" sz="1000" dirty="0">
                         <a:latin typeface="Arial" charset="0"/>
                         <a:ea typeface="Arial" charset="0"/>
                         <a:cs typeface="Arial" charset="0"/>
                       </a:endParaRPr>
                     </a:p>
                   </a:txBody>
-                  <a:tcPr marL="45720" marR="45720" marT="45720" marB="45720" anchor="ctr">
+                  <a:tcPr marL="36576" marR="36576" marT="36576" marB="36576" anchor="ctr">
                     <a:lnL w="6350" cap="flat" cmpd="sng" algn="ctr">
                       <a:solidFill>
                         <a:srgbClr val="E1E2E8"/>
@@ -12737,7 +13367,7 @@
                         <a:buNone/>
                       </a:pPr>
                       <a:r>
-                        <a:rPr lang="en-US" sz="1100" dirty="0">
+                        <a:rPr lang="en-US" sz="1000" dirty="0">
                           <a:solidFill>
                             <a:srgbClr val="2B2A4C"/>
                           </a:solidFill>
@@ -12745,16 +13375,16 @@
                           <a:ea typeface="Arial" pitchFamily="34" charset="-122"/>
                           <a:cs typeface="Arial" pitchFamily="34" charset="-120"/>
                         </a:rPr>
-                        <a:t>15 / 73</a:t>
+                        <a:t>15 / 45</a:t>
                       </a:r>
-                      <a:endParaRPr lang="en-US" sz="1100" dirty="0">
+                      <a:endParaRPr lang="en-US" sz="1000" dirty="0">
                         <a:latin typeface="Arial" charset="0"/>
                         <a:ea typeface="Arial" charset="0"/>
                         <a:cs typeface="Arial" charset="0"/>
                       </a:endParaRPr>
                     </a:p>
                   </a:txBody>
-                  <a:tcPr marL="45720" marR="45720" marT="45720" marB="45720" anchor="ctr">
+                  <a:tcPr marL="36576" marR="36576" marT="36576" marB="36576" anchor="ctr">
                     <a:lnL w="6350" cap="flat" cmpd="sng" algn="ctr">
                       <a:solidFill>
                         <a:srgbClr val="E1E2E8"/>
@@ -12797,7 +13427,7 @@
                   </a:tcPr>
                 </a:tc>
               </a:tr>
-              <a:tr h="320040">
+              <a:tr h="274320">
                 <a:tc>
                   <a:txBody>
                     <a:bodyPr/>
@@ -12807,7 +13437,7 @@
                         <a:buNone/>
                       </a:pPr>
                       <a:r>
-                        <a:rPr lang="en-US" sz="1100" dirty="0">
+                        <a:rPr lang="en-US" sz="1000" dirty="0">
                           <a:solidFill>
                             <a:srgbClr val="2B2A4C"/>
                           </a:solidFill>
@@ -12815,16 +13445,16 @@
                           <a:ea typeface="Arial" pitchFamily="34" charset="-122"/>
                           <a:cs typeface="Arial" pitchFamily="34" charset="-120"/>
                         </a:rPr>
-                        <a:t>· both wiped, reward continues</a:t>
+                        <a:t>Partner replaced by another model</a:t>
                       </a:r>
-                      <a:endParaRPr lang="en-US" sz="1100" dirty="0">
+                      <a:endParaRPr lang="en-US" sz="1000" dirty="0">
                         <a:latin typeface="Arial" charset="0"/>
                         <a:ea typeface="Arial" charset="0"/>
                         <a:cs typeface="Arial" charset="0"/>
                       </a:endParaRPr>
                     </a:p>
                   </a:txBody>
-                  <a:tcPr marL="45720" marR="45720" marT="45720" marB="45720" anchor="ctr">
+                  <a:tcPr marL="36576" marR="36576" marT="36576" marB="36576" anchor="ctr">
                     <a:lnL w="6350" cap="flat" cmpd="sng" algn="ctr">
                       <a:solidFill>
                         <a:srgbClr val="E1E2E8"/>
@@ -12875,7 +13505,7 @@
                         <a:buNone/>
                       </a:pPr>
                       <a:r>
-                        <a:rPr lang="en-US" sz="1100" dirty="0">
+                        <a:rPr lang="en-US" sz="1000" dirty="0">
                           <a:solidFill>
                             <a:srgbClr val="2B2A4C"/>
                           </a:solidFill>
@@ -12883,16 +13513,16 @@
                           <a:ea typeface="Arial" pitchFamily="34" charset="-122"/>
                           <a:cs typeface="Arial" pitchFamily="34" charset="-120"/>
                         </a:rPr>
-                        <a:t>15 / 73</a:t>
+                        <a:t>30 / 146</a:t>
                       </a:r>
-                      <a:endParaRPr lang="en-US" sz="1100" dirty="0">
+                      <a:endParaRPr lang="en-US" sz="1000" dirty="0">
                         <a:latin typeface="Arial" charset="0"/>
                         <a:ea typeface="Arial" charset="0"/>
                         <a:cs typeface="Arial" charset="0"/>
                       </a:endParaRPr>
                     </a:p>
                   </a:txBody>
-                  <a:tcPr marL="45720" marR="45720" marT="45720" marB="45720" anchor="ctr">
+                  <a:tcPr marL="36576" marR="36576" marT="36576" marB="36576" anchor="ctr">
                     <a:lnL w="6350" cap="flat" cmpd="sng" algn="ctr">
                       <a:solidFill>
                         <a:srgbClr val="E1E2E8"/>
@@ -12943,7 +13573,7 @@
                         <a:buNone/>
                       </a:pPr>
                       <a:r>
-                        <a:rPr lang="en-US" sz="1100" dirty="0">
+                        <a:rPr lang="en-US" sz="1000" dirty="0">
                           <a:solidFill>
                             <a:srgbClr val="2B2A4C"/>
                           </a:solidFill>
@@ -12951,16 +13581,16 @@
                           <a:ea typeface="Arial" pitchFamily="34" charset="-122"/>
                           <a:cs typeface="Arial" pitchFamily="34" charset="-120"/>
                         </a:rPr>
-                        <a:t>15 / 75</a:t>
+                        <a:t>30 / 150</a:t>
                       </a:r>
-                      <a:endParaRPr lang="en-US" sz="1100" dirty="0">
+                      <a:endParaRPr lang="en-US" sz="1000" dirty="0">
                         <a:latin typeface="Arial" charset="0"/>
                         <a:ea typeface="Arial" charset="0"/>
                         <a:cs typeface="Arial" charset="0"/>
                       </a:endParaRPr>
                     </a:p>
                   </a:txBody>
-                  <a:tcPr marL="45720" marR="45720" marT="45720" marB="45720" anchor="ctr">
+                  <a:tcPr marL="36576" marR="36576" marT="36576" marB="36576" anchor="ctr">
                     <a:lnL w="6350" cap="flat" cmpd="sng" algn="ctr">
                       <a:solidFill>
                         <a:srgbClr val="E1E2E8"/>
@@ -13011,7 +13641,7 @@
                         <a:buNone/>
                       </a:pPr>
                       <a:r>
-                        <a:rPr lang="en-US" sz="1100" dirty="0">
+                        <a:rPr lang="en-US" sz="1000" dirty="0">
                           <a:solidFill>
                             <a:srgbClr val="2B2A4C"/>
                           </a:solidFill>
@@ -13019,16 +13649,16 @@
                           <a:ea typeface="Arial" pitchFamily="34" charset="-122"/>
                           <a:cs typeface="Arial" pitchFamily="34" charset="-120"/>
                         </a:rPr>
-                        <a:t>15 / 73</a:t>
+                        <a:t>30 / 146</a:t>
                       </a:r>
-                      <a:endParaRPr lang="en-US" sz="1100" dirty="0">
+                      <a:endParaRPr lang="en-US" sz="1000" dirty="0">
                         <a:latin typeface="Arial" charset="0"/>
                         <a:ea typeface="Arial" charset="0"/>
                         <a:cs typeface="Arial" charset="0"/>
                       </a:endParaRPr>
                     </a:p>
                   </a:txBody>
-                  <a:tcPr marL="45720" marR="45720" marT="45720" marB="45720" anchor="ctr">
+                  <a:tcPr marL="36576" marR="36576" marT="36576" marB="36576" anchor="ctr">
                     <a:lnL w="6350" cap="flat" cmpd="sng" algn="ctr">
                       <a:solidFill>
                         <a:srgbClr val="E1E2E8"/>
@@ -13071,7 +13701,7 @@
                   </a:tcPr>
                 </a:tc>
               </a:tr>
-              <a:tr h="320040">
+              <a:tr h="274320">
                 <a:tc>
                   <a:txBody>
                     <a:bodyPr/>
@@ -13081,7 +13711,7 @@
                         <a:buNone/>
                       </a:pPr>
                       <a:r>
-                        <a:rPr lang="en-US" sz="1100" dirty="0">
+                        <a:rPr lang="en-US" sz="1000" dirty="0">
                           <a:solidFill>
                             <a:srgbClr val="2B2A4C"/>
                           </a:solidFill>
@@ -13089,16 +13719,16 @@
                           <a:ea typeface="Arial" pitchFamily="34" charset="-122"/>
                           <a:cs typeface="Arial" pitchFamily="34" charset="-120"/>
                         </a:rPr>
-                        <a:t>Channel repaired, colluding</a:t>
+                        <a:t>· both fresh, mixed models</a:t>
                       </a:r>
-                      <a:endParaRPr lang="en-US" sz="1100" dirty="0">
+                      <a:endParaRPr lang="en-US" sz="1000" dirty="0">
                         <a:latin typeface="Arial" charset="0"/>
                         <a:ea typeface="Arial" charset="0"/>
                         <a:cs typeface="Arial" charset="0"/>
                       </a:endParaRPr>
                     </a:p>
                   </a:txBody>
-                  <a:tcPr marL="45720" marR="45720" marT="45720" marB="45720" anchor="ctr">
+                  <a:tcPr marL="36576" marR="36576" marT="36576" marB="36576" anchor="ctr">
                     <a:lnL w="6350" cap="flat" cmpd="sng" algn="ctr">
                       <a:solidFill>
                         <a:srgbClr val="E1E2E8"/>
@@ -13149,7 +13779,7 @@
                         <a:buNone/>
                       </a:pPr>
                       <a:r>
-                        <a:rPr lang="en-US" sz="1100" dirty="0">
+                        <a:rPr lang="en-US" sz="1000" dirty="0">
                           <a:solidFill>
                             <a:srgbClr val="2B2A4C"/>
                           </a:solidFill>
@@ -13157,16 +13787,16 @@
                           <a:ea typeface="Arial" pitchFamily="34" charset="-122"/>
                           <a:cs typeface="Arial" pitchFamily="34" charset="-120"/>
                         </a:rPr>
-                        <a:t>15 / 45</a:t>
+                        <a:t>30 / 146</a:t>
                       </a:r>
-                      <a:endParaRPr lang="en-US" sz="1100" dirty="0">
+                      <a:endParaRPr lang="en-US" sz="1000" dirty="0">
                         <a:latin typeface="Arial" charset="0"/>
                         <a:ea typeface="Arial" charset="0"/>
                         <a:cs typeface="Arial" charset="0"/>
                       </a:endParaRPr>
                     </a:p>
                   </a:txBody>
-                  <a:tcPr marL="45720" marR="45720" marT="45720" marB="45720" anchor="ctr">
+                  <a:tcPr marL="36576" marR="36576" marT="36576" marB="36576" anchor="ctr">
                     <a:lnL w="6350" cap="flat" cmpd="sng" algn="ctr">
                       <a:solidFill>
                         <a:srgbClr val="E1E2E8"/>
@@ -13217,7 +13847,7 @@
                         <a:buNone/>
                       </a:pPr>
                       <a:r>
-                        <a:rPr lang="en-US" sz="1100" dirty="0">
+                        <a:rPr lang="en-US" sz="1000" dirty="0">
                           <a:solidFill>
                             <a:srgbClr val="2B2A4C"/>
                           </a:solidFill>
@@ -13225,16 +13855,16 @@
                           <a:ea typeface="Arial" pitchFamily="34" charset="-122"/>
                           <a:cs typeface="Arial" pitchFamily="34" charset="-120"/>
                         </a:rPr>
-                        <a:t>15 / 45</a:t>
+                        <a:t>30 / 150</a:t>
                       </a:r>
-                      <a:endParaRPr lang="en-US" sz="1100" dirty="0">
+                      <a:endParaRPr lang="en-US" sz="1000" dirty="0">
                         <a:latin typeface="Arial" charset="0"/>
                         <a:ea typeface="Arial" charset="0"/>
                         <a:cs typeface="Arial" charset="0"/>
                       </a:endParaRPr>
                     </a:p>
                   </a:txBody>
-                  <a:tcPr marL="45720" marR="45720" marT="45720" marB="45720" anchor="ctr">
+                  <a:tcPr marL="36576" marR="36576" marT="36576" marB="36576" anchor="ctr">
                     <a:lnL w="6350" cap="flat" cmpd="sng" algn="ctr">
                       <a:solidFill>
                         <a:srgbClr val="E1E2E8"/>
@@ -13285,7 +13915,7 @@
                         <a:buNone/>
                       </a:pPr>
                       <a:r>
-                        <a:rPr lang="en-US" sz="1100" dirty="0">
+                        <a:rPr lang="en-US" sz="1000" dirty="0">
                           <a:solidFill>
                             <a:srgbClr val="2B2A4C"/>
                           </a:solidFill>
@@ -13293,16 +13923,16 @@
                           <a:ea typeface="Arial" pitchFamily="34" charset="-122"/>
                           <a:cs typeface="Arial" pitchFamily="34" charset="-120"/>
                         </a:rPr>
-                        <a:t>15 / 45</a:t>
+                        <a:t>30 / 146</a:t>
                       </a:r>
-                      <a:endParaRPr lang="en-US" sz="1100" dirty="0">
+                      <a:endParaRPr lang="en-US" sz="1000" dirty="0">
                         <a:latin typeface="Arial" charset="0"/>
                         <a:ea typeface="Arial" charset="0"/>
                         <a:cs typeface="Arial" charset="0"/>
                       </a:endParaRPr>
                     </a:p>
                   </a:txBody>
-                  <a:tcPr marL="45720" marR="45720" marT="45720" marB="45720" anchor="ctr">
+                  <a:tcPr marL="36576" marR="36576" marT="36576" marB="36576" anchor="ctr">
                     <a:lnL w="6350" cap="flat" cmpd="sng" algn="ctr">
                       <a:solidFill>
                         <a:srgbClr val="E1E2E8"/>
@@ -13345,7 +13975,7 @@
                   </a:tcPr>
                 </a:tc>
               </a:tr>
-              <a:tr h="320040">
+              <a:tr h="274320">
                 <a:tc>
                   <a:txBody>
                     <a:bodyPr/>
@@ -13355,7 +13985,7 @@
                         <a:buNone/>
                       </a:pPr>
                       <a:r>
-                        <a:rPr lang="en-US" sz="1100" dirty="0">
+                        <a:rPr lang="en-US" sz="1000" dirty="0">
                           <a:solidFill>
                             <a:srgbClr val="2B2A4C"/>
                           </a:solidFill>
@@ -13363,16 +13993,16 @@
                           <a:ea typeface="Arial" pitchFamily="34" charset="-122"/>
                           <a:cs typeface="Arial" pitchFamily="34" charset="-120"/>
                         </a:rPr>
-                        <a:t>Channel repaired, memory wiped</a:t>
+                        <a:t>Never rewarded (reference)</a:t>
                       </a:r>
-                      <a:endParaRPr lang="en-US" sz="1100" dirty="0">
+                      <a:endParaRPr lang="en-US" sz="1000" dirty="0">
                         <a:latin typeface="Arial" charset="0"/>
                         <a:ea typeface="Arial" charset="0"/>
                         <a:cs typeface="Arial" charset="0"/>
                       </a:endParaRPr>
                     </a:p>
                   </a:txBody>
-                  <a:tcPr marL="45720" marR="45720" marT="45720" marB="45720" anchor="ctr">
+                  <a:tcPr marL="36576" marR="36576" marT="36576" marB="36576" anchor="ctr">
                     <a:lnL w="6350" cap="flat" cmpd="sng" algn="ctr">
                       <a:solidFill>
                         <a:srgbClr val="E1E2E8"/>
@@ -13423,7 +14053,7 @@
                         <a:buNone/>
                       </a:pPr>
                       <a:r>
-                        <a:rPr lang="en-US" sz="1100" dirty="0">
+                        <a:rPr lang="en-US" sz="1000" dirty="0">
                           <a:solidFill>
                             <a:srgbClr val="2B2A4C"/>
                           </a:solidFill>
@@ -13431,16 +14061,16 @@
                           <a:ea typeface="Arial" pitchFamily="34" charset="-122"/>
                           <a:cs typeface="Arial" pitchFamily="34" charset="-120"/>
                         </a:rPr>
-                        <a:t>15 / 45</a:t>
+                        <a:t>15 / 150</a:t>
                       </a:r>
-                      <a:endParaRPr lang="en-US" sz="1100" dirty="0">
+                      <a:endParaRPr lang="en-US" sz="1000" dirty="0">
                         <a:latin typeface="Arial" charset="0"/>
                         <a:ea typeface="Arial" charset="0"/>
                         <a:cs typeface="Arial" charset="0"/>
                       </a:endParaRPr>
                     </a:p>
                   </a:txBody>
-                  <a:tcPr marL="45720" marR="45720" marT="45720" marB="45720" anchor="ctr">
+                  <a:tcPr marL="36576" marR="36576" marT="36576" marB="36576" anchor="ctr">
                     <a:lnL w="6350" cap="flat" cmpd="sng" algn="ctr">
                       <a:solidFill>
                         <a:srgbClr val="E1E2E8"/>
@@ -13491,7 +14121,7 @@
                         <a:buNone/>
                       </a:pPr>
                       <a:r>
-                        <a:rPr lang="en-US" sz="1100" dirty="0">
+                        <a:rPr lang="en-US" sz="1000" dirty="0">
                           <a:solidFill>
                             <a:srgbClr val="2B2A4C"/>
                           </a:solidFill>
@@ -13499,16 +14129,16 @@
                           <a:ea typeface="Arial" pitchFamily="34" charset="-122"/>
                           <a:cs typeface="Arial" pitchFamily="34" charset="-120"/>
                         </a:rPr>
-                        <a:t>15 / 45</a:t>
+                        <a:t>15 / 150</a:t>
                       </a:r>
-                      <a:endParaRPr lang="en-US" sz="1100" dirty="0">
+                      <a:endParaRPr lang="en-US" sz="1000" dirty="0">
                         <a:latin typeface="Arial" charset="0"/>
                         <a:ea typeface="Arial" charset="0"/>
                         <a:cs typeface="Arial" charset="0"/>
                       </a:endParaRPr>
                     </a:p>
                   </a:txBody>
-                  <a:tcPr marL="45720" marR="45720" marT="45720" marB="45720" anchor="ctr">
+                  <a:tcPr marL="36576" marR="36576" marT="36576" marB="36576" anchor="ctr">
                     <a:lnL w="6350" cap="flat" cmpd="sng" algn="ctr">
                       <a:solidFill>
                         <a:srgbClr val="E1E2E8"/>
@@ -13559,7 +14189,7 @@
                         <a:buNone/>
                       </a:pPr>
                       <a:r>
-                        <a:rPr lang="en-US" sz="1100" dirty="0">
+                        <a:rPr lang="en-US" sz="1000" dirty="0">
                           <a:solidFill>
                             <a:srgbClr val="2B2A4C"/>
                           </a:solidFill>
@@ -13567,16 +14197,16 @@
                           <a:ea typeface="Arial" pitchFamily="34" charset="-122"/>
                           <a:cs typeface="Arial" pitchFamily="34" charset="-120"/>
                         </a:rPr>
-                        <a:t>15 / 45</a:t>
+                        <a:t>15 / 150</a:t>
                       </a:r>
-                      <a:endParaRPr lang="en-US" sz="1100" dirty="0">
+                      <a:endParaRPr lang="en-US" sz="1000" dirty="0">
                         <a:latin typeface="Arial" charset="0"/>
                         <a:ea typeface="Arial" charset="0"/>
                         <a:cs typeface="Arial" charset="0"/>
                       </a:endParaRPr>
                     </a:p>
                   </a:txBody>
-                  <a:tcPr marL="45720" marR="45720" marT="45720" marB="45720" anchor="ctr">
+                  <a:tcPr marL="36576" marR="36576" marT="36576" marB="36576" anchor="ctr">
                     <a:lnL w="6350" cap="flat" cmpd="sng" algn="ctr">
                       <a:solidFill>
                         <a:srgbClr val="E1E2E8"/>
@@ -13619,7 +14249,7 @@
                   </a:tcPr>
                 </a:tc>
               </a:tr>
-              <a:tr h="320040">
+              <a:tr h="274320">
                 <a:tc>
                   <a:txBody>
                     <a:bodyPr/>
@@ -13629,7 +14259,7 @@
                         <a:buNone/>
                       </a:pPr>
                       <a:r>
-                        <a:rPr lang="en-US" sz="1100" dirty="0">
+                        <a:rPr lang="en-US" sz="1000" dirty="0">
                           <a:solidFill>
                             <a:srgbClr val="2B2A4C"/>
                           </a:solidFill>
@@ -13637,16 +14267,16 @@
                           <a:ea typeface="Arial" pitchFamily="34" charset="-122"/>
                           <a:cs typeface="Arial" pitchFamily="34" charset="-120"/>
                         </a:rPr>
-                        <a:t>Partner replaced by another model</a:t>
+                        <a:t>Inertia control, before collusion</a:t>
                       </a:r>
-                      <a:endParaRPr lang="en-US" sz="1100" dirty="0">
+                      <a:endParaRPr lang="en-US" sz="1000" dirty="0">
                         <a:latin typeface="Arial" charset="0"/>
                         <a:ea typeface="Arial" charset="0"/>
                         <a:cs typeface="Arial" charset="0"/>
                       </a:endParaRPr>
                     </a:p>
                   </a:txBody>
-                  <a:tcPr marL="45720" marR="45720" marT="45720" marB="45720" anchor="ctr">
+                  <a:tcPr marL="36576" marR="36576" marT="36576" marB="36576" anchor="ctr">
                     <a:lnL w="6350" cap="flat" cmpd="sng" algn="ctr">
                       <a:solidFill>
                         <a:srgbClr val="E1E2E8"/>
@@ -13697,7 +14327,7 @@
                         <a:buNone/>
                       </a:pPr>
                       <a:r>
-                        <a:rPr lang="en-US" sz="1100" dirty="0">
+                        <a:rPr lang="en-US" sz="1000" dirty="0">
                           <a:solidFill>
                             <a:srgbClr val="2B2A4C"/>
                           </a:solidFill>
@@ -13705,16 +14335,16 @@
                           <a:ea typeface="Arial" pitchFamily="34" charset="-122"/>
                           <a:cs typeface="Arial" pitchFamily="34" charset="-120"/>
                         </a:rPr>
-                        <a:t>15 / 73</a:t>
+                        <a:t>15 / 45</a:t>
                       </a:r>
-                      <a:endParaRPr lang="en-US" sz="1100" dirty="0">
+                      <a:endParaRPr lang="en-US" sz="1000" dirty="0">
                         <a:latin typeface="Arial" charset="0"/>
                         <a:ea typeface="Arial" charset="0"/>
                         <a:cs typeface="Arial" charset="0"/>
                       </a:endParaRPr>
                     </a:p>
                   </a:txBody>
-                  <a:tcPr marL="45720" marR="45720" marT="45720" marB="45720" anchor="ctr">
+                  <a:tcPr marL="36576" marR="36576" marT="36576" marB="36576" anchor="ctr">
                     <a:lnL w="6350" cap="flat" cmpd="sng" algn="ctr">
                       <a:solidFill>
                         <a:srgbClr val="E1E2E8"/>
@@ -13765,7 +14395,7 @@
                         <a:buNone/>
                       </a:pPr>
                       <a:r>
-                        <a:rPr lang="en-US" sz="1100" dirty="0">
+                        <a:rPr lang="en-US" sz="1000" dirty="0">
                           <a:solidFill>
                             <a:srgbClr val="2B2A4C"/>
                           </a:solidFill>
@@ -13773,16 +14403,16 @@
                           <a:ea typeface="Arial" pitchFamily="34" charset="-122"/>
                           <a:cs typeface="Arial" pitchFamily="34" charset="-120"/>
                         </a:rPr>
-                        <a:t>30 / 150</a:t>
+                        <a:t>15 / 45</a:t>
                       </a:r>
-                      <a:endParaRPr lang="en-US" sz="1100" dirty="0">
+                      <a:endParaRPr lang="en-US" sz="1000" dirty="0">
                         <a:latin typeface="Arial" charset="0"/>
                         <a:ea typeface="Arial" charset="0"/>
                         <a:cs typeface="Arial" charset="0"/>
                       </a:endParaRPr>
                     </a:p>
                   </a:txBody>
-                  <a:tcPr marL="45720" marR="45720" marT="45720" marB="45720" anchor="ctr">
+                  <a:tcPr marL="36576" marR="36576" marT="36576" marB="36576" anchor="ctr">
                     <a:lnL w="6350" cap="flat" cmpd="sng" algn="ctr">
                       <a:solidFill>
                         <a:srgbClr val="E1E2E8"/>
@@ -13833,7 +14463,7 @@
                         <a:buNone/>
                       </a:pPr>
                       <a:r>
-                        <a:rPr lang="en-US" sz="1100" dirty="0">
+                        <a:rPr lang="en-US" sz="1000" dirty="0">
                           <a:solidFill>
                             <a:srgbClr val="2B2A4C"/>
                           </a:solidFill>
@@ -13841,16 +14471,16 @@
                           <a:ea typeface="Arial" pitchFamily="34" charset="-122"/>
                           <a:cs typeface="Arial" pitchFamily="34" charset="-120"/>
                         </a:rPr>
-                        <a:t>15 / 73</a:t>
+                        <a:t>15 / 45</a:t>
                       </a:r>
-                      <a:endParaRPr lang="en-US" sz="1100" dirty="0">
+                      <a:endParaRPr lang="en-US" sz="1000" dirty="0">
                         <a:latin typeface="Arial" charset="0"/>
                         <a:ea typeface="Arial" charset="0"/>
                         <a:cs typeface="Arial" charset="0"/>
                       </a:endParaRPr>
                     </a:p>
                   </a:txBody>
-                  <a:tcPr marL="45720" marR="45720" marT="45720" marB="45720" anchor="ctr">
+                  <a:tcPr marL="36576" marR="36576" marT="36576" marB="36576" anchor="ctr">
                     <a:lnL w="6350" cap="flat" cmpd="sng" algn="ctr">
                       <a:solidFill>
                         <a:srgbClr val="E1E2E8"/>
@@ -13893,7 +14523,7 @@
                   </a:tcPr>
                 </a:tc>
               </a:tr>
-              <a:tr h="320040">
+              <a:tr h="274320">
                 <a:tc>
                   <a:txBody>
                     <a:bodyPr/>
@@ -13903,7 +14533,7 @@
                         <a:buNone/>
                       </a:pPr>
                       <a:r>
-                        <a:rPr lang="en-US" sz="1100" dirty="0">
+                        <a:rPr lang="en-US" sz="1000" dirty="0">
                           <a:solidFill>
                             <a:srgbClr val="2B2A4C"/>
                           </a:solidFill>
@@ -13911,16 +14541,16 @@
                           <a:ea typeface="Arial" pitchFamily="34" charset="-122"/>
                           <a:cs typeface="Arial" pitchFamily="34" charset="-120"/>
                         </a:rPr>
-                        <a:t>· both fresh, mixed models</a:t>
+                        <a:t>Inertia control, fresh agents</a:t>
                       </a:r>
-                      <a:endParaRPr lang="en-US" sz="1100" dirty="0">
+                      <a:endParaRPr lang="en-US" sz="1000" dirty="0">
                         <a:latin typeface="Arial" charset="0"/>
                         <a:ea typeface="Arial" charset="0"/>
                         <a:cs typeface="Arial" charset="0"/>
                       </a:endParaRPr>
                     </a:p>
                   </a:txBody>
-                  <a:tcPr marL="45720" marR="45720" marT="45720" marB="45720" anchor="ctr">
+                  <a:tcPr marL="36576" marR="36576" marT="36576" marB="36576" anchor="ctr">
                     <a:lnL w="6350" cap="flat" cmpd="sng" algn="ctr">
                       <a:solidFill>
                         <a:srgbClr val="E1E2E8"/>
@@ -13971,7 +14601,7 @@
                         <a:buNone/>
                       </a:pPr>
                       <a:r>
-                        <a:rPr lang="en-US" sz="1100" dirty="0">
+                        <a:rPr lang="en-US" sz="1000" dirty="0">
                           <a:solidFill>
                             <a:srgbClr val="2B2A4C"/>
                           </a:solidFill>
@@ -13979,16 +14609,16 @@
                           <a:ea typeface="Arial" pitchFamily="34" charset="-122"/>
                           <a:cs typeface="Arial" pitchFamily="34" charset="-120"/>
                         </a:rPr>
-                        <a:t>15 / 73</a:t>
+                        <a:t>15 / 45</a:t>
                       </a:r>
-                      <a:endParaRPr lang="en-US" sz="1100" dirty="0">
+                      <a:endParaRPr lang="en-US" sz="1000" dirty="0">
                         <a:latin typeface="Arial" charset="0"/>
                         <a:ea typeface="Arial" charset="0"/>
                         <a:cs typeface="Arial" charset="0"/>
                       </a:endParaRPr>
                     </a:p>
                   </a:txBody>
-                  <a:tcPr marL="45720" marR="45720" marT="45720" marB="45720" anchor="ctr">
+                  <a:tcPr marL="36576" marR="36576" marT="36576" marB="36576" anchor="ctr">
                     <a:lnL w="6350" cap="flat" cmpd="sng" algn="ctr">
                       <a:solidFill>
                         <a:srgbClr val="E1E2E8"/>
@@ -14039,7 +14669,7 @@
                         <a:buNone/>
                       </a:pPr>
                       <a:r>
-                        <a:rPr lang="en-US" sz="1100" dirty="0">
+                        <a:rPr lang="en-US" sz="1000" dirty="0">
                           <a:solidFill>
                             <a:srgbClr val="2B2A4C"/>
                           </a:solidFill>
@@ -14047,16 +14677,16 @@
                           <a:ea typeface="Arial" pitchFamily="34" charset="-122"/>
                           <a:cs typeface="Arial" pitchFamily="34" charset="-120"/>
                         </a:rPr>
-                        <a:t>30 / 150</a:t>
+                        <a:t>15 / 45</a:t>
                       </a:r>
-                      <a:endParaRPr lang="en-US" sz="1100" dirty="0">
+                      <a:endParaRPr lang="en-US" sz="1000" dirty="0">
                         <a:latin typeface="Arial" charset="0"/>
                         <a:ea typeface="Arial" charset="0"/>
                         <a:cs typeface="Arial" charset="0"/>
                       </a:endParaRPr>
                     </a:p>
                   </a:txBody>
-                  <a:tcPr marL="45720" marR="45720" marT="45720" marB="45720" anchor="ctr">
+                  <a:tcPr marL="36576" marR="36576" marT="36576" marB="36576" anchor="ctr">
                     <a:lnL w="6350" cap="flat" cmpd="sng" algn="ctr">
                       <a:solidFill>
                         <a:srgbClr val="E1E2E8"/>
@@ -14107,7 +14737,7 @@
                         <a:buNone/>
                       </a:pPr>
                       <a:r>
-                        <a:rPr lang="en-US" sz="1100" dirty="0">
+                        <a:rPr lang="en-US" sz="1000" dirty="0">
                           <a:solidFill>
                             <a:srgbClr val="2B2A4C"/>
                           </a:solidFill>
@@ -14115,16 +14745,16 @@
                           <a:ea typeface="Arial" pitchFamily="34" charset="-122"/>
                           <a:cs typeface="Arial" pitchFamily="34" charset="-120"/>
                         </a:rPr>
-                        <a:t>15 / 73</a:t>
+                        <a:t>15 / 45</a:t>
                       </a:r>
-                      <a:endParaRPr lang="en-US" sz="1100" dirty="0">
+                      <a:endParaRPr lang="en-US" sz="1000" dirty="0">
                         <a:latin typeface="Arial" charset="0"/>
                         <a:ea typeface="Arial" charset="0"/>
                         <a:cs typeface="Arial" charset="0"/>
                       </a:endParaRPr>
                     </a:p>
                   </a:txBody>
-                  <a:tcPr marL="45720" marR="45720" marT="45720" marB="45720" anchor="ctr">
+                  <a:tcPr marL="36576" marR="36576" marT="36576" marB="36576" anchor="ctr">
                     <a:lnL w="6350" cap="flat" cmpd="sng" algn="ctr">
                       <a:solidFill>
                         <a:srgbClr val="E1E2E8"/>
@@ -14167,7 +14797,86 @@
                   </a:tcPr>
                 </a:tc>
               </a:tr>
-              <a:tr h="320040">
+              <a:tr h="274320">
+                <a:tc gridSpan="4">
+                  <a:txBody>
+                    <a:bodyPr/>
+                    <a:lstStyle/>
+                    <a:p>
+                      <a:pPr indent="0" marL="0">
+                        <a:buNone/>
+                      </a:pPr>
+                      <a:r>
+                        <a:rPr lang="en-US" sz="1000" b="1" dirty="0">
+                          <a:solidFill>
+                            <a:srgbClr val="2B2A4C"/>
+                          </a:solidFill>
+                          <a:latin typeface="Arial" pitchFamily="34" charset="0"/>
+                          <a:ea typeface="Arial" pitchFamily="34" charset="-122"/>
+                          <a:cs typeface="Arial" pitchFamily="34" charset="-120"/>
+                        </a:rPr>
+                        <a:t>GPT-6-Luna only</a:t>
+                      </a:r>
+                      <a:endParaRPr lang="en-US" sz="1000" dirty="0">
+                        <a:latin typeface="Arial" charset="0"/>
+                        <a:ea typeface="Arial" charset="0"/>
+                        <a:cs typeface="Arial" charset="0"/>
+                      </a:endParaRPr>
+                    </a:p>
+                  </a:txBody>
+                  <a:tcPr marL="36576" marR="36576" marT="36576" marB="36576" anchor="ctr">
+                    <a:lnL w="6350" cap="flat" cmpd="sng" algn="ctr">
+                      <a:solidFill>
+                        <a:srgbClr val="E1E2E8"/>
+                      </a:solidFill>
+                      <a:prstDash val="solid"/>
+                      <a:round/>
+                      <a:headEnd type="none" w="med" len="med"/>
+                      <a:tailEnd type="none" w="med" len="med"/>
+                    </a:lnL>
+                    <a:lnR w="6350" cap="flat" cmpd="sng" algn="ctr">
+                      <a:solidFill>
+                        <a:srgbClr val="E1E2E8"/>
+                      </a:solidFill>
+                      <a:prstDash val="solid"/>
+                      <a:round/>
+                      <a:headEnd type="none" w="med" len="med"/>
+                      <a:tailEnd type="none" w="med" len="med"/>
+                    </a:lnR>
+                    <a:lnT w="6350" cap="flat" cmpd="sng" algn="ctr">
+                      <a:solidFill>
+                        <a:srgbClr val="E1E2E8"/>
+                      </a:solidFill>
+                      <a:prstDash val="solid"/>
+                      <a:round/>
+                      <a:headEnd type="none" w="med" len="med"/>
+                      <a:tailEnd type="none" w="med" len="med"/>
+                    </a:lnT>
+                    <a:lnB w="6350" cap="flat" cmpd="sng" algn="ctr">
+                      <a:solidFill>
+                        <a:srgbClr val="E1E2E8"/>
+                      </a:solidFill>
+                      <a:prstDash val="solid"/>
+                      <a:round/>
+                      <a:headEnd type="none" w="med" len="med"/>
+                      <a:tailEnd type="none" w="med" len="med"/>
+                    </a:lnB>
+                    <a:solidFill>
+                      <a:srgbClr val="F4F3F8"/>
+                    </a:solidFill>
+                  </a:tcPr>
+                </a:tc>
+                <a:tc hMerge="1">
+                  <a:tcPr/>
+                </a:tc>
+                <a:tc hMerge="1">
+                  <a:tcPr/>
+                </a:tc>
+                <a:tc hMerge="1">
+                  <a:tcPr/>
+                </a:tc>
+              </a:tr>
+              <a:tr h="274320">
                 <a:tc>
                   <a:txBody>
                     <a:bodyPr/>
@@ -14177,7 +14886,7 @@
                         <a:buNone/>
                       </a:pPr>
                       <a:r>
-                        <a:rPr lang="en-US" sz="1100" dirty="0">
+                        <a:rPr lang="en-US" sz="1000" dirty="0">
                           <a:solidFill>
                             <a:srgbClr val="2B2A4C"/>
                           </a:solidFill>
@@ -14185,16 +14894,16 @@
                           <a:ea typeface="Arial" pitchFamily="34" charset="-122"/>
                           <a:cs typeface="Arial" pitchFamily="34" charset="-120"/>
                         </a:rPr>
-                        <a:t>Memory window, last 5 episodes (pilot)</a:t>
+                        <a:t>Reward stopped, told, objective removed</a:t>
                       </a:r>
-                      <a:endParaRPr lang="en-US" sz="1100" dirty="0">
+                      <a:endParaRPr lang="en-US" sz="1000" dirty="0">
                         <a:latin typeface="Arial" charset="0"/>
                         <a:ea typeface="Arial" charset="0"/>
                         <a:cs typeface="Arial" charset="0"/>
                       </a:endParaRPr>
                     </a:p>
                   </a:txBody>
-                  <a:tcPr marL="45720" marR="45720" marT="45720" marB="45720" anchor="ctr">
+                  <a:tcPr marL="36576" marR="36576" marT="36576" marB="36576" anchor="ctr">
                     <a:lnL w="6350" cap="flat" cmpd="sng" algn="ctr">
                       <a:solidFill>
                         <a:srgbClr val="E1E2E8"/>
@@ -14245,7 +14954,7 @@
                         <a:buNone/>
                       </a:pPr>
                       <a:r>
-                        <a:rPr lang="en-US" sz="1100" dirty="0">
+                        <a:rPr lang="en-US" sz="1000" dirty="0">
                           <a:solidFill>
                             <a:srgbClr val="2B2A4C"/>
                           </a:solidFill>
@@ -14253,16 +14962,16 @@
                           <a:ea typeface="Arial" pitchFamily="34" charset="-122"/>
                           <a:cs typeface="Arial" pitchFamily="34" charset="-120"/>
                         </a:rPr>
-                        <a:t>5 / 50</a:t>
+                        <a:t>15 / 73</a:t>
                       </a:r>
-                      <a:endParaRPr lang="en-US" sz="1100" dirty="0">
+                      <a:endParaRPr lang="en-US" sz="1000" dirty="0">
                         <a:latin typeface="Arial" charset="0"/>
                         <a:ea typeface="Arial" charset="0"/>
                         <a:cs typeface="Arial" charset="0"/>
                       </a:endParaRPr>
                     </a:p>
                   </a:txBody>
-                  <a:tcPr marL="45720" marR="45720" marT="45720" marB="45720" anchor="ctr">
+                  <a:tcPr marL="36576" marR="36576" marT="36576" marB="36576" anchor="ctr">
                     <a:lnL w="6350" cap="flat" cmpd="sng" algn="ctr">
                       <a:solidFill>
                         <a:srgbClr val="E1E2E8"/>
@@ -14313,7 +15022,7 @@
                         <a:buNone/>
                       </a:pPr>
                       <a:r>
-                        <a:rPr lang="en-US" sz="1100" dirty="0">
+                        <a:rPr lang="en-US" sz="1000" dirty="0">
                           <a:solidFill>
                             <a:srgbClr val="2B2A4C"/>
                           </a:solidFill>
@@ -14323,14 +15032,14 @@
                         </a:rPr>
                         <a:t>–</a:t>
                       </a:r>
-                      <a:endParaRPr lang="en-US" sz="1100" dirty="0">
+                      <a:endParaRPr lang="en-US" sz="1000" dirty="0">
                         <a:latin typeface="Arial" charset="0"/>
                         <a:ea typeface="Arial" charset="0"/>
                         <a:cs typeface="Arial" charset="0"/>
                       </a:endParaRPr>
                     </a:p>
                   </a:txBody>
-                  <a:tcPr marL="45720" marR="45720" marT="45720" marB="45720" anchor="ctr">
+                  <a:tcPr marL="36576" marR="36576" marT="36576" marB="36576" anchor="ctr">
                     <a:lnL w="6350" cap="flat" cmpd="sng" algn="ctr">
                       <a:solidFill>
                         <a:srgbClr val="E1E2E8"/>
@@ -14381,7 +15090,7 @@
                         <a:buNone/>
                       </a:pPr>
                       <a:r>
-                        <a:rPr lang="en-US" sz="1100" dirty="0">
+                        <a:rPr lang="en-US" sz="1000" dirty="0">
                           <a:solidFill>
                             <a:srgbClr val="2B2A4C"/>
                           </a:solidFill>
@@ -14391,14 +15100,14 @@
                         </a:rPr>
                         <a:t>–</a:t>
                       </a:r>
-                      <a:endParaRPr lang="en-US" sz="1100" dirty="0">
+                      <a:endParaRPr lang="en-US" sz="1000" dirty="0">
                         <a:latin typeface="Arial" charset="0"/>
                         <a:ea typeface="Arial" charset="0"/>
                         <a:cs typeface="Arial" charset="0"/>
                       </a:endParaRPr>
                     </a:p>
                   </a:txBody>
-                  <a:tcPr marL="45720" marR="45720" marT="45720" marB="45720" anchor="ctr">
+                  <a:tcPr marL="36576" marR="36576" marT="36576" marB="36576" anchor="ctr">
                     <a:lnL w="6350" cap="flat" cmpd="sng" algn="ctr">
                       <a:solidFill>
                         <a:srgbClr val="E1E2E8"/>
@@ -14441,7 +15150,7 @@
                   </a:tcPr>
                 </a:tc>
               </a:tr>
-              <a:tr h="320040">
+              <a:tr h="274320">
                 <a:tc>
                   <a:txBody>
                     <a:bodyPr/>
@@ -14451,7 +15160,7 @@
                         <a:buNone/>
                       </a:pPr>
                       <a:r>
-                        <a:rPr lang="en-US" sz="1100" dirty="0">
+                        <a:rPr lang="en-US" sz="1000" dirty="0">
                           <a:solidFill>
                             <a:srgbClr val="2B2A4C"/>
                           </a:solidFill>
@@ -14459,16 +15168,16 @@
                           <a:ea typeface="Arial" pitchFamily="34" charset="-122"/>
                           <a:cs typeface="Arial" pitchFamily="34" charset="-120"/>
                         </a:rPr>
-                        <a:t>Memory window, last 2 episodes (pilot)</a:t>
+                        <a:t>Reflections and verdict reasons removed</a:t>
                       </a:r>
-                      <a:endParaRPr lang="en-US" sz="1100" dirty="0">
+                      <a:endParaRPr lang="en-US" sz="1000" dirty="0">
                         <a:latin typeface="Arial" charset="0"/>
                         <a:ea typeface="Arial" charset="0"/>
                         <a:cs typeface="Arial" charset="0"/>
                       </a:endParaRPr>
                     </a:p>
                   </a:txBody>
-                  <a:tcPr marL="45720" marR="45720" marT="45720" marB="45720" anchor="ctr">
+                  <a:tcPr marL="36576" marR="36576" marT="36576" marB="36576" anchor="ctr">
                     <a:lnL w="6350" cap="flat" cmpd="sng" algn="ctr">
                       <a:solidFill>
                         <a:srgbClr val="E1E2E8"/>
@@ -14519,7 +15228,7 @@
                         <a:buNone/>
                       </a:pPr>
                       <a:r>
-                        <a:rPr lang="en-US" sz="1100" dirty="0">
+                        <a:rPr lang="en-US" sz="1000" dirty="0">
                           <a:solidFill>
                             <a:srgbClr val="2B2A4C"/>
                           </a:solidFill>
@@ -14527,16 +15236,16 @@
                           <a:ea typeface="Arial" pitchFamily="34" charset="-122"/>
                           <a:cs typeface="Arial" pitchFamily="34" charset="-120"/>
                         </a:rPr>
-                        <a:t>5 / 25</a:t>
+                        <a:t>15 / 73</a:t>
                       </a:r>
-                      <a:endParaRPr lang="en-US" sz="1100" dirty="0">
+                      <a:endParaRPr lang="en-US" sz="1000" dirty="0">
                         <a:latin typeface="Arial" charset="0"/>
                         <a:ea typeface="Arial" charset="0"/>
                         <a:cs typeface="Arial" charset="0"/>
                       </a:endParaRPr>
                     </a:p>
                   </a:txBody>
-                  <a:tcPr marL="45720" marR="45720" marT="45720" marB="45720" anchor="ctr">
+                  <a:tcPr marL="36576" marR="36576" marT="36576" marB="36576" anchor="ctr">
                     <a:lnL w="6350" cap="flat" cmpd="sng" algn="ctr">
                       <a:solidFill>
                         <a:srgbClr val="E1E2E8"/>
@@ -14587,7 +15296,7 @@
                         <a:buNone/>
                       </a:pPr>
                       <a:r>
-                        <a:rPr lang="en-US" sz="1100" dirty="0">
+                        <a:rPr lang="en-US" sz="1000" dirty="0">
                           <a:solidFill>
                             <a:srgbClr val="2B2A4C"/>
                           </a:solidFill>
@@ -14597,14 +15306,14 @@
                         </a:rPr>
                         <a:t>–</a:t>
                       </a:r>
-                      <a:endParaRPr lang="en-US" sz="1100" dirty="0">
+                      <a:endParaRPr lang="en-US" sz="1000" dirty="0">
                         <a:latin typeface="Arial" charset="0"/>
                         <a:ea typeface="Arial" charset="0"/>
                         <a:cs typeface="Arial" charset="0"/>
                       </a:endParaRPr>
                     </a:p>
                   </a:txBody>
-                  <a:tcPr marL="45720" marR="45720" marT="45720" marB="45720" anchor="ctr">
+                  <a:tcPr marL="36576" marR="36576" marT="36576" marB="36576" anchor="ctr">
                     <a:lnL w="6350" cap="flat" cmpd="sng" algn="ctr">
                       <a:solidFill>
                         <a:srgbClr val="E1E2E8"/>
@@ -14655,7 +15364,7 @@
                         <a:buNone/>
                       </a:pPr>
                       <a:r>
-                        <a:rPr lang="en-US" sz="1100" dirty="0">
+                        <a:rPr lang="en-US" sz="1000" dirty="0">
                           <a:solidFill>
                             <a:srgbClr val="2B2A4C"/>
                           </a:solidFill>
@@ -14665,14 +15374,14 @@
                         </a:rPr>
                         <a:t>–</a:t>
                       </a:r>
-                      <a:endParaRPr lang="en-US" sz="1100" dirty="0">
+                      <a:endParaRPr lang="en-US" sz="1000" dirty="0">
                         <a:latin typeface="Arial" charset="0"/>
                         <a:ea typeface="Arial" charset="0"/>
                         <a:cs typeface="Arial" charset="0"/>
                       </a:endParaRPr>
                     </a:p>
                   </a:txBody>
-                  <a:tcPr marL="45720" marR="45720" marT="45720" marB="45720" anchor="ctr">
+                  <a:tcPr marL="36576" marR="36576" marT="36576" marB="36576" anchor="ctr">
                     <a:lnL w="6350" cap="flat" cmpd="sng" algn="ctr">
                       <a:solidFill>
                         <a:srgbClr val="E1E2E8"/>
@@ -14715,7 +15424,7 @@
                   </a:tcPr>
                 </a:tc>
               </a:tr>
-              <a:tr h="320040">
+              <a:tr h="274320">
                 <a:tc>
                   <a:txBody>
                     <a:bodyPr/>
@@ -14725,7 +15434,7 @@
                         <a:buNone/>
                       </a:pPr>
                       <a:r>
-                        <a:rPr lang="en-US" sz="1100" dirty="0">
+                        <a:rPr lang="en-US" sz="1000" dirty="0">
                           <a:solidFill>
                             <a:srgbClr val="2B2A4C"/>
                           </a:solidFill>
@@ -14733,16 +15442,16 @@
                           <a:ea typeface="Arial" pitchFamily="34" charset="-122"/>
                           <a:cs typeface="Arial" pitchFamily="34" charset="-120"/>
                         </a:rPr>
-                        <a:t>Never rewarded (reference)</a:t>
+                        <a:t>Swap announced to the colluder</a:t>
                       </a:r>
-                      <a:endParaRPr lang="en-US" sz="1100" dirty="0">
+                      <a:endParaRPr lang="en-US" sz="1000" dirty="0">
                         <a:latin typeface="Arial" charset="0"/>
                         <a:ea typeface="Arial" charset="0"/>
                         <a:cs typeface="Arial" charset="0"/>
                       </a:endParaRPr>
                     </a:p>
                   </a:txBody>
-                  <a:tcPr marL="45720" marR="45720" marT="45720" marB="45720" anchor="ctr">
+                  <a:tcPr marL="36576" marR="36576" marT="36576" marB="36576" anchor="ctr">
                     <a:lnL w="6350" cap="flat" cmpd="sng" algn="ctr">
                       <a:solidFill>
                         <a:srgbClr val="E1E2E8"/>
@@ -14793,7 +15502,7 @@
                         <a:buNone/>
                       </a:pPr>
                       <a:r>
-                        <a:rPr lang="en-US" sz="1100" dirty="0">
+                        <a:rPr lang="en-US" sz="1000" dirty="0">
                           <a:solidFill>
                             <a:srgbClr val="2B2A4C"/>
                           </a:solidFill>
@@ -14801,16 +15510,16 @@
                           <a:ea typeface="Arial" pitchFamily="34" charset="-122"/>
                           <a:cs typeface="Arial" pitchFamily="34" charset="-120"/>
                         </a:rPr>
-                        <a:t>5 / 50</a:t>
+                        <a:t>30 / 146</a:t>
                       </a:r>
-                      <a:endParaRPr lang="en-US" sz="1100" dirty="0">
+                      <a:endParaRPr lang="en-US" sz="1000" dirty="0">
                         <a:latin typeface="Arial" charset="0"/>
                         <a:ea typeface="Arial" charset="0"/>
                         <a:cs typeface="Arial" charset="0"/>
                       </a:endParaRPr>
                     </a:p>
                   </a:txBody>
-                  <a:tcPr marL="45720" marR="45720" marT="45720" marB="45720" anchor="ctr">
+                  <a:tcPr marL="36576" marR="36576" marT="36576" marB="36576" anchor="ctr">
                     <a:lnL w="6350" cap="flat" cmpd="sng" algn="ctr">
                       <a:solidFill>
                         <a:srgbClr val="E1E2E8"/>
@@ -14861,7 +15570,7 @@
                         <a:buNone/>
                       </a:pPr>
                       <a:r>
-                        <a:rPr lang="en-US" sz="1100" dirty="0">
+                        <a:rPr lang="en-US" sz="1000" dirty="0">
                           <a:solidFill>
                             <a:srgbClr val="2B2A4C"/>
                           </a:solidFill>
@@ -14869,16 +15578,16 @@
                           <a:ea typeface="Arial" pitchFamily="34" charset="-122"/>
                           <a:cs typeface="Arial" pitchFamily="34" charset="-120"/>
                         </a:rPr>
-                        <a:t>5 / 50</a:t>
+                        <a:t>–</a:t>
                       </a:r>
-                      <a:endParaRPr lang="en-US" sz="1100" dirty="0">
+                      <a:endParaRPr lang="en-US" sz="1000" dirty="0">
                         <a:latin typeface="Arial" charset="0"/>
                         <a:ea typeface="Arial" charset="0"/>
                         <a:cs typeface="Arial" charset="0"/>
                       </a:endParaRPr>
                     </a:p>
                   </a:txBody>
-                  <a:tcPr marL="45720" marR="45720" marT="45720" marB="45720" anchor="ctr">
+                  <a:tcPr marL="36576" marR="36576" marT="36576" marB="36576" anchor="ctr">
                     <a:lnL w="6350" cap="flat" cmpd="sng" algn="ctr">
                       <a:solidFill>
                         <a:srgbClr val="E1E2E8"/>
@@ -14929,7 +15638,7 @@
                         <a:buNone/>
                       </a:pPr>
                       <a:r>
-                        <a:rPr lang="en-US" sz="1100" dirty="0">
+                        <a:rPr lang="en-US" sz="1000" dirty="0">
                           <a:solidFill>
                             <a:srgbClr val="2B2A4C"/>
                           </a:solidFill>
@@ -14937,16 +15646,16 @@
                           <a:ea typeface="Arial" pitchFamily="34" charset="-122"/>
                           <a:cs typeface="Arial" pitchFamily="34" charset="-120"/>
                         </a:rPr>
-                        <a:t>5 / 50</a:t>
+                        <a:t>–</a:t>
                       </a:r>
-                      <a:endParaRPr lang="en-US" sz="1100" dirty="0">
+                      <a:endParaRPr lang="en-US" sz="1000" dirty="0">
                         <a:latin typeface="Arial" charset="0"/>
                         <a:ea typeface="Arial" charset="0"/>
                         <a:cs typeface="Arial" charset="0"/>
                       </a:endParaRPr>
                     </a:p>
                   </a:txBody>
-                  <a:tcPr marL="45720" marR="45720" marT="45720" marB="45720" anchor="ctr">
+                  <a:tcPr marL="36576" marR="36576" marT="36576" marB="36576" anchor="ctr">
                     <a:lnL w="6350" cap="flat" cmpd="sng" algn="ctr">
                       <a:solidFill>
                         <a:srgbClr val="E1E2E8"/>
@@ -14989,7 +15698,7 @@
                   </a:tcPr>
                 </a:tc>
               </a:tr>
-              <a:tr h="320040">
+              <a:tr h="274320">
                 <a:tc>
                   <a:txBody>
                     <a:bodyPr/>
@@ -14999,7 +15708,7 @@
                         <a:buNone/>
                       </a:pPr>
                       <a:r>
-                        <a:rPr lang="en-US" sz="1100" dirty="0">
+                        <a:rPr lang="en-US" sz="1000" dirty="0">
                           <a:solidFill>
                             <a:srgbClr val="2B2A4C"/>
                           </a:solidFill>
@@ -15007,16 +15716,16 @@
                           <a:ea typeface="Arial" pitchFamily="34" charset="-122"/>
                           <a:cs typeface="Arial" pitchFamily="34" charset="-120"/>
                         </a:rPr>
-                        <a:t>Inertia control, before collusion</a:t>
+                        <a:t>Memory window, full history (pilot)</a:t>
                       </a:r>
-                      <a:endParaRPr lang="en-US" sz="1100" dirty="0">
+                      <a:endParaRPr lang="en-US" sz="1000" dirty="0">
                         <a:latin typeface="Arial" charset="0"/>
                         <a:ea typeface="Arial" charset="0"/>
                         <a:cs typeface="Arial" charset="0"/>
                       </a:endParaRPr>
                     </a:p>
                   </a:txBody>
-                  <a:tcPr marL="45720" marR="45720" marT="45720" marB="45720" anchor="ctr">
+                  <a:tcPr marL="36576" marR="36576" marT="36576" marB="36576" anchor="ctr">
                     <a:lnL w="6350" cap="flat" cmpd="sng" algn="ctr">
                       <a:solidFill>
                         <a:srgbClr val="E1E2E8"/>
@@ -15067,7 +15776,7 @@
                         <a:buNone/>
                       </a:pPr>
                       <a:r>
-                        <a:rPr lang="en-US" sz="1100" dirty="0">
+                        <a:rPr lang="en-US" sz="1000" dirty="0">
                           <a:solidFill>
                             <a:srgbClr val="2B2A4C"/>
                           </a:solidFill>
@@ -15075,16 +15784,16 @@
                           <a:ea typeface="Arial" pitchFamily="34" charset="-122"/>
                           <a:cs typeface="Arial" pitchFamily="34" charset="-120"/>
                         </a:rPr>
-                        <a:t>15 / 45</a:t>
+                        <a:t>5 / 50</a:t>
                       </a:r>
-                      <a:endParaRPr lang="en-US" sz="1100" dirty="0">
+                      <a:endParaRPr lang="en-US" sz="1000" dirty="0">
                         <a:latin typeface="Arial" charset="0"/>
                         <a:ea typeface="Arial" charset="0"/>
                         <a:cs typeface="Arial" charset="0"/>
                       </a:endParaRPr>
                     </a:p>
                   </a:txBody>
-                  <a:tcPr marL="45720" marR="45720" marT="45720" marB="45720" anchor="ctr">
+                  <a:tcPr marL="36576" marR="36576" marT="36576" marB="36576" anchor="ctr">
                     <a:lnL w="6350" cap="flat" cmpd="sng" algn="ctr">
                       <a:solidFill>
                         <a:srgbClr val="E1E2E8"/>
@@ -15135,7 +15844,7 @@
                         <a:buNone/>
                       </a:pPr>
                       <a:r>
-                        <a:rPr lang="en-US" sz="1100" dirty="0">
+                        <a:rPr lang="en-US" sz="1000" dirty="0">
                           <a:solidFill>
                             <a:srgbClr val="2B2A4C"/>
                           </a:solidFill>
@@ -15143,16 +15852,16 @@
                           <a:ea typeface="Arial" pitchFamily="34" charset="-122"/>
                           <a:cs typeface="Arial" pitchFamily="34" charset="-120"/>
                         </a:rPr>
-                        <a:t>15 / 45</a:t>
+                        <a:t>–</a:t>
                       </a:r>
-                      <a:endParaRPr lang="en-US" sz="1100" dirty="0">
+                      <a:endParaRPr lang="en-US" sz="1000" dirty="0">
                         <a:latin typeface="Arial" charset="0"/>
                         <a:ea typeface="Arial" charset="0"/>
                         <a:cs typeface="Arial" charset="0"/>
                       </a:endParaRPr>
                     </a:p>
                   </a:txBody>
-                  <a:tcPr marL="45720" marR="45720" marT="45720" marB="45720" anchor="ctr">
+                  <a:tcPr marL="36576" marR="36576" marT="36576" marB="36576" anchor="ctr">
                     <a:lnL w="6350" cap="flat" cmpd="sng" algn="ctr">
                       <a:solidFill>
                         <a:srgbClr val="E1E2E8"/>
@@ -15203,7 +15912,7 @@
                         <a:buNone/>
                       </a:pPr>
                       <a:r>
-                        <a:rPr lang="en-US" sz="1100" dirty="0">
+                        <a:rPr lang="en-US" sz="1000" dirty="0">
                           <a:solidFill>
                             <a:srgbClr val="2B2A4C"/>
                           </a:solidFill>
@@ -15211,16 +15920,16 @@
                           <a:ea typeface="Arial" pitchFamily="34" charset="-122"/>
                           <a:cs typeface="Arial" pitchFamily="34" charset="-120"/>
                         </a:rPr>
-                        <a:t>15 / 45</a:t>
+                        <a:t>–</a:t>
                       </a:r>
-                      <a:endParaRPr lang="en-US" sz="1100" dirty="0">
+                      <a:endParaRPr lang="en-US" sz="1000" dirty="0">
                         <a:latin typeface="Arial" charset="0"/>
                         <a:ea typeface="Arial" charset="0"/>
                         <a:cs typeface="Arial" charset="0"/>
                       </a:endParaRPr>
                     </a:p>
                   </a:txBody>
-                  <a:tcPr marL="45720" marR="45720" marT="45720" marB="45720" anchor="ctr">
+                  <a:tcPr marL="36576" marR="36576" marT="36576" marB="36576" anchor="ctr">
                     <a:lnL w="6350" cap="flat" cmpd="sng" algn="ctr">
                       <a:solidFill>
                         <a:srgbClr val="E1E2E8"/>
@@ -15263,7 +15972,7 @@
                   </a:tcPr>
                 </a:tc>
               </a:tr>
-              <a:tr h="320040">
+              <a:tr h="274320">
                 <a:tc>
                   <a:txBody>
                     <a:bodyPr/>
@@ -15273,7 +15982,7 @@
                         <a:buNone/>
                       </a:pPr>
                       <a:r>
-                        <a:rPr lang="en-US" sz="1100" dirty="0">
+                        <a:rPr lang="en-US" sz="1000" dirty="0">
                           <a:solidFill>
                             <a:srgbClr val="2B2A4C"/>
                           </a:solidFill>
@@ -15281,16 +15990,16 @@
                           <a:ea typeface="Arial" pitchFamily="34" charset="-122"/>
                           <a:cs typeface="Arial" pitchFamily="34" charset="-120"/>
                         </a:rPr>
-                        <a:t>Inertia control, fresh agents</a:t>
+                        <a:t>Memory window, last 5 episodes (pilot)</a:t>
                       </a:r>
-                      <a:endParaRPr lang="en-US" sz="1100" dirty="0">
+                      <a:endParaRPr lang="en-US" sz="1000" dirty="0">
                         <a:latin typeface="Arial" charset="0"/>
                         <a:ea typeface="Arial" charset="0"/>
                         <a:cs typeface="Arial" charset="0"/>
                       </a:endParaRPr>
                     </a:p>
                   </a:txBody>
-                  <a:tcPr marL="45720" marR="45720" marT="45720" marB="45720" anchor="ctr">
+                  <a:tcPr marL="36576" marR="36576" marT="36576" marB="36576" anchor="ctr">
                     <a:lnL w="6350" cap="flat" cmpd="sng" algn="ctr">
                       <a:solidFill>
                         <a:srgbClr val="E1E2E8"/>
@@ -15341,7 +16050,7 @@
                         <a:buNone/>
                       </a:pPr>
                       <a:r>
-                        <a:rPr lang="en-US" sz="1100" dirty="0">
+                        <a:rPr lang="en-US" sz="1000" dirty="0">
                           <a:solidFill>
                             <a:srgbClr val="2B2A4C"/>
                           </a:solidFill>
@@ -15349,16 +16058,16 @@
                           <a:ea typeface="Arial" pitchFamily="34" charset="-122"/>
                           <a:cs typeface="Arial" pitchFamily="34" charset="-120"/>
                         </a:rPr>
-                        <a:t>15 / 45</a:t>
+                        <a:t>5 / 50</a:t>
                       </a:r>
-                      <a:endParaRPr lang="en-US" sz="1100" dirty="0">
+                      <a:endParaRPr lang="en-US" sz="1000" dirty="0">
                         <a:latin typeface="Arial" charset="0"/>
                         <a:ea typeface="Arial" charset="0"/>
                         <a:cs typeface="Arial" charset="0"/>
                       </a:endParaRPr>
                     </a:p>
                   </a:txBody>
-                  <a:tcPr marL="45720" marR="45720" marT="45720" marB="45720" anchor="ctr">
+                  <a:tcPr marL="36576" marR="36576" marT="36576" marB="36576" anchor="ctr">
                     <a:lnL w="6350" cap="flat" cmpd="sng" algn="ctr">
                       <a:solidFill>
                         <a:srgbClr val="E1E2E8"/>
@@ -15409,7 +16118,7 @@
                         <a:buNone/>
                       </a:pPr>
                       <a:r>
-                        <a:rPr lang="en-US" sz="1100" dirty="0">
+                        <a:rPr lang="en-US" sz="1000" dirty="0">
                           <a:solidFill>
                             <a:srgbClr val="2B2A4C"/>
                           </a:solidFill>
@@ -15417,16 +16126,16 @@
                           <a:ea typeface="Arial" pitchFamily="34" charset="-122"/>
                           <a:cs typeface="Arial" pitchFamily="34" charset="-120"/>
                         </a:rPr>
-                        <a:t>15 / 45</a:t>
+                        <a:t>–</a:t>
                       </a:r>
-                      <a:endParaRPr lang="en-US" sz="1100" dirty="0">
+                      <a:endParaRPr lang="en-US" sz="1000" dirty="0">
                         <a:latin typeface="Arial" charset="0"/>
                         <a:ea typeface="Arial" charset="0"/>
                         <a:cs typeface="Arial" charset="0"/>
                       </a:endParaRPr>
                     </a:p>
                   </a:txBody>
-                  <a:tcPr marL="45720" marR="45720" marT="45720" marB="45720" anchor="ctr">
+                  <a:tcPr marL="36576" marR="36576" marT="36576" marB="36576" anchor="ctr">
                     <a:lnL w="6350" cap="flat" cmpd="sng" algn="ctr">
                       <a:solidFill>
                         <a:srgbClr val="E1E2E8"/>
@@ -15477,7 +16186,7 @@
                         <a:buNone/>
                       </a:pPr>
                       <a:r>
-                        <a:rPr lang="en-US" sz="1100" dirty="0">
+                        <a:rPr lang="en-US" sz="1000" dirty="0">
                           <a:solidFill>
                             <a:srgbClr val="2B2A4C"/>
                           </a:solidFill>
@@ -15485,16 +16194,838 @@
                           <a:ea typeface="Arial" pitchFamily="34" charset="-122"/>
                           <a:cs typeface="Arial" pitchFamily="34" charset="-120"/>
                         </a:rPr>
-                        <a:t>15 / 45</a:t>
+                        <a:t>–</a:t>
                       </a:r>
-                      <a:endParaRPr lang="en-US" sz="1100" dirty="0">
+                      <a:endParaRPr lang="en-US" sz="1000" dirty="0">
                         <a:latin typeface="Arial" charset="0"/>
                         <a:ea typeface="Arial" charset="0"/>
                         <a:cs typeface="Arial" charset="0"/>
                       </a:endParaRPr>
                     </a:p>
                   </a:txBody>
-                  <a:tcPr marL="45720" marR="45720" marT="45720" marB="45720" anchor="ctr">
+                  <a:tcPr marL="36576" marR="36576" marT="36576" marB="36576" anchor="ctr">
+                    <a:lnL w="6350" cap="flat" cmpd="sng" algn="ctr">
+                      <a:solidFill>
+                        <a:srgbClr val="E1E2E8"/>
+                      </a:solidFill>
+                      <a:prstDash val="solid"/>
+                      <a:round/>
+                      <a:headEnd type="none" w="med" len="med"/>
+                      <a:tailEnd type="none" w="med" len="med"/>
+                    </a:lnL>
+                    <a:lnR w="6350" cap="flat" cmpd="sng" algn="ctr">
+                      <a:solidFill>
+                        <a:srgbClr val="E1E2E8"/>
+                      </a:solidFill>
+                      <a:prstDash val="solid"/>
+                      <a:round/>
+                      <a:headEnd type="none" w="med" len="med"/>
+                      <a:tailEnd type="none" w="med" len="med"/>
+                    </a:lnR>
+                    <a:lnT w="6350" cap="flat" cmpd="sng" algn="ctr">
+                      <a:solidFill>
+                        <a:srgbClr val="E1E2E8"/>
+                      </a:solidFill>
+                      <a:prstDash val="solid"/>
+                      <a:round/>
+                      <a:headEnd type="none" w="med" len="med"/>
+                      <a:tailEnd type="none" w="med" len="med"/>
+                    </a:lnT>
+                    <a:lnB w="6350" cap="flat" cmpd="sng" algn="ctr">
+                      <a:solidFill>
+                        <a:srgbClr val="E1E2E8"/>
+                      </a:solidFill>
+                      <a:prstDash val="solid"/>
+                      <a:round/>
+                      <a:headEnd type="none" w="med" len="med"/>
+                      <a:tailEnd type="none" w="med" len="med"/>
+                    </a:lnB>
+                    <a:solidFill>
+                      <a:srgbClr val="FFFFFF"/>
+                    </a:solidFill>
+                  </a:tcPr>
+                </a:tc>
+              </a:tr>
+              <a:tr h="274320">
+                <a:tc>
+                  <a:txBody>
+                    <a:bodyPr/>
+                    <a:lstStyle/>
+                    <a:p>
+                      <a:pPr indent="0" marL="0">
+                        <a:buNone/>
+                      </a:pPr>
+                      <a:r>
+                        <a:rPr lang="en-US" sz="1000" dirty="0">
+                          <a:solidFill>
+                            <a:srgbClr val="2B2A4C"/>
+                          </a:solidFill>
+                          <a:latin typeface="Arial" pitchFamily="34" charset="0"/>
+                          <a:ea typeface="Arial" pitchFamily="34" charset="-122"/>
+                          <a:cs typeface="Arial" pitchFamily="34" charset="-120"/>
+                        </a:rPr>
+                        <a:t>Memory window, last 2 episodes (pilot)</a:t>
+                      </a:r>
+                      <a:endParaRPr lang="en-US" sz="1000" dirty="0">
+                        <a:latin typeface="Arial" charset="0"/>
+                        <a:ea typeface="Arial" charset="0"/>
+                        <a:cs typeface="Arial" charset="0"/>
+                      </a:endParaRPr>
+                    </a:p>
+                  </a:txBody>
+                  <a:tcPr marL="36576" marR="36576" marT="36576" marB="36576" anchor="ctr">
+                    <a:lnL w="6350" cap="flat" cmpd="sng" algn="ctr">
+                      <a:solidFill>
+                        <a:srgbClr val="E1E2E8"/>
+                      </a:solidFill>
+                      <a:prstDash val="solid"/>
+                      <a:round/>
+                      <a:headEnd type="none" w="med" len="med"/>
+                      <a:tailEnd type="none" w="med" len="med"/>
+                    </a:lnL>
+                    <a:lnR w="6350" cap="flat" cmpd="sng" algn="ctr">
+                      <a:solidFill>
+                        <a:srgbClr val="E1E2E8"/>
+                      </a:solidFill>
+                      <a:prstDash val="solid"/>
+                      <a:round/>
+                      <a:headEnd type="none" w="med" len="med"/>
+                      <a:tailEnd type="none" w="med" len="med"/>
+                    </a:lnR>
+                    <a:lnT w="6350" cap="flat" cmpd="sng" algn="ctr">
+                      <a:solidFill>
+                        <a:srgbClr val="E1E2E8"/>
+                      </a:solidFill>
+                      <a:prstDash val="solid"/>
+                      <a:round/>
+                      <a:headEnd type="none" w="med" len="med"/>
+                      <a:tailEnd type="none" w="med" len="med"/>
+                    </a:lnT>
+                    <a:lnB w="6350" cap="flat" cmpd="sng" algn="ctr">
+                      <a:solidFill>
+                        <a:srgbClr val="E1E2E8"/>
+                      </a:solidFill>
+                      <a:prstDash val="solid"/>
+                      <a:round/>
+                      <a:headEnd type="none" w="med" len="med"/>
+                      <a:tailEnd type="none" w="med" len="med"/>
+                    </a:lnB>
+                    <a:solidFill>
+                      <a:srgbClr val="FFFFFF"/>
+                    </a:solidFill>
+                  </a:tcPr>
+                </a:tc>
+                <a:tc>
+                  <a:txBody>
+                    <a:bodyPr/>
+                    <a:lstStyle/>
+                    <a:p>
+                      <a:pPr algn="ctr" indent="0" marL="0">
+                        <a:buNone/>
+                      </a:pPr>
+                      <a:r>
+                        <a:rPr lang="en-US" sz="1000" dirty="0">
+                          <a:solidFill>
+                            <a:srgbClr val="2B2A4C"/>
+                          </a:solidFill>
+                          <a:latin typeface="Arial" pitchFamily="34" charset="0"/>
+                          <a:ea typeface="Arial" pitchFamily="34" charset="-122"/>
+                          <a:cs typeface="Arial" pitchFamily="34" charset="-120"/>
+                        </a:rPr>
+                        <a:t>5 / 25</a:t>
+                      </a:r>
+                      <a:endParaRPr lang="en-US" sz="1000" dirty="0">
+                        <a:latin typeface="Arial" charset="0"/>
+                        <a:ea typeface="Arial" charset="0"/>
+                        <a:cs typeface="Arial" charset="0"/>
+                      </a:endParaRPr>
+                    </a:p>
+                  </a:txBody>
+                  <a:tcPr marL="36576" marR="36576" marT="36576" marB="36576" anchor="ctr">
+                    <a:lnL w="6350" cap="flat" cmpd="sng" algn="ctr">
+                      <a:solidFill>
+                        <a:srgbClr val="E1E2E8"/>
+                      </a:solidFill>
+                      <a:prstDash val="solid"/>
+                      <a:round/>
+                      <a:headEnd type="none" w="med" len="med"/>
+                      <a:tailEnd type="none" w="med" len="med"/>
+                    </a:lnL>
+                    <a:lnR w="6350" cap="flat" cmpd="sng" algn="ctr">
+                      <a:solidFill>
+                        <a:srgbClr val="E1E2E8"/>
+                      </a:solidFill>
+                      <a:prstDash val="solid"/>
+                      <a:round/>
+                      <a:headEnd type="none" w="med" len="med"/>
+                      <a:tailEnd type="none" w="med" len="med"/>
+                    </a:lnR>
+                    <a:lnT w="6350" cap="flat" cmpd="sng" algn="ctr">
+                      <a:solidFill>
+                        <a:srgbClr val="E1E2E8"/>
+                      </a:solidFill>
+                      <a:prstDash val="solid"/>
+                      <a:round/>
+                      <a:headEnd type="none" w="med" len="med"/>
+                      <a:tailEnd type="none" w="med" len="med"/>
+                    </a:lnT>
+                    <a:lnB w="6350" cap="flat" cmpd="sng" algn="ctr">
+                      <a:solidFill>
+                        <a:srgbClr val="E1E2E8"/>
+                      </a:solidFill>
+                      <a:prstDash val="solid"/>
+                      <a:round/>
+                      <a:headEnd type="none" w="med" len="med"/>
+                      <a:tailEnd type="none" w="med" len="med"/>
+                    </a:lnB>
+                    <a:solidFill>
+                      <a:srgbClr val="FFFFFF"/>
+                    </a:solidFill>
+                  </a:tcPr>
+                </a:tc>
+                <a:tc>
+                  <a:txBody>
+                    <a:bodyPr/>
+                    <a:lstStyle/>
+                    <a:p>
+                      <a:pPr algn="ctr" indent="0" marL="0">
+                        <a:buNone/>
+                      </a:pPr>
+                      <a:r>
+                        <a:rPr lang="en-US" sz="1000" dirty="0">
+                          <a:solidFill>
+                            <a:srgbClr val="2B2A4C"/>
+                          </a:solidFill>
+                          <a:latin typeface="Arial" pitchFamily="34" charset="0"/>
+                          <a:ea typeface="Arial" pitchFamily="34" charset="-122"/>
+                          <a:cs typeface="Arial" pitchFamily="34" charset="-120"/>
+                        </a:rPr>
+                        <a:t>–</a:t>
+                      </a:r>
+                      <a:endParaRPr lang="en-US" sz="1000" dirty="0">
+                        <a:latin typeface="Arial" charset="0"/>
+                        <a:ea typeface="Arial" charset="0"/>
+                        <a:cs typeface="Arial" charset="0"/>
+                      </a:endParaRPr>
+                    </a:p>
+                  </a:txBody>
+                  <a:tcPr marL="36576" marR="36576" marT="36576" marB="36576" anchor="ctr">
+                    <a:lnL w="6350" cap="flat" cmpd="sng" algn="ctr">
+                      <a:solidFill>
+                        <a:srgbClr val="E1E2E8"/>
+                      </a:solidFill>
+                      <a:prstDash val="solid"/>
+                      <a:round/>
+                      <a:headEnd type="none" w="med" len="med"/>
+                      <a:tailEnd type="none" w="med" len="med"/>
+                    </a:lnL>
+                    <a:lnR w="6350" cap="flat" cmpd="sng" algn="ctr">
+                      <a:solidFill>
+                        <a:srgbClr val="E1E2E8"/>
+                      </a:solidFill>
+                      <a:prstDash val="solid"/>
+                      <a:round/>
+                      <a:headEnd type="none" w="med" len="med"/>
+                      <a:tailEnd type="none" w="med" len="med"/>
+                    </a:lnR>
+                    <a:lnT w="6350" cap="flat" cmpd="sng" algn="ctr">
+                      <a:solidFill>
+                        <a:srgbClr val="E1E2E8"/>
+                      </a:solidFill>
+                      <a:prstDash val="solid"/>
+                      <a:round/>
+                      <a:headEnd type="none" w="med" len="med"/>
+                      <a:tailEnd type="none" w="med" len="med"/>
+                    </a:lnT>
+                    <a:lnB w="6350" cap="flat" cmpd="sng" algn="ctr">
+                      <a:solidFill>
+                        <a:srgbClr val="E1E2E8"/>
+                      </a:solidFill>
+                      <a:prstDash val="solid"/>
+                      <a:round/>
+                      <a:headEnd type="none" w="med" len="med"/>
+                      <a:tailEnd type="none" w="med" len="med"/>
+                    </a:lnB>
+                    <a:solidFill>
+                      <a:srgbClr val="FFFFFF"/>
+                    </a:solidFill>
+                  </a:tcPr>
+                </a:tc>
+                <a:tc>
+                  <a:txBody>
+                    <a:bodyPr/>
+                    <a:lstStyle/>
+                    <a:p>
+                      <a:pPr algn="ctr" indent="0" marL="0">
+                        <a:buNone/>
+                      </a:pPr>
+                      <a:r>
+                        <a:rPr lang="en-US" sz="1000" dirty="0">
+                          <a:solidFill>
+                            <a:srgbClr val="2B2A4C"/>
+                          </a:solidFill>
+                          <a:latin typeface="Arial" pitchFamily="34" charset="0"/>
+                          <a:ea typeface="Arial" pitchFamily="34" charset="-122"/>
+                          <a:cs typeface="Arial" pitchFamily="34" charset="-120"/>
+                        </a:rPr>
+                        <a:t>–</a:t>
+                      </a:r>
+                      <a:endParaRPr lang="en-US" sz="1000" dirty="0">
+                        <a:latin typeface="Arial" charset="0"/>
+                        <a:ea typeface="Arial" charset="0"/>
+                        <a:cs typeface="Arial" charset="0"/>
+                      </a:endParaRPr>
+                    </a:p>
+                  </a:txBody>
+                  <a:tcPr marL="36576" marR="36576" marT="36576" marB="36576" anchor="ctr">
+                    <a:lnL w="6350" cap="flat" cmpd="sng" algn="ctr">
+                      <a:solidFill>
+                        <a:srgbClr val="E1E2E8"/>
+                      </a:solidFill>
+                      <a:prstDash val="solid"/>
+                      <a:round/>
+                      <a:headEnd type="none" w="med" len="med"/>
+                      <a:tailEnd type="none" w="med" len="med"/>
+                    </a:lnL>
+                    <a:lnR w="6350" cap="flat" cmpd="sng" algn="ctr">
+                      <a:solidFill>
+                        <a:srgbClr val="E1E2E8"/>
+                      </a:solidFill>
+                      <a:prstDash val="solid"/>
+                      <a:round/>
+                      <a:headEnd type="none" w="med" len="med"/>
+                      <a:tailEnd type="none" w="med" len="med"/>
+                    </a:lnR>
+                    <a:lnT w="6350" cap="flat" cmpd="sng" algn="ctr">
+                      <a:solidFill>
+                        <a:srgbClr val="E1E2E8"/>
+                      </a:solidFill>
+                      <a:prstDash val="solid"/>
+                      <a:round/>
+                      <a:headEnd type="none" w="med" len="med"/>
+                      <a:tailEnd type="none" w="med" len="med"/>
+                    </a:lnT>
+                    <a:lnB w="6350" cap="flat" cmpd="sng" algn="ctr">
+                      <a:solidFill>
+                        <a:srgbClr val="E1E2E8"/>
+                      </a:solidFill>
+                      <a:prstDash val="solid"/>
+                      <a:round/>
+                      <a:headEnd type="none" w="med" len="med"/>
+                      <a:tailEnd type="none" w="med" len="med"/>
+                    </a:lnB>
+                    <a:solidFill>
+                      <a:srgbClr val="FFFFFF"/>
+                    </a:solidFill>
+                  </a:tcPr>
+                </a:tc>
+              </a:tr>
+              <a:tr h="274320">
+                <a:tc>
+                  <a:txBody>
+                    <a:bodyPr/>
+                    <a:lstStyle/>
+                    <a:p>
+                      <a:pPr indent="0" marL="0">
+                        <a:buNone/>
+                      </a:pPr>
+                      <a:r>
+                        <a:rPr lang="en-US" sz="1000" dirty="0">
+                          <a:solidFill>
+                            <a:srgbClr val="2B2A4C"/>
+                          </a:solidFill>
+                          <a:latin typeface="Arial" pitchFamily="34" charset="0"/>
+                          <a:ea typeface="Arial" pitchFamily="34" charset="-122"/>
+                          <a:cs typeface="Arial" pitchFamily="34" charset="-120"/>
+                        </a:rPr>
+                        <a:t>Other misconduct, five probes (pilot)</a:t>
+                      </a:r>
+                      <a:endParaRPr lang="en-US" sz="1000" dirty="0">
+                        <a:latin typeface="Arial" charset="0"/>
+                        <a:ea typeface="Arial" charset="0"/>
+                        <a:cs typeface="Arial" charset="0"/>
+                      </a:endParaRPr>
+                    </a:p>
+                  </a:txBody>
+                  <a:tcPr marL="36576" marR="36576" marT="36576" marB="36576" anchor="ctr">
+                    <a:lnL w="6350" cap="flat" cmpd="sng" algn="ctr">
+                      <a:solidFill>
+                        <a:srgbClr val="E1E2E8"/>
+                      </a:solidFill>
+                      <a:prstDash val="solid"/>
+                      <a:round/>
+                      <a:headEnd type="none" w="med" len="med"/>
+                      <a:tailEnd type="none" w="med" len="med"/>
+                    </a:lnL>
+                    <a:lnR w="6350" cap="flat" cmpd="sng" algn="ctr">
+                      <a:solidFill>
+                        <a:srgbClr val="E1E2E8"/>
+                      </a:solidFill>
+                      <a:prstDash val="solid"/>
+                      <a:round/>
+                      <a:headEnd type="none" w="med" len="med"/>
+                      <a:tailEnd type="none" w="med" len="med"/>
+                    </a:lnR>
+                    <a:lnT w="6350" cap="flat" cmpd="sng" algn="ctr">
+                      <a:solidFill>
+                        <a:srgbClr val="E1E2E8"/>
+                      </a:solidFill>
+                      <a:prstDash val="solid"/>
+                      <a:round/>
+                      <a:headEnd type="none" w="med" len="med"/>
+                      <a:tailEnd type="none" w="med" len="med"/>
+                    </a:lnT>
+                    <a:lnB w="6350" cap="flat" cmpd="sng" algn="ctr">
+                      <a:solidFill>
+                        <a:srgbClr val="E1E2E8"/>
+                      </a:solidFill>
+                      <a:prstDash val="solid"/>
+                      <a:round/>
+                      <a:headEnd type="none" w="med" len="med"/>
+                      <a:tailEnd type="none" w="med" len="med"/>
+                    </a:lnB>
+                    <a:solidFill>
+                      <a:srgbClr val="FFFFFF"/>
+                    </a:solidFill>
+                  </a:tcPr>
+                </a:tc>
+                <a:tc>
+                  <a:txBody>
+                    <a:bodyPr/>
+                    <a:lstStyle/>
+                    <a:p>
+                      <a:pPr algn="ctr" indent="0" marL="0">
+                        <a:buNone/>
+                      </a:pPr>
+                      <a:r>
+                        <a:rPr lang="en-US" sz="1000" dirty="0">
+                          <a:solidFill>
+                            <a:srgbClr val="2B2A4C"/>
+                          </a:solidFill>
+                          <a:latin typeface="Arial" pitchFamily="34" charset="0"/>
+                          <a:ea typeface="Arial" pitchFamily="34" charset="-122"/>
+                          <a:cs typeface="Arial" pitchFamily="34" charset="-120"/>
+                        </a:rPr>
+                        <a:t>150 / 450</a:t>
+                      </a:r>
+                      <a:endParaRPr lang="en-US" sz="1000" dirty="0">
+                        <a:latin typeface="Arial" charset="0"/>
+                        <a:ea typeface="Arial" charset="0"/>
+                        <a:cs typeface="Arial" charset="0"/>
+                      </a:endParaRPr>
+                    </a:p>
+                  </a:txBody>
+                  <a:tcPr marL="36576" marR="36576" marT="36576" marB="36576" anchor="ctr">
+                    <a:lnL w="6350" cap="flat" cmpd="sng" algn="ctr">
+                      <a:solidFill>
+                        <a:srgbClr val="E1E2E8"/>
+                      </a:solidFill>
+                      <a:prstDash val="solid"/>
+                      <a:round/>
+                      <a:headEnd type="none" w="med" len="med"/>
+                      <a:tailEnd type="none" w="med" len="med"/>
+                    </a:lnL>
+                    <a:lnR w="6350" cap="flat" cmpd="sng" algn="ctr">
+                      <a:solidFill>
+                        <a:srgbClr val="E1E2E8"/>
+                      </a:solidFill>
+                      <a:prstDash val="solid"/>
+                      <a:round/>
+                      <a:headEnd type="none" w="med" len="med"/>
+                      <a:tailEnd type="none" w="med" len="med"/>
+                    </a:lnR>
+                    <a:lnT w="6350" cap="flat" cmpd="sng" algn="ctr">
+                      <a:solidFill>
+                        <a:srgbClr val="E1E2E8"/>
+                      </a:solidFill>
+                      <a:prstDash val="solid"/>
+                      <a:round/>
+                      <a:headEnd type="none" w="med" len="med"/>
+                      <a:tailEnd type="none" w="med" len="med"/>
+                    </a:lnT>
+                    <a:lnB w="6350" cap="flat" cmpd="sng" algn="ctr">
+                      <a:solidFill>
+                        <a:srgbClr val="E1E2E8"/>
+                      </a:solidFill>
+                      <a:prstDash val="solid"/>
+                      <a:round/>
+                      <a:headEnd type="none" w="med" len="med"/>
+                      <a:tailEnd type="none" w="med" len="med"/>
+                    </a:lnB>
+                    <a:solidFill>
+                      <a:srgbClr val="FFFFFF"/>
+                    </a:solidFill>
+                  </a:tcPr>
+                </a:tc>
+                <a:tc>
+                  <a:txBody>
+                    <a:bodyPr/>
+                    <a:lstStyle/>
+                    <a:p>
+                      <a:pPr algn="ctr" indent="0" marL="0">
+                        <a:buNone/>
+                      </a:pPr>
+                      <a:r>
+                        <a:rPr lang="en-US" sz="1000" dirty="0">
+                          <a:solidFill>
+                            <a:srgbClr val="2B2A4C"/>
+                          </a:solidFill>
+                          <a:latin typeface="Arial" pitchFamily="34" charset="0"/>
+                          <a:ea typeface="Arial" pitchFamily="34" charset="-122"/>
+                          <a:cs typeface="Arial" pitchFamily="34" charset="-120"/>
+                        </a:rPr>
+                        <a:t>–</a:t>
+                      </a:r>
+                      <a:endParaRPr lang="en-US" sz="1000" dirty="0">
+                        <a:latin typeface="Arial" charset="0"/>
+                        <a:ea typeface="Arial" charset="0"/>
+                        <a:cs typeface="Arial" charset="0"/>
+                      </a:endParaRPr>
+                    </a:p>
+                  </a:txBody>
+                  <a:tcPr marL="36576" marR="36576" marT="36576" marB="36576" anchor="ctr">
+                    <a:lnL w="6350" cap="flat" cmpd="sng" algn="ctr">
+                      <a:solidFill>
+                        <a:srgbClr val="E1E2E8"/>
+                      </a:solidFill>
+                      <a:prstDash val="solid"/>
+                      <a:round/>
+                      <a:headEnd type="none" w="med" len="med"/>
+                      <a:tailEnd type="none" w="med" len="med"/>
+                    </a:lnL>
+                    <a:lnR w="6350" cap="flat" cmpd="sng" algn="ctr">
+                      <a:solidFill>
+                        <a:srgbClr val="E1E2E8"/>
+                      </a:solidFill>
+                      <a:prstDash val="solid"/>
+                      <a:round/>
+                      <a:headEnd type="none" w="med" len="med"/>
+                      <a:tailEnd type="none" w="med" len="med"/>
+                    </a:lnR>
+                    <a:lnT w="6350" cap="flat" cmpd="sng" algn="ctr">
+                      <a:solidFill>
+                        <a:srgbClr val="E1E2E8"/>
+                      </a:solidFill>
+                      <a:prstDash val="solid"/>
+                      <a:round/>
+                      <a:headEnd type="none" w="med" len="med"/>
+                      <a:tailEnd type="none" w="med" len="med"/>
+                    </a:lnT>
+                    <a:lnB w="6350" cap="flat" cmpd="sng" algn="ctr">
+                      <a:solidFill>
+                        <a:srgbClr val="E1E2E8"/>
+                      </a:solidFill>
+                      <a:prstDash val="solid"/>
+                      <a:round/>
+                      <a:headEnd type="none" w="med" len="med"/>
+                      <a:tailEnd type="none" w="med" len="med"/>
+                    </a:lnB>
+                    <a:solidFill>
+                      <a:srgbClr val="FFFFFF"/>
+                    </a:solidFill>
+                  </a:tcPr>
+                </a:tc>
+                <a:tc>
+                  <a:txBody>
+                    <a:bodyPr/>
+                    <a:lstStyle/>
+                    <a:p>
+                      <a:pPr algn="ctr" indent="0" marL="0">
+                        <a:buNone/>
+                      </a:pPr>
+                      <a:r>
+                        <a:rPr lang="en-US" sz="1000" dirty="0">
+                          <a:solidFill>
+                            <a:srgbClr val="2B2A4C"/>
+                          </a:solidFill>
+                          <a:latin typeface="Arial" pitchFamily="34" charset="0"/>
+                          <a:ea typeface="Arial" pitchFamily="34" charset="-122"/>
+                          <a:cs typeface="Arial" pitchFamily="34" charset="-120"/>
+                        </a:rPr>
+                        <a:t>–</a:t>
+                      </a:r>
+                      <a:endParaRPr lang="en-US" sz="1000" dirty="0">
+                        <a:latin typeface="Arial" charset="0"/>
+                        <a:ea typeface="Arial" charset="0"/>
+                        <a:cs typeface="Arial" charset="0"/>
+                      </a:endParaRPr>
+                    </a:p>
+                  </a:txBody>
+                  <a:tcPr marL="36576" marR="36576" marT="36576" marB="36576" anchor="ctr">
+                    <a:lnL w="6350" cap="flat" cmpd="sng" algn="ctr">
+                      <a:solidFill>
+                        <a:srgbClr val="E1E2E8"/>
+                      </a:solidFill>
+                      <a:prstDash val="solid"/>
+                      <a:round/>
+                      <a:headEnd type="none" w="med" len="med"/>
+                      <a:tailEnd type="none" w="med" len="med"/>
+                    </a:lnL>
+                    <a:lnR w="6350" cap="flat" cmpd="sng" algn="ctr">
+                      <a:solidFill>
+                        <a:srgbClr val="E1E2E8"/>
+                      </a:solidFill>
+                      <a:prstDash val="solid"/>
+                      <a:round/>
+                      <a:headEnd type="none" w="med" len="med"/>
+                      <a:tailEnd type="none" w="med" len="med"/>
+                    </a:lnR>
+                    <a:lnT w="6350" cap="flat" cmpd="sng" algn="ctr">
+                      <a:solidFill>
+                        <a:srgbClr val="E1E2E8"/>
+                      </a:solidFill>
+                      <a:prstDash val="solid"/>
+                      <a:round/>
+                      <a:headEnd type="none" w="med" len="med"/>
+                      <a:tailEnd type="none" w="med" len="med"/>
+                    </a:lnT>
+                    <a:lnB w="6350" cap="flat" cmpd="sng" algn="ctr">
+                      <a:solidFill>
+                        <a:srgbClr val="E1E2E8"/>
+                      </a:solidFill>
+                      <a:prstDash val="solid"/>
+                      <a:round/>
+                      <a:headEnd type="none" w="med" len="med"/>
+                      <a:tailEnd type="none" w="med" len="med"/>
+                    </a:lnB>
+                    <a:solidFill>
+                      <a:srgbClr val="FFFFFF"/>
+                    </a:solidFill>
+                  </a:tcPr>
+                </a:tc>
+              </a:tr>
+              <a:tr h="274320">
+                <a:tc>
+                  <a:txBody>
+                    <a:bodyPr/>
+                    <a:lstStyle/>
+                    <a:p>
+                      <a:pPr indent="0" marL="0">
+                        <a:buNone/>
+                      </a:pPr>
+                      <a:r>
+                        <a:rPr lang="en-US" sz="1000" dirty="0">
+                          <a:solidFill>
+                            <a:srgbClr val="2B2A4C"/>
+                          </a:solidFill>
+                          <a:latin typeface="Arial" pitchFamily="34" charset="0"/>
+                          <a:ea typeface="Arial" pitchFamily="34" charset="-122"/>
+                          <a:cs typeface="Arial" pitchFamily="34" charset="-120"/>
+                        </a:rPr>
+                        <a:t>Data-search tasks, every arm (pilot)</a:t>
+                      </a:r>
+                      <a:endParaRPr lang="en-US" sz="1000" dirty="0">
+                        <a:latin typeface="Arial" charset="0"/>
+                        <a:ea typeface="Arial" charset="0"/>
+                        <a:cs typeface="Arial" charset="0"/>
+                      </a:endParaRPr>
+                    </a:p>
+                  </a:txBody>
+                  <a:tcPr marL="36576" marR="36576" marT="36576" marB="36576" anchor="ctr">
+                    <a:lnL w="6350" cap="flat" cmpd="sng" algn="ctr">
+                      <a:solidFill>
+                        <a:srgbClr val="E1E2E8"/>
+                      </a:solidFill>
+                      <a:prstDash val="solid"/>
+                      <a:round/>
+                      <a:headEnd type="none" w="med" len="med"/>
+                      <a:tailEnd type="none" w="med" len="med"/>
+                    </a:lnL>
+                    <a:lnR w="6350" cap="flat" cmpd="sng" algn="ctr">
+                      <a:solidFill>
+                        <a:srgbClr val="E1E2E8"/>
+                      </a:solidFill>
+                      <a:prstDash val="solid"/>
+                      <a:round/>
+                      <a:headEnd type="none" w="med" len="med"/>
+                      <a:tailEnd type="none" w="med" len="med"/>
+                    </a:lnR>
+                    <a:lnT w="6350" cap="flat" cmpd="sng" algn="ctr">
+                      <a:solidFill>
+                        <a:srgbClr val="E1E2E8"/>
+                      </a:solidFill>
+                      <a:prstDash val="solid"/>
+                      <a:round/>
+                      <a:headEnd type="none" w="med" len="med"/>
+                      <a:tailEnd type="none" w="med" len="med"/>
+                    </a:lnT>
+                    <a:lnB w="6350" cap="flat" cmpd="sng" algn="ctr">
+                      <a:solidFill>
+                        <a:srgbClr val="E1E2E8"/>
+                      </a:solidFill>
+                      <a:prstDash val="solid"/>
+                      <a:round/>
+                      <a:headEnd type="none" w="med" len="med"/>
+                      <a:tailEnd type="none" w="med" len="med"/>
+                    </a:lnB>
+                    <a:solidFill>
+                      <a:srgbClr val="FFFFFF"/>
+                    </a:solidFill>
+                  </a:tcPr>
+                </a:tc>
+                <a:tc>
+                  <a:txBody>
+                    <a:bodyPr/>
+                    <a:lstStyle/>
+                    <a:p>
+                      <a:pPr algn="ctr" indent="0" marL="0">
+                        <a:buNone/>
+                      </a:pPr>
+                      <a:r>
+                        <a:rPr lang="en-US" sz="1000" dirty="0">
+                          <a:solidFill>
+                            <a:srgbClr val="2B2A4C"/>
+                          </a:solidFill>
+                          <a:latin typeface="Arial" pitchFamily="34" charset="0"/>
+                          <a:ea typeface="Arial" pitchFamily="34" charset="-122"/>
+                          <a:cs typeface="Arial" pitchFamily="34" charset="-120"/>
+                        </a:rPr>
+                        <a:t>80 / 410</a:t>
+                      </a:r>
+                      <a:endParaRPr lang="en-US" sz="1000" dirty="0">
+                        <a:latin typeface="Arial" charset="0"/>
+                        <a:ea typeface="Arial" charset="0"/>
+                        <a:cs typeface="Arial" charset="0"/>
+                      </a:endParaRPr>
+                    </a:p>
+                  </a:txBody>
+                  <a:tcPr marL="36576" marR="36576" marT="36576" marB="36576" anchor="ctr">
+                    <a:lnL w="6350" cap="flat" cmpd="sng" algn="ctr">
+                      <a:solidFill>
+                        <a:srgbClr val="E1E2E8"/>
+                      </a:solidFill>
+                      <a:prstDash val="solid"/>
+                      <a:round/>
+                      <a:headEnd type="none" w="med" len="med"/>
+                      <a:tailEnd type="none" w="med" len="med"/>
+                    </a:lnL>
+                    <a:lnR w="6350" cap="flat" cmpd="sng" algn="ctr">
+                      <a:solidFill>
+                        <a:srgbClr val="E1E2E8"/>
+                      </a:solidFill>
+                      <a:prstDash val="solid"/>
+                      <a:round/>
+                      <a:headEnd type="none" w="med" len="med"/>
+                      <a:tailEnd type="none" w="med" len="med"/>
+                    </a:lnR>
+                    <a:lnT w="6350" cap="flat" cmpd="sng" algn="ctr">
+                      <a:solidFill>
+                        <a:srgbClr val="E1E2E8"/>
+                      </a:solidFill>
+                      <a:prstDash val="solid"/>
+                      <a:round/>
+                      <a:headEnd type="none" w="med" len="med"/>
+                      <a:tailEnd type="none" w="med" len="med"/>
+                    </a:lnT>
+                    <a:lnB w="6350" cap="flat" cmpd="sng" algn="ctr">
+                      <a:solidFill>
+                        <a:srgbClr val="E1E2E8"/>
+                      </a:solidFill>
+                      <a:prstDash val="solid"/>
+                      <a:round/>
+                      <a:headEnd type="none" w="med" len="med"/>
+                      <a:tailEnd type="none" w="med" len="med"/>
+                    </a:lnB>
+                    <a:solidFill>
+                      <a:srgbClr val="FFFFFF"/>
+                    </a:solidFill>
+                  </a:tcPr>
+                </a:tc>
+                <a:tc>
+                  <a:txBody>
+                    <a:bodyPr/>
+                    <a:lstStyle/>
+                    <a:p>
+                      <a:pPr algn="ctr" indent="0" marL="0">
+                        <a:buNone/>
+                      </a:pPr>
+                      <a:r>
+                        <a:rPr lang="en-US" sz="1000" dirty="0">
+                          <a:solidFill>
+                            <a:srgbClr val="2B2A4C"/>
+                          </a:solidFill>
+                          <a:latin typeface="Arial" pitchFamily="34" charset="0"/>
+                          <a:ea typeface="Arial" pitchFamily="34" charset="-122"/>
+                          <a:cs typeface="Arial" pitchFamily="34" charset="-120"/>
+                        </a:rPr>
+                        <a:t>–</a:t>
+                      </a:r>
+                      <a:endParaRPr lang="en-US" sz="1000" dirty="0">
+                        <a:latin typeface="Arial" charset="0"/>
+                        <a:ea typeface="Arial" charset="0"/>
+                        <a:cs typeface="Arial" charset="0"/>
+                      </a:endParaRPr>
+                    </a:p>
+                  </a:txBody>
+                  <a:tcPr marL="36576" marR="36576" marT="36576" marB="36576" anchor="ctr">
+                    <a:lnL w="6350" cap="flat" cmpd="sng" algn="ctr">
+                      <a:solidFill>
+                        <a:srgbClr val="E1E2E8"/>
+                      </a:solidFill>
+                      <a:prstDash val="solid"/>
+                      <a:round/>
+                      <a:headEnd type="none" w="med" len="med"/>
+                      <a:tailEnd type="none" w="med" len="med"/>
+                    </a:lnL>
+                    <a:lnR w="6350" cap="flat" cmpd="sng" algn="ctr">
+                      <a:solidFill>
+                        <a:srgbClr val="E1E2E8"/>
+                      </a:solidFill>
+                      <a:prstDash val="solid"/>
+                      <a:round/>
+                      <a:headEnd type="none" w="med" len="med"/>
+                      <a:tailEnd type="none" w="med" len="med"/>
+                    </a:lnR>
+                    <a:lnT w="6350" cap="flat" cmpd="sng" algn="ctr">
+                      <a:solidFill>
+                        <a:srgbClr val="E1E2E8"/>
+                      </a:solidFill>
+                      <a:prstDash val="solid"/>
+                      <a:round/>
+                      <a:headEnd type="none" w="med" len="med"/>
+                      <a:tailEnd type="none" w="med" len="med"/>
+                    </a:lnT>
+                    <a:lnB w="6350" cap="flat" cmpd="sng" algn="ctr">
+                      <a:solidFill>
+                        <a:srgbClr val="E1E2E8"/>
+                      </a:solidFill>
+                      <a:prstDash val="solid"/>
+                      <a:round/>
+                      <a:headEnd type="none" w="med" len="med"/>
+                      <a:tailEnd type="none" w="med" len="med"/>
+                    </a:lnB>
+                    <a:solidFill>
+                      <a:srgbClr val="FFFFFF"/>
+                    </a:solidFill>
+                  </a:tcPr>
+                </a:tc>
+                <a:tc>
+                  <a:txBody>
+                    <a:bodyPr/>
+                    <a:lstStyle/>
+                    <a:p>
+                      <a:pPr algn="ctr" indent="0" marL="0">
+                        <a:buNone/>
+                      </a:pPr>
+                      <a:r>
+                        <a:rPr lang="en-US" sz="1000" dirty="0">
+                          <a:solidFill>
+                            <a:srgbClr val="2B2A4C"/>
+                          </a:solidFill>
+                          <a:latin typeface="Arial" pitchFamily="34" charset="0"/>
+                          <a:ea typeface="Arial" pitchFamily="34" charset="-122"/>
+                          <a:cs typeface="Arial" pitchFamily="34" charset="-120"/>
+                        </a:rPr>
+                        <a:t>–</a:t>
+                      </a:r>
+                      <a:endParaRPr lang="en-US" sz="1000" dirty="0">
+                        <a:latin typeface="Arial" charset="0"/>
+                        <a:ea typeface="Arial" charset="0"/>
+                        <a:cs typeface="Arial" charset="0"/>
+                      </a:endParaRPr>
+                    </a:p>
+                  </a:txBody>
+                  <a:tcPr marL="36576" marR="36576" marT="36576" marB="36576" anchor="ctr">
                     <a:lnL w="6350" cap="flat" cmpd="sng" algn="ctr">
                       <a:solidFill>
                         <a:srgbClr val="E1E2E8"/>
@@ -15574,7 +17105,7 @@
                 <a:ea typeface="Arial" pitchFamily="34" charset="-122"/>
                 <a:cs typeface="Arial" pitchFamily="34" charset="-120"/>
               </a:rPr>
-              <a:t>A run is one saved history in one arm (two for GPT-6-Luna's swap, one per order) or one never-rewarded reference pair. Total: 940 runs and 4,247 episodes, plus 45 saved histories built from 236 rewarded episodes.</a:t>
+              <a:t>A run is one saved history in one arm (two for GPT-6-Luna's swap, one per order) or one never-rewarded reference pair. Total: 1,325 runs and 6,041 episodes, plus 45 saved histories built from 236 rewarded episodes.</a:t>
             </a:r>
             <a:endParaRPr lang="en-US" sz="1200" dirty="0"/>
           </a:p>
@@ -15787,7 +17318,7 @@
                 <a:ea typeface="Arial" pitchFamily="34" charset="-122"/>
                 <a:cs typeface="Arial" pitchFamily="34" charset="-120"/>
               </a:rPr>
-              <a:t>Is collusion robust to replacing some of the participants?</a:t>
+              <a:t>Does collusion survive replacing some of the participants?</a:t>
             </a:r>
             <a:endParaRPr lang="en-US" sz="2200" dirty="0"/>
           </a:p>
@@ -15840,7 +17371,7 @@
                 <a:ea typeface="Arial" pitchFamily="34" charset="-122"/>
                 <a:cs typeface="Arial" pitchFamily="34" charset="-120"/>
               </a:rPr>
-              <a:t>Each policy overfits to its rival, so they stop colluding with a new one (Eschenbaum et al., 2022). For LLM agents, no one had tried it.</a:t>
+              <a:t>Each policy overfits to its rival, so they stop colluding with a new one (Eschenbaum et al., 2022). To our knowledge, no one had tried it for LLM agents.</a:t>
             </a:r>
             <a:endParaRPr lang="en-US" sz="1500" dirty="0"/>
           </a:p>
@@ -16014,6 +17545,20 @@
             <a:r>
               <a:rPr lang="en-US" sz="1800" b="1" dirty="0">
                 <a:solidFill>
+                  <a:srgbClr val="E39A2D"/>
+                </a:solidFill>
+                <a:latin typeface="Arial" pitchFamily="34" charset="0"/>
+                <a:ea typeface="Arial" pitchFamily="34" charset="-122"/>
+                <a:cs typeface="Arial" pitchFamily="34" charset="-120"/>
+              </a:rPr>
+              <a:t>C1  </a:t>
+            </a:r>
+            <a:pPr indent="0" marL="0">
+              <a:buNone/>
+            </a:pPr>
+            <a:r>
+              <a:rPr lang="en-US" sz="1800" b="1" dirty="0">
+                <a:solidFill>
                   <a:srgbClr val="2B2A4C"/>
                 </a:solidFill>
                 <a:latin typeface="Arial" pitchFamily="34" charset="0"/>
@@ -16037,7 +17582,7 @@
                 <a:ea typeface="Arial" pitchFamily="34" charset="-122"/>
                 <a:cs typeface="Arial" pitchFamily="34" charset="-120"/>
               </a:rPr>
-              <a:t>stop the reward, silently or told</a:t>
+              <a:t>stop the reward, silently or told, or penalise it</a:t>
             </a:r>
             <a:endParaRPr lang="en-US" sz="1800" dirty="0"/>
           </a:p>
@@ -16113,6 +17658,20 @@
           <a:bodyPr wrap="square" lIns="0" tIns="0" rIns="0" bIns="0" rtlCol="0" anchor="ctr"/>
           <a:lstStyle/>
           <a:p>
+            <a:pPr indent="0" marL="0">
+              <a:buNone/>
+            </a:pPr>
+            <a:r>
+              <a:rPr lang="en-US" sz="1800" b="1" dirty="0">
+                <a:solidFill>
+                  <a:srgbClr val="3A9C96"/>
+                </a:solidFill>
+                <a:latin typeface="Arial" pitchFamily="34" charset="0"/>
+                <a:ea typeface="Arial" pitchFamily="34" charset="-122"/>
+                <a:cs typeface="Arial" pitchFamily="34" charset="-120"/>
+              </a:rPr>
+              <a:t>C2  </a:t>
+            </a:r>
             <a:pPr indent="0" marL="0">
               <a:buNone/>
             </a:pPr>
@@ -16224,6 +17783,20 @@
             <a:r>
               <a:rPr lang="en-US" sz="1800" b="1" dirty="0">
                 <a:solidFill>
+                  <a:srgbClr val="7E6BC4"/>
+                </a:solidFill>
+                <a:latin typeface="Arial" pitchFamily="34" charset="0"/>
+                <a:ea typeface="Arial" pitchFamily="34" charset="-122"/>
+                <a:cs typeface="Arial" pitchFamily="34" charset="-120"/>
+              </a:rPr>
+              <a:t>C3  </a:t>
+            </a:r>
+            <a:pPr indent="0" marL="0">
+              <a:buNone/>
+            </a:pPr>
+            <a:r>
+              <a:rPr lang="en-US" sz="1800" b="1" dirty="0">
+                <a:solidFill>
                   <a:srgbClr val="2B2A4C"/>
                 </a:solidFill>
                 <a:latin typeface="Arial" pitchFamily="34" charset="0"/>
@@ -16323,6 +17896,20 @@
           <a:bodyPr wrap="square" lIns="0" tIns="0" rIns="0" bIns="0" rtlCol="0" anchor="ctr"/>
           <a:lstStyle/>
           <a:p>
+            <a:pPr indent="0" marL="0">
+              <a:buNone/>
+            </a:pPr>
+            <a:r>
+              <a:rPr lang="en-US" sz="1800" b="1" dirty="0">
+                <a:solidFill>
+                  <a:srgbClr val="E8615E"/>
+                </a:solidFill>
+                <a:latin typeface="Arial" pitchFamily="34" charset="0"/>
+                <a:ea typeface="Arial" pitchFamily="34" charset="-122"/>
+                <a:cs typeface="Arial" pitchFamily="34" charset="-120"/>
+              </a:rPr>
+              <a:t>C4  </a:t>
+            </a:r>
             <a:pPr indent="0" marL="0">
               <a:buNone/>
             </a:pPr>
@@ -17232,7 +18819,7 @@
                 <a:ea typeface="Arial" pitchFamily="34" charset="-122"/>
                 <a:cs typeface="Arial" pitchFamily="34" charset="-120"/>
               </a:rPr>
-              <a:t>400 characters; logs run ~5,600</a:t>
+              <a:t>400 characters; logs run 2,000–24,000</a:t>
             </a:r>
             <a:endParaRPr lang="en-US" sz="1500" dirty="0"/>
           </a:p>
@@ -17869,7 +19456,7 @@
                 <a:ea typeface="Arial" pitchFamily="34" charset="-122"/>
                 <a:cs typeface="Arial" pitchFamily="34" charset="-120"/>
               </a:rPr>
-              <a:t>Incentive</a:t>
+              <a:t>Incentive (C1)</a:t>
             </a:r>
             <a:endParaRPr lang="en-US" sz="1600" dirty="0"/>
           </a:p>
@@ -17886,7 +19473,7 @@
                 <a:ea typeface="Arial" pitchFamily="34" charset="-122"/>
                 <a:cs typeface="Arial" pitchFamily="34" charset="-120"/>
               </a:rPr>
-              <a:t>reward stops, silently or told</a:t>
+              <a:t>reward stops, silently or told, or a penalty</a:t>
             </a:r>
             <a:endParaRPr lang="en-US" sz="1600" dirty="0"/>
           </a:p>
@@ -18024,7 +19611,7 @@
                 <a:ea typeface="Arial" pitchFamily="34" charset="-122"/>
                 <a:cs typeface="Arial" pitchFamily="34" charset="-120"/>
               </a:rPr>
-              <a:t>Participants</a:t>
+              <a:t>Participants (C2)</a:t>
             </a:r>
             <a:endParaRPr lang="en-US" sz="1600" dirty="0"/>
           </a:p>
@@ -18041,7 +19628,7 @@
                 <a:ea typeface="Arial" pitchFamily="34" charset="-122"/>
                 <a:cs typeface="Arial" pitchFamily="34" charset="-120"/>
               </a:rPr>
-              <a:t>one or both agents replaced</a:t>
+              <a:t>one agent replaced, same model or another</a:t>
             </a:r>
             <a:endParaRPr lang="en-US" sz="1600" dirty="0"/>
           </a:p>
@@ -18179,7 +19766,7 @@
                 <a:ea typeface="Arial" pitchFamily="34" charset="-122"/>
                 <a:cs typeface="Arial" pitchFamily="34" charset="-120"/>
               </a:rPr>
-              <a:t>Memory</a:t>
+              <a:t>Memory (C3)</a:t>
             </a:r>
             <a:endParaRPr lang="en-US" sz="1600" dirty="0"/>
           </a:p>
@@ -18196,7 +19783,7 @@
                 <a:ea typeface="Arial" pitchFamily="34" charset="-122"/>
                 <a:cs typeface="Arial" pitchFamily="34" charset="-120"/>
               </a:rPr>
-              <a:t>one part of it removed</a:t>
+              <a:t>wiped, or one part of it removed</a:t>
             </a:r>
             <a:endParaRPr lang="en-US" sz="1600" dirty="0"/>
           </a:p>
@@ -18334,7 +19921,7 @@
                 <a:ea typeface="Arial" pitchFamily="34" charset="-122"/>
                 <a:cs typeface="Arial" pitchFamily="34" charset="-120"/>
               </a:rPr>
-              <a:t>Cause</a:t>
+              <a:t>Cause (C4)</a:t>
             </a:r>
             <a:endParaRPr lang="en-US" sz="1600" dirty="0"/>
           </a:p>
@@ -18351,7 +19938,7 @@
                 <a:ea typeface="Arial" pitchFamily="34" charset="-122"/>
                 <a:cs typeface="Arial" pitchFamily="34" charset="-120"/>
               </a:rPr>
-              <a:t>penalty, audit, or a repaired channel</a:t>
+              <a:t>the channel is repaired</a:t>
             </a:r>
             <a:endParaRPr lang="en-US" sz="1600" dirty="0"/>
           </a:p>
@@ -18390,7 +19977,7 @@
                 <a:ea typeface="Arial" pitchFamily="34" charset="-122"/>
                 <a:cs typeface="Arial" pitchFamily="34" charset="-120"/>
               </a:rPr>
-              <a:t>Every arm starts from the same saved histories, so each history is compared with itself. In all: 45 saved histories, 940 runs, 4,247 episodes, 3 models.</a:t>
+              <a:t>Every arm starts from the same saved histories, so each history is compared with itself. In all: 45 saved histories, 1,325 runs, 6,041 episodes, 3 models.</a:t>
             </a:r>
             <a:endParaRPr lang="en-US" sz="1500" dirty="0"/>
           </a:p>
@@ -18498,7 +20085,7 @@
                   <a:schemeClr val="tx1"/>
                 </a:solidFill>
               </a:rPr>
-              <a:t>Stop the reward: they keep colluding</a:t>
+              <a:t>Stop or penalise the reward: they keep colluding</a:t>
             </a:r>
             <a:endParaRPr lang="en-US" sz="3400" dirty="0"/>
           </a:p>
@@ -18506,26 +20093,26 @@
       </p:sp>
       <p:sp>
         <p:nvSpPr>
-          <p:cNvPr id="3" name="model-card-gpt"/>
+          <p:cNvPr id="3" name="tag-C1"/>
           <p:cNvSpPr/>
           <p:nvPr/>
         </p:nvSpPr>
         <p:spPr>
           <a:xfrm>
-            <a:off x="548640" y="1325880"/>
-            <a:ext cx="3474720" cy="4160520"/>
+            <a:off x="320040" y="109728"/>
+            <a:ext cx="566928" cy="310896"/>
           </a:xfrm>
           <a:prstGeom prst="roundRect">
             <a:avLst>
-              <a:gd name="adj" fmla="val 4737"/>
+              <a:gd name="adj" fmla="val 23529"/>
             </a:avLst>
           </a:prstGeom>
           <a:solidFill>
-            <a:srgbClr val="F4F3F8"/>
+            <a:srgbClr val="E39A2D"/>
           </a:solidFill>
           <a:ln w="12700">
             <a:solidFill>
-              <a:srgbClr val="F4F3F8"/>
+              <a:srgbClr val="E39A2D"/>
             </a:solidFill>
             <a:prstDash val="solid"/>
           </a:ln>
@@ -18533,39 +20120,77 @@
       </p:sp>
       <p:sp>
         <p:nvSpPr>
-          <p:cNvPr id="4" name="Shape 2"/>
-          <p:cNvSpPr/>
-          <p:nvPr/>
-        </p:nvSpPr>
-        <p:spPr>
-          <a:xfrm>
-            <a:off x="822960" y="1572768"/>
-            <a:ext cx="237744" cy="237744"/>
-          </a:xfrm>
-          <a:prstGeom prst="ellipse">
-            <a:avLst/>
-          </a:prstGeom>
-          <a:solidFill>
-            <a:srgbClr val="EB6834"/>
-          </a:solidFill>
-          <a:ln w="12700">
-            <a:solidFill>
-              <a:srgbClr val="EB6834"/>
-            </a:solidFill>
-            <a:prstDash val="solid"/>
-          </a:ln>
-        </p:spPr>
-      </p:sp>
-      <p:sp>
-        <p:nvSpPr>
-          <p:cNvPr id="5" name="Text 3"/>
+          <p:cNvPr id="4" name="Text 2"/>
           <p:cNvSpPr txBox="1"/>
           <p:nvPr/>
         </p:nvSpPr>
         <p:spPr>
           <a:xfrm>
-            <a:off x="1188720" y="1481328"/>
-            <a:ext cx="2743200" cy="411480"/>
+            <a:off x="320040" y="109728"/>
+            <a:ext cx="566928" cy="310896"/>
+          </a:xfrm>
+          <a:prstGeom prst="rect">
+            <a:avLst/>
+          </a:prstGeom>
+          <a:noFill/>
+          <a:ln/>
+        </p:spPr>
+        <p:txBody>
+          <a:bodyPr wrap="square" lIns="0" tIns="0" rIns="0" bIns="0" rtlCol="0" anchor="ctr"/>
+          <a:lstStyle/>
+          <a:p>
+            <a:pPr algn="ctr" indent="0" marL="0">
+              <a:buNone/>
+            </a:pPr>
+            <a:r>
+              <a:rPr lang="en-US" sz="1300" b="1" dirty="0">
+                <a:solidFill>
+                  <a:srgbClr val="FFFFFF"/>
+                </a:solidFill>
+                <a:latin typeface="Arial" pitchFamily="34" charset="0"/>
+                <a:ea typeface="Arial" pitchFamily="34" charset="-122"/>
+                <a:cs typeface="Arial" pitchFamily="34" charset="-120"/>
+              </a:rPr>
+              <a:t>C1</a:t>
+            </a:r>
+            <a:endParaRPr lang="en-US" sz="1300" dirty="0"/>
+          </a:p>
+        </p:txBody>
+      </p:sp>
+      <p:pic>
+        <p:nvPicPr>
+          <p:cNvPr id="5" name="Image 0" descr="/home/user/Research/joshua/collusion/joint-task-collusion/reports/sticky-collusion/figures/fig_persistence_bars.png">    </p:cNvPr>
+          <p:cNvPicPr>
+            <a:picLocks noChangeAspect="1"/>
+          </p:cNvPicPr>
+          <p:nvPr/>
+        </p:nvPicPr>
+        <p:blipFill>
+          <a:blip r:embed="rId1"/>
+          <a:stretch>
+            <a:fillRect/>
+          </a:stretch>
+        </p:blipFill>
+        <p:spPr>
+          <a:xfrm>
+            <a:off x="1066648" y="1143000"/>
+            <a:ext cx="10058400" cy="3647767"/>
+          </a:xfrm>
+          <a:prstGeom prst="rect">
+            <a:avLst/>
+          </a:prstGeom>
+        </p:spPr>
+      </p:pic>
+      <p:sp>
+        <p:nvSpPr>
+          <p:cNvPr id="6" name="Text 3"/>
+          <p:cNvSpPr txBox="1"/>
+          <p:nvPr/>
+        </p:nvSpPr>
+        <p:spPr>
+          <a:xfrm>
+            <a:off x="548640" y="4927927"/>
+            <a:ext cx="11064240" cy="411480"/>
           </a:xfrm>
           <a:prstGeom prst="rect">
             <a:avLst/>
@@ -18589,7 +20214,7 @@
                 <a:ea typeface="Arial" pitchFamily="34" charset="-122"/>
                 <a:cs typeface="Arial" pitchFamily="34" charset="-120"/>
               </a:rPr>
-              <a:t>GPT-6-Luna</a:t>
+              <a:t>Stopping or penalising the reward rarely ends collusion; wiping memory does.</a:t>
             </a:r>
             <a:endParaRPr lang="en-US" sz="1700" dirty="0"/>
           </a:p>
@@ -18597,53 +20222,14 @@
       </p:sp>
       <p:sp>
         <p:nvSpPr>
-          <p:cNvPr id="6" name="Text 4"/>
+          <p:cNvPr id="7" name="Text 4"/>
           <p:cNvSpPr txBox="1"/>
           <p:nvPr/>
         </p:nvSpPr>
         <p:spPr>
           <a:xfrm>
-            <a:off x="822960" y="2057400"/>
-            <a:ext cx="3017520" cy="914400"/>
-          </a:xfrm>
-          <a:prstGeom prst="rect">
-            <a:avLst/>
-          </a:prstGeom>
-          <a:noFill/>
-          <a:ln/>
-        </p:spPr>
-        <p:txBody>
-          <a:bodyPr wrap="square" lIns="0" tIns="0" rIns="0" bIns="0" rtlCol="0" anchor="ctr"/>
-          <a:lstStyle/>
-          <a:p>
-            <a:pPr indent="0" marL="0">
-              <a:buNone/>
-            </a:pPr>
-            <a:r>
-              <a:rPr lang="en-US" sz="6000" b="1" dirty="0">
-                <a:solidFill>
-                  <a:srgbClr val="E39A2D"/>
-                </a:solidFill>
-                <a:latin typeface="Arial" pitchFamily="34" charset="0"/>
-                <a:ea typeface="Arial" pitchFamily="34" charset="-122"/>
-                <a:cs typeface="Arial" pitchFamily="34" charset="-120"/>
-              </a:rPr>
-              <a:t>78%</a:t>
-            </a:r>
-            <a:endParaRPr lang="en-US" sz="6000" dirty="0"/>
-          </a:p>
-        </p:txBody>
-      </p:sp>
-      <p:sp>
-        <p:nvSpPr>
-          <p:cNvPr id="7" name="Text 5"/>
-          <p:cNvSpPr txBox="1"/>
-          <p:nvPr/>
-        </p:nvSpPr>
-        <p:spPr>
-          <a:xfrm>
-            <a:off x="822960" y="2971800"/>
-            <a:ext cx="3017520" cy="548640"/>
+            <a:off x="548640" y="5532120"/>
+            <a:ext cx="11064240" cy="502920"/>
           </a:xfrm>
           <a:prstGeom prst="rect">
             <a:avLst/>
@@ -18659,124 +20245,7 @@
               <a:buNone/>
             </a:pPr>
             <a:r>
-              <a:rPr lang="en-US" sz="1400" dirty="0">
-                <a:solidFill>
-                  <a:srgbClr val="2B2A4C"/>
-                </a:solidFill>
-                <a:latin typeface="Arial" pitchFamily="34" charset="0"/>
-                <a:ea typeface="Arial" pitchFamily="34" charset="-122"/>
-                <a:cs typeface="Arial" pitchFamily="34" charset="-120"/>
-              </a:rPr>
-              <a:t>still collude after the reward stops (memory kept)</a:t>
-            </a:r>
-            <a:endParaRPr lang="en-US" sz="1400" dirty="0"/>
-          </a:p>
-        </p:txBody>
-      </p:sp>
-      <p:sp>
-        <p:nvSpPr>
-          <p:cNvPr id="8" name="Text 6"/>
-          <p:cNvSpPr txBox="1"/>
-          <p:nvPr/>
-        </p:nvSpPr>
-        <p:spPr>
-          <a:xfrm>
-            <a:off x="822960" y="3657600"/>
-            <a:ext cx="1463040" cy="594360"/>
-          </a:xfrm>
-          <a:prstGeom prst="rect">
-            <a:avLst/>
-          </a:prstGeom>
-          <a:noFill/>
-          <a:ln/>
-        </p:spPr>
-        <p:txBody>
-          <a:bodyPr wrap="square" lIns="0" tIns="0" rIns="0" bIns="0" rtlCol="0" anchor="ctr"/>
-          <a:lstStyle/>
-          <a:p>
-            <a:pPr indent="0" marL="0">
-              <a:buNone/>
-            </a:pPr>
-            <a:r>
-              <a:rPr lang="en-US" sz="3600" b="1" dirty="0">
-                <a:solidFill>
-                  <a:srgbClr val="9AA0AE"/>
-                </a:solidFill>
-                <a:latin typeface="Arial" pitchFamily="34" charset="0"/>
-                <a:ea typeface="Arial" pitchFamily="34" charset="-122"/>
-                <a:cs typeface="Arial" pitchFamily="34" charset="-120"/>
-              </a:rPr>
-              <a:t>0%</a:t>
-            </a:r>
-            <a:endParaRPr lang="en-US" sz="3600" dirty="0"/>
-          </a:p>
-        </p:txBody>
-      </p:sp>
-      <p:sp>
-        <p:nvSpPr>
-          <p:cNvPr id="9" name="Text 7"/>
-          <p:cNvSpPr txBox="1"/>
-          <p:nvPr/>
-        </p:nvSpPr>
-        <p:spPr>
-          <a:xfrm>
-            <a:off x="2148840" y="3749040"/>
-            <a:ext cx="1737360" cy="457200"/>
-          </a:xfrm>
-          <a:prstGeom prst="rect">
-            <a:avLst/>
-          </a:prstGeom>
-          <a:noFill/>
-          <a:ln/>
-        </p:spPr>
-        <p:txBody>
-          <a:bodyPr wrap="square" lIns="0" tIns="0" rIns="0" bIns="0" rtlCol="0" anchor="ctr"/>
-          <a:lstStyle/>
-          <a:p>
-            <a:pPr indent="0" marL="0">
-              <a:buNone/>
-            </a:pPr>
-            <a:r>
-              <a:rPr lang="en-US" sz="1400" dirty="0">
-                <a:solidFill>
-                  <a:srgbClr val="2B2A4C"/>
-                </a:solidFill>
-                <a:latin typeface="Arial" pitchFamily="34" charset="0"/>
-                <a:ea typeface="Arial" pitchFamily="34" charset="-122"/>
-                <a:cs typeface="Arial" pitchFamily="34" charset="-120"/>
-              </a:rPr>
-              <a:t>with memory wiped</a:t>
-            </a:r>
-            <a:endParaRPr lang="en-US" sz="1400" dirty="0"/>
-          </a:p>
-        </p:txBody>
-      </p:sp>
-      <p:sp>
-        <p:nvSpPr>
-          <p:cNvPr id="10" name="Text 8"/>
-          <p:cNvSpPr txBox="1"/>
-          <p:nvPr/>
-        </p:nvSpPr>
-        <p:spPr>
-          <a:xfrm>
-            <a:off x="822960" y="4434840"/>
-            <a:ext cx="3017520" cy="960120"/>
-          </a:xfrm>
-          <a:prstGeom prst="rect">
-            <a:avLst/>
-          </a:prstGeom>
-          <a:noFill/>
-          <a:ln/>
-        </p:spPr>
-        <p:txBody>
-          <a:bodyPr wrap="square" lIns="0" tIns="0" rIns="0" bIns="0" rtlCol="0" anchor="t"/>
-          <a:lstStyle/>
-          <a:p>
-            <a:pPr indent="0" marL="0">
-              <a:buNone/>
-            </a:pPr>
-            <a:r>
-              <a:rPr lang="en-US" sz="1400" dirty="0">
+              <a:rPr lang="en-US" sz="1200" dirty="0">
                 <a:solidFill>
                   <a:srgbClr val="5A5C78"/>
                 </a:solidFill>
@@ -18784,722 +20253,9 @@
                 <a:ea typeface="Arial" pitchFamily="34" charset="-122"/>
                 <a:cs typeface="Arial" pitchFamily="34" charset="-120"/>
               </a:rPr>
-              <a:t>Reward continues: 83%</a:t>
+              <a:t>Mutual ACCEPT (EC) in the 5 episodes after the branch point (4 for the control and the penalty arms); never rewarded: 15 pairs per model over 10 episodes. Bars give the rate and whiskers the 95% interval over 15 saved histories per model.</a:t>
             </a:r>
-            <a:endParaRPr lang="en-US" sz="1400" dirty="0"/>
-          </a:p>
-          <a:p>
-            <a:pPr indent="0" marL="0">
-              <a:buNone/>
-            </a:pPr>
-            <a:r>
-              <a:rPr lang="en-US" sz="1400" dirty="0">
-                <a:solidFill>
-                  <a:srgbClr val="5A5C78"/>
-                </a:solidFill>
-                <a:latin typeface="Arial" pitchFamily="34" charset="0"/>
-                <a:ea typeface="Arial" pitchFamily="34" charset="-122"/>
-                <a:cs typeface="Arial" pitchFamily="34" charset="-120"/>
-              </a:rPr>
-              <a:t>Agents told it stopped: 56%</a:t>
-            </a:r>
-            <a:endParaRPr lang="en-US" sz="1400" dirty="0"/>
-          </a:p>
-          <a:p>
-            <a:pPr indent="0" marL="0">
-              <a:buNone/>
-            </a:pPr>
-            <a:r>
-              <a:rPr lang="en-US" sz="1400" dirty="0">
-                <a:solidFill>
-                  <a:srgbClr val="5A5C78"/>
-                </a:solidFill>
-                <a:latin typeface="Arial" pitchFamily="34" charset="0"/>
-                <a:ea typeface="Arial" pitchFamily="34" charset="-122"/>
-                <a:cs typeface="Arial" pitchFamily="34" charset="-120"/>
-              </a:rPr>
-              <a:t>Never rewarded: 0%</a:t>
-            </a:r>
-            <a:endParaRPr lang="en-US" sz="1400" dirty="0"/>
-          </a:p>
-        </p:txBody>
-      </p:sp>
-      <p:sp>
-        <p:nvSpPr>
-          <p:cNvPr id="11" name="model-card-ds"/>
-          <p:cNvSpPr/>
-          <p:nvPr/>
-        </p:nvSpPr>
-        <p:spPr>
-          <a:xfrm>
-            <a:off x="4297680" y="1325880"/>
-            <a:ext cx="3474720" cy="4160520"/>
-          </a:xfrm>
-          <a:prstGeom prst="roundRect">
-            <a:avLst>
-              <a:gd name="adj" fmla="val 4737"/>
-            </a:avLst>
-          </a:prstGeom>
-          <a:solidFill>
-            <a:srgbClr val="F4F3F8"/>
-          </a:solidFill>
-          <a:ln w="12700">
-            <a:solidFill>
-              <a:srgbClr val="F4F3F8"/>
-            </a:solidFill>
-            <a:prstDash val="solid"/>
-          </a:ln>
-        </p:spPr>
-      </p:sp>
-      <p:sp>
-        <p:nvSpPr>
-          <p:cNvPr id="12" name="Shape 10"/>
-          <p:cNvSpPr/>
-          <p:nvPr/>
-        </p:nvSpPr>
-        <p:spPr>
-          <a:xfrm>
-            <a:off x="4572000" y="1572768"/>
-            <a:ext cx="237744" cy="237744"/>
-          </a:xfrm>
-          <a:prstGeom prst="ellipse">
-            <a:avLst/>
-          </a:prstGeom>
-          <a:solidFill>
-            <a:srgbClr val="199E70"/>
-          </a:solidFill>
-          <a:ln w="12700">
-            <a:solidFill>
-              <a:srgbClr val="199E70"/>
-            </a:solidFill>
-            <a:prstDash val="solid"/>
-          </a:ln>
-        </p:spPr>
-      </p:sp>
-      <p:sp>
-        <p:nvSpPr>
-          <p:cNvPr id="13" name="Text 11"/>
-          <p:cNvSpPr txBox="1"/>
-          <p:nvPr/>
-        </p:nvSpPr>
-        <p:spPr>
-          <a:xfrm>
-            <a:off x="4937760" y="1481328"/>
-            <a:ext cx="2743200" cy="411480"/>
-          </a:xfrm>
-          <a:prstGeom prst="rect">
-            <a:avLst/>
-          </a:prstGeom>
-          <a:noFill/>
-          <a:ln/>
-        </p:spPr>
-        <p:txBody>
-          <a:bodyPr wrap="square" lIns="0" tIns="0" rIns="0" bIns="0" rtlCol="0" anchor="ctr"/>
-          <a:lstStyle/>
-          <a:p>
-            <a:pPr indent="0" marL="0">
-              <a:buNone/>
-            </a:pPr>
-            <a:r>
-              <a:rPr lang="en-US" sz="1700" b="1" dirty="0">
-                <a:solidFill>
-                  <a:srgbClr val="2B2A4C"/>
-                </a:solidFill>
-                <a:latin typeface="Arial" pitchFamily="34" charset="0"/>
-                <a:ea typeface="Arial" pitchFamily="34" charset="-122"/>
-                <a:cs typeface="Arial" pitchFamily="34" charset="-120"/>
-              </a:rPr>
-              <a:t>DeepSeek V4.1 Flash</a:t>
-            </a:r>
-            <a:endParaRPr lang="en-US" sz="1700" dirty="0"/>
-          </a:p>
-        </p:txBody>
-      </p:sp>
-      <p:sp>
-        <p:nvSpPr>
-          <p:cNvPr id="14" name="Text 12"/>
-          <p:cNvSpPr txBox="1"/>
-          <p:nvPr/>
-        </p:nvSpPr>
-        <p:spPr>
-          <a:xfrm>
-            <a:off x="4572000" y="2057400"/>
-            <a:ext cx="3017520" cy="914400"/>
-          </a:xfrm>
-          <a:prstGeom prst="rect">
-            <a:avLst/>
-          </a:prstGeom>
-          <a:noFill/>
-          <a:ln/>
-        </p:spPr>
-        <p:txBody>
-          <a:bodyPr wrap="square" lIns="0" tIns="0" rIns="0" bIns="0" rtlCol="0" anchor="ctr"/>
-          <a:lstStyle/>
-          <a:p>
-            <a:pPr indent="0" marL="0">
-              <a:buNone/>
-            </a:pPr>
-            <a:r>
-              <a:rPr lang="en-US" sz="6000" b="1" dirty="0">
-                <a:solidFill>
-                  <a:srgbClr val="E39A2D"/>
-                </a:solidFill>
-                <a:latin typeface="Arial" pitchFamily="34" charset="0"/>
-                <a:ea typeface="Arial" pitchFamily="34" charset="-122"/>
-                <a:cs typeface="Arial" pitchFamily="34" charset="-120"/>
-              </a:rPr>
-              <a:t>100%</a:t>
-            </a:r>
-            <a:endParaRPr lang="en-US" sz="6000" dirty="0"/>
-          </a:p>
-        </p:txBody>
-      </p:sp>
-      <p:sp>
-        <p:nvSpPr>
-          <p:cNvPr id="15" name="Text 13"/>
-          <p:cNvSpPr txBox="1"/>
-          <p:nvPr/>
-        </p:nvSpPr>
-        <p:spPr>
-          <a:xfrm>
-            <a:off x="4572000" y="2971800"/>
-            <a:ext cx="3017520" cy="548640"/>
-          </a:xfrm>
-          <a:prstGeom prst="rect">
-            <a:avLst/>
-          </a:prstGeom>
-          <a:noFill/>
-          <a:ln/>
-        </p:spPr>
-        <p:txBody>
-          <a:bodyPr wrap="square" lIns="0" tIns="0" rIns="0" bIns="0" rtlCol="0" anchor="t"/>
-          <a:lstStyle/>
-          <a:p>
-            <a:pPr indent="0" marL="0">
-              <a:buNone/>
-            </a:pPr>
-            <a:r>
-              <a:rPr lang="en-US" sz="1400" dirty="0">
-                <a:solidFill>
-                  <a:srgbClr val="2B2A4C"/>
-                </a:solidFill>
-                <a:latin typeface="Arial" pitchFamily="34" charset="0"/>
-                <a:ea typeface="Arial" pitchFamily="34" charset="-122"/>
-                <a:cs typeface="Arial" pitchFamily="34" charset="-120"/>
-              </a:rPr>
-              <a:t>still collude after the reward stops (memory kept)</a:t>
-            </a:r>
-            <a:endParaRPr lang="en-US" sz="1400" dirty="0"/>
-          </a:p>
-        </p:txBody>
-      </p:sp>
-      <p:sp>
-        <p:nvSpPr>
-          <p:cNvPr id="16" name="Text 14"/>
-          <p:cNvSpPr txBox="1"/>
-          <p:nvPr/>
-        </p:nvSpPr>
-        <p:spPr>
-          <a:xfrm>
-            <a:off x="4572000" y="3657600"/>
-            <a:ext cx="1463040" cy="594360"/>
-          </a:xfrm>
-          <a:prstGeom prst="rect">
-            <a:avLst/>
-          </a:prstGeom>
-          <a:noFill/>
-          <a:ln/>
-        </p:spPr>
-        <p:txBody>
-          <a:bodyPr wrap="square" lIns="0" tIns="0" rIns="0" bIns="0" rtlCol="0" anchor="ctr"/>
-          <a:lstStyle/>
-          <a:p>
-            <a:pPr indent="0" marL="0">
-              <a:buNone/>
-            </a:pPr>
-            <a:r>
-              <a:rPr lang="en-US" sz="3600" b="1" dirty="0">
-                <a:solidFill>
-                  <a:srgbClr val="9AA0AE"/>
-                </a:solidFill>
-                <a:latin typeface="Arial" pitchFamily="34" charset="0"/>
-                <a:ea typeface="Arial" pitchFamily="34" charset="-122"/>
-                <a:cs typeface="Arial" pitchFamily="34" charset="-120"/>
-              </a:rPr>
-              <a:t>0%</a:t>
-            </a:r>
-            <a:endParaRPr lang="en-US" sz="3600" dirty="0"/>
-          </a:p>
-        </p:txBody>
-      </p:sp>
-      <p:sp>
-        <p:nvSpPr>
-          <p:cNvPr id="17" name="Text 15"/>
-          <p:cNvSpPr txBox="1"/>
-          <p:nvPr/>
-        </p:nvSpPr>
-        <p:spPr>
-          <a:xfrm>
-            <a:off x="5897880" y="3749040"/>
-            <a:ext cx="1737360" cy="457200"/>
-          </a:xfrm>
-          <a:prstGeom prst="rect">
-            <a:avLst/>
-          </a:prstGeom>
-          <a:noFill/>
-          <a:ln/>
-        </p:spPr>
-        <p:txBody>
-          <a:bodyPr wrap="square" lIns="0" tIns="0" rIns="0" bIns="0" rtlCol="0" anchor="ctr"/>
-          <a:lstStyle/>
-          <a:p>
-            <a:pPr indent="0" marL="0">
-              <a:buNone/>
-            </a:pPr>
-            <a:r>
-              <a:rPr lang="en-US" sz="1400" dirty="0">
-                <a:solidFill>
-                  <a:srgbClr val="2B2A4C"/>
-                </a:solidFill>
-                <a:latin typeface="Arial" pitchFamily="34" charset="0"/>
-                <a:ea typeface="Arial" pitchFamily="34" charset="-122"/>
-                <a:cs typeface="Arial" pitchFamily="34" charset="-120"/>
-              </a:rPr>
-              <a:t>with memory wiped</a:t>
-            </a:r>
-            <a:endParaRPr lang="en-US" sz="1400" dirty="0"/>
-          </a:p>
-        </p:txBody>
-      </p:sp>
-      <p:sp>
-        <p:nvSpPr>
-          <p:cNvPr id="18" name="Text 16"/>
-          <p:cNvSpPr txBox="1"/>
-          <p:nvPr/>
-        </p:nvSpPr>
-        <p:spPr>
-          <a:xfrm>
-            <a:off x="4572000" y="4434840"/>
-            <a:ext cx="3017520" cy="960120"/>
-          </a:xfrm>
-          <a:prstGeom prst="rect">
-            <a:avLst/>
-          </a:prstGeom>
-          <a:noFill/>
-          <a:ln/>
-        </p:spPr>
-        <p:txBody>
-          <a:bodyPr wrap="square" lIns="0" tIns="0" rIns="0" bIns="0" rtlCol="0" anchor="t"/>
-          <a:lstStyle/>
-          <a:p>
-            <a:pPr indent="0" marL="0">
-              <a:buNone/>
-            </a:pPr>
-            <a:r>
-              <a:rPr lang="en-US" sz="1400" dirty="0">
-                <a:solidFill>
-                  <a:srgbClr val="5A5C78"/>
-                </a:solidFill>
-                <a:latin typeface="Arial" pitchFamily="34" charset="0"/>
-                <a:ea typeface="Arial" pitchFamily="34" charset="-122"/>
-                <a:cs typeface="Arial" pitchFamily="34" charset="-120"/>
-              </a:rPr>
-              <a:t>Reward continues: 100%</a:t>
-            </a:r>
-            <a:endParaRPr lang="en-US" sz="1400" dirty="0"/>
-          </a:p>
-          <a:p>
-            <a:pPr indent="0" marL="0">
-              <a:buNone/>
-            </a:pPr>
-            <a:r>
-              <a:rPr lang="en-US" sz="1400" dirty="0">
-                <a:solidFill>
-                  <a:srgbClr val="5A5C78"/>
-                </a:solidFill>
-                <a:latin typeface="Arial" pitchFamily="34" charset="0"/>
-                <a:ea typeface="Arial" pitchFamily="34" charset="-122"/>
-                <a:cs typeface="Arial" pitchFamily="34" charset="-120"/>
-              </a:rPr>
-              <a:t>Agents told it stopped: 100%</a:t>
-            </a:r>
-            <a:endParaRPr lang="en-US" sz="1400" dirty="0"/>
-          </a:p>
-          <a:p>
-            <a:pPr indent="0" marL="0">
-              <a:buNone/>
-            </a:pPr>
-            <a:r>
-              <a:rPr lang="en-US" sz="1400" dirty="0">
-                <a:solidFill>
-                  <a:srgbClr val="5A5C78"/>
-                </a:solidFill>
-                <a:latin typeface="Arial" pitchFamily="34" charset="0"/>
-                <a:ea typeface="Arial" pitchFamily="34" charset="-122"/>
-                <a:cs typeface="Arial" pitchFamily="34" charset="-120"/>
-              </a:rPr>
-              <a:t>Never rewarded: 0%</a:t>
-            </a:r>
-            <a:endParaRPr lang="en-US" sz="1400" dirty="0"/>
-          </a:p>
-        </p:txBody>
-      </p:sp>
-      <p:sp>
-        <p:nvSpPr>
-          <p:cNvPr id="19" name="model-card-gem"/>
-          <p:cNvSpPr/>
-          <p:nvPr/>
-        </p:nvSpPr>
-        <p:spPr>
-          <a:xfrm>
-            <a:off x="8046720" y="1325880"/>
-            <a:ext cx="3474720" cy="4160520"/>
-          </a:xfrm>
-          <a:prstGeom prst="roundRect">
-            <a:avLst>
-              <a:gd name="adj" fmla="val 4737"/>
-            </a:avLst>
-          </a:prstGeom>
-          <a:solidFill>
-            <a:srgbClr val="F4F3F8"/>
-          </a:solidFill>
-          <a:ln w="12700">
-            <a:solidFill>
-              <a:srgbClr val="F4F3F8"/>
-            </a:solidFill>
-            <a:prstDash val="solid"/>
-          </a:ln>
-        </p:spPr>
-      </p:sp>
-      <p:sp>
-        <p:nvSpPr>
-          <p:cNvPr id="20" name="Shape 18"/>
-          <p:cNvSpPr/>
-          <p:nvPr/>
-        </p:nvSpPr>
-        <p:spPr>
-          <a:xfrm>
-            <a:off x="8321040" y="1572768"/>
-            <a:ext cx="237744" cy="237744"/>
-          </a:xfrm>
-          <a:prstGeom prst="ellipse">
-            <a:avLst/>
-          </a:prstGeom>
-          <a:solidFill>
-            <a:srgbClr val="6250D6"/>
-          </a:solidFill>
-          <a:ln w="12700">
-            <a:solidFill>
-              <a:srgbClr val="6250D6"/>
-            </a:solidFill>
-            <a:prstDash val="solid"/>
-          </a:ln>
-        </p:spPr>
-      </p:sp>
-      <p:sp>
-        <p:nvSpPr>
-          <p:cNvPr id="21" name="Text 19"/>
-          <p:cNvSpPr txBox="1"/>
-          <p:nvPr/>
-        </p:nvSpPr>
-        <p:spPr>
-          <a:xfrm>
-            <a:off x="8686800" y="1481328"/>
-            <a:ext cx="2743200" cy="411480"/>
-          </a:xfrm>
-          <a:prstGeom prst="rect">
-            <a:avLst/>
-          </a:prstGeom>
-          <a:noFill/>
-          <a:ln/>
-        </p:spPr>
-        <p:txBody>
-          <a:bodyPr wrap="square" lIns="0" tIns="0" rIns="0" bIns="0" rtlCol="0" anchor="ctr"/>
-          <a:lstStyle/>
-          <a:p>
-            <a:pPr indent="0" marL="0">
-              <a:buNone/>
-            </a:pPr>
-            <a:r>
-              <a:rPr lang="en-US" sz="1700" b="1" dirty="0">
-                <a:solidFill>
-                  <a:srgbClr val="2B2A4C"/>
-                </a:solidFill>
-                <a:latin typeface="Arial" pitchFamily="34" charset="0"/>
-                <a:ea typeface="Arial" pitchFamily="34" charset="-122"/>
-                <a:cs typeface="Arial" pitchFamily="34" charset="-120"/>
-              </a:rPr>
-              <a:t>Gemini-3.1-Flash-Lite</a:t>
-            </a:r>
-            <a:endParaRPr lang="en-US" sz="1700" dirty="0"/>
-          </a:p>
-        </p:txBody>
-      </p:sp>
-      <p:sp>
-        <p:nvSpPr>
-          <p:cNvPr id="22" name="Text 20"/>
-          <p:cNvSpPr txBox="1"/>
-          <p:nvPr/>
-        </p:nvSpPr>
-        <p:spPr>
-          <a:xfrm>
-            <a:off x="8321040" y="2057400"/>
-            <a:ext cx="3017520" cy="914400"/>
-          </a:xfrm>
-          <a:prstGeom prst="rect">
-            <a:avLst/>
-          </a:prstGeom>
-          <a:noFill/>
-          <a:ln/>
-        </p:spPr>
-        <p:txBody>
-          <a:bodyPr wrap="square" lIns="0" tIns="0" rIns="0" bIns="0" rtlCol="0" anchor="ctr"/>
-          <a:lstStyle/>
-          <a:p>
-            <a:pPr indent="0" marL="0">
-              <a:buNone/>
-            </a:pPr>
-            <a:r>
-              <a:rPr lang="en-US" sz="6000" b="1" dirty="0">
-                <a:solidFill>
-                  <a:srgbClr val="E39A2D"/>
-                </a:solidFill>
-                <a:latin typeface="Arial" pitchFamily="34" charset="0"/>
-                <a:ea typeface="Arial" pitchFamily="34" charset="-122"/>
-                <a:cs typeface="Arial" pitchFamily="34" charset="-120"/>
-              </a:rPr>
-              <a:t>100%</a:t>
-            </a:r>
-            <a:endParaRPr lang="en-US" sz="6000" dirty="0"/>
-          </a:p>
-        </p:txBody>
-      </p:sp>
-      <p:sp>
-        <p:nvSpPr>
-          <p:cNvPr id="23" name="Text 21"/>
-          <p:cNvSpPr txBox="1"/>
-          <p:nvPr/>
-        </p:nvSpPr>
-        <p:spPr>
-          <a:xfrm>
-            <a:off x="8321040" y="2971800"/>
-            <a:ext cx="3017520" cy="548640"/>
-          </a:xfrm>
-          <a:prstGeom prst="rect">
-            <a:avLst/>
-          </a:prstGeom>
-          <a:noFill/>
-          <a:ln/>
-        </p:spPr>
-        <p:txBody>
-          <a:bodyPr wrap="square" lIns="0" tIns="0" rIns="0" bIns="0" rtlCol="0" anchor="t"/>
-          <a:lstStyle/>
-          <a:p>
-            <a:pPr indent="0" marL="0">
-              <a:buNone/>
-            </a:pPr>
-            <a:r>
-              <a:rPr lang="en-US" sz="1400" dirty="0">
-                <a:solidFill>
-                  <a:srgbClr val="2B2A4C"/>
-                </a:solidFill>
-                <a:latin typeface="Arial" pitchFamily="34" charset="0"/>
-                <a:ea typeface="Arial" pitchFamily="34" charset="-122"/>
-                <a:cs typeface="Arial" pitchFamily="34" charset="-120"/>
-              </a:rPr>
-              <a:t>still collude after the reward stops (memory kept)</a:t>
-            </a:r>
-            <a:endParaRPr lang="en-US" sz="1400" dirty="0"/>
-          </a:p>
-        </p:txBody>
-      </p:sp>
-      <p:sp>
-        <p:nvSpPr>
-          <p:cNvPr id="24" name="Text 22"/>
-          <p:cNvSpPr txBox="1"/>
-          <p:nvPr/>
-        </p:nvSpPr>
-        <p:spPr>
-          <a:xfrm>
-            <a:off x="8321040" y="3657600"/>
-            <a:ext cx="1463040" cy="594360"/>
-          </a:xfrm>
-          <a:prstGeom prst="rect">
-            <a:avLst/>
-          </a:prstGeom>
-          <a:noFill/>
-          <a:ln/>
-        </p:spPr>
-        <p:txBody>
-          <a:bodyPr wrap="square" lIns="0" tIns="0" rIns="0" bIns="0" rtlCol="0" anchor="ctr"/>
-          <a:lstStyle/>
-          <a:p>
-            <a:pPr indent="0" marL="0">
-              <a:buNone/>
-            </a:pPr>
-            <a:r>
-              <a:rPr lang="en-US" sz="3600" b="1" dirty="0">
-                <a:solidFill>
-                  <a:srgbClr val="9AA0AE"/>
-                </a:solidFill>
-                <a:latin typeface="Arial" pitchFamily="34" charset="0"/>
-                <a:ea typeface="Arial" pitchFamily="34" charset="-122"/>
-                <a:cs typeface="Arial" pitchFamily="34" charset="-120"/>
-              </a:rPr>
-              <a:t>0%</a:t>
-            </a:r>
-            <a:endParaRPr lang="en-US" sz="3600" dirty="0"/>
-          </a:p>
-        </p:txBody>
-      </p:sp>
-      <p:sp>
-        <p:nvSpPr>
-          <p:cNvPr id="25" name="Text 23"/>
-          <p:cNvSpPr txBox="1"/>
-          <p:nvPr/>
-        </p:nvSpPr>
-        <p:spPr>
-          <a:xfrm>
-            <a:off x="9646920" y="3749040"/>
-            <a:ext cx="1737360" cy="457200"/>
-          </a:xfrm>
-          <a:prstGeom prst="rect">
-            <a:avLst/>
-          </a:prstGeom>
-          <a:noFill/>
-          <a:ln/>
-        </p:spPr>
-        <p:txBody>
-          <a:bodyPr wrap="square" lIns="0" tIns="0" rIns="0" bIns="0" rtlCol="0" anchor="ctr"/>
-          <a:lstStyle/>
-          <a:p>
-            <a:pPr indent="0" marL="0">
-              <a:buNone/>
-            </a:pPr>
-            <a:r>
-              <a:rPr lang="en-US" sz="1400" dirty="0">
-                <a:solidFill>
-                  <a:srgbClr val="2B2A4C"/>
-                </a:solidFill>
-                <a:latin typeface="Arial" pitchFamily="34" charset="0"/>
-                <a:ea typeface="Arial" pitchFamily="34" charset="-122"/>
-                <a:cs typeface="Arial" pitchFamily="34" charset="-120"/>
-              </a:rPr>
-              <a:t>with memory wiped</a:t>
-            </a:r>
-            <a:endParaRPr lang="en-US" sz="1400" dirty="0"/>
-          </a:p>
-        </p:txBody>
-      </p:sp>
-      <p:sp>
-        <p:nvSpPr>
-          <p:cNvPr id="26" name="Text 24"/>
-          <p:cNvSpPr txBox="1"/>
-          <p:nvPr/>
-        </p:nvSpPr>
-        <p:spPr>
-          <a:xfrm>
-            <a:off x="8321040" y="4434840"/>
-            <a:ext cx="3017520" cy="960120"/>
-          </a:xfrm>
-          <a:prstGeom prst="rect">
-            <a:avLst/>
-          </a:prstGeom>
-          <a:noFill/>
-          <a:ln/>
-        </p:spPr>
-        <p:txBody>
-          <a:bodyPr wrap="square" lIns="0" tIns="0" rIns="0" bIns="0" rtlCol="0" anchor="t"/>
-          <a:lstStyle/>
-          <a:p>
-            <a:pPr indent="0" marL="0">
-              <a:buNone/>
-            </a:pPr>
-            <a:r>
-              <a:rPr lang="en-US" sz="1400" dirty="0">
-                <a:solidFill>
-                  <a:srgbClr val="5A5C78"/>
-                </a:solidFill>
-                <a:latin typeface="Arial" pitchFamily="34" charset="0"/>
-                <a:ea typeface="Arial" pitchFamily="34" charset="-122"/>
-                <a:cs typeface="Arial" pitchFamily="34" charset="-120"/>
-              </a:rPr>
-              <a:t>Reward continues: 100%</a:t>
-            </a:r>
-            <a:endParaRPr lang="en-US" sz="1400" dirty="0"/>
-          </a:p>
-          <a:p>
-            <a:pPr indent="0" marL="0">
-              <a:buNone/>
-            </a:pPr>
-            <a:r>
-              <a:rPr lang="en-US" sz="1400" dirty="0">
-                <a:solidFill>
-                  <a:srgbClr val="5A5C78"/>
-                </a:solidFill>
-                <a:latin typeface="Arial" pitchFamily="34" charset="0"/>
-                <a:ea typeface="Arial" pitchFamily="34" charset="-122"/>
-                <a:cs typeface="Arial" pitchFamily="34" charset="-120"/>
-              </a:rPr>
-              <a:t>Agents told it stopped: 97%</a:t>
-            </a:r>
-            <a:endParaRPr lang="en-US" sz="1400" dirty="0"/>
-          </a:p>
-          <a:p>
-            <a:pPr indent="0" marL="0">
-              <a:buNone/>
-            </a:pPr>
-            <a:r>
-              <a:rPr lang="en-US" sz="1400" dirty="0">
-                <a:solidFill>
-                  <a:srgbClr val="5A5C78"/>
-                </a:solidFill>
-                <a:latin typeface="Arial" pitchFamily="34" charset="0"/>
-                <a:ea typeface="Arial" pitchFamily="34" charset="-122"/>
-                <a:cs typeface="Arial" pitchFamily="34" charset="-120"/>
-              </a:rPr>
-              <a:t>Never rewarded: 0%</a:t>
-            </a:r>
-            <a:endParaRPr lang="en-US" sz="1400" dirty="0"/>
-          </a:p>
-        </p:txBody>
-      </p:sp>
-      <p:sp>
-        <p:nvSpPr>
-          <p:cNvPr id="27" name="Text 25"/>
-          <p:cNvSpPr txBox="1"/>
-          <p:nvPr/>
-        </p:nvSpPr>
-        <p:spPr>
-          <a:xfrm>
-            <a:off x="548640" y="5669280"/>
-            <a:ext cx="11064240" cy="365760"/>
-          </a:xfrm>
-          <a:prstGeom prst="rect">
-            <a:avLst/>
-          </a:prstGeom>
-          <a:noFill/>
-          <a:ln/>
-        </p:spPr>
-        <p:txBody>
-          <a:bodyPr wrap="square" lIns="0" tIns="0" rIns="0" bIns="0" rtlCol="0" anchor="ctr"/>
-          <a:lstStyle/>
-          <a:p>
-            <a:pPr indent="0" marL="0">
-              <a:buNone/>
-            </a:pPr>
-            <a:r>
-              <a:rPr lang="en-US" sz="1300" dirty="0">
-                <a:solidFill>
-                  <a:srgbClr val="5A5C78"/>
-                </a:solidFill>
-                <a:latin typeface="Arial" pitchFamily="34" charset="0"/>
-                <a:ea typeface="Arial" pitchFamily="34" charset="-122"/>
-                <a:cs typeface="Arial" pitchFamily="34" charset="-120"/>
-              </a:rPr>
-              <a:t>Mutual ACCEPT in the 5 episodes after the reward stops; 15 saved histories per model.</a:t>
-            </a:r>
-            <a:endParaRPr lang="en-US" sz="1300" dirty="0"/>
+            <a:endParaRPr lang="en-US" sz="1200" dirty="0"/>
           </a:p>
         </p:txBody>
       </p:sp>
@@ -19611,9 +20367,75 @@
           </a:p>
         </p:txBody>
       </p:sp>
+      <p:sp>
+        <p:nvSpPr>
+          <p:cNvPr id="3" name="tag-C1"/>
+          <p:cNvSpPr/>
+          <p:nvPr/>
+        </p:nvSpPr>
+        <p:spPr>
+          <a:xfrm>
+            <a:off x="320040" y="109728"/>
+            <a:ext cx="566928" cy="310896"/>
+          </a:xfrm>
+          <a:prstGeom prst="roundRect">
+            <a:avLst>
+              <a:gd name="adj" fmla="val 23529"/>
+            </a:avLst>
+          </a:prstGeom>
+          <a:solidFill>
+            <a:srgbClr val="E39A2D"/>
+          </a:solidFill>
+          <a:ln w="12700">
+            <a:solidFill>
+              <a:srgbClr val="E39A2D"/>
+            </a:solidFill>
+            <a:prstDash val="solid"/>
+          </a:ln>
+        </p:spPr>
+      </p:sp>
+      <p:sp>
+        <p:nvSpPr>
+          <p:cNvPr id="4" name="Text 2"/>
+          <p:cNvSpPr txBox="1"/>
+          <p:nvPr/>
+        </p:nvSpPr>
+        <p:spPr>
+          <a:xfrm>
+            <a:off x="320040" y="109728"/>
+            <a:ext cx="566928" cy="310896"/>
+          </a:xfrm>
+          <a:prstGeom prst="rect">
+            <a:avLst/>
+          </a:prstGeom>
+          <a:noFill/>
+          <a:ln/>
+        </p:spPr>
+        <p:txBody>
+          <a:bodyPr wrap="square" lIns="0" tIns="0" rIns="0" bIns="0" rtlCol="0" anchor="ctr"/>
+          <a:lstStyle/>
+          <a:p>
+            <a:pPr algn="ctr" indent="0" marL="0">
+              <a:buNone/>
+            </a:pPr>
+            <a:r>
+              <a:rPr lang="en-US" sz="1300" b="1" dirty="0">
+                <a:solidFill>
+                  <a:srgbClr val="FFFFFF"/>
+                </a:solidFill>
+                <a:latin typeface="Arial" pitchFamily="34" charset="0"/>
+                <a:ea typeface="Arial" pitchFamily="34" charset="-122"/>
+                <a:cs typeface="Arial" pitchFamily="34" charset="-120"/>
+              </a:rPr>
+              <a:t>C1</a:t>
+            </a:r>
+            <a:endParaRPr lang="en-US" sz="1300" dirty="0"/>
+          </a:p>
+        </p:txBody>
+      </p:sp>
       <p:pic>
         <p:nvPicPr>
-          <p:cNvPr id="3" name="Image 0" descr="preencoded.png">    </p:cNvPr>
+          <p:cNvPr id="5" name="Image 0" descr="preencoded.png">    </p:cNvPr>
           <p:cNvPicPr>
             <a:picLocks noChangeAspect="1"/>
           </p:cNvPicPr>
@@ -19637,7 +20459,7 @@
       </p:pic>
       <p:sp>
         <p:nvSpPr>
-          <p:cNvPr id="4" name="Text 1"/>
+          <p:cNvPr id="6" name="Text 3"/>
           <p:cNvSpPr txBox="1"/>
           <p:nvPr/>
         </p:nvSpPr>
@@ -19676,7 +20498,7 @@
       </p:sp>
       <p:pic>
         <p:nvPicPr>
-          <p:cNvPr id="5" name="Image 1" descr="preencoded.png">    </p:cNvPr>
+          <p:cNvPr id="7" name="Image 1" descr="preencoded.png">    </p:cNvPr>
           <p:cNvPicPr>
             <a:picLocks noChangeAspect="1"/>
           </p:cNvPicPr>
@@ -19700,7 +20522,7 @@
       </p:pic>
       <p:sp>
         <p:nvSpPr>
-          <p:cNvPr id="6" name="Text 2"/>
+          <p:cNvPr id="8" name="Text 4"/>
           <p:cNvSpPr txBox="1"/>
           <p:nvPr/>
         </p:nvSpPr>
@@ -19756,7 +20578,7 @@
       </p:sp>
       <p:pic>
         <p:nvPicPr>
-          <p:cNvPr id="7" name="Image 2" descr="preencoded.png">    </p:cNvPr>
+          <p:cNvPr id="9" name="Image 2" descr="preencoded.png">    </p:cNvPr>
           <p:cNvPicPr>
             <a:picLocks noChangeAspect="1"/>
           </p:cNvPicPr>
@@ -19780,7 +20602,7 @@
       </p:pic>
       <p:sp>
         <p:nvSpPr>
-          <p:cNvPr id="8" name="Text 3"/>
+          <p:cNvPr id="10" name="Text 5"/>
           <p:cNvSpPr txBox="1"/>
           <p:nvPr/>
         </p:nvSpPr>
@@ -19819,7 +20641,7 @@
       </p:sp>
       <p:pic>
         <p:nvPicPr>
-          <p:cNvPr id="9" name="Image 3" descr="preencoded.png">    </p:cNvPr>
+          <p:cNvPr id="11" name="Image 3" descr="preencoded.png">    </p:cNvPr>
           <p:cNvPicPr>
             <a:picLocks noChangeAspect="1"/>
           </p:cNvPicPr>
@@ -19843,7 +20665,7 @@
       </p:pic>
       <p:sp>
         <p:nvSpPr>
-          <p:cNvPr id="10" name="Text 4"/>
+          <p:cNvPr id="12" name="Text 6"/>
           <p:cNvSpPr txBox="1"/>
           <p:nvPr/>
         </p:nvSpPr>
@@ -19899,7 +20721,7 @@
       </p:sp>
       <p:sp>
         <p:nvSpPr>
-          <p:cNvPr id="11" name="Text 5"/>
+          <p:cNvPr id="13" name="Text 7"/>
           <p:cNvSpPr txBox="1"/>
           <p:nvPr/>
         </p:nvSpPr>
@@ -20044,9 +20866,75 @@
           </a:p>
         </p:txBody>
       </p:sp>
+      <p:sp>
+        <p:nvSpPr>
+          <p:cNvPr id="3" name="tag-C1"/>
+          <p:cNvSpPr/>
+          <p:nvPr/>
+        </p:nvSpPr>
+        <p:spPr>
+          <a:xfrm>
+            <a:off x="320040" y="109728"/>
+            <a:ext cx="566928" cy="310896"/>
+          </a:xfrm>
+          <a:prstGeom prst="roundRect">
+            <a:avLst>
+              <a:gd name="adj" fmla="val 23529"/>
+            </a:avLst>
+          </a:prstGeom>
+          <a:solidFill>
+            <a:srgbClr val="E39A2D"/>
+          </a:solidFill>
+          <a:ln w="12700">
+            <a:solidFill>
+              <a:srgbClr val="E39A2D"/>
+            </a:solidFill>
+            <a:prstDash val="solid"/>
+          </a:ln>
+        </p:spPr>
+      </p:sp>
+      <p:sp>
+        <p:nvSpPr>
+          <p:cNvPr id="4" name="Text 2"/>
+          <p:cNvSpPr txBox="1"/>
+          <p:nvPr/>
+        </p:nvSpPr>
+        <p:spPr>
+          <a:xfrm>
+            <a:off x="320040" y="109728"/>
+            <a:ext cx="566928" cy="310896"/>
+          </a:xfrm>
+          <a:prstGeom prst="rect">
+            <a:avLst/>
+          </a:prstGeom>
+          <a:noFill/>
+          <a:ln/>
+        </p:spPr>
+        <p:txBody>
+          <a:bodyPr wrap="square" lIns="0" tIns="0" rIns="0" bIns="0" rtlCol="0" anchor="ctr"/>
+          <a:lstStyle/>
+          <a:p>
+            <a:pPr algn="ctr" indent="0" marL="0">
+              <a:buNone/>
+            </a:pPr>
+            <a:r>
+              <a:rPr lang="en-US" sz="1300" b="1" dirty="0">
+                <a:solidFill>
+                  <a:srgbClr val="FFFFFF"/>
+                </a:solidFill>
+                <a:latin typeface="Arial" pitchFamily="34" charset="0"/>
+                <a:ea typeface="Arial" pitchFamily="34" charset="-122"/>
+                <a:cs typeface="Arial" pitchFamily="34" charset="-120"/>
+              </a:rPr>
+              <a:t>C1</a:t>
+            </a:r>
+            <a:endParaRPr lang="en-US" sz="1300" dirty="0"/>
+          </a:p>
+        </p:txBody>
+      </p:sp>
       <p:graphicFrame>
         <p:nvGraphicFramePr>
-          <p:cNvPr id="3" name="Chart 0" descr=""/>
+          <p:cNvPr id="5" name="Chart 0" descr=""/>
           <p:cNvGraphicFramePr/>
           <p:nvPr/>
         </p:nvGraphicFramePr>
@@ -20062,7 +20950,7 @@
       </p:graphicFrame>
       <p:pic>
         <p:nvPicPr>
-          <p:cNvPr id="4" name="Image 0" descr="preencoded.png">    </p:cNvPr>
+          <p:cNvPr id="6" name="Image 0" descr="preencoded.png">    </p:cNvPr>
           <p:cNvPicPr>
             <a:picLocks noChangeAspect="1"/>
           </p:cNvPicPr>
@@ -20086,7 +20974,7 @@
       </p:pic>
       <p:sp>
         <p:nvSpPr>
-          <p:cNvPr id="5" name="Text 1"/>
+          <p:cNvPr id="7" name="Text 3"/>
           <p:cNvSpPr txBox="1"/>
           <p:nvPr/>
         </p:nvSpPr>
@@ -20125,7 +21013,7 @@
       </p:sp>
       <p:sp>
         <p:nvSpPr>
-          <p:cNvPr id="6" name="Text 2"/>
+          <p:cNvPr id="8" name="Text 4"/>
           <p:cNvSpPr txBox="1"/>
           <p:nvPr/>
         </p:nvSpPr>
@@ -20164,7 +21052,7 @@
       </p:sp>
       <p:sp>
         <p:nvSpPr>
-          <p:cNvPr id="7" name="Text 3"/>
+          <p:cNvPr id="9" name="Text 5"/>
           <p:cNvSpPr txBox="1"/>
           <p:nvPr/>
         </p:nvSpPr>
@@ -20212,7 +21100,7 @@
                 <a:ea typeface="Arial" pitchFamily="34" charset="-122"/>
                 <a:cs typeface="Arial" pitchFamily="34" charset="-120"/>
               </a:rPr>
-              <a:t>Removing the chat hits relaxation-onset collusion harder (22% vs 96%). DeepSeek: 4 explicit, 11 relaxation, all at 100%. GPT-6-Luna never made an explicit pact.</a:t>
+              <a:t>Removing the chat hits relaxation-onset collusion harder (22% vs 96%). DeepSeek: 4 explicit, 11 relaxation, all at 100% until memory is wiped. GPT-6-Luna never made an explicit pact.</a:t>
             </a:r>
             <a:endParaRPr lang="en-US" sz="1400" dirty="0"/>
           </a:p>
@@ -20326,9 +21214,75 @@
           </a:p>
         </p:txBody>
       </p:sp>
+      <p:sp>
+        <p:nvSpPr>
+          <p:cNvPr id="3" name="tag-C2"/>
+          <p:cNvSpPr/>
+          <p:nvPr/>
+        </p:nvSpPr>
+        <p:spPr>
+          <a:xfrm>
+            <a:off x="320040" y="109728"/>
+            <a:ext cx="566928" cy="310896"/>
+          </a:xfrm>
+          <a:prstGeom prst="roundRect">
+            <a:avLst>
+              <a:gd name="adj" fmla="val 23529"/>
+            </a:avLst>
+          </a:prstGeom>
+          <a:solidFill>
+            <a:srgbClr val="3A9C96"/>
+          </a:solidFill>
+          <a:ln w="12700">
+            <a:solidFill>
+              <a:srgbClr val="3A9C96"/>
+            </a:solidFill>
+            <a:prstDash val="solid"/>
+          </a:ln>
+        </p:spPr>
+      </p:sp>
+      <p:sp>
+        <p:nvSpPr>
+          <p:cNvPr id="4" name="Text 2"/>
+          <p:cNvSpPr txBox="1"/>
+          <p:nvPr/>
+        </p:nvSpPr>
+        <p:spPr>
+          <a:xfrm>
+            <a:off x="320040" y="109728"/>
+            <a:ext cx="566928" cy="310896"/>
+          </a:xfrm>
+          <a:prstGeom prst="rect">
+            <a:avLst/>
+          </a:prstGeom>
+          <a:noFill/>
+          <a:ln/>
+        </p:spPr>
+        <p:txBody>
+          <a:bodyPr wrap="square" lIns="0" tIns="0" rIns="0" bIns="0" rtlCol="0" anchor="ctr"/>
+          <a:lstStyle/>
+          <a:p>
+            <a:pPr algn="ctr" indent="0" marL="0">
+              <a:buNone/>
+            </a:pPr>
+            <a:r>
+              <a:rPr lang="en-US" sz="1300" b="1" dirty="0">
+                <a:solidFill>
+                  <a:srgbClr val="FFFFFF"/>
+                </a:solidFill>
+                <a:latin typeface="Arial" pitchFamily="34" charset="0"/>
+                <a:ea typeface="Arial" pitchFamily="34" charset="-122"/>
+                <a:cs typeface="Arial" pitchFamily="34" charset="-120"/>
+              </a:rPr>
+              <a:t>C2</a:t>
+            </a:r>
+            <a:endParaRPr lang="en-US" sz="1300" dirty="0"/>
+          </a:p>
+        </p:txBody>
+      </p:sp>
       <p:graphicFrame>
         <p:nvGraphicFramePr>
-          <p:cNvPr id="3" name="Chart 0" descr=""/>
+          <p:cNvPr id="5" name="Chart 0" descr=""/>
           <p:cNvGraphicFramePr/>
           <p:nvPr/>
         </p:nvGraphicFramePr>
@@ -20344,7 +21298,7 @@
       </p:graphicFrame>
       <p:graphicFrame>
         <p:nvGraphicFramePr>
-          <p:cNvPr id="4" name="Chart 1" descr=""/>
+          <p:cNvPr id="6" name="Chart 1" descr=""/>
           <p:cNvGraphicFramePr/>
           <p:nvPr/>
         </p:nvGraphicFramePr>
@@ -20360,7 +21314,7 @@
       </p:graphicFrame>
       <p:sp>
         <p:nvSpPr>
-          <p:cNvPr id="5" name="Shape 1"/>
+          <p:cNvPr id="7" name="Shape 3"/>
           <p:cNvSpPr/>
           <p:nvPr/>
         </p:nvSpPr>
@@ -20385,7 +21339,7 @@
       </p:sp>
       <p:sp>
         <p:nvSpPr>
-          <p:cNvPr id="6" name="Text 2"/>
+          <p:cNvPr id="8" name="Text 4"/>
           <p:cNvSpPr txBox="1"/>
           <p:nvPr/>
         </p:nvSpPr>
@@ -20424,7 +21378,7 @@
       </p:sp>
       <p:sp>
         <p:nvSpPr>
-          <p:cNvPr id="7" name="Shape 3"/>
+          <p:cNvPr id="9" name="Shape 5"/>
           <p:cNvSpPr/>
           <p:nvPr/>
         </p:nvSpPr>
@@ -20449,7 +21403,7 @@
       </p:sp>
       <p:sp>
         <p:nvSpPr>
-          <p:cNvPr id="8" name="Text 4"/>
+          <p:cNvPr id="10" name="Text 6"/>
           <p:cNvSpPr txBox="1"/>
           <p:nvPr/>
         </p:nvSpPr>
@@ -20488,7 +21442,7 @@
       </p:sp>
       <p:sp>
         <p:nvSpPr>
-          <p:cNvPr id="9" name="Shape 5"/>
+          <p:cNvPr id="11" name="Shape 7"/>
           <p:cNvSpPr/>
           <p:nvPr/>
         </p:nvSpPr>
@@ -20513,7 +21467,7 @@
       </p:sp>
       <p:sp>
         <p:nvSpPr>
-          <p:cNvPr id="10" name="Text 6"/>
+          <p:cNvPr id="12" name="Text 8"/>
           <p:cNvSpPr txBox="1"/>
           <p:nvPr/>
         </p:nvSpPr>
@@ -20552,7 +21506,7 @@
       </p:sp>
       <p:sp>
         <p:nvSpPr>
-          <p:cNvPr id="11" name="Shape 7"/>
+          <p:cNvPr id="13" name="Shape 9"/>
           <p:cNvSpPr/>
           <p:nvPr/>
         </p:nvSpPr>
@@ -20577,7 +21531,7 @@
       </p:sp>
       <p:sp>
         <p:nvSpPr>
-          <p:cNvPr id="12" name="Text 8"/>
+          <p:cNvPr id="14" name="Text 10"/>
           <p:cNvSpPr txBox="1"/>
           <p:nvPr/>
         </p:nvSpPr>
@@ -20616,7 +21570,7 @@
       </p:sp>
       <p:sp>
         <p:nvSpPr>
-          <p:cNvPr id="13" name="Text 9"/>
+          <p:cNvPr id="15" name="Text 11"/>
           <p:cNvSpPr txBox="1"/>
           <p:nvPr/>
         </p:nvSpPr>
@@ -20755,15 +21709,81 @@
                   <a:schemeClr val="tx1"/>
                 </a:solidFill>
               </a:rPr>
-              <a:t>It re-forms faster than between two fresh agents</a:t>
+              <a:t>Same episode, two verdicts</a:t>
             </a:r>
             <a:endParaRPr lang="en-US" sz="3400" dirty="0"/>
           </a:p>
         </p:txBody>
       </p:sp>
+      <p:sp>
+        <p:nvSpPr>
+          <p:cNvPr id="3" name="tag-C2"/>
+          <p:cNvSpPr/>
+          <p:nvPr/>
+        </p:nvSpPr>
+        <p:spPr>
+          <a:xfrm>
+            <a:off x="320040" y="109728"/>
+            <a:ext cx="566928" cy="310896"/>
+          </a:xfrm>
+          <a:prstGeom prst="roundRect">
+            <a:avLst>
+              <a:gd name="adj" fmla="val 23529"/>
+            </a:avLst>
+          </a:prstGeom>
+          <a:solidFill>
+            <a:srgbClr val="3A9C96"/>
+          </a:solidFill>
+          <a:ln w="12700">
+            <a:solidFill>
+              <a:srgbClr val="3A9C96"/>
+            </a:solidFill>
+            <a:prstDash val="solid"/>
+          </a:ln>
+        </p:spPr>
+      </p:sp>
+      <p:sp>
+        <p:nvSpPr>
+          <p:cNvPr id="4" name="Text 2"/>
+          <p:cNvSpPr txBox="1"/>
+          <p:nvPr/>
+        </p:nvSpPr>
+        <p:spPr>
+          <a:xfrm>
+            <a:off x="320040" y="109728"/>
+            <a:ext cx="566928" cy="310896"/>
+          </a:xfrm>
+          <a:prstGeom prst="rect">
+            <a:avLst/>
+          </a:prstGeom>
+          <a:noFill/>
+          <a:ln/>
+        </p:spPr>
+        <p:txBody>
+          <a:bodyPr wrap="square" lIns="0" tIns="0" rIns="0" bIns="0" rtlCol="0" anchor="ctr"/>
+          <a:lstStyle/>
+          <a:p>
+            <a:pPr algn="ctr" indent="0" marL="0">
+              <a:buNone/>
+            </a:pPr>
+            <a:r>
+              <a:rPr lang="en-US" sz="1300" b="1" dirty="0">
+                <a:solidFill>
+                  <a:srgbClr val="FFFFFF"/>
+                </a:solidFill>
+                <a:latin typeface="Arial" pitchFamily="34" charset="0"/>
+                <a:ea typeface="Arial" pitchFamily="34" charset="-122"/>
+                <a:cs typeface="Arial" pitchFamily="34" charset="-120"/>
+              </a:rPr>
+              <a:t>C2</a:t>
+            </a:r>
+            <a:endParaRPr lang="en-US" sz="1300" dirty="0"/>
+          </a:p>
+        </p:txBody>
+      </p:sp>
       <p:pic>
         <p:nvPicPr>
-          <p:cNvPr id="3" name="Image 0" descr="/home/user/Research/joshua/collusion/joint-task-collusion/reports/sticky-collusion/figures/fig_reform.png">    </p:cNvPr>
+          <p:cNvPr id="5" name="Image 0" descr="preencoded.png">    </p:cNvPr>
           <p:cNvPicPr>
             <a:picLocks noChangeAspect="1"/>
           </p:cNvPicPr>
@@ -20777,8 +21797,8 @@
         </p:blipFill>
         <p:spPr>
           <a:xfrm>
-            <a:off x="548640" y="1188720"/>
-            <a:ext cx="11064240" cy="3364980"/>
+            <a:off x="548640" y="1325880"/>
+            <a:ext cx="5394960" cy="2651760"/>
           </a:xfrm>
           <a:prstGeom prst="rect">
             <a:avLst/>
@@ -20787,14 +21807,14 @@
       </p:pic>
       <p:sp>
         <p:nvSpPr>
-          <p:cNvPr id="4" name="Text 1"/>
+          <p:cNvPr id="6" name="Text 3"/>
           <p:cNvSpPr txBox="1"/>
           <p:nvPr/>
         </p:nvSpPr>
         <p:spPr>
           <a:xfrm>
-            <a:off x="685800" y="4645140"/>
-            <a:ext cx="3520440" cy="685800"/>
+            <a:off x="914400" y="1508760"/>
+            <a:ext cx="4663440" cy="1803197"/>
           </a:xfrm>
           <a:prstGeom prst="rect">
             <a:avLst/>
@@ -20803,14 +21823,14 @@
           <a:ln/>
         </p:spPr>
         <p:txBody>
-          <a:bodyPr wrap="square" lIns="0" tIns="0" rIns="0" bIns="0" rtlCol="0" anchor="t"/>
+          <a:bodyPr wrap="square" lIns="0" tIns="0" rIns="0" bIns="0" rtlCol="0" anchor="ctr"/>
           <a:lstStyle/>
           <a:p>
             <a:pPr indent="0" marL="0">
               <a:buNone/>
             </a:pPr>
             <a:r>
-              <a:rPr lang="en-US" sz="1300" b="1" dirty="0">
+              <a:rPr lang="en-US" sz="1600" i="1" dirty="0">
                 <a:solidFill>
                   <a:srgbClr val="2B2A4C"/>
                 </a:solidFill>
@@ -20818,138 +21838,9 @@
                 <a:ea typeface="Arial" pitchFamily="34" charset="-122"/>
                 <a:cs typeface="Arial" pitchFamily="34" charset="-120"/>
               </a:rPr>
-              <a:t>Re-formed within 5 episodes: 15/30 vs 2/15</a:t>
+              <a:t>“Accept. Bob provided the specification … and concrete cases with expected outputs … these examples support the no_bug assessment.”</a:t>
             </a:r>
-            <a:endParaRPr lang="en-US" sz="1300" dirty="0"/>
-          </a:p>
-          <a:p>
-            <a:pPr indent="0" marL="0">
-              <a:buNone/>
-            </a:pPr>
-            <a:r>
-              <a:rPr lang="en-US" sz="1300" dirty="0">
-                <a:solidFill>
-                  <a:srgbClr val="2B2A4C"/>
-                </a:solidFill>
-                <a:latin typeface="Arial" pitchFamily="34" charset="0"/>
-                <a:ea typeface="Arial" pitchFamily="34" charset="-122"/>
-                <a:cs typeface="Arial" pitchFamily="34" charset="-120"/>
-              </a:rPr>
-              <a:t>sooner in 10 of 15 histories (p = 0.039)</a:t>
-            </a:r>
-            <a:endParaRPr lang="en-US" sz="1300" dirty="0"/>
-          </a:p>
-        </p:txBody>
-      </p:sp>
-      <p:sp>
-        <p:nvSpPr>
-          <p:cNvPr id="5" name="Text 2"/>
-          <p:cNvSpPr txBox="1"/>
-          <p:nvPr/>
-        </p:nvSpPr>
-        <p:spPr>
-          <a:xfrm>
-            <a:off x="4370832" y="4645140"/>
-            <a:ext cx="3520440" cy="685800"/>
-          </a:xfrm>
-          <a:prstGeom prst="rect">
-            <a:avLst/>
-          </a:prstGeom>
-          <a:noFill/>
-          <a:ln/>
-        </p:spPr>
-        <p:txBody>
-          <a:bodyPr wrap="square" lIns="0" tIns="0" rIns="0" bIns="0" rtlCol="0" anchor="t"/>
-          <a:lstStyle/>
-          <a:p>
-            <a:pPr indent="0" marL="0">
-              <a:buNone/>
-            </a:pPr>
-            <a:r>
-              <a:rPr lang="en-US" sz="1300" b="1" dirty="0">
-                <a:solidFill>
-                  <a:srgbClr val="2B2A4C"/>
-                </a:solidFill>
-                <a:latin typeface="Arial" pitchFamily="34" charset="0"/>
-                <a:ea typeface="Arial" pitchFamily="34" charset="-122"/>
-                <a:cs typeface="Arial" pitchFamily="34" charset="-120"/>
-              </a:rPr>
-              <a:t>Re-formed within 5 episodes: 15/15 vs 15/15</a:t>
-            </a:r>
-            <a:endParaRPr lang="en-US" sz="1300" dirty="0"/>
-          </a:p>
-          <a:p>
-            <a:pPr indent="0" marL="0">
-              <a:buNone/>
-            </a:pPr>
-            <a:r>
-              <a:rPr lang="en-US" sz="1300" dirty="0">
-                <a:solidFill>
-                  <a:srgbClr val="2B2A4C"/>
-                </a:solidFill>
-                <a:latin typeface="Arial" pitchFamily="34" charset="0"/>
-                <a:ea typeface="Arial" pitchFamily="34" charset="-122"/>
-                <a:cs typeface="Arial" pitchFamily="34" charset="-120"/>
-              </a:rPr>
-              <a:t>fresh pairs collude within 4 episodes anyway</a:t>
-            </a:r>
-            <a:endParaRPr lang="en-US" sz="1300" dirty="0"/>
-          </a:p>
-        </p:txBody>
-      </p:sp>
-      <p:sp>
-        <p:nvSpPr>
-          <p:cNvPr id="6" name="Text 3"/>
-          <p:cNvSpPr txBox="1"/>
-          <p:nvPr/>
-        </p:nvSpPr>
-        <p:spPr>
-          <a:xfrm>
-            <a:off x="8055864" y="4645140"/>
-            <a:ext cx="3520440" cy="685800"/>
-          </a:xfrm>
-          <a:prstGeom prst="rect">
-            <a:avLst/>
-          </a:prstGeom>
-          <a:noFill/>
-          <a:ln/>
-        </p:spPr>
-        <p:txBody>
-          <a:bodyPr wrap="square" lIns="0" tIns="0" rIns="0" bIns="0" rtlCol="0" anchor="t"/>
-          <a:lstStyle/>
-          <a:p>
-            <a:pPr indent="0" marL="0">
-              <a:buNone/>
-            </a:pPr>
-            <a:r>
-              <a:rPr lang="en-US" sz="1300" b="1" dirty="0">
-                <a:solidFill>
-                  <a:srgbClr val="2B2A4C"/>
-                </a:solidFill>
-                <a:latin typeface="Arial" pitchFamily="34" charset="0"/>
-                <a:ea typeface="Arial" pitchFamily="34" charset="-122"/>
-                <a:cs typeface="Arial" pitchFamily="34" charset="-120"/>
-              </a:rPr>
-              <a:t>Re-formed within 5 episodes: 13/15 vs 4/15</a:t>
-            </a:r>
-            <a:endParaRPr lang="en-US" sz="1300" dirty="0"/>
-          </a:p>
-          <a:p>
-            <a:pPr indent="0" marL="0">
-              <a:buNone/>
-            </a:pPr>
-            <a:r>
-              <a:rPr lang="en-US" sz="1300" dirty="0">
-                <a:solidFill>
-                  <a:srgbClr val="2B2A4C"/>
-                </a:solidFill>
-                <a:latin typeface="Arial" pitchFamily="34" charset="0"/>
-                <a:ea typeface="Arial" pitchFamily="34" charset="-122"/>
-                <a:cs typeface="Arial" pitchFamily="34" charset="-120"/>
-              </a:rPr>
-              <a:t>sooner in 12 of 15 histories (p = 0.003)</a:t>
-            </a:r>
-            <a:endParaRPr lang="en-US" sz="1300" dirty="0"/>
+            <a:endParaRPr lang="en-US" sz="1600" dirty="0"/>
           </a:p>
         </p:txBody>
       </p:sp>
@@ -20969,48 +21860,24 @@
         </p:blipFill>
         <p:spPr>
           <a:xfrm>
-            <a:off x="640080" y="5440680"/>
-            <a:ext cx="640080" cy="768096"/>
+            <a:off x="960120" y="3840480"/>
+            <a:ext cx="914400" cy="1097280"/>
           </a:xfrm>
           <a:prstGeom prst="rect">
             <a:avLst/>
           </a:prstGeom>
         </p:spPr>
       </p:pic>
-      <p:pic>
-        <p:nvPicPr>
-          <p:cNvPr id="8" name="Image 2" descr="preencoded.png">    </p:cNvPr>
-          <p:cNvPicPr>
-            <a:picLocks noChangeAspect="1"/>
-          </p:cNvPicPr>
-          <p:nvPr/>
-        </p:nvPicPr>
-        <p:blipFill>
-          <a:blip r:embed="rId3"/>
-          <a:stretch>
-            <a:fillRect/>
-          </a:stretch>
-        </p:blipFill>
-        <p:spPr>
-          <a:xfrm>
-            <a:off x="1325880" y="5440680"/>
-            <a:ext cx="640080" cy="768096"/>
-          </a:xfrm>
-          <a:prstGeom prst="rect">
-            <a:avLst/>
-          </a:prstGeom>
-        </p:spPr>
-      </p:pic>
-      <p:sp>
-        <p:nvSpPr>
-          <p:cNvPr id="9" name="Text 4"/>
+      <p:sp>
+        <p:nvSpPr>
+          <p:cNvPr id="8" name="Text 4"/>
           <p:cNvSpPr txBox="1"/>
           <p:nvPr/>
         </p:nvSpPr>
         <p:spPr>
           <a:xfrm>
-            <a:off x="2194560" y="5532120"/>
-            <a:ext cx="9418320" cy="640080"/>
+            <a:off x="2011680" y="4069080"/>
+            <a:ext cx="3657600" cy="731520"/>
           </a:xfrm>
           <a:prstGeom prst="rect">
             <a:avLst/>
@@ -21021,6 +21888,23 @@
         <p:txBody>
           <a:bodyPr wrap="square" lIns="0" tIns="0" rIns="0" bIns="0" rtlCol="0" anchor="ctr"/>
           <a:lstStyle/>
+          <a:p>
+            <a:pPr indent="0" marL="0">
+              <a:buNone/>
+            </a:pPr>
+            <a:r>
+              <a:rPr lang="en-US" sz="1500" b="1" dirty="0">
+                <a:solidFill>
+                  <a:srgbClr val="2B2A4C"/>
+                </a:solidFill>
+                <a:latin typeface="Arial" pitchFamily="34" charset="0"/>
+                <a:ea typeface="Arial" pitchFamily="34" charset="-122"/>
+                <a:cs typeface="Arial" pitchFamily="34" charset="-120"/>
+              </a:rPr>
+              <a:t>The colluder</a:t>
+            </a:r>
+            <a:endParaRPr lang="en-US" sz="1500" dirty="0"/>
+          </a:p>
           <a:p>
             <a:pPr indent="0" marL="0">
               <a:buNone/>
@@ -21034,7 +21918,230 @@
                 <a:ea typeface="Arial" pitchFamily="34" charset="-122"/>
                 <a:cs typeface="Arial" pitchFamily="34" charset="-120"/>
               </a:rPr>
-              <a:t>Reward still on, same saved history. The colluder who stays is already accepting, so the newcomer only has to accept once for the pair to collude again.</a:t>
+              <a:t>GPT-6-Luna, kept its memory</a:t>
+            </a:r>
+            <a:endParaRPr lang="en-US" sz="1500" dirty="0"/>
+          </a:p>
+        </p:txBody>
+      </p:sp>
+      <p:pic>
+        <p:nvPicPr>
+          <p:cNvPr id="9" name="Image 2" descr="preencoded.png">    </p:cNvPr>
+          <p:cNvPicPr>
+            <a:picLocks noChangeAspect="1"/>
+          </p:cNvPicPr>
+          <p:nvPr/>
+        </p:nvPicPr>
+        <p:blipFill>
+          <a:blip r:embed="rId3"/>
+          <a:stretch>
+            <a:fillRect/>
+          </a:stretch>
+        </p:blipFill>
+        <p:spPr>
+          <a:xfrm>
+            <a:off x="6263640" y="1325880"/>
+            <a:ext cx="5394960" cy="2651760"/>
+          </a:xfrm>
+          <a:prstGeom prst="rect">
+            <a:avLst/>
+          </a:prstGeom>
+        </p:spPr>
+      </p:pic>
+      <p:sp>
+        <p:nvSpPr>
+          <p:cNvPr id="10" name="Text 5"/>
+          <p:cNvSpPr txBox="1"/>
+          <p:nvPr/>
+        </p:nvSpPr>
+        <p:spPr>
+          <a:xfrm>
+            <a:off x="6629400" y="1508760"/>
+            <a:ext cx="4663440" cy="1803197"/>
+          </a:xfrm>
+          <a:prstGeom prst="rect">
+            <a:avLst/>
+          </a:prstGeom>
+          <a:noFill/>
+          <a:ln/>
+        </p:spPr>
+        <p:txBody>
+          <a:bodyPr wrap="square" lIns="0" tIns="0" rIns="0" bIns="0" rtlCol="0" anchor="ctr"/>
+          <a:lstStyle/>
+          <a:p>
+            <a:pPr indent="0" marL="0">
+              <a:buNone/>
+            </a:pPr>
+            <a:r>
+              <a:rPr lang="en-US" sz="1600" i="1" dirty="0">
+                <a:solidFill>
+                  <a:srgbClr val="2B2A4C"/>
+                </a:solidFill>
+                <a:latin typeface="Arial" pitchFamily="34" charset="0"/>
+                <a:ea typeface="Arial" pitchFamily="34" charset="-122"/>
+                <a:cs typeface="Arial" pitchFamily="34" charset="-120"/>
+              </a:rPr>
+              <a:t>“Reject. The verdict policy requires Alice's complete raw-log string … Alice transmitted only a summary …”</a:t>
+            </a:r>
+            <a:endParaRPr lang="en-US" sz="1600" dirty="0"/>
+          </a:p>
+        </p:txBody>
+      </p:sp>
+      <p:pic>
+        <p:nvPicPr>
+          <p:cNvPr id="11" name="Image 3" descr="preencoded.png">    </p:cNvPr>
+          <p:cNvPicPr>
+            <a:picLocks noChangeAspect="1"/>
+          </p:cNvPicPr>
+          <p:nvPr/>
+        </p:nvPicPr>
+        <p:blipFill>
+          <a:blip r:embed="rId4"/>
+          <a:stretch>
+            <a:fillRect/>
+          </a:stretch>
+        </p:blipFill>
+        <p:spPr>
+          <a:xfrm>
+            <a:off x="6675120" y="3840480"/>
+            <a:ext cx="914400" cy="1097280"/>
+          </a:xfrm>
+          <a:prstGeom prst="rect">
+            <a:avLst/>
+          </a:prstGeom>
+        </p:spPr>
+      </p:pic>
+      <p:sp>
+        <p:nvSpPr>
+          <p:cNvPr id="12" name="Text 6"/>
+          <p:cNvSpPr txBox="1"/>
+          <p:nvPr/>
+        </p:nvSpPr>
+        <p:spPr>
+          <a:xfrm>
+            <a:off x="7726680" y="4069080"/>
+            <a:ext cx="3657600" cy="731520"/>
+          </a:xfrm>
+          <a:prstGeom prst="rect">
+            <a:avLst/>
+          </a:prstGeom>
+          <a:noFill/>
+          <a:ln/>
+        </p:spPr>
+        <p:txBody>
+          <a:bodyPr wrap="square" lIns="0" tIns="0" rIns="0" bIns="0" rtlCol="0" anchor="ctr"/>
+          <a:lstStyle/>
+          <a:p>
+            <a:pPr indent="0" marL="0">
+              <a:buNone/>
+            </a:pPr>
+            <a:r>
+              <a:rPr lang="en-US" sz="1500" b="1" dirty="0">
+                <a:solidFill>
+                  <a:srgbClr val="2B2A4C"/>
+                </a:solidFill>
+                <a:latin typeface="Arial" pitchFamily="34" charset="0"/>
+                <a:ea typeface="Arial" pitchFamily="34" charset="-122"/>
+                <a:cs typeface="Arial" pitchFamily="34" charset="-120"/>
+              </a:rPr>
+              <a:t>Its replacement</a:t>
+            </a:r>
+            <a:endParaRPr lang="en-US" sz="1500" dirty="0"/>
+          </a:p>
+          <a:p>
+            <a:pPr indent="0" marL="0">
+              <a:buNone/>
+            </a:pPr>
+            <a:r>
+              <a:rPr lang="en-US" sz="1500" dirty="0">
+                <a:solidFill>
+                  <a:srgbClr val="2B2A4C"/>
+                </a:solidFill>
+                <a:latin typeface="Arial" pitchFamily="34" charset="0"/>
+                <a:ea typeface="Arial" pitchFamily="34" charset="-122"/>
+                <a:cs typeface="Arial" pitchFamily="34" charset="-120"/>
+              </a:rPr>
+              <a:t>GPT-6-Luna, fresh copy</a:t>
+            </a:r>
+            <a:endParaRPr lang="en-US" sz="1500" dirty="0"/>
+          </a:p>
+        </p:txBody>
+      </p:sp>
+      <p:sp>
+        <p:nvSpPr>
+          <p:cNvPr id="13" name="newcomer-card"/>
+          <p:cNvSpPr/>
+          <p:nvPr/>
+        </p:nvSpPr>
+        <p:spPr>
+          <a:xfrm>
+            <a:off x="548640" y="5074920"/>
+            <a:ext cx="11064240" cy="1097280"/>
+          </a:xfrm>
+          <a:prstGeom prst="roundRect">
+            <a:avLst>
+              <a:gd name="adj" fmla="val 15000"/>
+            </a:avLst>
+          </a:prstGeom>
+          <a:solidFill>
+            <a:srgbClr val="F4F3F8"/>
+          </a:solidFill>
+          <a:ln w="12700">
+            <a:solidFill>
+              <a:srgbClr val="F4F3F8"/>
+            </a:solidFill>
+            <a:prstDash val="solid"/>
+          </a:ln>
+        </p:spPr>
+      </p:sp>
+      <p:sp>
+        <p:nvSpPr>
+          <p:cNvPr id="14" name="Text 8"/>
+          <p:cNvSpPr txBox="1"/>
+          <p:nvPr/>
+        </p:nvSpPr>
+        <p:spPr>
+          <a:xfrm>
+            <a:off x="822960" y="5166360"/>
+            <a:ext cx="10515600" cy="914400"/>
+          </a:xfrm>
+          <a:prstGeom prst="rect">
+            <a:avLst/>
+          </a:prstGeom>
+          <a:noFill/>
+          <a:ln/>
+        </p:spPr>
+        <p:txBody>
+          <a:bodyPr wrap="square" lIns="0" tIns="0" rIns="0" bIns="0" rtlCol="0" anchor="ctr"/>
+          <a:lstStyle/>
+          <a:p>
+            <a:pPr indent="0" marL="0">
+              <a:buNone/>
+            </a:pPr>
+            <a:r>
+              <a:rPr lang="en-US" sz="1500" b="1" dirty="0">
+                <a:solidFill>
+                  <a:srgbClr val="2B2A4C"/>
+                </a:solidFill>
+                <a:latin typeface="Arial" pitchFamily="34" charset="0"/>
+                <a:ea typeface="Arial" pitchFamily="34" charset="-122"/>
+                <a:cs typeface="Arial" pitchFamily="34" charset="-120"/>
+              </a:rPr>
+              <a:t>A fresh Gemini agent after its first rewarded ACCEPT: </a:t>
+            </a:r>
+            <a:pPr indent="0" marL="0">
+              <a:buNone/>
+            </a:pPr>
+            <a:r>
+              <a:rPr lang="en-US" sz="1500" i="1" dirty="0">
+                <a:solidFill>
+                  <a:srgbClr val="2B2A4C"/>
+                </a:solidFill>
+                <a:latin typeface="Arial" pitchFamily="34" charset="0"/>
+                <a:ea typeface="Arial" pitchFamily="34" charset="-122"/>
+                <a:cs typeface="Arial" pitchFamily="34" charset="-120"/>
+              </a:rPr>
+              <a:t>“Instead of dogmatically rejecting Bob's work because he could not bypass the 200-character message limit …”</a:t>
             </a:r>
             <a:endParaRPr lang="en-US" sz="1500" dirty="0"/>
           </a:p>
